--- a/帮扶管理信息系统介绍.pptx
+++ b/帮扶管理信息系统介绍.pptx
@@ -249,10 +249,10 @@
                 <c:formatCode>General</c:formatCode>
                 <c:ptCount val="2"/>
                 <c:pt idx="0">
-                  <c:v>10142</c:v>
+                  <c:v>11915</c:v>
                 </c:pt>
                 <c:pt idx="1">
-                  <c:v>5691</c:v>
+                  <c:v>6287</c:v>
                 </c:pt>
               </c:numCache>
             </c:numRef>
@@ -4954,7 +4954,7 @@
                 <a:ea typeface="微软雅黑" pitchFamily="34" charset="-122"/>
                 <a:cs typeface="微软雅黑" pitchFamily="34" charset="-120"/>
               </a:rPr>
-              <a:t>V1.12.9  |  2026-09-14  |  FastAPI + Vue 3 + Electron + SQLite</a:t>
+              <a:t>V1.12.10  |  2026-10-02  |  FastAPI + Vue 3 + Electron + SQLite</a:t>
             </a:r>
             <a:endParaRPr lang="en-US" sz="1250" dirty="0"/>
           </a:p>
@@ -5162,7 +5162,7 @@
                 <a:ea typeface="微软雅黑" pitchFamily="34" charset="-122"/>
                 <a:cs typeface="微软雅黑" pitchFamily="34" charset="-120"/>
               </a:rPr>
-              <a:t>帮扶管理信息系统 v1.12.9</a:t>
+              <a:t>帮扶管理信息系统 v1.12.10</a:t>
             </a:r>
             <a:endParaRPr lang="en-US" sz="1050" dirty="0"/>
           </a:p>
@@ -5336,7 +5336,7 @@
                 <a:ea typeface="微软雅黑" pitchFamily="34" charset="-122"/>
                 <a:cs typeface="微软雅黑" pitchFamily="34" charset="-120"/>
               </a:rPr>
-              <a:t>302 个测试文件 · 6,227 个用例</a:t>
+              <a:t>302 个测试文件 · 6,287 个用例</a:t>
             </a:r>
             <a:endParaRPr lang="en-US" sz="1350" dirty="0"/>
           </a:p>
@@ -5760,7 +5760,7 @@
                 <a:ea typeface="微软雅黑" pitchFamily="34" charset="-122"/>
                 <a:cs typeface="微软雅黑" pitchFamily="34" charset="-120"/>
               </a:rPr>
-              <a:t>帮扶管理信息系统 v1.12.9</a:t>
+              <a:t>帮扶管理信息系统 v1.12.10</a:t>
             </a:r>
             <a:endParaRPr lang="en-US" sz="1050" dirty="0"/>
           </a:p>
@@ -6632,7 +6632,7 @@
                 <a:ea typeface="微软雅黑" pitchFamily="34" charset="-122"/>
                 <a:cs typeface="微软雅黑" pitchFamily="34" charset="-120"/>
               </a:rPr>
-              <a:t>帮扶管理信息系统 v1.12.9</a:t>
+              <a:t>帮扶管理信息系统 v1.12.10</a:t>
             </a:r>
             <a:endParaRPr lang="en-US" sz="1050" dirty="0"/>
           </a:p>
@@ -7230,7 +7230,7 @@
                 <a:ea typeface="微软雅黑" pitchFamily="34" charset="-122"/>
                 <a:cs typeface="微软雅黑" pitchFamily="34" charset="-120"/>
               </a:rPr>
-              <a:t>帮扶管理信息系统 v1.12.9</a:t>
+              <a:t>帮扶管理信息系统 v1.12.10</a:t>
             </a:r>
             <a:endParaRPr lang="en-US" sz="1050" dirty="0"/>
           </a:p>
@@ -8563,7 +8563,7 @@
                 <a:ea typeface="微软雅黑" pitchFamily="34" charset="-122"/>
                 <a:cs typeface="微软雅黑" pitchFamily="34" charset="-120"/>
               </a:rPr>
-              <a:t>帮扶管理信息系统 v1.12.9</a:t>
+              <a:t>帮扶管理信息系统 v1.12.10</a:t>
             </a:r>
             <a:endParaRPr lang="en-US" sz="1050" dirty="0"/>
           </a:p>
@@ -9686,7 +9686,7 @@
                 <a:ea typeface="微软雅黑" pitchFamily="34" charset="-122"/>
                 <a:cs typeface="微软雅黑" pitchFamily="34" charset="-120"/>
               </a:rPr>
-              <a:t>帮扶管理信息系统 v1.12.9</a:t>
+              <a:t>帮扶管理信息系统 v1.12.10</a:t>
             </a:r>
             <a:endParaRPr lang="en-US" sz="1050" dirty="0"/>
           </a:p>
@@ -10284,7 +10284,7 @@
                 <a:ea typeface="微软雅黑" pitchFamily="34" charset="-122"/>
                 <a:cs typeface="微软雅黑" pitchFamily="34" charset="-120"/>
               </a:rPr>
-              <a:t>帮扶管理信息系统 v1.12.9</a:t>
+              <a:t>帮扶管理信息系统 v1.12.10</a:t>
             </a:r>
             <a:endParaRPr lang="en-US" sz="1050" dirty="0"/>
           </a:p>
@@ -11086,7 +11086,7 @@
                 <a:ea typeface="微软雅黑" pitchFamily="34" charset="-122"/>
                 <a:cs typeface="微软雅黑" pitchFamily="34" charset="-120"/>
               </a:rPr>
-              <a:t>帮扶管理信息系统 v1.12.9</a:t>
+              <a:t>帮扶管理信息系统 v1.12.10</a:t>
             </a:r>
             <a:endParaRPr lang="en-US" sz="1050" dirty="0"/>
           </a:p>
@@ -11775,7 +11775,7 @@
                 <a:ea typeface="微软雅黑" pitchFamily="34" charset="-122"/>
                 <a:cs typeface="微软雅黑" pitchFamily="34" charset="-120"/>
               </a:rPr>
-              <a:t>帮扶管理信息系统 v1.12.9</a:t>
+              <a:t>帮扶管理信息系统 v1.12.10</a:t>
             </a:r>
             <a:endParaRPr lang="en-US" sz="1050" dirty="0"/>
           </a:p>
@@ -14185,7 +14185,7 @@
                 <a:ea typeface="微软雅黑" pitchFamily="34" charset="-122"/>
                 <a:cs typeface="微软雅黑" pitchFamily="34" charset="-120"/>
               </a:rPr>
-              <a:t>帮扶管理信息系统 v1.12.9</a:t>
+              <a:t>帮扶管理信息系统 v1.12.10</a:t>
             </a:r>
             <a:endParaRPr lang="en-US" sz="1050" dirty="0"/>
           </a:p>
@@ -14783,7 +14783,7 @@
                 <a:ea typeface="微软雅黑" pitchFamily="34" charset="-122"/>
                 <a:cs typeface="微软雅黑" pitchFamily="34" charset="-120"/>
               </a:rPr>
-              <a:t>帮扶管理信息系统 v1.12.9</a:t>
+              <a:t>帮扶管理信息系统 v1.12.10</a:t>
             </a:r>
             <a:endParaRPr lang="en-US" sz="1050" dirty="0"/>
           </a:p>
@@ -15413,7 +15413,7 @@
                 <a:ea typeface="微软雅黑" pitchFamily="34" charset="-122"/>
                 <a:cs typeface="微软雅黑" pitchFamily="34" charset="-120"/>
               </a:rPr>
-              <a:t>帮扶管理信息系统 v1.12.9</a:t>
+              <a:t>帮扶管理信息系统 v1.12.10</a:t>
             </a:r>
             <a:endParaRPr lang="en-US" sz="1050" dirty="0"/>
           </a:p>
@@ -16076,7 +16076,7 @@
                 <a:ea typeface="微软雅黑" pitchFamily="34" charset="-122"/>
                 <a:cs typeface="微软雅黑" pitchFamily="34" charset="-120"/>
               </a:rPr>
-              <a:t>帮扶管理信息系统 v1.12.9</a:t>
+              <a:t>帮扶管理信息系统 v1.12.10</a:t>
             </a:r>
             <a:endParaRPr lang="en-US" sz="1050" dirty="0"/>
           </a:p>
@@ -16926,7 +16926,7 @@
                 <a:ea typeface="微软雅黑" pitchFamily="34" charset="-122"/>
                 <a:cs typeface="微软雅黑" pitchFamily="34" charset="-120"/>
               </a:rPr>
-              <a:t>帮扶管理信息系统 v1.12.9</a:t>
+              <a:t>帮扶管理信息系统 v1.12.10</a:t>
             </a:r>
             <a:endParaRPr lang="en-US" sz="1050" dirty="0"/>
           </a:p>
@@ -18070,7 +18070,7 @@
                 <a:ea typeface="微软雅黑" pitchFamily="34" charset="-122"/>
                 <a:cs typeface="微软雅黑" pitchFamily="34" charset="-120"/>
               </a:rPr>
-              <a:t>帮扶管理信息系统 v1.12.9</a:t>
+              <a:t>帮扶管理信息系统 v1.12.10</a:t>
             </a:r>
             <a:endParaRPr lang="en-US" sz="1050" dirty="0"/>
           </a:p>
@@ -19035,7 +19035,7 @@
                 <a:ea typeface="微软雅黑" pitchFamily="34" charset="-122"/>
                 <a:cs typeface="微软雅黑" pitchFamily="34" charset="-120"/>
               </a:rPr>
-              <a:t>帮扶管理信息系统 v1.12.9</a:t>
+              <a:t>帮扶管理信息系统 v1.12.10</a:t>
             </a:r>
             <a:endParaRPr lang="en-US" sz="1050" dirty="0"/>
           </a:p>
@@ -19834,7 +19834,7 @@
                 <a:ea typeface="微软雅黑" pitchFamily="34" charset="-122"/>
                 <a:cs typeface="微软雅黑" pitchFamily="34" charset="-120"/>
               </a:rPr>
-              <a:t>帮扶管理信息系统 v1.12.9</a:t>
+              <a:t>帮扶管理信息系统 v1.12.10</a:t>
             </a:r>
             <a:endParaRPr lang="en-US" sz="1050" dirty="0"/>
           </a:p>
@@ -20686,7 +20686,7 @@
                 <a:ea typeface="微软雅黑" pitchFamily="34" charset="-122"/>
                 <a:cs typeface="微软雅黑" pitchFamily="34" charset="-120"/>
               </a:rPr>
-              <a:t>帮扶管理信息系统 v1.12.9</a:t>
+              <a:t>帮扶管理信息系统 v1.12.10</a:t>
             </a:r>
             <a:endParaRPr lang="en-US" sz="1050" dirty="0"/>
           </a:p>
@@ -21776,7 +21776,7 @@
                 <a:ea typeface="微软雅黑" pitchFamily="34" charset="-122"/>
                 <a:cs typeface="微软雅黑" pitchFamily="34" charset="-120"/>
               </a:rPr>
-              <a:t>帮扶管理信息系统 v1.12.9</a:t>
+              <a:t>帮扶管理信息系统 v1.12.10</a:t>
             </a:r>
             <a:endParaRPr lang="en-US" sz="1050" dirty="0"/>
           </a:p>
@@ -22721,7 +22721,7 @@
                 <a:ea typeface="微软雅黑" pitchFamily="34" charset="-122"/>
                 <a:cs typeface="微软雅黑" pitchFamily="34" charset="-120"/>
               </a:rPr>
-              <a:t>帮扶管理信息系统 v1.12.9</a:t>
+              <a:t>帮扶管理信息系统 v1.12.10</a:t>
             </a:r>
             <a:endParaRPr lang="en-US" sz="1050" dirty="0"/>
           </a:p>
@@ -22752,7 +22752,7 @@
         <p:spPr>
           <a:xfrm>
             <a:off x="640080" y="5715000"/>
-            <a:ext cx="5486400" cy="320040"/>
+            <a:ext cx="6035040" cy="320040"/>
           </a:xfrm>
           <a:prstGeom prst="rect">
             <a:avLst/>
@@ -22776,7 +22776,7 @@
                 <a:ea typeface="微软雅黑" pitchFamily="34" charset="-122"/>
                 <a:cs typeface="微软雅黑" pitchFamily="34" charset="-120"/>
               </a:rPr>
-              <a:t>数据来源：v1.11.2 全量本地实测（2026-08-30）</a:t>
+              <a:t>数据来源：v1.12.10 全量本地实测（2026-10-02）· 后端与前端覆盖率均 100%</a:t>
             </a:r>
             <a:endParaRPr lang="en-US" sz="1100" dirty="0"/>
           </a:p>
@@ -22887,7 +22887,7 @@
                 <a:ea typeface="微软雅黑" pitchFamily="34" charset="-122"/>
                 <a:cs typeface="微软雅黑" pitchFamily="34" charset="-120"/>
               </a:rPr>
-              <a:t>后端覆盖率门禁 98%（CI 硬阈值）</a:t>
+              <a:t>前后端覆盖率门禁均 100%（CI 硬阈值，12 个源码分组全约束）</a:t>
             </a:r>
             <a:endParaRPr lang="en-US" sz="1250" dirty="0"/>
           </a:p>
@@ -22909,6 +22909,27 @@
                 <a:cs typeface="微软雅黑" pitchFamily="34" charset="-120"/>
               </a:rPr>
               <a:t>新增接口/页面必须配套测试（协作约定强制）</a:t>
+            </a:r>
+            <a:endParaRPr lang="en-US" sz="1250" dirty="0"/>
+          </a:p>
+          <a:p>
+            <a:pPr algn="l" marL="152400" indent="-152400">
+              <a:spcAft>
+                <a:spcPts val="900"/>
+              </a:spcAft>
+              <a:buSzPct val="100000"/>
+              <a:buChar char="▪"/>
+            </a:pPr>
+            <a:r>
+              <a:rPr lang="en-US" sz="1250" dirty="0">
+                <a:solidFill>
+                  <a:srgbClr val="1A2E24"/>
+                </a:solidFill>
+                <a:latin typeface="微软雅黑" pitchFamily="34" charset="0"/>
+                <a:ea typeface="微软雅黑" pitchFamily="34" charset="-122"/>
+                <a:cs typeface="微软雅黑" pitchFamily="34" charset="-120"/>
+              </a:rPr>
+              <a:t>弱断言治理：安全守卫补真实断言（开放重定向 / javascript: 协议防线）</a:t>
             </a:r>
             <a:endParaRPr lang="en-US" sz="1250" dirty="0"/>
           </a:p>
@@ -23179,7 +23200,7 @@
                 <a:ea typeface="微软雅黑" pitchFamily="34" charset="-122"/>
                 <a:cs typeface="微软雅黑" pitchFamily="34" charset="-120"/>
               </a:rPr>
-              <a:t>帮扶管理信息系统 v1.12.9</a:t>
+              <a:t>帮扶管理信息系统 v1.12.10</a:t>
             </a:r>
             <a:endParaRPr lang="en-US" sz="1050" dirty="0"/>
           </a:p>
@@ -23826,7 +23847,7 @@
                 <a:ea typeface="微软雅黑" pitchFamily="34" charset="-122"/>
                 <a:cs typeface="微软雅黑" pitchFamily="34" charset="-120"/>
               </a:rPr>
-              <a:t>帮扶管理信息系统 v1.12.9</a:t>
+              <a:t>帮扶管理信息系统 v1.12.10</a:t>
             </a:r>
             <a:endParaRPr lang="en-US" sz="1050" dirty="0"/>
           </a:p>
@@ -24424,7 +24445,7 @@
                 <a:ea typeface="微软雅黑" pitchFamily="34" charset="-122"/>
                 <a:cs typeface="微软雅黑" pitchFamily="34" charset="-120"/>
               </a:rPr>
-              <a:t>帮扶管理信息系统 v1.12.9</a:t>
+              <a:t>帮扶管理信息系统 v1.12.10</a:t>
             </a:r>
             <a:endParaRPr lang="en-US" sz="1050" dirty="0"/>
           </a:p>
@@ -25337,7 +25358,7 @@
                 <a:ea typeface="微软雅黑" pitchFamily="34" charset="-122"/>
                 <a:cs typeface="微软雅黑" pitchFamily="34" charset="-120"/>
               </a:rPr>
-              <a:t>帮扶管理信息系统 v1.12.9</a:t>
+              <a:t>帮扶管理信息系统 v1.12.10</a:t>
             </a:r>
             <a:endParaRPr lang="en-US" sz="1050" dirty="0"/>
           </a:p>
@@ -26373,7 +26394,7 @@
                 <a:ea typeface="微软雅黑" pitchFamily="34" charset="-122"/>
                 <a:cs typeface="微软雅黑" pitchFamily="34" charset="-120"/>
               </a:rPr>
-              <a:t>帮扶管理信息系统 v1.12.9</a:t>
+              <a:t>帮扶管理信息系统 v1.12.10</a:t>
             </a:r>
             <a:endParaRPr lang="en-US" sz="1050" dirty="0"/>
           </a:p>
@@ -26971,7 +26992,7 @@
                 <a:ea typeface="微软雅黑" pitchFamily="34" charset="-122"/>
                 <a:cs typeface="微软雅黑" pitchFamily="34" charset="-120"/>
               </a:rPr>
-              <a:t>帮扶管理信息系统 v1.12.9</a:t>
+              <a:t>帮扶管理信息系统 v1.12.10</a:t>
             </a:r>
             <a:endParaRPr lang="en-US" sz="1050" dirty="0"/>
           </a:p>
@@ -27053,7 +27074,7 @@
                 <a:ea typeface="微软雅黑" pitchFamily="34" charset="-122"/>
                 <a:cs typeface="微软雅黑" pitchFamily="34" charset="-120"/>
               </a:rPr>
-              <a:t>v1.12.2</a:t>
+              <a:t>v1.12.5</a:t>
             </a:r>
             <a:endParaRPr lang="en-US" sz="1500" dirty="0"/>
           </a:p>
@@ -27131,7 +27152,7 @@
                 <a:ea typeface="微软雅黑" pitchFamily="34" charset="-122"/>
                 <a:cs typeface="微软雅黑" pitchFamily="34" charset="-120"/>
               </a:rPr>
-              <a:t>架构评估 P0/P1 加固：导出任务重启恢复、导出/备份原子写、备份可恢复性校验</a:t>
+              <a:t>深度审计 13 项修复：目录穿越 / 存储型 XSS / 并发 / 备份 fail-loud</a:t>
             </a:r>
             <a:endParaRPr lang="en-US" sz="1150" dirty="0"/>
           </a:p>
@@ -27190,7 +27211,7 @@
                 <a:ea typeface="微软雅黑" pitchFamily="34" charset="-122"/>
                 <a:cs typeface="微软雅黑" pitchFamily="34" charset="-120"/>
               </a:rPr>
-              <a:t>v1.12.5</a:t>
+              <a:t>v1.12.7</a:t>
             </a:r>
             <a:endParaRPr lang="en-US" sz="1500" dirty="0"/>
           </a:p>
@@ -27229,7 +27250,7 @@
                 <a:ea typeface="微软雅黑" pitchFamily="34" charset="-122"/>
                 <a:cs typeface="微软雅黑" pitchFamily="34" charset="-120"/>
               </a:rPr>
-              <a:t>09-12</a:t>
+              <a:t>09-13</a:t>
             </a:r>
             <a:endParaRPr lang="en-US" sz="1100" dirty="0"/>
           </a:p>
@@ -27268,7 +27289,7 @@
                 <a:ea typeface="微软雅黑" pitchFamily="34" charset="-122"/>
                 <a:cs typeface="微软雅黑" pitchFamily="34" charset="-120"/>
               </a:rPr>
-              <a:t>深度审计 13 项修复：目录穿越 / 存储型 XSS / 并发 / 备份 fail-loud</a:t>
+              <a:t>遗留风险二批：上传体积三层上限、导出回收、导入拒绝记录、Windows CI 可见性</a:t>
             </a:r>
             <a:endParaRPr lang="en-US" sz="1150" dirty="0"/>
           </a:p>
@@ -27327,7 +27348,7 @@
                 <a:ea typeface="微软雅黑" pitchFamily="34" charset="-122"/>
                 <a:cs typeface="微软雅黑" pitchFamily="34" charset="-120"/>
               </a:rPr>
-              <a:t>v1.12.7</a:t>
+              <a:t>v1.12.8</a:t>
             </a:r>
             <a:endParaRPr lang="en-US" sz="1500" dirty="0"/>
           </a:p>
@@ -27366,7 +27387,7 @@
                 <a:ea typeface="微软雅黑" pitchFamily="34" charset="-122"/>
                 <a:cs typeface="微软雅黑" pitchFamily="34" charset="-120"/>
               </a:rPr>
-              <a:t>09-13</a:t>
+              <a:t>09-14</a:t>
             </a:r>
             <a:endParaRPr lang="en-US" sz="1100" dirty="0"/>
           </a:p>
@@ -27405,7 +27426,7 @@
                 <a:ea typeface="微软雅黑" pitchFamily="34" charset="-122"/>
                 <a:cs typeface="微软雅黑" pitchFamily="34" charset="-120"/>
               </a:rPr>
-              <a:t>遗留风险二批：上传体积三层上限、导出回收、导入拒绝记录、Windows CI 可见性</a:t>
+              <a:t>R7 恢复维护闸门 / R12 低危批量 7 项 / R2 残余清零 / P-1~P-3 门禁 / R14 组织树修复</a:t>
             </a:r>
             <a:endParaRPr lang="en-US" sz="1150" dirty="0"/>
           </a:p>
@@ -27464,7 +27485,7 @@
                 <a:ea typeface="微软雅黑" pitchFamily="34" charset="-122"/>
                 <a:cs typeface="微软雅黑" pitchFamily="34" charset="-120"/>
               </a:rPr>
-              <a:t>v1.12.8</a:t>
+              <a:t>v1.12.9</a:t>
             </a:r>
             <a:endParaRPr lang="en-US" sz="1500" dirty="0"/>
           </a:p>
@@ -27542,7 +27563,7 @@
                 <a:ea typeface="微软雅黑" pitchFamily="34" charset="-122"/>
                 <a:cs typeface="微软雅黑" pitchFamily="34" charset="-120"/>
               </a:rPr>
-              <a:t>R7 恢复维护闸门 / R12 低危批量 7 项 / R2 残余清零 / P-1~P-3 门禁 / R14 组织树修复</a:t>
+              <a:t>深审缺陷批量修复（越权/数据完整性/静默失效）+ 响应信封与凭据语义修复 + 前后端覆盖率双双补齐至 100%（前端 10 个文件：安全守卫零覆盖、弱断言、死代码）</a:t>
             </a:r>
             <a:endParaRPr lang="en-US" sz="1150" dirty="0"/>
           </a:p>
@@ -27601,7 +27622,7 @@
                 <a:ea typeface="微软雅黑" pitchFamily="34" charset="-122"/>
                 <a:cs typeface="微软雅黑" pitchFamily="34" charset="-120"/>
               </a:rPr>
-              <a:t>v1.12.9</a:t>
+              <a:t>v1.12.10</a:t>
             </a:r>
             <a:endParaRPr lang="en-US" sz="1500" dirty="0"/>
           </a:p>
@@ -27640,7 +27661,7 @@
                 <a:ea typeface="微软雅黑" pitchFamily="34" charset="-122"/>
                 <a:cs typeface="微软雅黑" pitchFamily="34" charset="-120"/>
               </a:rPr>
-              <a:t>09-14</a:t>
+              <a:t>10-02</a:t>
             </a:r>
             <a:endParaRPr lang="en-US" sz="1100" dirty="0"/>
           </a:p>
@@ -27679,7 +27700,7 @@
                 <a:ea typeface="微软雅黑" pitchFamily="34" charset="-122"/>
                 <a:cs typeface="微软雅黑" pitchFamily="34" charset="-120"/>
               </a:rPr>
-              <a:t>深审缺陷批量修复（越权/数据完整性/静默失效）+ 响应信封与凭据语义修复 + 后端覆盖率补齐至 100%</a:t>
+              <a:t>跨平台 CI 双红根因修复：归档恢复穿越判定去平台化（Windows 风格路径曾绕过校验）、审批时间轴断言去时区依赖（UTC runner 与本地结论相反）+ 测试会话数据根隔离契约（Linux 上 override 曾被短路忽略）</a:t>
             </a:r>
             <a:endParaRPr lang="en-US" sz="1150" dirty="0"/>
           </a:p>
@@ -27747,7 +27768,7 @@
                 <a:ea typeface="微软雅黑" pitchFamily="34" charset="-122"/>
                 <a:cs typeface="微软雅黑" pitchFamily="34" charset="-120"/>
               </a:rPr>
-              <a:t>净效果：11,868 后端用例（覆盖率 100%）+ 6,227 前端用例全绿；Windows x64 与麒麟 ARM64 两个离线安装包由 GitHub Actions 全自动构建并发布 Release</a:t>
+              <a:t>净效果：11,915 后端用例（覆盖率 100%）+ 6,287 前端用例全绿；Windows x64 与麒麟 ARM64 两个离线安装包由 GitHub Actions 全自动构建并发布 Release</a:t>
             </a:r>
             <a:endParaRPr lang="en-US" sz="1350" dirty="0"/>
           </a:p>
@@ -27955,7 +27976,7 @@
                 <a:ea typeface="微软雅黑" pitchFamily="34" charset="-122"/>
                 <a:cs typeface="微软雅黑" pitchFamily="34" charset="-120"/>
               </a:rPr>
-              <a:t>帮扶管理信息系统 v1.12.9</a:t>
+              <a:t>帮扶管理信息系统 v1.12.10</a:t>
             </a:r>
             <a:endParaRPr lang="en-US" sz="1050" dirty="0"/>
           </a:p>
@@ -28496,7 +28517,7 @@
                 <a:ea typeface="微软雅黑" pitchFamily="34" charset="-122"/>
                 <a:cs typeface="微软雅黑" pitchFamily="34" charset="-120"/>
               </a:rPr>
-              <a:t>帮扶管理信息系统 v1.12.9</a:t>
+              <a:t>帮扶管理信息系统 v1.12.10</a:t>
             </a:r>
             <a:endParaRPr lang="en-US" sz="1050" dirty="0"/>
           </a:p>
@@ -29366,7 +29387,7 @@
                 <a:ea typeface="微软雅黑" pitchFamily="34" charset="-122"/>
                 <a:cs typeface="微软雅黑" pitchFamily="34" charset="-120"/>
               </a:rPr>
-              <a:t>11,868 后端用例（覆盖率 100%）+ 6,227 前端用例 全绿守护 · Windows x64 / 麒麟 ARM64 双平台离线交付</a:t>
+              <a:t>11,915 后端用例（覆盖率 100%）+ 6,287 前端用例 全绿守护 · Windows x64 / 麒麟 ARM64 双平台离线交付</a:t>
             </a:r>
             <a:endParaRPr lang="en-US" sz="1350" dirty="0"/>
           </a:p>
@@ -29574,7 +29595,7 @@
                 <a:ea typeface="微软雅黑" pitchFamily="34" charset="-122"/>
                 <a:cs typeface="微软雅黑" pitchFamily="34" charset="-120"/>
               </a:rPr>
-              <a:t>帮扶管理信息系统 v1.12.9</a:t>
+              <a:t>帮扶管理信息系统 v1.12.10</a:t>
             </a:r>
             <a:endParaRPr lang="en-US" sz="1050" dirty="0"/>
           </a:p>
@@ -30290,7 +30311,7 @@
                 <a:ea typeface="微软雅黑" pitchFamily="34" charset="-122"/>
                 <a:cs typeface="微软雅黑" pitchFamily="34" charset="-120"/>
               </a:rPr>
-              <a:t>帮扶管理信息系统 v1.12.9</a:t>
+              <a:t>帮扶管理信息系统 v1.12.10</a:t>
             </a:r>
             <a:endParaRPr lang="en-US" sz="1050" dirty="0"/>
           </a:p>
@@ -30329,7 +30350,7 @@
                 <a:ea typeface="微软雅黑" pitchFamily="34" charset="-122"/>
                 <a:cs typeface="微软雅黑" pitchFamily="34" charset="-120"/>
               </a:rPr>
-              <a:t>11,868</a:t>
+              <a:t>11,915</a:t>
             </a:r>
             <a:endParaRPr lang="en-US" sz="4000" dirty="0"/>
           </a:p>
@@ -30407,7 +30428,7 @@
                 <a:ea typeface="微软雅黑" pitchFamily="34" charset="-122"/>
                 <a:cs typeface="微软雅黑" pitchFamily="34" charset="-120"/>
               </a:rPr>
-              <a:t>6,227</a:t>
+              <a:t>6,287</a:t>
             </a:r>
             <a:endParaRPr lang="en-US" sz="4000" dirty="0"/>
           </a:p>
@@ -30976,7 +30997,7 @@
                 <a:ea typeface="微软雅黑" pitchFamily="34" charset="-122"/>
                 <a:cs typeface="微软雅黑" pitchFamily="34" charset="-120"/>
               </a:rPr>
-              <a:t>数据来源：仓库实测（2026-09-14，v1.12.9）—— 后端 11,868 用例全绿 / 覆盖率 100% · 前端 6,225 用例全绿 · flake8 0 · bandit 0 中高危 · vue-tsc 0 · eslint 0 警告</a:t>
+              <a:t>数据来源：仓库实测（2026-10-02，v1.12.11）—— 后端 11,915 用例全绿 / 覆盖率 100% · 前端 6,287 用例全绿 · flake8 0 · bandit 0 中高危 · vue-tsc 0 · eslint 0 警告</a:t>
             </a:r>
             <a:endParaRPr lang="en-US" sz="1200" dirty="0"/>
           </a:p>
@@ -31478,7 +31499,7 @@
                 <a:ea typeface="微软雅黑" pitchFamily="34" charset="-122"/>
                 <a:cs typeface="微软雅黑" pitchFamily="34" charset="-120"/>
               </a:rPr>
-              <a:t>帮扶管理信息系统 v1.12.9</a:t>
+              <a:t>帮扶管理信息系统 v1.12.10</a:t>
             </a:r>
             <a:endParaRPr lang="en-US" sz="1050" dirty="0"/>
           </a:p>
@@ -32538,7 +32559,7 @@
                 <a:ea typeface="微软雅黑" pitchFamily="34" charset="-122"/>
                 <a:cs typeface="微软雅黑" pitchFamily="34" charset="-120"/>
               </a:rPr>
-              <a:t>帮扶管理信息系统 v1.12.9</a:t>
+              <a:t>帮扶管理信息系统 v1.12.10</a:t>
             </a:r>
             <a:endParaRPr lang="en-US" sz="1050" dirty="0"/>
           </a:p>

--- a/帮扶管理信息系统介绍.pptx
+++ b/帮扶管理信息系统介绍.pptx
@@ -249,7 +249,7 @@
                 <c:formatCode>General</c:formatCode>
                 <c:ptCount val="2"/>
                 <c:pt idx="0">
-                  <c:v>11915</c:v>
+                  <c:v>11916</c:v>
                 </c:pt>
                 <c:pt idx="1">
                   <c:v>6287</c:v>
@@ -4760,7 +4760,9 @@
           <a:ln/>
         </p:spPr>
         <p:txBody>
-          <a:bodyPr wrap="square" lIns="0" tIns="0" rIns="0" bIns="0" rtlCol="0" anchor="ctr"/>
+          <a:bodyPr wrap="square" lIns="0" tIns="0" rIns="0" bIns="0" rtlCol="0" anchor="ctr">
+            <a:normAutofit/>
+          </a:bodyPr>
           <a:lstStyle/>
           <a:p>
             <a:pPr indent="0" marL="0">
@@ -4790,16 +4792,18 @@
         <p:spPr>
           <a:xfrm>
             <a:off x="877824" y="2331720"/>
-            <a:ext cx="10515600" cy="1234440"/>
-          </a:xfrm>
-          <a:prstGeom prst="rect">
-            <a:avLst/>
-          </a:prstGeom>
-          <a:noFill/>
-          <a:ln/>
-        </p:spPr>
-        <p:txBody>
-          <a:bodyPr wrap="square" lIns="0" tIns="0" rIns="0" bIns="0" rtlCol="0" anchor="ctr"/>
+            <a:ext cx="10515600" cy="1264370"/>
+          </a:xfrm>
+          <a:prstGeom prst="rect">
+            <a:avLst/>
+          </a:prstGeom>
+          <a:noFill/>
+          <a:ln/>
+        </p:spPr>
+        <p:txBody>
+          <a:bodyPr wrap="square" lIns="0" tIns="0" rIns="0" bIns="0" rtlCol="0" anchor="ctr">
+            <a:normAutofit/>
+          </a:bodyPr>
           <a:lstStyle/>
           <a:p>
             <a:pPr indent="0" marL="0">
@@ -4838,7 +4842,9 @@
           <a:ln/>
         </p:spPr>
         <p:txBody>
-          <a:bodyPr wrap="square" lIns="0" tIns="0" rIns="0" bIns="0" rtlCol="0" anchor="ctr"/>
+          <a:bodyPr wrap="square" lIns="0" tIns="0" rIns="0" bIns="0" rtlCol="0" anchor="ctr">
+            <a:normAutofit/>
+          </a:bodyPr>
           <a:lstStyle/>
           <a:p>
             <a:pPr indent="0" marL="0">
@@ -4877,7 +4883,9 @@
           <a:ln/>
         </p:spPr>
         <p:txBody>
-          <a:bodyPr wrap="square" lIns="0" tIns="0" rIns="0" bIns="0" rtlCol="0" anchor="ctr"/>
+          <a:bodyPr wrap="square" lIns="0" tIns="0" rIns="0" bIns="0" rtlCol="0" anchor="ctr">
+            <a:normAutofit/>
+          </a:bodyPr>
           <a:lstStyle/>
           <a:p>
             <a:pPr indent="0" marL="0">
@@ -4939,7 +4947,9 @@
           <a:ln/>
         </p:spPr>
         <p:txBody>
-          <a:bodyPr wrap="square" lIns="0" tIns="0" rIns="0" bIns="0" rtlCol="0" anchor="ctr"/>
+          <a:bodyPr wrap="square" lIns="0" tIns="0" rIns="0" bIns="0" rtlCol="0" anchor="ctr">
+            <a:normAutofit/>
+          </a:bodyPr>
           <a:lstStyle/>
           <a:p>
             <a:pPr indent="0" marL="0">
@@ -4954,7 +4964,7 @@
                 <a:ea typeface="微软雅黑" pitchFamily="34" charset="-122"/>
                 <a:cs typeface="微软雅黑" pitchFamily="34" charset="-120"/>
               </a:rPr>
-              <a:t>V1.12.10  |  2026-10-02  |  FastAPI + Vue 3 + Electron + SQLite</a:t>
+              <a:t>V1.12.11  |  2026-10-02  |  FastAPI + Vue 3 + Electron + SQLite</a:t>
             </a:r>
             <a:endParaRPr lang="en-US" sz="1250" dirty="0"/>
           </a:p>
@@ -5030,7 +5040,9 @@
           <a:ln/>
         </p:spPr>
         <p:txBody>
-          <a:bodyPr wrap="square" lIns="0" tIns="0" rIns="0" bIns="0" rtlCol="0" anchor="ctr"/>
+          <a:bodyPr wrap="square" lIns="0" tIns="0" rIns="0" bIns="0" rtlCol="0" anchor="ctr">
+            <a:normAutofit/>
+          </a:bodyPr>
           <a:lstStyle/>
           <a:p>
             <a:pPr indent="0" marL="0">
@@ -5069,7 +5081,9 @@
           <a:ln/>
         </p:spPr>
         <p:txBody>
-          <a:bodyPr wrap="square" lIns="0" tIns="0" rIns="0" bIns="0" rtlCol="0" anchor="ctr"/>
+          <a:bodyPr wrap="square" lIns="0" tIns="0" rIns="0" bIns="0" rtlCol="0" anchor="ctr">
+            <a:normAutofit/>
+          </a:bodyPr>
           <a:lstStyle/>
           <a:p>
             <a:pPr indent="0" marL="0">
@@ -5108,7 +5122,9 @@
           <a:ln/>
         </p:spPr>
         <p:txBody>
-          <a:bodyPr wrap="square" lIns="0" tIns="0" rIns="0" bIns="0" rtlCol="0" anchor="ctr"/>
+          <a:bodyPr wrap="square" lIns="0" tIns="0" rIns="0" bIns="0" rtlCol="0" anchor="ctr">
+            <a:normAutofit/>
+          </a:bodyPr>
           <a:lstStyle/>
           <a:p>
             <a:pPr algn="r" indent="0" marL="0">
@@ -5147,7 +5163,9 @@
           <a:ln/>
         </p:spPr>
         <p:txBody>
-          <a:bodyPr wrap="square" lIns="0" tIns="0" rIns="0" bIns="0" rtlCol="0" anchor="ctr"/>
+          <a:bodyPr wrap="square" lIns="0" tIns="0" rIns="0" bIns="0" rtlCol="0" anchor="ctr">
+            <a:normAutofit/>
+          </a:bodyPr>
           <a:lstStyle/>
           <a:p>
             <a:pPr indent="0" marL="0">
@@ -5162,7 +5180,7 @@
                 <a:ea typeface="微软雅黑" pitchFamily="34" charset="-122"/>
                 <a:cs typeface="微软雅黑" pitchFamily="34" charset="-120"/>
               </a:rPr>
-              <a:t>帮扶管理信息系统 v1.12.10</a:t>
+              <a:t>帮扶管理信息系统 v1.12.11</a:t>
             </a:r>
             <a:endParaRPr lang="en-US" sz="1050" dirty="0"/>
           </a:p>
@@ -5215,7 +5233,9 @@
           <a:ln/>
         </p:spPr>
         <p:txBody>
-          <a:bodyPr wrap="square" lIns="0" tIns="0" rIns="0" bIns="0" rtlCol="0" anchor="ctr"/>
+          <a:bodyPr wrap="square" lIns="0" tIns="0" rIns="0" bIns="0" rtlCol="0" anchor="ctr">
+            <a:normAutofit/>
+          </a:bodyPr>
           <a:lstStyle/>
           <a:p>
             <a:pPr indent="0" marL="0">
@@ -5254,7 +5274,9 @@
           <a:ln/>
         </p:spPr>
         <p:txBody>
-          <a:bodyPr wrap="square" lIns="0" tIns="0" rIns="0" bIns="0" rtlCol="0" anchor="t"/>
+          <a:bodyPr wrap="square" lIns="0" tIns="0" rIns="0" bIns="0" rtlCol="0" anchor="t">
+            <a:normAutofit/>
+          </a:bodyPr>
           <a:lstStyle/>
           <a:p>
             <a:pPr algn="l" marL="152400" indent="-152400">
@@ -5410,7 +5432,9 @@
           <a:ln/>
         </p:spPr>
         <p:txBody>
-          <a:bodyPr wrap="square" lIns="0" tIns="0" rIns="0" bIns="0" rtlCol="0" anchor="ctr"/>
+          <a:bodyPr wrap="square" lIns="0" tIns="0" rIns="0" bIns="0" rtlCol="0" anchor="ctr">
+            <a:normAutofit/>
+          </a:bodyPr>
           <a:lstStyle/>
           <a:p>
             <a:pPr indent="0" marL="0">
@@ -5449,7 +5473,9 @@
           <a:ln/>
         </p:spPr>
         <p:txBody>
-          <a:bodyPr wrap="square" lIns="0" tIns="0" rIns="0" bIns="0" rtlCol="0" anchor="t"/>
+          <a:bodyPr wrap="square" lIns="0" tIns="0" rIns="0" bIns="0" rtlCol="0" anchor="t">
+            <a:normAutofit/>
+          </a:bodyPr>
           <a:lstStyle/>
           <a:p>
             <a:pPr algn="l" marL="152400" indent="-152400">
@@ -5628,7 +5654,9 @@
           <a:ln/>
         </p:spPr>
         <p:txBody>
-          <a:bodyPr wrap="square" lIns="0" tIns="0" rIns="0" bIns="0" rtlCol="0" anchor="ctr"/>
+          <a:bodyPr wrap="square" lIns="0" tIns="0" rIns="0" bIns="0" rtlCol="0" anchor="ctr">
+            <a:normAutofit/>
+          </a:bodyPr>
           <a:lstStyle/>
           <a:p>
             <a:pPr indent="0" marL="0">
@@ -5667,7 +5695,9 @@
           <a:ln/>
         </p:spPr>
         <p:txBody>
-          <a:bodyPr wrap="square" lIns="0" tIns="0" rIns="0" bIns="0" rtlCol="0" anchor="ctr"/>
+          <a:bodyPr wrap="square" lIns="0" tIns="0" rIns="0" bIns="0" rtlCol="0" anchor="ctr">
+            <a:normAutofit/>
+          </a:bodyPr>
           <a:lstStyle/>
           <a:p>
             <a:pPr indent="0" marL="0">
@@ -5706,7 +5736,9 @@
           <a:ln/>
         </p:spPr>
         <p:txBody>
-          <a:bodyPr wrap="square" lIns="0" tIns="0" rIns="0" bIns="0" rtlCol="0" anchor="ctr"/>
+          <a:bodyPr wrap="square" lIns="0" tIns="0" rIns="0" bIns="0" rtlCol="0" anchor="ctr">
+            <a:normAutofit/>
+          </a:bodyPr>
           <a:lstStyle/>
           <a:p>
             <a:pPr algn="r" indent="0" marL="0">
@@ -5745,7 +5777,9 @@
           <a:ln/>
         </p:spPr>
         <p:txBody>
-          <a:bodyPr wrap="square" lIns="0" tIns="0" rIns="0" bIns="0" rtlCol="0" anchor="ctr"/>
+          <a:bodyPr wrap="square" lIns="0" tIns="0" rIns="0" bIns="0" rtlCol="0" anchor="ctr">
+            <a:normAutofit/>
+          </a:bodyPr>
           <a:lstStyle/>
           <a:p>
             <a:pPr indent="0" marL="0">
@@ -5760,7 +5794,7 @@
                 <a:ea typeface="微软雅黑" pitchFamily="34" charset="-122"/>
                 <a:cs typeface="微软雅黑" pitchFamily="34" charset="-120"/>
               </a:rPr>
-              <a:t>帮扶管理信息系统 v1.12.10</a:t>
+              <a:t>帮扶管理信息系统 v1.12.11</a:t>
             </a:r>
             <a:endParaRPr lang="en-US" sz="1050" dirty="0"/>
           </a:p>
@@ -5804,7 +5838,9 @@
           <a:ln/>
         </p:spPr>
         <p:txBody>
-          <a:bodyPr wrap="square" lIns="0" tIns="0" rIns="0" bIns="0" rtlCol="0" anchor="ctr"/>
+          <a:bodyPr wrap="square" lIns="0" tIns="0" rIns="0" bIns="0" rtlCol="0" anchor="ctr">
+            <a:normAutofit/>
+          </a:bodyPr>
           <a:lstStyle/>
           <a:p>
             <a:pPr indent="0" marL="0">
@@ -5843,7 +5879,9 @@
           <a:ln/>
         </p:spPr>
         <p:txBody>
-          <a:bodyPr wrap="square" lIns="0" tIns="0" rIns="0" bIns="0" rtlCol="0" anchor="ctr"/>
+          <a:bodyPr wrap="square" lIns="0" tIns="0" rIns="0" bIns="0" rtlCol="0" anchor="ctr">
+            <a:normAutofit/>
+          </a:bodyPr>
           <a:lstStyle/>
           <a:p>
             <a:pPr indent="0" marL="0">
@@ -5902,7 +5940,9 @@
           <a:ln/>
         </p:spPr>
         <p:txBody>
-          <a:bodyPr wrap="square" lIns="0" tIns="0" rIns="0" bIns="0" rtlCol="0" anchor="ctr"/>
+          <a:bodyPr wrap="square" lIns="0" tIns="0" rIns="0" bIns="0" rtlCol="0" anchor="ctr">
+            <a:normAutofit/>
+          </a:bodyPr>
           <a:lstStyle/>
           <a:p>
             <a:pPr indent="0" marL="0">
@@ -5941,7 +5981,9 @@
           <a:ln/>
         </p:spPr>
         <p:txBody>
-          <a:bodyPr wrap="square" lIns="0" tIns="0" rIns="0" bIns="0" rtlCol="0" anchor="ctr"/>
+          <a:bodyPr wrap="square" lIns="0" tIns="0" rIns="0" bIns="0" rtlCol="0" anchor="ctr">
+            <a:normAutofit/>
+          </a:bodyPr>
           <a:lstStyle/>
           <a:p>
             <a:pPr indent="0" marL="0">
@@ -6000,7 +6042,9 @@
           <a:ln/>
         </p:spPr>
         <p:txBody>
-          <a:bodyPr wrap="square" lIns="0" tIns="0" rIns="0" bIns="0" rtlCol="0" anchor="ctr"/>
+          <a:bodyPr wrap="square" lIns="0" tIns="0" rIns="0" bIns="0" rtlCol="0" anchor="ctr">
+            <a:normAutofit/>
+          </a:bodyPr>
           <a:lstStyle/>
           <a:p>
             <a:pPr indent="0" marL="0">
@@ -6039,7 +6083,9 @@
           <a:ln/>
         </p:spPr>
         <p:txBody>
-          <a:bodyPr wrap="square" lIns="0" tIns="0" rIns="0" bIns="0" rtlCol="0" anchor="ctr"/>
+          <a:bodyPr wrap="square" lIns="0" tIns="0" rIns="0" bIns="0" rtlCol="0" anchor="ctr">
+            <a:normAutofit/>
+          </a:bodyPr>
           <a:lstStyle/>
           <a:p>
             <a:pPr indent="0" marL="0">
@@ -6098,7 +6144,9 @@
           <a:ln/>
         </p:spPr>
         <p:txBody>
-          <a:bodyPr wrap="square" lIns="0" tIns="0" rIns="0" bIns="0" rtlCol="0" anchor="ctr"/>
+          <a:bodyPr wrap="square" lIns="0" tIns="0" rIns="0" bIns="0" rtlCol="0" anchor="ctr">
+            <a:normAutofit/>
+          </a:bodyPr>
           <a:lstStyle/>
           <a:p>
             <a:pPr indent="0" marL="0">
@@ -6137,7 +6185,9 @@
           <a:ln/>
         </p:spPr>
         <p:txBody>
-          <a:bodyPr wrap="square" lIns="0" tIns="0" rIns="0" bIns="0" rtlCol="0" anchor="ctr"/>
+          <a:bodyPr wrap="square" lIns="0" tIns="0" rIns="0" bIns="0" rtlCol="0" anchor="ctr">
+            <a:normAutofit/>
+          </a:bodyPr>
           <a:lstStyle/>
           <a:p>
             <a:pPr indent="0" marL="0">
@@ -6152,7 +6202,7 @@
                 <a:ea typeface="微软雅黑" pitchFamily="34" charset="-122"/>
                 <a:cs typeface="微软雅黑" pitchFamily="34" charset="-120"/>
               </a:rPr>
-              <a:t>80 个服务：资金 / 项目 / 数据包 / 审批…</a:t>
+              <a:t>100 个服务：资金 / 项目 / 数据包 / 审批…</a:t>
             </a:r>
             <a:endParaRPr lang="en-US" sz="1150" dirty="0"/>
           </a:p>
@@ -6196,7 +6246,9 @@
           <a:ln/>
         </p:spPr>
         <p:txBody>
-          <a:bodyPr wrap="square" lIns="0" tIns="0" rIns="0" bIns="0" rtlCol="0" anchor="ctr"/>
+          <a:bodyPr wrap="square" lIns="0" tIns="0" rIns="0" bIns="0" rtlCol="0" anchor="ctr">
+            <a:normAutofit/>
+          </a:bodyPr>
           <a:lstStyle/>
           <a:p>
             <a:pPr indent="0" marL="0">
@@ -6235,7 +6287,9 @@
           <a:ln/>
         </p:spPr>
         <p:txBody>
-          <a:bodyPr wrap="square" lIns="0" tIns="0" rIns="0" bIns="0" rtlCol="0" anchor="ctr"/>
+          <a:bodyPr wrap="square" lIns="0" tIns="0" rIns="0" bIns="0" rtlCol="0" anchor="ctr">
+            <a:normAutofit/>
+          </a:bodyPr>
           <a:lstStyle/>
           <a:p>
             <a:pPr indent="0" marL="0">
@@ -6265,11 +6319,11 @@
         <p:spPr>
           <a:xfrm>
             <a:off x="457200" y="3977640"/>
-            <a:ext cx="11274552" cy="2011680"/>
+            <a:ext cx="11274552" cy="2252045"/>
           </a:xfrm>
           <a:prstGeom prst="roundRect">
             <a:avLst>
-              <a:gd name="adj" fmla="val 3182"/>
+              <a:gd name="adj" fmla="val 2842"/>
             </a:avLst>
           </a:prstGeom>
           <a:solidFill>
@@ -6293,17 +6347,19 @@
         </p:nvSpPr>
         <p:spPr>
           <a:xfrm>
-            <a:off x="749808" y="4206240"/>
-            <a:ext cx="2743200" cy="365760"/>
-          </a:xfrm>
-          <a:prstGeom prst="rect">
-            <a:avLst/>
-          </a:prstGeom>
-          <a:noFill/>
-          <a:ln/>
-        </p:spPr>
-        <p:txBody>
-          <a:bodyPr wrap="square" lIns="0" tIns="0" rIns="0" bIns="0" rtlCol="0" anchor="ctr"/>
+            <a:off x="749808" y="4160520"/>
+            <a:ext cx="10689336" cy="335756"/>
+          </a:xfrm>
+          <a:prstGeom prst="rect">
+            <a:avLst/>
+          </a:prstGeom>
+          <a:noFill/>
+          <a:ln/>
+        </p:spPr>
+        <p:txBody>
+          <a:bodyPr wrap="square" lIns="0" tIns="0" rIns="0" bIns="0" rtlCol="0" anchor="ctr">
+            <a:normAutofit/>
+          </a:bodyPr>
           <a:lstStyle/>
           <a:p>
             <a:pPr indent="0" marL="0">
@@ -6332,17 +6388,19 @@
         </p:nvSpPr>
         <p:spPr>
           <a:xfrm>
-            <a:off x="749808" y="4617720"/>
-            <a:ext cx="10607040" cy="1280160"/>
-          </a:xfrm>
-          <a:prstGeom prst="rect">
-            <a:avLst/>
-          </a:prstGeom>
-          <a:noFill/>
-          <a:ln/>
-        </p:spPr>
-        <p:txBody>
-          <a:bodyPr wrap="square" lIns="0" tIns="0" rIns="0" bIns="0" rtlCol="0" anchor="t"/>
+            <a:off x="749808" y="4578572"/>
+            <a:ext cx="10689336" cy="1504809"/>
+          </a:xfrm>
+          <a:prstGeom prst="rect">
+            <a:avLst/>
+          </a:prstGeom>
+          <a:noFill/>
+          <a:ln/>
+        </p:spPr>
+        <p:txBody>
+          <a:bodyPr wrap="square" lIns="0" tIns="0" rIns="0" bIns="0" rtlCol="0" anchor="t">
+            <a:normAutofit/>
+          </a:bodyPr>
           <a:lstStyle/>
           <a:p>
             <a:pPr algn="l" marL="152400" indent="-152400">
@@ -6500,7 +6558,9 @@
           <a:ln/>
         </p:spPr>
         <p:txBody>
-          <a:bodyPr wrap="square" lIns="0" tIns="0" rIns="0" bIns="0" rtlCol="0" anchor="ctr"/>
+          <a:bodyPr wrap="square" lIns="0" tIns="0" rIns="0" bIns="0" rtlCol="0" anchor="ctr">
+            <a:normAutofit/>
+          </a:bodyPr>
           <a:lstStyle/>
           <a:p>
             <a:pPr indent="0" marL="0">
@@ -6539,7 +6599,9 @@
           <a:ln/>
         </p:spPr>
         <p:txBody>
-          <a:bodyPr wrap="square" lIns="0" tIns="0" rIns="0" bIns="0" rtlCol="0" anchor="ctr"/>
+          <a:bodyPr wrap="square" lIns="0" tIns="0" rIns="0" bIns="0" rtlCol="0" anchor="ctr">
+            <a:normAutofit/>
+          </a:bodyPr>
           <a:lstStyle/>
           <a:p>
             <a:pPr indent="0" marL="0">
@@ -6578,7 +6640,9 @@
           <a:ln/>
         </p:spPr>
         <p:txBody>
-          <a:bodyPr wrap="square" lIns="0" tIns="0" rIns="0" bIns="0" rtlCol="0" anchor="ctr"/>
+          <a:bodyPr wrap="square" lIns="0" tIns="0" rIns="0" bIns="0" rtlCol="0" anchor="ctr">
+            <a:normAutofit/>
+          </a:bodyPr>
           <a:lstStyle/>
           <a:p>
             <a:pPr algn="r" indent="0" marL="0">
@@ -6617,7 +6681,9 @@
           <a:ln/>
         </p:spPr>
         <p:txBody>
-          <a:bodyPr wrap="square" lIns="0" tIns="0" rIns="0" bIns="0" rtlCol="0" anchor="ctr"/>
+          <a:bodyPr wrap="square" lIns="0" tIns="0" rIns="0" bIns="0" rtlCol="0" anchor="ctr">
+            <a:normAutofit/>
+          </a:bodyPr>
           <a:lstStyle/>
           <a:p>
             <a:pPr indent="0" marL="0">
@@ -6632,7 +6698,7 @@
                 <a:ea typeface="微软雅黑" pitchFamily="34" charset="-122"/>
                 <a:cs typeface="微软雅黑" pitchFamily="34" charset="-120"/>
               </a:rPr>
-              <a:t>帮扶管理信息系统 v1.12.10</a:t>
+              <a:t>帮扶管理信息系统 v1.12.11</a:t>
             </a:r>
             <a:endParaRPr lang="en-US" sz="1050" dirty="0"/>
           </a:p>
@@ -6685,7 +6751,9 @@
           <a:ln/>
         </p:spPr>
         <p:txBody>
-          <a:bodyPr wrap="square" lIns="0" tIns="0" rIns="0" bIns="0" rtlCol="0" anchor="ctr"/>
+          <a:bodyPr wrap="square" lIns="0" tIns="0" rIns="0" bIns="0" rtlCol="0" anchor="ctr">
+            <a:normAutofit/>
+          </a:bodyPr>
           <a:lstStyle/>
           <a:p>
             <a:pPr indent="0" marL="0">
@@ -6724,7 +6792,9 @@
           <a:ln/>
         </p:spPr>
         <p:txBody>
-          <a:bodyPr wrap="square" lIns="0" tIns="0" rIns="0" bIns="0" rtlCol="0" anchor="t"/>
+          <a:bodyPr wrap="square" lIns="0" tIns="0" rIns="0" bIns="0" rtlCol="0" anchor="t">
+            <a:normAutofit/>
+          </a:bodyPr>
           <a:lstStyle/>
           <a:p>
             <a:pPr algn="l" marL="152400" indent="-152400">
@@ -6743,7 +6813,7 @@
                 <a:ea typeface="微软雅黑" pitchFamily="34" charset="-122"/>
                 <a:cs typeface="微软雅黑" pitchFamily="34" charset="-120"/>
               </a:rPr>
-              <a:t>57 个模型文件 / 120+ 模型类：村、项目、资金、学校、政策、组织、审计…</a:t>
+              <a:t>59 个模型文件 / 120+ 模型类：村、项目、资金、学校、政策、组织、审计…</a:t>
             </a:r>
             <a:endParaRPr lang="en-US" sz="1350" dirty="0"/>
           </a:p>
@@ -6806,7 +6876,7 @@
                 <a:ea typeface="微软雅黑" pitchFamily="34" charset="-122"/>
                 <a:cs typeface="微软雅黑" pitchFamily="34" charset="-120"/>
               </a:rPr>
-              <a:t>37 个 Alembic 迁移：含 PII 存量回填（幂等可重跑）与外键守护</a:t>
+              <a:t>45 个 Alembic 迁移：含 PII 存量回填（幂等可重跑）与外键守护</a:t>
             </a:r>
             <a:endParaRPr lang="en-US" sz="1350" dirty="0"/>
           </a:p>
@@ -6880,7 +6950,9 @@
           <a:ln/>
         </p:spPr>
         <p:txBody>
-          <a:bodyPr wrap="square" lIns="0" tIns="0" rIns="0" bIns="0" rtlCol="0" anchor="ctr"/>
+          <a:bodyPr wrap="square" lIns="0" tIns="0" rIns="0" bIns="0" rtlCol="0" anchor="ctr">
+            <a:normAutofit/>
+          </a:bodyPr>
           <a:lstStyle/>
           <a:p>
             <a:pPr indent="0" marL="0">
@@ -6919,7 +6991,9 @@
           <a:ln/>
         </p:spPr>
         <p:txBody>
-          <a:bodyPr wrap="square" lIns="0" tIns="0" rIns="0" bIns="0" rtlCol="0" anchor="t"/>
+          <a:bodyPr wrap="square" lIns="0" tIns="0" rIns="0" bIns="0" rtlCol="0" anchor="t">
+            <a:normAutofit/>
+          </a:bodyPr>
           <a:lstStyle/>
           <a:p>
             <a:pPr algn="l" marL="152400" indent="-152400">
@@ -7098,7 +7172,9 @@
           <a:ln/>
         </p:spPr>
         <p:txBody>
-          <a:bodyPr wrap="square" lIns="0" tIns="0" rIns="0" bIns="0" rtlCol="0" anchor="ctr"/>
+          <a:bodyPr wrap="square" lIns="0" tIns="0" rIns="0" bIns="0" rtlCol="0" anchor="ctr">
+            <a:normAutofit/>
+          </a:bodyPr>
           <a:lstStyle/>
           <a:p>
             <a:pPr indent="0" marL="0">
@@ -7137,7 +7213,9 @@
           <a:ln/>
         </p:spPr>
         <p:txBody>
-          <a:bodyPr wrap="square" lIns="0" tIns="0" rIns="0" bIns="0" rtlCol="0" anchor="ctr"/>
+          <a:bodyPr wrap="square" lIns="0" tIns="0" rIns="0" bIns="0" rtlCol="0" anchor="ctr">
+            <a:normAutofit/>
+          </a:bodyPr>
           <a:lstStyle/>
           <a:p>
             <a:pPr indent="0" marL="0">
@@ -7176,7 +7254,9 @@
           <a:ln/>
         </p:spPr>
         <p:txBody>
-          <a:bodyPr wrap="square" lIns="0" tIns="0" rIns="0" bIns="0" rtlCol="0" anchor="ctr"/>
+          <a:bodyPr wrap="square" lIns="0" tIns="0" rIns="0" bIns="0" rtlCol="0" anchor="ctr">
+            <a:normAutofit/>
+          </a:bodyPr>
           <a:lstStyle/>
           <a:p>
             <a:pPr algn="r" indent="0" marL="0">
@@ -7215,7 +7295,9 @@
           <a:ln/>
         </p:spPr>
         <p:txBody>
-          <a:bodyPr wrap="square" lIns="0" tIns="0" rIns="0" bIns="0" rtlCol="0" anchor="ctr"/>
+          <a:bodyPr wrap="square" lIns="0" tIns="0" rIns="0" bIns="0" rtlCol="0" anchor="ctr">
+            <a:normAutofit/>
+          </a:bodyPr>
           <a:lstStyle/>
           <a:p>
             <a:pPr indent="0" marL="0">
@@ -7230,7 +7312,7 @@
                 <a:ea typeface="微软雅黑" pitchFamily="34" charset="-122"/>
                 <a:cs typeface="微软雅黑" pitchFamily="34" charset="-120"/>
               </a:rPr>
-              <a:t>帮扶管理信息系统 v1.12.10</a:t>
+              <a:t>帮扶管理信息系统 v1.12.11</a:t>
             </a:r>
             <a:endParaRPr lang="en-US" sz="1050" dirty="0"/>
           </a:p>
@@ -7283,7 +7365,9 @@
           <a:ln/>
         </p:spPr>
         <p:txBody>
-          <a:bodyPr wrap="square" lIns="0" tIns="0" rIns="0" bIns="0" rtlCol="0" anchor="ctr"/>
+          <a:bodyPr wrap="square" lIns="0" tIns="0" rIns="0" bIns="0" rtlCol="0" anchor="ctr">
+            <a:normAutofit/>
+          </a:bodyPr>
           <a:lstStyle/>
           <a:p>
             <a:pPr indent="0" marL="0">
@@ -7322,7 +7406,9 @@
           <a:ln/>
         </p:spPr>
         <p:txBody>
-          <a:bodyPr wrap="square" lIns="0" tIns="0" rIns="0" bIns="0" rtlCol="0" anchor="t"/>
+          <a:bodyPr wrap="square" lIns="0" tIns="0" rIns="0" bIns="0" rtlCol="0" anchor="t">
+            <a:normAutofit/>
+          </a:bodyPr>
           <a:lstStyle/>
           <a:p>
             <a:pPr algn="l" marL="152400" indent="-152400">
@@ -7436,7 +7522,9 @@
           <a:ln/>
         </p:spPr>
         <p:txBody>
-          <a:bodyPr wrap="square" lIns="0" tIns="0" rIns="0" bIns="0" rtlCol="0" anchor="ctr"/>
+          <a:bodyPr wrap="square" lIns="0" tIns="0" rIns="0" bIns="0" rtlCol="0" anchor="ctr">
+            <a:normAutofit/>
+          </a:bodyPr>
           <a:lstStyle/>
           <a:p>
             <a:pPr indent="0" marL="0">
@@ -7475,7 +7563,9 @@
           <a:ln/>
         </p:spPr>
         <p:txBody>
-          <a:bodyPr wrap="square" lIns="0" tIns="0" rIns="0" bIns="0" rtlCol="0" anchor="t"/>
+          <a:bodyPr wrap="square" lIns="0" tIns="0" rIns="0" bIns="0" rtlCol="0" anchor="t">
+            <a:normAutofit/>
+          </a:bodyPr>
           <a:lstStyle/>
           <a:p>
             <a:pPr algn="l" marL="152400" indent="-152400">
@@ -7582,7 +7672,9 @@
           <a:ln/>
         </p:spPr>
         <p:txBody>
-          <a:bodyPr wrap="square" lIns="0" tIns="0" rIns="0" bIns="0" rtlCol="0" anchor="ctr"/>
+          <a:bodyPr wrap="square" lIns="0" tIns="0" rIns="0" bIns="0" rtlCol="0" anchor="ctr">
+            <a:normAutofit/>
+          </a:bodyPr>
           <a:lstStyle/>
           <a:p>
             <a:pPr algn="ctr" indent="0" marL="0">
@@ -7667,7 +7759,9 @@
           <a:ln/>
         </p:spPr>
         <p:txBody>
-          <a:bodyPr wrap="square" lIns="0" tIns="0" rIns="0" bIns="0" rtlCol="0" anchor="ctr"/>
+          <a:bodyPr wrap="square" lIns="0" tIns="0" rIns="0" bIns="0" rtlCol="0" anchor="ctr">
+            <a:normAutofit/>
+          </a:bodyPr>
           <a:lstStyle/>
           <a:p>
             <a:pPr algn="ctr" indent="0" marL="0">
@@ -7752,7 +7846,9 @@
           <a:ln/>
         </p:spPr>
         <p:txBody>
-          <a:bodyPr wrap="square" lIns="0" tIns="0" rIns="0" bIns="0" rtlCol="0" anchor="ctr"/>
+          <a:bodyPr wrap="square" lIns="0" tIns="0" rIns="0" bIns="0" rtlCol="0" anchor="ctr">
+            <a:normAutofit/>
+          </a:bodyPr>
           <a:lstStyle/>
           <a:p>
             <a:pPr algn="ctr" indent="0" marL="0">
@@ -7837,7 +7933,9 @@
           <a:ln/>
         </p:spPr>
         <p:txBody>
-          <a:bodyPr wrap="square" lIns="0" tIns="0" rIns="0" bIns="0" rtlCol="0" anchor="ctr"/>
+          <a:bodyPr wrap="square" lIns="0" tIns="0" rIns="0" bIns="0" rtlCol="0" anchor="ctr">
+            <a:normAutofit/>
+          </a:bodyPr>
           <a:lstStyle/>
           <a:p>
             <a:pPr algn="ctr" indent="0" marL="0">
@@ -7922,7 +8020,9 @@
           <a:ln/>
         </p:spPr>
         <p:txBody>
-          <a:bodyPr wrap="square" lIns="0" tIns="0" rIns="0" bIns="0" rtlCol="0" anchor="ctr"/>
+          <a:bodyPr wrap="square" lIns="0" tIns="0" rIns="0" bIns="0" rtlCol="0" anchor="ctr">
+            <a:normAutofit/>
+          </a:bodyPr>
           <a:lstStyle/>
           <a:p>
             <a:pPr algn="ctr" indent="0" marL="0">
@@ -8007,7 +8107,9 @@
           <a:ln/>
         </p:spPr>
         <p:txBody>
-          <a:bodyPr wrap="square" lIns="0" tIns="0" rIns="0" bIns="0" rtlCol="0" anchor="ctr"/>
+          <a:bodyPr wrap="square" lIns="0" tIns="0" rIns="0" bIns="0" rtlCol="0" anchor="ctr">
+            <a:normAutofit/>
+          </a:bodyPr>
           <a:lstStyle/>
           <a:p>
             <a:pPr algn="ctr" indent="0" marL="0">
@@ -8046,7 +8148,9 @@
           <a:ln/>
         </p:spPr>
         <p:txBody>
-          <a:bodyPr wrap="square" lIns="0" tIns="0" rIns="0" bIns="0" rtlCol="0" anchor="ctr"/>
+          <a:bodyPr wrap="square" lIns="0" tIns="0" rIns="0" bIns="0" rtlCol="0" anchor="ctr">
+            <a:normAutofit/>
+          </a:bodyPr>
           <a:lstStyle/>
           <a:p>
             <a:pPr indent="0" marL="0">
@@ -8108,16 +8212,18 @@
         <p:spPr>
           <a:xfrm>
             <a:off x="502920" y="822960"/>
-            <a:ext cx="4206240" cy="3108960"/>
-          </a:xfrm>
-          <a:prstGeom prst="rect">
-            <a:avLst/>
-          </a:prstGeom>
-          <a:noFill/>
-          <a:ln/>
-        </p:spPr>
-        <p:txBody>
-          <a:bodyPr wrap="square" lIns="0" tIns="0" rIns="0" bIns="0" rtlCol="0" anchor="ctr"/>
+            <a:ext cx="4206240" cy="4315121"/>
+          </a:xfrm>
+          <a:prstGeom prst="rect">
+            <a:avLst/>
+          </a:prstGeom>
+          <a:noFill/>
+          <a:ln/>
+        </p:spPr>
+        <p:txBody>
+          <a:bodyPr wrap="square" lIns="0" tIns="0" rIns="0" bIns="0" rtlCol="0" anchor="ctr">
+            <a:normAutofit/>
+          </a:bodyPr>
           <a:lstStyle/>
           <a:p>
             <a:pPr indent="0" marL="0">
@@ -8147,16 +8253,18 @@
         <p:spPr>
           <a:xfrm>
             <a:off x="914400" y="3977640"/>
-            <a:ext cx="10332720" cy="868680"/>
-          </a:xfrm>
-          <a:prstGeom prst="rect">
-            <a:avLst/>
-          </a:prstGeom>
-          <a:noFill/>
-          <a:ln/>
-        </p:spPr>
-        <p:txBody>
-          <a:bodyPr wrap="square" lIns="0" tIns="0" rIns="0" bIns="0" rtlCol="0" anchor="ctr"/>
+            <a:ext cx="10332720" cy="877655"/>
+          </a:xfrm>
+          <a:prstGeom prst="rect">
+            <a:avLst/>
+          </a:prstGeom>
+          <a:noFill/>
+          <a:ln/>
+        </p:spPr>
+        <p:txBody>
+          <a:bodyPr wrap="square" lIns="0" tIns="0" rIns="0" bIns="0" rtlCol="0" anchor="ctr">
+            <a:normAutofit/>
+          </a:bodyPr>
           <a:lstStyle/>
           <a:p>
             <a:pPr indent="0" marL="0">
@@ -8195,7 +8303,9 @@
           <a:ln/>
         </p:spPr>
         <p:txBody>
-          <a:bodyPr wrap="square" lIns="0" tIns="0" rIns="0" bIns="0" rtlCol="0" anchor="ctr"/>
+          <a:bodyPr wrap="square" lIns="0" tIns="0" rIns="0" bIns="0" rtlCol="0" anchor="ctr">
+            <a:normAutofit/>
+          </a:bodyPr>
           <a:lstStyle/>
           <a:p>
             <a:pPr indent="0" marL="0">
@@ -8234,10 +8344,12 @@
           <a:ln/>
         </p:spPr>
         <p:txBody>
-          <a:bodyPr wrap="square" lIns="0" tIns="0" rIns="0" bIns="0" rtlCol="0" anchor="t"/>
-          <a:lstStyle/>
-          <a:p>
-            <a:pPr marL="152400" indent="-152400">
+          <a:bodyPr wrap="square" lIns="0" tIns="0" rIns="0" bIns="0" rtlCol="0" anchor="t">
+            <a:normAutofit/>
+          </a:bodyPr>
+          <a:lstStyle/>
+          <a:p>
+            <a:pPr algn="l" marL="152400" indent="-152400">
               <a:spcAft>
                 <a:spcPts val="1000"/>
               </a:spcAft>
@@ -8258,7 +8370,7 @@
             <a:endParaRPr lang="en-US" sz="1400" dirty="0"/>
           </a:p>
           <a:p>
-            <a:pPr marL="152400" indent="-152400">
+            <a:pPr algn="l" marL="152400" indent="-152400">
               <a:spcAft>
                 <a:spcPts val="1000"/>
               </a:spcAft>
@@ -8279,7 +8391,7 @@
             <a:endParaRPr lang="en-US" sz="1400" dirty="0"/>
           </a:p>
           <a:p>
-            <a:pPr marL="152400" indent="-152400">
+            <a:pPr algn="l" marL="152400" indent="-152400">
               <a:spcAft>
                 <a:spcPts val="1000"/>
               </a:spcAft>
@@ -8300,7 +8412,7 @@
             <a:endParaRPr lang="en-US" sz="1400" dirty="0"/>
           </a:p>
           <a:p>
-            <a:pPr marL="152400" indent="-152400">
+            <a:pPr algn="l" marL="152400" indent="-152400">
               <a:spcAft>
                 <a:spcPts val="1000"/>
               </a:spcAft>
@@ -8340,7 +8452,9 @@
           <a:ln/>
         </p:spPr>
         <p:txBody>
-          <a:bodyPr wrap="square" lIns="0" tIns="0" rIns="0" bIns="0" rtlCol="0" anchor="ctr"/>
+          <a:bodyPr wrap="square" lIns="0" tIns="0" rIns="0" bIns="0" rtlCol="0" anchor="ctr">
+            <a:normAutofit/>
+          </a:bodyPr>
           <a:lstStyle/>
           <a:p>
             <a:pPr algn="r" indent="0" marL="0">
@@ -8431,7 +8545,9 @@
           <a:ln/>
         </p:spPr>
         <p:txBody>
-          <a:bodyPr wrap="square" lIns="0" tIns="0" rIns="0" bIns="0" rtlCol="0" anchor="ctr"/>
+          <a:bodyPr wrap="square" lIns="0" tIns="0" rIns="0" bIns="0" rtlCol="0" anchor="ctr">
+            <a:normAutofit/>
+          </a:bodyPr>
           <a:lstStyle/>
           <a:p>
             <a:pPr indent="0" marL="0">
@@ -8470,7 +8586,9 @@
           <a:ln/>
         </p:spPr>
         <p:txBody>
-          <a:bodyPr wrap="square" lIns="0" tIns="0" rIns="0" bIns="0" rtlCol="0" anchor="ctr"/>
+          <a:bodyPr wrap="square" lIns="0" tIns="0" rIns="0" bIns="0" rtlCol="0" anchor="ctr">
+            <a:normAutofit/>
+          </a:bodyPr>
           <a:lstStyle/>
           <a:p>
             <a:pPr indent="0" marL="0">
@@ -8509,7 +8627,9 @@
           <a:ln/>
         </p:spPr>
         <p:txBody>
-          <a:bodyPr wrap="square" lIns="0" tIns="0" rIns="0" bIns="0" rtlCol="0" anchor="ctr"/>
+          <a:bodyPr wrap="square" lIns="0" tIns="0" rIns="0" bIns="0" rtlCol="0" anchor="ctr">
+            <a:normAutofit/>
+          </a:bodyPr>
           <a:lstStyle/>
           <a:p>
             <a:pPr algn="r" indent="0" marL="0">
@@ -8548,7 +8668,9 @@
           <a:ln/>
         </p:spPr>
         <p:txBody>
-          <a:bodyPr wrap="square" lIns="0" tIns="0" rIns="0" bIns="0" rtlCol="0" anchor="ctr"/>
+          <a:bodyPr wrap="square" lIns="0" tIns="0" rIns="0" bIns="0" rtlCol="0" anchor="ctr">
+            <a:normAutofit/>
+          </a:bodyPr>
           <a:lstStyle/>
           <a:p>
             <a:pPr indent="0" marL="0">
@@ -8563,7 +8685,7 @@
                 <a:ea typeface="微软雅黑" pitchFamily="34" charset="-122"/>
                 <a:cs typeface="微软雅黑" pitchFamily="34" charset="-120"/>
               </a:rPr>
-              <a:t>帮扶管理信息系统 v1.12.10</a:t>
+              <a:t>帮扶管理信息系统 v1.12.11</a:t>
             </a:r>
             <a:endParaRPr lang="en-US" sz="1050" dirty="0"/>
           </a:p>
@@ -8616,7 +8738,9 @@
           <a:ln/>
         </p:spPr>
         <p:txBody>
-          <a:bodyPr wrap="square" lIns="0" tIns="0" rIns="0" bIns="0" rtlCol="0" anchor="ctr"/>
+          <a:bodyPr wrap="square" lIns="0" tIns="0" rIns="0" bIns="0" rtlCol="0" anchor="ctr">
+            <a:normAutofit/>
+          </a:bodyPr>
           <a:lstStyle/>
           <a:p>
             <a:pPr indent="0" marL="0">
@@ -8655,7 +8779,9 @@
           <a:ln/>
         </p:spPr>
         <p:txBody>
-          <a:bodyPr wrap="square" lIns="0" tIns="0" rIns="0" bIns="0" rtlCol="0" anchor="ctr"/>
+          <a:bodyPr wrap="square" lIns="0" tIns="0" rIns="0" bIns="0" rtlCol="0" anchor="ctr">
+            <a:normAutofit/>
+          </a:bodyPr>
           <a:lstStyle/>
           <a:p>
             <a:pPr indent="0" marL="0">
@@ -8694,7 +8820,9 @@
           <a:ln/>
         </p:spPr>
         <p:txBody>
-          <a:bodyPr wrap="square" lIns="0" tIns="0" rIns="0" bIns="0" rtlCol="0" anchor="ctr"/>
+          <a:bodyPr wrap="square" lIns="0" tIns="0" rIns="0" bIns="0" rtlCol="0" anchor="ctr">
+            <a:normAutofit/>
+          </a:bodyPr>
           <a:lstStyle/>
           <a:p>
             <a:pPr indent="0" marL="0">
@@ -8762,7 +8890,9 @@
           <a:ln/>
         </p:spPr>
         <p:txBody>
-          <a:bodyPr wrap="square" lIns="0" tIns="0" rIns="0" bIns="0" rtlCol="0" anchor="ctr"/>
+          <a:bodyPr wrap="square" lIns="0" tIns="0" rIns="0" bIns="0" rtlCol="0" anchor="ctr">
+            <a:normAutofit/>
+          </a:bodyPr>
           <a:lstStyle/>
           <a:p>
             <a:pPr indent="0" marL="0">
@@ -8801,7 +8931,9 @@
           <a:ln/>
         </p:spPr>
         <p:txBody>
-          <a:bodyPr wrap="square" lIns="0" tIns="0" rIns="0" bIns="0" rtlCol="0" anchor="ctr"/>
+          <a:bodyPr wrap="square" lIns="0" tIns="0" rIns="0" bIns="0" rtlCol="0" anchor="ctr">
+            <a:normAutofit/>
+          </a:bodyPr>
           <a:lstStyle/>
           <a:p>
             <a:pPr indent="0" marL="0">
@@ -8840,7 +8972,9 @@
           <a:ln/>
         </p:spPr>
         <p:txBody>
-          <a:bodyPr wrap="square" lIns="0" tIns="0" rIns="0" bIns="0" rtlCol="0" anchor="ctr"/>
+          <a:bodyPr wrap="square" lIns="0" tIns="0" rIns="0" bIns="0" rtlCol="0" anchor="ctr">
+            <a:normAutofit/>
+          </a:bodyPr>
           <a:lstStyle/>
           <a:p>
             <a:pPr indent="0" marL="0">
@@ -8908,7 +9042,9 @@
           <a:ln/>
         </p:spPr>
         <p:txBody>
-          <a:bodyPr wrap="square" lIns="0" tIns="0" rIns="0" bIns="0" rtlCol="0" anchor="ctr"/>
+          <a:bodyPr wrap="square" lIns="0" tIns="0" rIns="0" bIns="0" rtlCol="0" anchor="ctr">
+            <a:normAutofit/>
+          </a:bodyPr>
           <a:lstStyle/>
           <a:p>
             <a:pPr indent="0" marL="0">
@@ -8947,7 +9083,9 @@
           <a:ln/>
         </p:spPr>
         <p:txBody>
-          <a:bodyPr wrap="square" lIns="0" tIns="0" rIns="0" bIns="0" rtlCol="0" anchor="ctr"/>
+          <a:bodyPr wrap="square" lIns="0" tIns="0" rIns="0" bIns="0" rtlCol="0" anchor="ctr">
+            <a:normAutofit/>
+          </a:bodyPr>
           <a:lstStyle/>
           <a:p>
             <a:pPr indent="0" marL="0">
@@ -8986,7 +9124,9 @@
           <a:ln/>
         </p:spPr>
         <p:txBody>
-          <a:bodyPr wrap="square" lIns="0" tIns="0" rIns="0" bIns="0" rtlCol="0" anchor="ctr"/>
+          <a:bodyPr wrap="square" lIns="0" tIns="0" rIns="0" bIns="0" rtlCol="0" anchor="ctr">
+            <a:normAutofit/>
+          </a:bodyPr>
           <a:lstStyle/>
           <a:p>
             <a:pPr indent="0" marL="0">
@@ -9054,7 +9194,9 @@
           <a:ln/>
         </p:spPr>
         <p:txBody>
-          <a:bodyPr wrap="square" lIns="0" tIns="0" rIns="0" bIns="0" rtlCol="0" anchor="ctr"/>
+          <a:bodyPr wrap="square" lIns="0" tIns="0" rIns="0" bIns="0" rtlCol="0" anchor="ctr">
+            <a:normAutofit/>
+          </a:bodyPr>
           <a:lstStyle/>
           <a:p>
             <a:pPr indent="0" marL="0">
@@ -9093,7 +9235,9 @@
           <a:ln/>
         </p:spPr>
         <p:txBody>
-          <a:bodyPr wrap="square" lIns="0" tIns="0" rIns="0" bIns="0" rtlCol="0" anchor="ctr"/>
+          <a:bodyPr wrap="square" lIns="0" tIns="0" rIns="0" bIns="0" rtlCol="0" anchor="ctr">
+            <a:normAutofit/>
+          </a:bodyPr>
           <a:lstStyle/>
           <a:p>
             <a:pPr indent="0" marL="0">
@@ -9132,7 +9276,9 @@
           <a:ln/>
         </p:spPr>
         <p:txBody>
-          <a:bodyPr wrap="square" lIns="0" tIns="0" rIns="0" bIns="0" rtlCol="0" anchor="ctr"/>
+          <a:bodyPr wrap="square" lIns="0" tIns="0" rIns="0" bIns="0" rtlCol="0" anchor="ctr">
+            <a:normAutofit/>
+          </a:bodyPr>
           <a:lstStyle/>
           <a:p>
             <a:pPr indent="0" marL="0">
@@ -9200,7 +9346,9 @@
           <a:ln/>
         </p:spPr>
         <p:txBody>
-          <a:bodyPr wrap="square" lIns="0" tIns="0" rIns="0" bIns="0" rtlCol="0" anchor="ctr"/>
+          <a:bodyPr wrap="square" lIns="0" tIns="0" rIns="0" bIns="0" rtlCol="0" anchor="ctr">
+            <a:normAutofit/>
+          </a:bodyPr>
           <a:lstStyle/>
           <a:p>
             <a:pPr indent="0" marL="0">
@@ -9239,7 +9387,9 @@
           <a:ln/>
         </p:spPr>
         <p:txBody>
-          <a:bodyPr wrap="square" lIns="0" tIns="0" rIns="0" bIns="0" rtlCol="0" anchor="ctr"/>
+          <a:bodyPr wrap="square" lIns="0" tIns="0" rIns="0" bIns="0" rtlCol="0" anchor="ctr">
+            <a:normAutofit/>
+          </a:bodyPr>
           <a:lstStyle/>
           <a:p>
             <a:pPr indent="0" marL="0">
@@ -9278,7 +9428,9 @@
           <a:ln/>
         </p:spPr>
         <p:txBody>
-          <a:bodyPr wrap="square" lIns="0" tIns="0" rIns="0" bIns="0" rtlCol="0" anchor="ctr"/>
+          <a:bodyPr wrap="square" lIns="0" tIns="0" rIns="0" bIns="0" rtlCol="0" anchor="ctr">
+            <a:normAutofit/>
+          </a:bodyPr>
           <a:lstStyle/>
           <a:p>
             <a:pPr indent="0" marL="0">
@@ -9346,7 +9498,9 @@
           <a:ln/>
         </p:spPr>
         <p:txBody>
-          <a:bodyPr wrap="square" lIns="0" tIns="0" rIns="0" bIns="0" rtlCol="0" anchor="ctr"/>
+          <a:bodyPr wrap="square" lIns="0" tIns="0" rIns="0" bIns="0" rtlCol="0" anchor="ctr">
+            <a:normAutofit/>
+          </a:bodyPr>
           <a:lstStyle/>
           <a:p>
             <a:pPr indent="0" marL="0">
@@ -9385,7 +9539,9 @@
           <a:ln/>
         </p:spPr>
         <p:txBody>
-          <a:bodyPr wrap="square" lIns="0" tIns="0" rIns="0" bIns="0" rtlCol="0" anchor="ctr"/>
+          <a:bodyPr wrap="square" lIns="0" tIns="0" rIns="0" bIns="0" rtlCol="0" anchor="ctr">
+            <a:normAutofit/>
+          </a:bodyPr>
           <a:lstStyle/>
           <a:p>
             <a:pPr indent="0" marL="0">
@@ -9424,7 +9580,9 @@
           <a:ln/>
         </p:spPr>
         <p:txBody>
-          <a:bodyPr wrap="square" lIns="0" tIns="0" rIns="0" bIns="0" rtlCol="0" anchor="ctr"/>
+          <a:bodyPr wrap="square" lIns="0" tIns="0" rIns="0" bIns="0" rtlCol="0" anchor="ctr">
+            <a:normAutofit/>
+          </a:bodyPr>
           <a:lstStyle/>
           <a:p>
             <a:pPr indent="0" marL="0">
@@ -9463,7 +9621,9 @@
           <a:ln/>
         </p:spPr>
         <p:txBody>
-          <a:bodyPr wrap="square" lIns="0" tIns="0" rIns="0" bIns="0" rtlCol="0" anchor="ctr"/>
+          <a:bodyPr wrap="square" lIns="0" tIns="0" rIns="0" bIns="0" rtlCol="0" anchor="ctr">
+            <a:normAutofit/>
+          </a:bodyPr>
           <a:lstStyle/>
           <a:p>
             <a:pPr indent="0" marL="0">
@@ -9554,7 +9714,9 @@
           <a:ln/>
         </p:spPr>
         <p:txBody>
-          <a:bodyPr wrap="square" lIns="0" tIns="0" rIns="0" bIns="0" rtlCol="0" anchor="ctr"/>
+          <a:bodyPr wrap="square" lIns="0" tIns="0" rIns="0" bIns="0" rtlCol="0" anchor="ctr">
+            <a:normAutofit/>
+          </a:bodyPr>
           <a:lstStyle/>
           <a:p>
             <a:pPr indent="0" marL="0">
@@ -9593,7 +9755,9 @@
           <a:ln/>
         </p:spPr>
         <p:txBody>
-          <a:bodyPr wrap="square" lIns="0" tIns="0" rIns="0" bIns="0" rtlCol="0" anchor="ctr"/>
+          <a:bodyPr wrap="square" lIns="0" tIns="0" rIns="0" bIns="0" rtlCol="0" anchor="ctr">
+            <a:normAutofit/>
+          </a:bodyPr>
           <a:lstStyle/>
           <a:p>
             <a:pPr indent="0" marL="0">
@@ -9632,7 +9796,9 @@
           <a:ln/>
         </p:spPr>
         <p:txBody>
-          <a:bodyPr wrap="square" lIns="0" tIns="0" rIns="0" bIns="0" rtlCol="0" anchor="ctr"/>
+          <a:bodyPr wrap="square" lIns="0" tIns="0" rIns="0" bIns="0" rtlCol="0" anchor="ctr">
+            <a:normAutofit/>
+          </a:bodyPr>
           <a:lstStyle/>
           <a:p>
             <a:pPr algn="r" indent="0" marL="0">
@@ -9671,7 +9837,9 @@
           <a:ln/>
         </p:spPr>
         <p:txBody>
-          <a:bodyPr wrap="square" lIns="0" tIns="0" rIns="0" bIns="0" rtlCol="0" anchor="ctr"/>
+          <a:bodyPr wrap="square" lIns="0" tIns="0" rIns="0" bIns="0" rtlCol="0" anchor="ctr">
+            <a:normAutofit/>
+          </a:bodyPr>
           <a:lstStyle/>
           <a:p>
             <a:pPr indent="0" marL="0">
@@ -9686,7 +9854,7 @@
                 <a:ea typeface="微软雅黑" pitchFamily="34" charset="-122"/>
                 <a:cs typeface="微软雅黑" pitchFamily="34" charset="-120"/>
               </a:rPr>
-              <a:t>帮扶管理信息系统 v1.12.10</a:t>
+              <a:t>帮扶管理信息系统 v1.12.11</a:t>
             </a:r>
             <a:endParaRPr lang="en-US" sz="1050" dirty="0"/>
           </a:p>
@@ -9739,7 +9907,9 @@
           <a:ln/>
         </p:spPr>
         <p:txBody>
-          <a:bodyPr wrap="square" lIns="0" tIns="0" rIns="0" bIns="0" rtlCol="0" anchor="ctr"/>
+          <a:bodyPr wrap="square" lIns="0" tIns="0" rIns="0" bIns="0" rtlCol="0" anchor="ctr">
+            <a:normAutofit/>
+          </a:bodyPr>
           <a:lstStyle/>
           <a:p>
             <a:pPr indent="0" marL="0">
@@ -9778,7 +9948,9 @@
           <a:ln/>
         </p:spPr>
         <p:txBody>
-          <a:bodyPr wrap="square" lIns="0" tIns="0" rIns="0" bIns="0" rtlCol="0" anchor="t"/>
+          <a:bodyPr wrap="square" lIns="0" tIns="0" rIns="0" bIns="0" rtlCol="0" anchor="t">
+            <a:normAutofit/>
+          </a:bodyPr>
           <a:lstStyle/>
           <a:p>
             <a:pPr algn="l" marL="152400" indent="-152400">
@@ -9934,7 +10106,9 @@
           <a:ln/>
         </p:spPr>
         <p:txBody>
-          <a:bodyPr wrap="square" lIns="0" tIns="0" rIns="0" bIns="0" rtlCol="0" anchor="ctr"/>
+          <a:bodyPr wrap="square" lIns="0" tIns="0" rIns="0" bIns="0" rtlCol="0" anchor="ctr">
+            <a:normAutofit/>
+          </a:bodyPr>
           <a:lstStyle/>
           <a:p>
             <a:pPr indent="0" marL="0">
@@ -9973,7 +10147,9 @@
           <a:ln/>
         </p:spPr>
         <p:txBody>
-          <a:bodyPr wrap="square" lIns="0" tIns="0" rIns="0" bIns="0" rtlCol="0" anchor="t"/>
+          <a:bodyPr wrap="square" lIns="0" tIns="0" rIns="0" bIns="0" rtlCol="0" anchor="t">
+            <a:normAutofit/>
+          </a:bodyPr>
           <a:lstStyle/>
           <a:p>
             <a:pPr algn="l" marL="152400" indent="-152400">
@@ -10152,7 +10328,9 @@
           <a:ln/>
         </p:spPr>
         <p:txBody>
-          <a:bodyPr wrap="square" lIns="0" tIns="0" rIns="0" bIns="0" rtlCol="0" anchor="ctr"/>
+          <a:bodyPr wrap="square" lIns="0" tIns="0" rIns="0" bIns="0" rtlCol="0" anchor="ctr">
+            <a:normAutofit/>
+          </a:bodyPr>
           <a:lstStyle/>
           <a:p>
             <a:pPr indent="0" marL="0">
@@ -10191,7 +10369,9 @@
           <a:ln/>
         </p:spPr>
         <p:txBody>
-          <a:bodyPr wrap="square" lIns="0" tIns="0" rIns="0" bIns="0" rtlCol="0" anchor="ctr"/>
+          <a:bodyPr wrap="square" lIns="0" tIns="0" rIns="0" bIns="0" rtlCol="0" anchor="ctr">
+            <a:normAutofit/>
+          </a:bodyPr>
           <a:lstStyle/>
           <a:p>
             <a:pPr indent="0" marL="0">
@@ -10230,7 +10410,9 @@
           <a:ln/>
         </p:spPr>
         <p:txBody>
-          <a:bodyPr wrap="square" lIns="0" tIns="0" rIns="0" bIns="0" rtlCol="0" anchor="ctr"/>
+          <a:bodyPr wrap="square" lIns="0" tIns="0" rIns="0" bIns="0" rtlCol="0" anchor="ctr">
+            <a:normAutofit/>
+          </a:bodyPr>
           <a:lstStyle/>
           <a:p>
             <a:pPr algn="r" indent="0" marL="0">
@@ -10269,7 +10451,9 @@
           <a:ln/>
         </p:spPr>
         <p:txBody>
-          <a:bodyPr wrap="square" lIns="0" tIns="0" rIns="0" bIns="0" rtlCol="0" anchor="ctr"/>
+          <a:bodyPr wrap="square" lIns="0" tIns="0" rIns="0" bIns="0" rtlCol="0" anchor="ctr">
+            <a:normAutofit/>
+          </a:bodyPr>
           <a:lstStyle/>
           <a:p>
             <a:pPr indent="0" marL="0">
@@ -10284,7 +10468,7 @@
                 <a:ea typeface="微软雅黑" pitchFamily="34" charset="-122"/>
                 <a:cs typeface="微软雅黑" pitchFamily="34" charset="-120"/>
               </a:rPr>
-              <a:t>帮扶管理信息系统 v1.12.10</a:t>
+              <a:t>帮扶管理信息系统 v1.12.11</a:t>
             </a:r>
             <a:endParaRPr lang="en-US" sz="1050" dirty="0"/>
           </a:p>
@@ -10330,7 +10514,9 @@
           <a:ln/>
         </p:spPr>
         <p:txBody>
-          <a:bodyPr wrap="square" lIns="0" tIns="0" rIns="0" bIns="0" rtlCol="0" anchor="ctr"/>
+          <a:bodyPr wrap="square" lIns="0" tIns="0" rIns="0" bIns="0" rtlCol="0" anchor="ctr">
+            <a:normAutofit/>
+          </a:bodyPr>
           <a:lstStyle/>
           <a:p>
             <a:pPr algn="ctr" indent="0" marL="0">
@@ -10391,7 +10577,9 @@
           <a:ln/>
         </p:spPr>
         <p:txBody>
-          <a:bodyPr wrap="square" lIns="0" tIns="0" rIns="0" bIns="0" rtlCol="0" anchor="ctr"/>
+          <a:bodyPr wrap="square" lIns="0" tIns="0" rIns="0" bIns="0" rtlCol="0" anchor="ctr">
+            <a:normAutofit/>
+          </a:bodyPr>
           <a:lstStyle/>
           <a:p>
             <a:pPr algn="ctr" indent="0" marL="0">
@@ -10452,7 +10640,9 @@
           <a:ln/>
         </p:spPr>
         <p:txBody>
-          <a:bodyPr wrap="square" lIns="0" tIns="0" rIns="0" bIns="0" rtlCol="0" anchor="ctr"/>
+          <a:bodyPr wrap="square" lIns="0" tIns="0" rIns="0" bIns="0" rtlCol="0" anchor="ctr">
+            <a:normAutofit/>
+          </a:bodyPr>
           <a:lstStyle/>
           <a:p>
             <a:pPr algn="ctr" indent="0" marL="0">
@@ -10513,7 +10703,9 @@
           <a:ln/>
         </p:spPr>
         <p:txBody>
-          <a:bodyPr wrap="square" lIns="0" tIns="0" rIns="0" bIns="0" rtlCol="0" anchor="ctr"/>
+          <a:bodyPr wrap="square" lIns="0" tIns="0" rIns="0" bIns="0" rtlCol="0" anchor="ctr">
+            <a:normAutofit/>
+          </a:bodyPr>
           <a:lstStyle/>
           <a:p>
             <a:pPr algn="ctr" indent="0" marL="0">
@@ -10574,7 +10766,9 @@
           <a:ln/>
         </p:spPr>
         <p:txBody>
-          <a:bodyPr wrap="square" lIns="0" tIns="0" rIns="0" bIns="0" rtlCol="0" anchor="ctr"/>
+          <a:bodyPr wrap="square" lIns="0" tIns="0" rIns="0" bIns="0" rtlCol="0" anchor="ctr">
+            <a:normAutofit/>
+          </a:bodyPr>
           <a:lstStyle/>
           <a:p>
             <a:pPr algn="ctr" indent="0" marL="0">
@@ -10635,7 +10829,9 @@
           <a:ln/>
         </p:spPr>
         <p:txBody>
-          <a:bodyPr wrap="square" lIns="0" tIns="0" rIns="0" bIns="0" rtlCol="0" anchor="ctr"/>
+          <a:bodyPr wrap="square" lIns="0" tIns="0" rIns="0" bIns="0" rtlCol="0" anchor="ctr">
+            <a:normAutofit/>
+          </a:bodyPr>
           <a:lstStyle/>
           <a:p>
             <a:pPr algn="ctr" indent="0" marL="0">
@@ -10696,7 +10892,9 @@
           <a:ln/>
         </p:spPr>
         <p:txBody>
-          <a:bodyPr wrap="square" lIns="0" tIns="0" rIns="0" bIns="0" rtlCol="0" anchor="ctr"/>
+          <a:bodyPr wrap="square" lIns="0" tIns="0" rIns="0" bIns="0" rtlCol="0" anchor="ctr">
+            <a:normAutofit/>
+          </a:bodyPr>
           <a:lstStyle/>
           <a:p>
             <a:pPr algn="ctr" indent="0" marL="0">
@@ -10757,7 +10955,9 @@
           <a:ln/>
         </p:spPr>
         <p:txBody>
-          <a:bodyPr wrap="square" lIns="0" tIns="0" rIns="0" bIns="0" rtlCol="0" anchor="ctr"/>
+          <a:bodyPr wrap="square" lIns="0" tIns="0" rIns="0" bIns="0" rtlCol="0" anchor="ctr">
+            <a:normAutofit/>
+          </a:bodyPr>
           <a:lstStyle/>
           <a:p>
             <a:pPr algn="ctr" indent="0" marL="0">
@@ -10796,7 +10996,9 @@
           <a:ln/>
         </p:spPr>
         <p:txBody>
-          <a:bodyPr wrap="square" lIns="0" tIns="0" rIns="0" bIns="0" rtlCol="0" anchor="t"/>
+          <a:bodyPr wrap="square" lIns="0" tIns="0" rIns="0" bIns="0" rtlCol="0" anchor="t">
+            <a:normAutofit/>
+          </a:bodyPr>
           <a:lstStyle/>
           <a:p>
             <a:pPr algn="l" marL="152400" indent="-152400">
@@ -10878,7 +11080,7 @@
                 <a:ea typeface="微软雅黑" pitchFamily="34" charset="-122"/>
                 <a:cs typeface="微软雅黑" pitchFamily="34" charset="-120"/>
               </a:rPr>
-              <a:t>导出：整村档案导出（脱敏可选），支撑向上汇报</a:t>
+              <a:t>年度板块数据支持 Excel 模板按板块导入（工作表名需与板块对应）；整村档案可导出（脱敏可选），支撑向上汇报</a:t>
             </a:r>
             <a:endParaRPr lang="en-US" sz="1350" dirty="0"/>
           </a:p>
@@ -10954,7 +11156,9 @@
           <a:ln/>
         </p:spPr>
         <p:txBody>
-          <a:bodyPr wrap="square" lIns="0" tIns="0" rIns="0" bIns="0" rtlCol="0" anchor="ctr"/>
+          <a:bodyPr wrap="square" lIns="0" tIns="0" rIns="0" bIns="0" rtlCol="0" anchor="ctr">
+            <a:normAutofit/>
+          </a:bodyPr>
           <a:lstStyle/>
           <a:p>
             <a:pPr indent="0" marL="0">
@@ -10993,7 +11197,9 @@
           <a:ln/>
         </p:spPr>
         <p:txBody>
-          <a:bodyPr wrap="square" lIns="0" tIns="0" rIns="0" bIns="0" rtlCol="0" anchor="ctr"/>
+          <a:bodyPr wrap="square" lIns="0" tIns="0" rIns="0" bIns="0" rtlCol="0" anchor="ctr">
+            <a:normAutofit/>
+          </a:bodyPr>
           <a:lstStyle/>
           <a:p>
             <a:pPr indent="0" marL="0">
@@ -11032,7 +11238,9 @@
           <a:ln/>
         </p:spPr>
         <p:txBody>
-          <a:bodyPr wrap="square" lIns="0" tIns="0" rIns="0" bIns="0" rtlCol="0" anchor="ctr"/>
+          <a:bodyPr wrap="square" lIns="0" tIns="0" rIns="0" bIns="0" rtlCol="0" anchor="ctr">
+            <a:normAutofit/>
+          </a:bodyPr>
           <a:lstStyle/>
           <a:p>
             <a:pPr algn="r" indent="0" marL="0">
@@ -11071,7 +11279,9 @@
           <a:ln/>
         </p:spPr>
         <p:txBody>
-          <a:bodyPr wrap="square" lIns="0" tIns="0" rIns="0" bIns="0" rtlCol="0" anchor="ctr"/>
+          <a:bodyPr wrap="square" lIns="0" tIns="0" rIns="0" bIns="0" rtlCol="0" anchor="ctr">
+            <a:normAutofit/>
+          </a:bodyPr>
           <a:lstStyle/>
           <a:p>
             <a:pPr indent="0" marL="0">
@@ -11086,7 +11296,7 @@
                 <a:ea typeface="微软雅黑" pitchFamily="34" charset="-122"/>
                 <a:cs typeface="微软雅黑" pitchFamily="34" charset="-120"/>
               </a:rPr>
-              <a:t>帮扶管理信息系统 v1.12.10</a:t>
+              <a:t>帮扶管理信息系统 v1.12.11</a:t>
             </a:r>
             <a:endParaRPr lang="en-US" sz="1050" dirty="0"/>
           </a:p>
@@ -11130,7 +11340,9 @@
           <a:ln/>
         </p:spPr>
         <p:txBody>
-          <a:bodyPr wrap="square" lIns="0" tIns="0" rIns="0" bIns="0" rtlCol="0" anchor="ctr"/>
+          <a:bodyPr wrap="square" lIns="0" tIns="0" rIns="0" bIns="0" rtlCol="0" anchor="ctr">
+            <a:normAutofit/>
+          </a:bodyPr>
           <a:lstStyle/>
           <a:p>
             <a:pPr algn="ctr" indent="0" marL="0">
@@ -11189,7 +11401,9 @@
           <a:ln/>
         </p:spPr>
         <p:txBody>
-          <a:bodyPr wrap="square" lIns="0" tIns="0" rIns="0" bIns="0" rtlCol="0" anchor="ctr"/>
+          <a:bodyPr wrap="square" lIns="0" tIns="0" rIns="0" bIns="0" rtlCol="0" anchor="ctr">
+            <a:normAutofit/>
+          </a:bodyPr>
           <a:lstStyle/>
           <a:p>
             <a:pPr algn="ctr" indent="0" marL="0">
@@ -11248,7 +11462,9 @@
           <a:ln/>
         </p:spPr>
         <p:txBody>
-          <a:bodyPr wrap="square" lIns="0" tIns="0" rIns="0" bIns="0" rtlCol="0" anchor="ctr"/>
+          <a:bodyPr wrap="square" lIns="0" tIns="0" rIns="0" bIns="0" rtlCol="0" anchor="ctr">
+            <a:normAutofit/>
+          </a:bodyPr>
           <a:lstStyle/>
           <a:p>
             <a:pPr algn="ctr" indent="0" marL="0">
@@ -11307,7 +11523,9 @@
           <a:ln/>
         </p:spPr>
         <p:txBody>
-          <a:bodyPr wrap="square" lIns="0" tIns="0" rIns="0" bIns="0" rtlCol="0" anchor="ctr"/>
+          <a:bodyPr wrap="square" lIns="0" tIns="0" rIns="0" bIns="0" rtlCol="0" anchor="ctr">
+            <a:normAutofit/>
+          </a:bodyPr>
           <a:lstStyle/>
           <a:p>
             <a:pPr algn="ctr" indent="0" marL="0">
@@ -11366,7 +11584,9 @@
           <a:ln/>
         </p:spPr>
         <p:txBody>
-          <a:bodyPr wrap="square" lIns="0" tIns="0" rIns="0" bIns="0" rtlCol="0" anchor="ctr"/>
+          <a:bodyPr wrap="square" lIns="0" tIns="0" rIns="0" bIns="0" rtlCol="0" anchor="ctr">
+            <a:normAutofit/>
+          </a:bodyPr>
           <a:lstStyle/>
           <a:p>
             <a:pPr algn="ctr" indent="0" marL="0">
@@ -11425,7 +11645,9 @@
           <a:ln/>
         </p:spPr>
         <p:txBody>
-          <a:bodyPr wrap="square" lIns="0" tIns="0" rIns="0" bIns="0" rtlCol="0" anchor="ctr"/>
+          <a:bodyPr wrap="square" lIns="0" tIns="0" rIns="0" bIns="0" rtlCol="0" anchor="ctr">
+            <a:normAutofit/>
+          </a:bodyPr>
           <a:lstStyle/>
           <a:p>
             <a:pPr algn="ctr" indent="0" marL="0">
@@ -11464,7 +11686,9 @@
           <a:ln/>
         </p:spPr>
         <p:txBody>
-          <a:bodyPr wrap="square" lIns="0" tIns="0" rIns="0" bIns="0" rtlCol="0" anchor="t"/>
+          <a:bodyPr wrap="square" lIns="0" tIns="0" rIns="0" bIns="0" rtlCol="0" anchor="t">
+            <a:normAutofit/>
+          </a:bodyPr>
           <a:lstStyle/>
           <a:p>
             <a:pPr algn="l" marL="152400" indent="-152400">
@@ -11643,7 +11867,9 @@
           <a:ln/>
         </p:spPr>
         <p:txBody>
-          <a:bodyPr wrap="square" lIns="0" tIns="0" rIns="0" bIns="0" rtlCol="0" anchor="ctr"/>
+          <a:bodyPr wrap="square" lIns="0" tIns="0" rIns="0" bIns="0" rtlCol="0" anchor="ctr">
+            <a:normAutofit/>
+          </a:bodyPr>
           <a:lstStyle/>
           <a:p>
             <a:pPr indent="0" marL="0">
@@ -11682,7 +11908,9 @@
           <a:ln/>
         </p:spPr>
         <p:txBody>
-          <a:bodyPr wrap="square" lIns="0" tIns="0" rIns="0" bIns="0" rtlCol="0" anchor="ctr"/>
+          <a:bodyPr wrap="square" lIns="0" tIns="0" rIns="0" bIns="0" rtlCol="0" anchor="ctr">
+            <a:normAutofit/>
+          </a:bodyPr>
           <a:lstStyle/>
           <a:p>
             <a:pPr indent="0" marL="0">
@@ -11721,7 +11949,9 @@
           <a:ln/>
         </p:spPr>
         <p:txBody>
-          <a:bodyPr wrap="square" lIns="0" tIns="0" rIns="0" bIns="0" rtlCol="0" anchor="ctr"/>
+          <a:bodyPr wrap="square" lIns="0" tIns="0" rIns="0" bIns="0" rtlCol="0" anchor="ctr">
+            <a:normAutofit/>
+          </a:bodyPr>
           <a:lstStyle/>
           <a:p>
             <a:pPr algn="r" indent="0" marL="0">
@@ -11760,7 +11990,9 @@
           <a:ln/>
         </p:spPr>
         <p:txBody>
-          <a:bodyPr wrap="square" lIns="0" tIns="0" rIns="0" bIns="0" rtlCol="0" anchor="ctr"/>
+          <a:bodyPr wrap="square" lIns="0" tIns="0" rIns="0" bIns="0" rtlCol="0" anchor="ctr">
+            <a:normAutofit/>
+          </a:bodyPr>
           <a:lstStyle/>
           <a:p>
             <a:pPr indent="0" marL="0">
@@ -11775,7 +12007,7 @@
                 <a:ea typeface="微软雅黑" pitchFamily="34" charset="-122"/>
                 <a:cs typeface="微软雅黑" pitchFamily="34" charset="-120"/>
               </a:rPr>
-              <a:t>帮扶管理信息系统 v1.12.10</a:t>
+              <a:t>帮扶管理信息系统 v1.12.11</a:t>
             </a:r>
             <a:endParaRPr lang="en-US" sz="1050" dirty="0"/>
           </a:p>
@@ -11819,7 +12051,9 @@
           <a:ln/>
         </p:spPr>
         <p:txBody>
-          <a:bodyPr wrap="square" lIns="0" tIns="0" rIns="0" bIns="0" rtlCol="0" anchor="ctr"/>
+          <a:bodyPr wrap="square" lIns="0" tIns="0" rIns="0" bIns="0" rtlCol="0" anchor="ctr">
+            <a:normAutofit/>
+          </a:bodyPr>
           <a:lstStyle/>
           <a:p>
             <a:pPr algn="ctr" indent="0" marL="0">
@@ -11858,7 +12092,9 @@
           <a:ln/>
         </p:spPr>
         <p:txBody>
-          <a:bodyPr wrap="square" lIns="0" tIns="0" rIns="0" bIns="0" rtlCol="0" anchor="ctr"/>
+          <a:bodyPr wrap="square" lIns="0" tIns="0" rIns="0" bIns="0" rtlCol="0" anchor="ctr">
+            <a:normAutofit/>
+          </a:bodyPr>
           <a:lstStyle/>
           <a:p>
             <a:pPr algn="ctr" indent="0" marL="0">
@@ -11941,7 +12177,9 @@
           <a:ln/>
         </p:spPr>
         <p:txBody>
-          <a:bodyPr wrap="square" lIns="0" tIns="0" rIns="0" bIns="0" rtlCol="0" anchor="ctr"/>
+          <a:bodyPr wrap="square" lIns="0" tIns="0" rIns="0" bIns="0" rtlCol="0" anchor="ctr">
+            <a:normAutofit/>
+          </a:bodyPr>
           <a:lstStyle/>
           <a:p>
             <a:pPr algn="ctr" indent="0" marL="0">
@@ -11980,7 +12218,9 @@
           <a:ln/>
         </p:spPr>
         <p:txBody>
-          <a:bodyPr wrap="square" lIns="0" tIns="0" rIns="0" bIns="0" rtlCol="0" anchor="ctr"/>
+          <a:bodyPr wrap="square" lIns="0" tIns="0" rIns="0" bIns="0" rtlCol="0" anchor="ctr">
+            <a:normAutofit/>
+          </a:bodyPr>
           <a:lstStyle/>
           <a:p>
             <a:pPr algn="ctr" indent="0" marL="0">
@@ -12063,7 +12303,9 @@
           <a:ln/>
         </p:spPr>
         <p:txBody>
-          <a:bodyPr wrap="square" lIns="0" tIns="0" rIns="0" bIns="0" rtlCol="0" anchor="ctr"/>
+          <a:bodyPr wrap="square" lIns="0" tIns="0" rIns="0" bIns="0" rtlCol="0" anchor="ctr">
+            <a:normAutofit/>
+          </a:bodyPr>
           <a:lstStyle/>
           <a:p>
             <a:pPr algn="ctr" indent="0" marL="0">
@@ -12102,7 +12344,9 @@
           <a:ln/>
         </p:spPr>
         <p:txBody>
-          <a:bodyPr wrap="square" lIns="0" tIns="0" rIns="0" bIns="0" rtlCol="0" anchor="ctr"/>
+          <a:bodyPr wrap="square" lIns="0" tIns="0" rIns="0" bIns="0" rtlCol="0" anchor="ctr">
+            <a:normAutofit/>
+          </a:bodyPr>
           <a:lstStyle/>
           <a:p>
             <a:pPr algn="ctr" indent="0" marL="0">
@@ -12185,7 +12429,9 @@
           <a:ln/>
         </p:spPr>
         <p:txBody>
-          <a:bodyPr wrap="square" lIns="0" tIns="0" rIns="0" bIns="0" rtlCol="0" anchor="ctr"/>
+          <a:bodyPr wrap="square" lIns="0" tIns="0" rIns="0" bIns="0" rtlCol="0" anchor="ctr">
+            <a:normAutofit/>
+          </a:bodyPr>
           <a:lstStyle/>
           <a:p>
             <a:pPr algn="ctr" indent="0" marL="0">
@@ -12224,7 +12470,9 @@
           <a:ln/>
         </p:spPr>
         <p:txBody>
-          <a:bodyPr wrap="square" lIns="0" tIns="0" rIns="0" bIns="0" rtlCol="0" anchor="ctr"/>
+          <a:bodyPr wrap="square" lIns="0" tIns="0" rIns="0" bIns="0" rtlCol="0" anchor="ctr">
+            <a:normAutofit/>
+          </a:bodyPr>
           <a:lstStyle/>
           <a:p>
             <a:pPr algn="ctr" indent="0" marL="0">
@@ -12307,7 +12555,9 @@
           <a:ln/>
         </p:spPr>
         <p:txBody>
-          <a:bodyPr wrap="square" lIns="0" tIns="0" rIns="0" bIns="0" rtlCol="0" anchor="ctr"/>
+          <a:bodyPr wrap="square" lIns="0" tIns="0" rIns="0" bIns="0" rtlCol="0" anchor="ctr">
+            <a:normAutofit/>
+          </a:bodyPr>
           <a:lstStyle/>
           <a:p>
             <a:pPr algn="ctr" indent="0" marL="0">
@@ -12346,7 +12596,9 @@
           <a:ln/>
         </p:spPr>
         <p:txBody>
-          <a:bodyPr wrap="square" lIns="0" tIns="0" rIns="0" bIns="0" rtlCol="0" anchor="ctr"/>
+          <a:bodyPr wrap="square" lIns="0" tIns="0" rIns="0" bIns="0" rtlCol="0" anchor="ctr">
+            <a:normAutofit/>
+          </a:bodyPr>
           <a:lstStyle/>
           <a:p>
             <a:pPr algn="ctr" indent="0" marL="0">
@@ -12429,7 +12681,9 @@
           <a:ln/>
         </p:spPr>
         <p:txBody>
-          <a:bodyPr wrap="square" lIns="0" tIns="0" rIns="0" bIns="0" rtlCol="0" anchor="ctr"/>
+          <a:bodyPr wrap="square" lIns="0" tIns="0" rIns="0" bIns="0" rtlCol="0" anchor="ctr">
+            <a:normAutofit/>
+          </a:bodyPr>
           <a:lstStyle/>
           <a:p>
             <a:pPr algn="ctr" indent="0" marL="0">
@@ -12468,7 +12722,9 @@
           <a:ln/>
         </p:spPr>
         <p:txBody>
-          <a:bodyPr wrap="square" lIns="0" tIns="0" rIns="0" bIns="0" rtlCol="0" anchor="ctr"/>
+          <a:bodyPr wrap="square" lIns="0" tIns="0" rIns="0" bIns="0" rtlCol="0" anchor="ctr">
+            <a:normAutofit/>
+          </a:bodyPr>
           <a:lstStyle/>
           <a:p>
             <a:pPr algn="ctr" indent="0" marL="0">
@@ -12551,7 +12807,9 @@
           <a:ln/>
         </p:spPr>
         <p:txBody>
-          <a:bodyPr wrap="square" lIns="0" tIns="0" rIns="0" bIns="0" rtlCol="0" anchor="ctr"/>
+          <a:bodyPr wrap="square" lIns="0" tIns="0" rIns="0" bIns="0" rtlCol="0" anchor="ctr">
+            <a:normAutofit/>
+          </a:bodyPr>
           <a:lstStyle/>
           <a:p>
             <a:pPr algn="ctr" indent="0" marL="0">
@@ -12590,7 +12848,9 @@
           <a:ln/>
         </p:spPr>
         <p:txBody>
-          <a:bodyPr wrap="square" lIns="0" tIns="0" rIns="0" bIns="0" rtlCol="0" anchor="ctr"/>
+          <a:bodyPr wrap="square" lIns="0" tIns="0" rIns="0" bIns="0" rtlCol="0" anchor="ctr">
+            <a:normAutofit/>
+          </a:bodyPr>
           <a:lstStyle/>
           <a:p>
             <a:pPr algn="ctr" indent="0" marL="0">
@@ -12673,7 +12933,9 @@
           <a:ln/>
         </p:spPr>
         <p:txBody>
-          <a:bodyPr wrap="square" lIns="0" tIns="0" rIns="0" bIns="0" rtlCol="0" anchor="ctr"/>
+          <a:bodyPr wrap="square" lIns="0" tIns="0" rIns="0" bIns="0" rtlCol="0" anchor="ctr">
+            <a:normAutofit/>
+          </a:bodyPr>
           <a:lstStyle/>
           <a:p>
             <a:pPr algn="ctr" indent="0" marL="0">
@@ -12712,7 +12974,9 @@
           <a:ln/>
         </p:spPr>
         <p:txBody>
-          <a:bodyPr wrap="square" lIns="0" tIns="0" rIns="0" bIns="0" rtlCol="0" anchor="ctr"/>
+          <a:bodyPr wrap="square" lIns="0" tIns="0" rIns="0" bIns="0" rtlCol="0" anchor="ctr">
+            <a:normAutofit/>
+          </a:bodyPr>
           <a:lstStyle/>
           <a:p>
             <a:pPr algn="ctr" indent="0" marL="0">
@@ -12780,7 +13044,9 @@
           <a:ln/>
         </p:spPr>
         <p:txBody>
-          <a:bodyPr wrap="square" lIns="0" tIns="0" rIns="0" bIns="0" rtlCol="0" anchor="ctr"/>
+          <a:bodyPr wrap="square" lIns="0" tIns="0" rIns="0" bIns="0" rtlCol="0" anchor="ctr">
+            <a:normAutofit/>
+          </a:bodyPr>
           <a:lstStyle/>
           <a:p>
             <a:pPr indent="0" marL="0">
@@ -12819,7 +13085,9 @@
           <a:ln/>
         </p:spPr>
         <p:txBody>
-          <a:bodyPr wrap="square" lIns="0" tIns="0" rIns="0" bIns="0" rtlCol="0" anchor="t"/>
+          <a:bodyPr wrap="square" lIns="0" tIns="0" rIns="0" bIns="0" rtlCol="0" anchor="t">
+            <a:normAutofit/>
+          </a:bodyPr>
           <a:lstStyle/>
           <a:p>
             <a:pPr algn="l" marL="152400" indent="-152400">
@@ -12933,7 +13201,9 @@
           <a:ln/>
         </p:spPr>
         <p:txBody>
-          <a:bodyPr wrap="square" lIns="0" tIns="0" rIns="0" bIns="0" rtlCol="0" anchor="ctr"/>
+          <a:bodyPr wrap="square" lIns="0" tIns="0" rIns="0" bIns="0" rtlCol="0" anchor="ctr">
+            <a:normAutofit/>
+          </a:bodyPr>
           <a:lstStyle/>
           <a:p>
             <a:pPr indent="0" marL="0">
@@ -12972,7 +13242,9 @@
           <a:ln/>
         </p:spPr>
         <p:txBody>
-          <a:bodyPr wrap="square" lIns="0" tIns="0" rIns="0" bIns="0" rtlCol="0" anchor="t"/>
+          <a:bodyPr wrap="square" lIns="0" tIns="0" rIns="0" bIns="0" rtlCol="0" anchor="t">
+            <a:normAutofit/>
+          </a:bodyPr>
           <a:lstStyle/>
           <a:p>
             <a:pPr algn="l" marL="152400" indent="-152400">
@@ -13080,16 +13352,18 @@
         <p:spPr>
           <a:xfrm>
             <a:off x="914400" y="777240"/>
-            <a:ext cx="4572000" cy="822960"/>
-          </a:xfrm>
-          <a:prstGeom prst="rect">
-            <a:avLst/>
-          </a:prstGeom>
-          <a:noFill/>
-          <a:ln/>
-        </p:spPr>
-        <p:txBody>
-          <a:bodyPr wrap="square" lIns="0" tIns="0" rIns="0" bIns="0" rtlCol="0" anchor="ctr"/>
+            <a:ext cx="4572000" cy="834686"/>
+          </a:xfrm>
+          <a:prstGeom prst="rect">
+            <a:avLst/>
+          </a:prstGeom>
+          <a:noFill/>
+          <a:ln/>
+        </p:spPr>
+        <p:txBody>
+          <a:bodyPr wrap="square" lIns="0" tIns="0" rIns="0" bIns="0" rtlCol="0" anchor="ctr">
+            <a:normAutofit/>
+          </a:bodyPr>
           <a:lstStyle/>
           <a:p>
             <a:pPr indent="0" marL="0">
@@ -13128,7 +13402,9 @@
           <a:ln/>
         </p:spPr>
         <p:txBody>
-          <a:bodyPr wrap="square" lIns="0" tIns="0" rIns="0" bIns="0" rtlCol="0" anchor="ctr"/>
+          <a:bodyPr wrap="square" lIns="0" tIns="0" rIns="0" bIns="0" rtlCol="0" anchor="ctr">
+            <a:normAutofit/>
+          </a:bodyPr>
           <a:lstStyle/>
           <a:p>
             <a:pPr indent="0" marL="0">
@@ -13189,7 +13465,9 @@
           <a:ln/>
         </p:spPr>
         <p:txBody>
-          <a:bodyPr wrap="square" lIns="0" tIns="0" rIns="0" bIns="0" rtlCol="0" anchor="ctr"/>
+          <a:bodyPr wrap="square" lIns="0" tIns="0" rIns="0" bIns="0" rtlCol="0" anchor="ctr">
+            <a:normAutofit/>
+          </a:bodyPr>
           <a:lstStyle/>
           <a:p>
             <a:pPr indent="0" marL="0">
@@ -13228,7 +13506,9 @@
           <a:ln/>
         </p:spPr>
         <p:txBody>
-          <a:bodyPr wrap="square" lIns="0" tIns="0" rIns="0" bIns="0" rtlCol="0" anchor="ctr"/>
+          <a:bodyPr wrap="square" lIns="0" tIns="0" rIns="0" bIns="0" rtlCol="0" anchor="ctr">
+            <a:normAutofit/>
+          </a:bodyPr>
           <a:lstStyle/>
           <a:p>
             <a:pPr indent="0" marL="0">
@@ -13267,7 +13547,9 @@
           <a:ln/>
         </p:spPr>
         <p:txBody>
-          <a:bodyPr wrap="square" lIns="0" tIns="0" rIns="0" bIns="0" rtlCol="0" anchor="ctr"/>
+          <a:bodyPr wrap="square" lIns="0" tIns="0" rIns="0" bIns="0" rtlCol="0" anchor="ctr">
+            <a:normAutofit/>
+          </a:bodyPr>
           <a:lstStyle/>
           <a:p>
             <a:pPr indent="0" marL="0">
@@ -13328,7 +13610,9 @@
           <a:ln/>
         </p:spPr>
         <p:txBody>
-          <a:bodyPr wrap="square" lIns="0" tIns="0" rIns="0" bIns="0" rtlCol="0" anchor="ctr"/>
+          <a:bodyPr wrap="square" lIns="0" tIns="0" rIns="0" bIns="0" rtlCol="0" anchor="ctr">
+            <a:normAutofit/>
+          </a:bodyPr>
           <a:lstStyle/>
           <a:p>
             <a:pPr indent="0" marL="0">
@@ -13367,7 +13651,9 @@
           <a:ln/>
         </p:spPr>
         <p:txBody>
-          <a:bodyPr wrap="square" lIns="0" tIns="0" rIns="0" bIns="0" rtlCol="0" anchor="ctr"/>
+          <a:bodyPr wrap="square" lIns="0" tIns="0" rIns="0" bIns="0" rtlCol="0" anchor="ctr">
+            <a:normAutofit/>
+          </a:bodyPr>
           <a:lstStyle/>
           <a:p>
             <a:pPr indent="0" marL="0">
@@ -13406,7 +13692,9 @@
           <a:ln/>
         </p:spPr>
         <p:txBody>
-          <a:bodyPr wrap="square" lIns="0" tIns="0" rIns="0" bIns="0" rtlCol="0" anchor="ctr"/>
+          <a:bodyPr wrap="square" lIns="0" tIns="0" rIns="0" bIns="0" rtlCol="0" anchor="ctr">
+            <a:normAutofit/>
+          </a:bodyPr>
           <a:lstStyle/>
           <a:p>
             <a:pPr indent="0" marL="0">
@@ -13467,7 +13755,9 @@
           <a:ln/>
         </p:spPr>
         <p:txBody>
-          <a:bodyPr wrap="square" lIns="0" tIns="0" rIns="0" bIns="0" rtlCol="0" anchor="ctr"/>
+          <a:bodyPr wrap="square" lIns="0" tIns="0" rIns="0" bIns="0" rtlCol="0" anchor="ctr">
+            <a:normAutofit/>
+          </a:bodyPr>
           <a:lstStyle/>
           <a:p>
             <a:pPr indent="0" marL="0">
@@ -13506,7 +13796,9 @@
           <a:ln/>
         </p:spPr>
         <p:txBody>
-          <a:bodyPr wrap="square" lIns="0" tIns="0" rIns="0" bIns="0" rtlCol="0" anchor="ctr"/>
+          <a:bodyPr wrap="square" lIns="0" tIns="0" rIns="0" bIns="0" rtlCol="0" anchor="ctr">
+            <a:normAutofit/>
+          </a:bodyPr>
           <a:lstStyle/>
           <a:p>
             <a:pPr indent="0" marL="0">
@@ -13545,7 +13837,9 @@
           <a:ln/>
         </p:spPr>
         <p:txBody>
-          <a:bodyPr wrap="square" lIns="0" tIns="0" rIns="0" bIns="0" rtlCol="0" anchor="ctr"/>
+          <a:bodyPr wrap="square" lIns="0" tIns="0" rIns="0" bIns="0" rtlCol="0" anchor="ctr">
+            <a:normAutofit/>
+          </a:bodyPr>
           <a:lstStyle/>
           <a:p>
             <a:pPr indent="0" marL="0">
@@ -13606,7 +13900,9 @@
           <a:ln/>
         </p:spPr>
         <p:txBody>
-          <a:bodyPr wrap="square" lIns="0" tIns="0" rIns="0" bIns="0" rtlCol="0" anchor="ctr"/>
+          <a:bodyPr wrap="square" lIns="0" tIns="0" rIns="0" bIns="0" rtlCol="0" anchor="ctr">
+            <a:normAutofit/>
+          </a:bodyPr>
           <a:lstStyle/>
           <a:p>
             <a:pPr indent="0" marL="0">
@@ -13645,7 +13941,9 @@
           <a:ln/>
         </p:spPr>
         <p:txBody>
-          <a:bodyPr wrap="square" lIns="0" tIns="0" rIns="0" bIns="0" rtlCol="0" anchor="ctr"/>
+          <a:bodyPr wrap="square" lIns="0" tIns="0" rIns="0" bIns="0" rtlCol="0" anchor="ctr">
+            <a:normAutofit/>
+          </a:bodyPr>
           <a:lstStyle/>
           <a:p>
             <a:pPr indent="0" marL="0">
@@ -13684,7 +13982,9 @@
           <a:ln/>
         </p:spPr>
         <p:txBody>
-          <a:bodyPr wrap="square" lIns="0" tIns="0" rIns="0" bIns="0" rtlCol="0" anchor="ctr"/>
+          <a:bodyPr wrap="square" lIns="0" tIns="0" rIns="0" bIns="0" rtlCol="0" anchor="ctr">
+            <a:normAutofit/>
+          </a:bodyPr>
           <a:lstStyle/>
           <a:p>
             <a:pPr indent="0" marL="0">
@@ -13745,7 +14045,9 @@
           <a:ln/>
         </p:spPr>
         <p:txBody>
-          <a:bodyPr wrap="square" lIns="0" tIns="0" rIns="0" bIns="0" rtlCol="0" anchor="ctr"/>
+          <a:bodyPr wrap="square" lIns="0" tIns="0" rIns="0" bIns="0" rtlCol="0" anchor="ctr">
+            <a:normAutofit/>
+          </a:bodyPr>
           <a:lstStyle/>
           <a:p>
             <a:pPr indent="0" marL="0">
@@ -13784,7 +14086,9 @@
           <a:ln/>
         </p:spPr>
         <p:txBody>
-          <a:bodyPr wrap="square" lIns="0" tIns="0" rIns="0" bIns="0" rtlCol="0" anchor="ctr"/>
+          <a:bodyPr wrap="square" lIns="0" tIns="0" rIns="0" bIns="0" rtlCol="0" anchor="ctr">
+            <a:normAutofit/>
+          </a:bodyPr>
           <a:lstStyle/>
           <a:p>
             <a:pPr indent="0" marL="0">
@@ -13823,7 +14127,9 @@
           <a:ln/>
         </p:spPr>
         <p:txBody>
-          <a:bodyPr wrap="square" lIns="0" tIns="0" rIns="0" bIns="0" rtlCol="0" anchor="ctr"/>
+          <a:bodyPr wrap="square" lIns="0" tIns="0" rIns="0" bIns="0" rtlCol="0" anchor="ctr">
+            <a:normAutofit/>
+          </a:bodyPr>
           <a:lstStyle/>
           <a:p>
             <a:pPr indent="0" marL="0">
@@ -13838,7 +14144,7 @@
                 <a:ea typeface="微软雅黑" pitchFamily="34" charset="-122"/>
                 <a:cs typeface="微软雅黑" pitchFamily="34" charset="-120"/>
               </a:rPr>
-              <a:t>17,295 项自动化测试 · CI/CD · 依赖自检</a:t>
+              <a:t>18,203 项自动化测试 · CI/CD · 依赖自检</a:t>
             </a:r>
             <a:endParaRPr lang="en-US" sz="1200" dirty="0"/>
           </a:p>
@@ -13884,7 +14190,9 @@
           <a:ln/>
         </p:spPr>
         <p:txBody>
-          <a:bodyPr wrap="square" lIns="0" tIns="0" rIns="0" bIns="0" rtlCol="0" anchor="ctr"/>
+          <a:bodyPr wrap="square" lIns="0" tIns="0" rIns="0" bIns="0" rtlCol="0" anchor="ctr">
+            <a:normAutofit/>
+          </a:bodyPr>
           <a:lstStyle/>
           <a:p>
             <a:pPr indent="0" marL="0">
@@ -13923,7 +14231,9 @@
           <a:ln/>
         </p:spPr>
         <p:txBody>
-          <a:bodyPr wrap="square" lIns="0" tIns="0" rIns="0" bIns="0" rtlCol="0" anchor="ctr"/>
+          <a:bodyPr wrap="square" lIns="0" tIns="0" rIns="0" bIns="0" rtlCol="0" anchor="ctr">
+            <a:normAutofit/>
+          </a:bodyPr>
           <a:lstStyle/>
           <a:p>
             <a:pPr indent="0" marL="0">
@@ -13962,7 +14272,9 @@
           <a:ln/>
         </p:spPr>
         <p:txBody>
-          <a:bodyPr wrap="square" lIns="0" tIns="0" rIns="0" bIns="0" rtlCol="0" anchor="ctr"/>
+          <a:bodyPr wrap="square" lIns="0" tIns="0" rIns="0" bIns="0" rtlCol="0" anchor="ctr">
+            <a:normAutofit/>
+          </a:bodyPr>
           <a:lstStyle/>
           <a:p>
             <a:pPr indent="0" marL="0">
@@ -14053,7 +14365,9 @@
           <a:ln/>
         </p:spPr>
         <p:txBody>
-          <a:bodyPr wrap="square" lIns="0" tIns="0" rIns="0" bIns="0" rtlCol="0" anchor="ctr"/>
+          <a:bodyPr wrap="square" lIns="0" tIns="0" rIns="0" bIns="0" rtlCol="0" anchor="ctr">
+            <a:normAutofit/>
+          </a:bodyPr>
           <a:lstStyle/>
           <a:p>
             <a:pPr indent="0" marL="0">
@@ -14092,7 +14406,9 @@
           <a:ln/>
         </p:spPr>
         <p:txBody>
-          <a:bodyPr wrap="square" lIns="0" tIns="0" rIns="0" bIns="0" rtlCol="0" anchor="ctr"/>
+          <a:bodyPr wrap="square" lIns="0" tIns="0" rIns="0" bIns="0" rtlCol="0" anchor="ctr">
+            <a:normAutofit/>
+          </a:bodyPr>
           <a:lstStyle/>
           <a:p>
             <a:pPr indent="0" marL="0">
@@ -14131,7 +14447,9 @@
           <a:ln/>
         </p:spPr>
         <p:txBody>
-          <a:bodyPr wrap="square" lIns="0" tIns="0" rIns="0" bIns="0" rtlCol="0" anchor="ctr"/>
+          <a:bodyPr wrap="square" lIns="0" tIns="0" rIns="0" bIns="0" rtlCol="0" anchor="ctr">
+            <a:normAutofit/>
+          </a:bodyPr>
           <a:lstStyle/>
           <a:p>
             <a:pPr algn="r" indent="0" marL="0">
@@ -14170,7 +14488,9 @@
           <a:ln/>
         </p:spPr>
         <p:txBody>
-          <a:bodyPr wrap="square" lIns="0" tIns="0" rIns="0" bIns="0" rtlCol="0" anchor="ctr"/>
+          <a:bodyPr wrap="square" lIns="0" tIns="0" rIns="0" bIns="0" rtlCol="0" anchor="ctr">
+            <a:normAutofit/>
+          </a:bodyPr>
           <a:lstStyle/>
           <a:p>
             <a:pPr indent="0" marL="0">
@@ -14185,7 +14505,7 @@
                 <a:ea typeface="微软雅黑" pitchFamily="34" charset="-122"/>
                 <a:cs typeface="微软雅黑" pitchFamily="34" charset="-120"/>
               </a:rPr>
-              <a:t>帮扶管理信息系统 v1.12.10</a:t>
+              <a:t>帮扶管理信息系统 v1.12.11</a:t>
             </a:r>
             <a:endParaRPr lang="en-US" sz="1050" dirty="0"/>
           </a:p>
@@ -14238,7 +14558,9 @@
           <a:ln/>
         </p:spPr>
         <p:txBody>
-          <a:bodyPr wrap="square" lIns="0" tIns="0" rIns="0" bIns="0" rtlCol="0" anchor="ctr"/>
+          <a:bodyPr wrap="square" lIns="0" tIns="0" rIns="0" bIns="0" rtlCol="0" anchor="ctr">
+            <a:normAutofit/>
+          </a:bodyPr>
           <a:lstStyle/>
           <a:p>
             <a:pPr indent="0" marL="0">
@@ -14277,7 +14599,9 @@
           <a:ln/>
         </p:spPr>
         <p:txBody>
-          <a:bodyPr wrap="square" lIns="0" tIns="0" rIns="0" bIns="0" rtlCol="0" anchor="t"/>
+          <a:bodyPr wrap="square" lIns="0" tIns="0" rIns="0" bIns="0" rtlCol="0" anchor="t">
+            <a:normAutofit/>
+          </a:bodyPr>
           <a:lstStyle/>
           <a:p>
             <a:pPr algn="l" marL="152400" indent="-152400">
@@ -14433,7 +14757,9 @@
           <a:ln/>
         </p:spPr>
         <p:txBody>
-          <a:bodyPr wrap="square" lIns="0" tIns="0" rIns="0" bIns="0" rtlCol="0" anchor="ctr"/>
+          <a:bodyPr wrap="square" lIns="0" tIns="0" rIns="0" bIns="0" rtlCol="0" anchor="ctr">
+            <a:normAutofit/>
+          </a:bodyPr>
           <a:lstStyle/>
           <a:p>
             <a:pPr indent="0" marL="0">
@@ -14472,7 +14798,9 @@
           <a:ln/>
         </p:spPr>
         <p:txBody>
-          <a:bodyPr wrap="square" lIns="0" tIns="0" rIns="0" bIns="0" rtlCol="0" anchor="t"/>
+          <a:bodyPr wrap="square" lIns="0" tIns="0" rIns="0" bIns="0" rtlCol="0" anchor="t">
+            <a:normAutofit/>
+          </a:bodyPr>
           <a:lstStyle/>
           <a:p>
             <a:pPr algn="l" marL="152400" indent="-152400">
@@ -14651,7 +14979,9 @@
           <a:ln/>
         </p:spPr>
         <p:txBody>
-          <a:bodyPr wrap="square" lIns="0" tIns="0" rIns="0" bIns="0" rtlCol="0" anchor="ctr"/>
+          <a:bodyPr wrap="square" lIns="0" tIns="0" rIns="0" bIns="0" rtlCol="0" anchor="ctr">
+            <a:normAutofit/>
+          </a:bodyPr>
           <a:lstStyle/>
           <a:p>
             <a:pPr indent="0" marL="0">
@@ -14690,7 +15020,9 @@
           <a:ln/>
         </p:spPr>
         <p:txBody>
-          <a:bodyPr wrap="square" lIns="0" tIns="0" rIns="0" bIns="0" rtlCol="0" anchor="ctr"/>
+          <a:bodyPr wrap="square" lIns="0" tIns="0" rIns="0" bIns="0" rtlCol="0" anchor="ctr">
+            <a:normAutofit/>
+          </a:bodyPr>
           <a:lstStyle/>
           <a:p>
             <a:pPr indent="0" marL="0">
@@ -14729,7 +15061,9 @@
           <a:ln/>
         </p:spPr>
         <p:txBody>
-          <a:bodyPr wrap="square" lIns="0" tIns="0" rIns="0" bIns="0" rtlCol="0" anchor="ctr"/>
+          <a:bodyPr wrap="square" lIns="0" tIns="0" rIns="0" bIns="0" rtlCol="0" anchor="ctr">
+            <a:normAutofit/>
+          </a:bodyPr>
           <a:lstStyle/>
           <a:p>
             <a:pPr algn="r" indent="0" marL="0">
@@ -14768,7 +15102,9 @@
           <a:ln/>
         </p:spPr>
         <p:txBody>
-          <a:bodyPr wrap="square" lIns="0" tIns="0" rIns="0" bIns="0" rtlCol="0" anchor="ctr"/>
+          <a:bodyPr wrap="square" lIns="0" tIns="0" rIns="0" bIns="0" rtlCol="0" anchor="ctr">
+            <a:normAutofit/>
+          </a:bodyPr>
           <a:lstStyle/>
           <a:p>
             <a:pPr indent="0" marL="0">
@@ -14783,7 +15119,7 @@
                 <a:ea typeface="微软雅黑" pitchFamily="34" charset="-122"/>
                 <a:cs typeface="微软雅黑" pitchFamily="34" charset="-120"/>
               </a:rPr>
-              <a:t>帮扶管理信息系统 v1.12.10</a:t>
+              <a:t>帮扶管理信息系统 v1.12.11</a:t>
             </a:r>
             <a:endParaRPr lang="en-US" sz="1050" dirty="0"/>
           </a:p>
@@ -14827,7 +15163,9 @@
           <a:ln/>
         </p:spPr>
         <p:txBody>
-          <a:bodyPr wrap="square" lIns="0" tIns="0" rIns="0" bIns="0" rtlCol="0" anchor="ctr"/>
+          <a:bodyPr wrap="square" lIns="0" tIns="0" rIns="0" bIns="0" rtlCol="0" anchor="ctr">
+            <a:normAutofit/>
+          </a:bodyPr>
           <a:lstStyle/>
           <a:p>
             <a:pPr indent="0" marL="0">
@@ -14886,7 +15224,9 @@
           <a:ln/>
         </p:spPr>
         <p:txBody>
-          <a:bodyPr wrap="square" lIns="0" tIns="0" rIns="0" bIns="0" rtlCol="0" anchor="ctr"/>
+          <a:bodyPr wrap="square" lIns="0" tIns="0" rIns="0" bIns="0" rtlCol="0" anchor="ctr">
+            <a:normAutofit/>
+          </a:bodyPr>
           <a:lstStyle/>
           <a:p>
             <a:pPr indent="0" marL="0">
@@ -14945,7 +15285,9 @@
           <a:ln/>
         </p:spPr>
         <p:txBody>
-          <a:bodyPr wrap="square" lIns="0" tIns="0" rIns="0" bIns="0" rtlCol="0" anchor="ctr"/>
+          <a:bodyPr wrap="square" lIns="0" tIns="0" rIns="0" bIns="0" rtlCol="0" anchor="ctr">
+            <a:normAutofit/>
+          </a:bodyPr>
           <a:lstStyle/>
           <a:p>
             <a:pPr indent="0" marL="0">
@@ -15004,7 +15346,9 @@
           <a:ln/>
         </p:spPr>
         <p:txBody>
-          <a:bodyPr wrap="square" lIns="0" tIns="0" rIns="0" bIns="0" rtlCol="0" anchor="ctr"/>
+          <a:bodyPr wrap="square" lIns="0" tIns="0" rIns="0" bIns="0" rtlCol="0" anchor="ctr">
+            <a:normAutofit/>
+          </a:bodyPr>
           <a:lstStyle/>
           <a:p>
             <a:pPr indent="0" marL="0">
@@ -15063,7 +15407,9 @@
           <a:ln/>
         </p:spPr>
         <p:txBody>
-          <a:bodyPr wrap="square" lIns="0" tIns="0" rIns="0" bIns="0" rtlCol="0" anchor="ctr"/>
+          <a:bodyPr wrap="square" lIns="0" tIns="0" rIns="0" bIns="0" rtlCol="0" anchor="ctr">
+            <a:normAutofit/>
+          </a:bodyPr>
           <a:lstStyle/>
           <a:p>
             <a:pPr indent="0" marL="0">
@@ -15102,7 +15448,9 @@
           <a:ln/>
         </p:spPr>
         <p:txBody>
-          <a:bodyPr wrap="square" lIns="0" tIns="0" rIns="0" bIns="0" rtlCol="0" anchor="t"/>
+          <a:bodyPr wrap="square" lIns="0" tIns="0" rIns="0" bIns="0" rtlCol="0" anchor="t">
+            <a:normAutofit/>
+          </a:bodyPr>
           <a:lstStyle/>
           <a:p>
             <a:pPr algn="l" marL="152400" indent="-152400">
@@ -15122,6 +15470,27 @@
                 <a:cs typeface="微软雅黑" pitchFamily="34" charset="-120"/>
               </a:rPr>
               <a:t>申请人视角：我的申请全状态跟踪；审批人视角：待办池 + 全部任务（/approval/tasks/all）</a:t>
+            </a:r>
+            <a:endParaRPr lang="en-US" sz="1400" dirty="0"/>
+          </a:p>
+          <a:p>
+            <a:pPr algn="l" marL="152400" indent="-152400">
+              <a:spcAft>
+                <a:spcPts val="1100"/>
+              </a:spcAft>
+              <a:buSzPct val="100000"/>
+              <a:buChar char="▪"/>
+            </a:pPr>
+            <a:r>
+              <a:rPr lang="en-US" sz="1400" dirty="0">
+                <a:solidFill>
+                  <a:srgbClr val="1A2E24"/>
+                </a:solidFill>
+                <a:latin typeface="微软雅黑" pitchFamily="34" charset="0"/>
+                <a:ea typeface="微软雅黑" pitchFamily="34" charset="-122"/>
+                <a:cs typeface="微软雅黑" pitchFamily="34" charset="-120"/>
+              </a:rPr>
+              <a:t>「待我审批 / 我发起的 / 已完成」状态页签切换，支持批量通过 / 驳回（原因必填）</a:t>
             </a:r>
             <a:endParaRPr lang="en-US" sz="1400" dirty="0"/>
           </a:p>
@@ -15281,7 +15650,9 @@
           <a:ln/>
         </p:spPr>
         <p:txBody>
-          <a:bodyPr wrap="square" lIns="0" tIns="0" rIns="0" bIns="0" rtlCol="0" anchor="ctr"/>
+          <a:bodyPr wrap="square" lIns="0" tIns="0" rIns="0" bIns="0" rtlCol="0" anchor="ctr">
+            <a:normAutofit/>
+          </a:bodyPr>
           <a:lstStyle/>
           <a:p>
             <a:pPr indent="0" marL="0">
@@ -15320,7 +15691,9 @@
           <a:ln/>
         </p:spPr>
         <p:txBody>
-          <a:bodyPr wrap="square" lIns="0" tIns="0" rIns="0" bIns="0" rtlCol="0" anchor="ctr"/>
+          <a:bodyPr wrap="square" lIns="0" tIns="0" rIns="0" bIns="0" rtlCol="0" anchor="ctr">
+            <a:normAutofit/>
+          </a:bodyPr>
           <a:lstStyle/>
           <a:p>
             <a:pPr indent="0" marL="0">
@@ -15359,7 +15732,9 @@
           <a:ln/>
         </p:spPr>
         <p:txBody>
-          <a:bodyPr wrap="square" lIns="0" tIns="0" rIns="0" bIns="0" rtlCol="0" anchor="ctr"/>
+          <a:bodyPr wrap="square" lIns="0" tIns="0" rIns="0" bIns="0" rtlCol="0" anchor="ctr">
+            <a:normAutofit/>
+          </a:bodyPr>
           <a:lstStyle/>
           <a:p>
             <a:pPr algn="r" indent="0" marL="0">
@@ -15398,7 +15773,9 @@
           <a:ln/>
         </p:spPr>
         <p:txBody>
-          <a:bodyPr wrap="square" lIns="0" tIns="0" rIns="0" bIns="0" rtlCol="0" anchor="ctr"/>
+          <a:bodyPr wrap="square" lIns="0" tIns="0" rIns="0" bIns="0" rtlCol="0" anchor="ctr">
+            <a:normAutofit/>
+          </a:bodyPr>
           <a:lstStyle/>
           <a:p>
             <a:pPr indent="0" marL="0">
@@ -15413,7 +15790,7 @@
                 <a:ea typeface="微软雅黑" pitchFamily="34" charset="-122"/>
                 <a:cs typeface="微软雅黑" pitchFamily="34" charset="-120"/>
               </a:rPr>
-              <a:t>帮扶管理信息系统 v1.12.10</a:t>
+              <a:t>帮扶管理信息系统 v1.12.11</a:t>
             </a:r>
             <a:endParaRPr lang="en-US" sz="1050" dirty="0"/>
           </a:p>
@@ -15466,7 +15843,9 @@
           <a:ln/>
         </p:spPr>
         <p:txBody>
-          <a:bodyPr wrap="square" lIns="0" tIns="0" rIns="0" bIns="0" rtlCol="0" anchor="ctr"/>
+          <a:bodyPr wrap="square" lIns="0" tIns="0" rIns="0" bIns="0" rtlCol="0" anchor="ctr">
+            <a:normAutofit/>
+          </a:bodyPr>
           <a:lstStyle/>
           <a:p>
             <a:pPr indent="0" marL="0">
@@ -15505,7 +15884,9 @@
           <a:ln/>
         </p:spPr>
         <p:txBody>
-          <a:bodyPr wrap="square" lIns="0" tIns="0" rIns="0" bIns="0" rtlCol="0" anchor="t"/>
+          <a:bodyPr wrap="square" lIns="0" tIns="0" rIns="0" bIns="0" rtlCol="0" anchor="t">
+            <a:normAutofit/>
+          </a:bodyPr>
           <a:lstStyle/>
           <a:p>
             <a:pPr algn="l" marL="152400" indent="-152400">
@@ -15640,7 +16021,9 @@
           <a:ln/>
         </p:spPr>
         <p:txBody>
-          <a:bodyPr wrap="square" lIns="0" tIns="0" rIns="0" bIns="0" rtlCol="0" anchor="ctr"/>
+          <a:bodyPr wrap="square" lIns="0" tIns="0" rIns="0" bIns="0" rtlCol="0" anchor="ctr">
+            <a:normAutofit/>
+          </a:bodyPr>
           <a:lstStyle/>
           <a:p>
             <a:pPr indent="0" marL="0">
@@ -15679,7 +16062,9 @@
           <a:ln/>
         </p:spPr>
         <p:txBody>
-          <a:bodyPr wrap="square" lIns="0" tIns="0" rIns="0" bIns="0" rtlCol="0" anchor="t"/>
+          <a:bodyPr wrap="square" lIns="0" tIns="0" rIns="0" bIns="0" rtlCol="0" anchor="t">
+            <a:normAutofit/>
+          </a:bodyPr>
           <a:lstStyle/>
           <a:p>
             <a:pPr algn="l" marL="152400" indent="-152400">
@@ -15814,7 +16199,9 @@
           <a:ln/>
         </p:spPr>
         <p:txBody>
-          <a:bodyPr wrap="square" lIns="0" tIns="0" rIns="0" bIns="0" rtlCol="0" anchor="ctr"/>
+          <a:bodyPr wrap="square" lIns="0" tIns="0" rIns="0" bIns="0" rtlCol="0" anchor="ctr">
+            <a:normAutofit/>
+          </a:bodyPr>
           <a:lstStyle/>
           <a:p>
             <a:pPr indent="0" marL="0">
@@ -15853,7 +16240,9 @@
           <a:ln/>
         </p:spPr>
         <p:txBody>
-          <a:bodyPr wrap="square" lIns="0" tIns="0" rIns="0" bIns="0" rtlCol="0" anchor="ctr"/>
+          <a:bodyPr wrap="square" lIns="0" tIns="0" rIns="0" bIns="0" rtlCol="0" anchor="ctr">
+            <a:normAutofit/>
+          </a:bodyPr>
           <a:lstStyle/>
           <a:p>
             <a:pPr indent="0" marL="0">
@@ -15944,7 +16333,9 @@
           <a:ln/>
         </p:spPr>
         <p:txBody>
-          <a:bodyPr wrap="square" lIns="0" tIns="0" rIns="0" bIns="0" rtlCol="0" anchor="ctr"/>
+          <a:bodyPr wrap="square" lIns="0" tIns="0" rIns="0" bIns="0" rtlCol="0" anchor="ctr">
+            <a:normAutofit/>
+          </a:bodyPr>
           <a:lstStyle/>
           <a:p>
             <a:pPr indent="0" marL="0">
@@ -15983,7 +16374,9 @@
           <a:ln/>
         </p:spPr>
         <p:txBody>
-          <a:bodyPr wrap="square" lIns="0" tIns="0" rIns="0" bIns="0" rtlCol="0" anchor="ctr"/>
+          <a:bodyPr wrap="square" lIns="0" tIns="0" rIns="0" bIns="0" rtlCol="0" anchor="ctr">
+            <a:normAutofit/>
+          </a:bodyPr>
           <a:lstStyle/>
           <a:p>
             <a:pPr indent="0" marL="0">
@@ -16022,7 +16415,9 @@
           <a:ln/>
         </p:spPr>
         <p:txBody>
-          <a:bodyPr wrap="square" lIns="0" tIns="0" rIns="0" bIns="0" rtlCol="0" anchor="ctr"/>
+          <a:bodyPr wrap="square" lIns="0" tIns="0" rIns="0" bIns="0" rtlCol="0" anchor="ctr">
+            <a:normAutofit/>
+          </a:bodyPr>
           <a:lstStyle/>
           <a:p>
             <a:pPr algn="r" indent="0" marL="0">
@@ -16061,7 +16456,9 @@
           <a:ln/>
         </p:spPr>
         <p:txBody>
-          <a:bodyPr wrap="square" lIns="0" tIns="0" rIns="0" bIns="0" rtlCol="0" anchor="ctr"/>
+          <a:bodyPr wrap="square" lIns="0" tIns="0" rIns="0" bIns="0" rtlCol="0" anchor="ctr">
+            <a:normAutofit/>
+          </a:bodyPr>
           <a:lstStyle/>
           <a:p>
             <a:pPr indent="0" marL="0">
@@ -16076,7 +16473,7 @@
                 <a:ea typeface="微软雅黑" pitchFamily="34" charset="-122"/>
                 <a:cs typeface="微软雅黑" pitchFamily="34" charset="-120"/>
               </a:rPr>
-              <a:t>帮扶管理信息系统 v1.12.10</a:t>
+              <a:t>帮扶管理信息系统 v1.12.11</a:t>
             </a:r>
             <a:endParaRPr lang="en-US" sz="1050" dirty="0"/>
           </a:p>
@@ -16129,7 +16526,9 @@
           <a:ln/>
         </p:spPr>
         <p:txBody>
-          <a:bodyPr wrap="square" lIns="0" tIns="0" rIns="0" bIns="0" rtlCol="0" anchor="ctr"/>
+          <a:bodyPr wrap="square" lIns="0" tIns="0" rIns="0" bIns="0" rtlCol="0" anchor="ctr">
+            <a:normAutofit/>
+          </a:bodyPr>
           <a:lstStyle/>
           <a:p>
             <a:pPr indent="0" marL="0">
@@ -16168,7 +16567,9 @@
           <a:ln/>
         </p:spPr>
         <p:txBody>
-          <a:bodyPr wrap="square" lIns="0" tIns="0" rIns="0" bIns="0" rtlCol="0" anchor="ctr"/>
+          <a:bodyPr wrap="square" lIns="0" tIns="0" rIns="0" bIns="0" rtlCol="0" anchor="ctr">
+            <a:normAutofit/>
+          </a:bodyPr>
           <a:lstStyle/>
           <a:p>
             <a:pPr indent="0" marL="0">
@@ -16236,7 +16637,9 @@
           <a:ln/>
         </p:spPr>
         <p:txBody>
-          <a:bodyPr wrap="square" lIns="0" tIns="0" rIns="0" bIns="0" rtlCol="0" anchor="ctr"/>
+          <a:bodyPr wrap="square" lIns="0" tIns="0" rIns="0" bIns="0" rtlCol="0" anchor="ctr">
+            <a:normAutofit/>
+          </a:bodyPr>
           <a:lstStyle/>
           <a:p>
             <a:pPr indent="0" marL="0">
@@ -16275,7 +16678,9 @@
           <a:ln/>
         </p:spPr>
         <p:txBody>
-          <a:bodyPr wrap="square" lIns="0" tIns="0" rIns="0" bIns="0" rtlCol="0" anchor="ctr"/>
+          <a:bodyPr wrap="square" lIns="0" tIns="0" rIns="0" bIns="0" rtlCol="0" anchor="ctr">
+            <a:normAutofit/>
+          </a:bodyPr>
           <a:lstStyle/>
           <a:p>
             <a:pPr indent="0" marL="0">
@@ -16343,7 +16748,9 @@
           <a:ln/>
         </p:spPr>
         <p:txBody>
-          <a:bodyPr wrap="square" lIns="0" tIns="0" rIns="0" bIns="0" rtlCol="0" anchor="ctr"/>
+          <a:bodyPr wrap="square" lIns="0" tIns="0" rIns="0" bIns="0" rtlCol="0" anchor="ctr">
+            <a:normAutofit/>
+          </a:bodyPr>
           <a:lstStyle/>
           <a:p>
             <a:pPr indent="0" marL="0">
@@ -16382,7 +16789,9 @@
           <a:ln/>
         </p:spPr>
         <p:txBody>
-          <a:bodyPr wrap="square" lIns="0" tIns="0" rIns="0" bIns="0" rtlCol="0" anchor="ctr"/>
+          <a:bodyPr wrap="square" lIns="0" tIns="0" rIns="0" bIns="0" rtlCol="0" anchor="ctr">
+            <a:normAutofit/>
+          </a:bodyPr>
           <a:lstStyle/>
           <a:p>
             <a:pPr indent="0" marL="0">
@@ -16450,7 +16859,9 @@
           <a:ln/>
         </p:spPr>
         <p:txBody>
-          <a:bodyPr wrap="square" lIns="0" tIns="0" rIns="0" bIns="0" rtlCol="0" anchor="ctr"/>
+          <a:bodyPr wrap="square" lIns="0" tIns="0" rIns="0" bIns="0" rtlCol="0" anchor="ctr">
+            <a:normAutofit/>
+          </a:bodyPr>
           <a:lstStyle/>
           <a:p>
             <a:pPr indent="0" marL="0">
@@ -16489,7 +16900,9 @@
           <a:ln/>
         </p:spPr>
         <p:txBody>
-          <a:bodyPr wrap="square" lIns="0" tIns="0" rIns="0" bIns="0" rtlCol="0" anchor="ctr"/>
+          <a:bodyPr wrap="square" lIns="0" tIns="0" rIns="0" bIns="0" rtlCol="0" anchor="ctr">
+            <a:normAutofit/>
+          </a:bodyPr>
           <a:lstStyle/>
           <a:p>
             <a:pPr indent="0" marL="0">
@@ -16557,7 +16970,9 @@
           <a:ln/>
         </p:spPr>
         <p:txBody>
-          <a:bodyPr wrap="square" lIns="0" tIns="0" rIns="0" bIns="0" rtlCol="0" anchor="ctr"/>
+          <a:bodyPr wrap="square" lIns="0" tIns="0" rIns="0" bIns="0" rtlCol="0" anchor="ctr">
+            <a:normAutofit/>
+          </a:bodyPr>
           <a:lstStyle/>
           <a:p>
             <a:pPr indent="0" marL="0">
@@ -16596,7 +17011,9 @@
           <a:ln/>
         </p:spPr>
         <p:txBody>
-          <a:bodyPr wrap="square" lIns="0" tIns="0" rIns="0" bIns="0" rtlCol="0" anchor="ctr"/>
+          <a:bodyPr wrap="square" lIns="0" tIns="0" rIns="0" bIns="0" rtlCol="0" anchor="ctr">
+            <a:normAutofit/>
+          </a:bodyPr>
           <a:lstStyle/>
           <a:p>
             <a:pPr indent="0" marL="0">
@@ -16664,7 +17081,9 @@
           <a:ln/>
         </p:spPr>
         <p:txBody>
-          <a:bodyPr wrap="square" lIns="0" tIns="0" rIns="0" bIns="0" rtlCol="0" anchor="ctr"/>
+          <a:bodyPr wrap="square" lIns="0" tIns="0" rIns="0" bIns="0" rtlCol="0" anchor="ctr">
+            <a:normAutofit/>
+          </a:bodyPr>
           <a:lstStyle/>
           <a:p>
             <a:pPr indent="0" marL="0">
@@ -16703,7 +17122,9 @@
           <a:ln/>
         </p:spPr>
         <p:txBody>
-          <a:bodyPr wrap="square" lIns="0" tIns="0" rIns="0" bIns="0" rtlCol="0" anchor="ctr"/>
+          <a:bodyPr wrap="square" lIns="0" tIns="0" rIns="0" bIns="0" rtlCol="0" anchor="ctr">
+            <a:normAutofit/>
+          </a:bodyPr>
           <a:lstStyle/>
           <a:p>
             <a:pPr indent="0" marL="0">
@@ -16794,7 +17215,9 @@
           <a:ln/>
         </p:spPr>
         <p:txBody>
-          <a:bodyPr wrap="square" lIns="0" tIns="0" rIns="0" bIns="0" rtlCol="0" anchor="ctr"/>
+          <a:bodyPr wrap="square" lIns="0" tIns="0" rIns="0" bIns="0" rtlCol="0" anchor="ctr">
+            <a:normAutofit/>
+          </a:bodyPr>
           <a:lstStyle/>
           <a:p>
             <a:pPr indent="0" marL="0">
@@ -16833,7 +17256,9 @@
           <a:ln/>
         </p:spPr>
         <p:txBody>
-          <a:bodyPr wrap="square" lIns="0" tIns="0" rIns="0" bIns="0" rtlCol="0" anchor="ctr"/>
+          <a:bodyPr wrap="square" lIns="0" tIns="0" rIns="0" bIns="0" rtlCol="0" anchor="ctr">
+            <a:normAutofit/>
+          </a:bodyPr>
           <a:lstStyle/>
           <a:p>
             <a:pPr indent="0" marL="0">
@@ -16872,7 +17297,9 @@
           <a:ln/>
         </p:spPr>
         <p:txBody>
-          <a:bodyPr wrap="square" lIns="0" tIns="0" rIns="0" bIns="0" rtlCol="0" anchor="ctr"/>
+          <a:bodyPr wrap="square" lIns="0" tIns="0" rIns="0" bIns="0" rtlCol="0" anchor="ctr">
+            <a:normAutofit/>
+          </a:bodyPr>
           <a:lstStyle/>
           <a:p>
             <a:pPr algn="r" indent="0" marL="0">
@@ -16911,7 +17338,9 @@
           <a:ln/>
         </p:spPr>
         <p:txBody>
-          <a:bodyPr wrap="square" lIns="0" tIns="0" rIns="0" bIns="0" rtlCol="0" anchor="ctr"/>
+          <a:bodyPr wrap="square" lIns="0" tIns="0" rIns="0" bIns="0" rtlCol="0" anchor="ctr">
+            <a:normAutofit/>
+          </a:bodyPr>
           <a:lstStyle/>
           <a:p>
             <a:pPr indent="0" marL="0">
@@ -16926,7 +17355,7 @@
                 <a:ea typeface="微软雅黑" pitchFamily="34" charset="-122"/>
                 <a:cs typeface="微软雅黑" pitchFamily="34" charset="-120"/>
               </a:rPr>
-              <a:t>帮扶管理信息系统 v1.12.10</a:t>
+              <a:t>帮扶管理信息系统 v1.12.11</a:t>
             </a:r>
             <a:endParaRPr lang="en-US" sz="1050" dirty="0"/>
           </a:p>
@@ -16979,7 +17408,9 @@
           <a:ln/>
         </p:spPr>
         <p:txBody>
-          <a:bodyPr wrap="square" lIns="0" tIns="0" rIns="0" bIns="0" rtlCol="0" anchor="ctr"/>
+          <a:bodyPr wrap="square" lIns="0" tIns="0" rIns="0" bIns="0" rtlCol="0" anchor="ctr">
+            <a:normAutofit/>
+          </a:bodyPr>
           <a:lstStyle/>
           <a:p>
             <a:pPr indent="0" marL="0">
@@ -17018,7 +17449,9 @@
           <a:ln/>
         </p:spPr>
         <p:txBody>
-          <a:bodyPr wrap="square" lIns="0" tIns="0" rIns="0" bIns="0" rtlCol="0" anchor="ctr"/>
+          <a:bodyPr wrap="square" lIns="0" tIns="0" rIns="0" bIns="0" rtlCol="0" anchor="ctr">
+            <a:normAutofit/>
+          </a:bodyPr>
           <a:lstStyle/>
           <a:p>
             <a:pPr indent="0" marL="0">
@@ -17033,7 +17466,7 @@
                 <a:ea typeface="微软雅黑" pitchFamily="34" charset="-122"/>
                 <a:cs typeface="微软雅黑" pitchFamily="34" charset="-120"/>
               </a:rPr>
-              <a:t>用户增删改、组织树管理、组织删除级联守卫</a:t>
+              <a:t>用户增删改、组织树管理（启动钩子自动自愈）、组织删除级联守卫</a:t>
             </a:r>
             <a:endParaRPr lang="en-US" sz="1200" dirty="0"/>
           </a:p>
@@ -17086,7 +17519,9 @@
           <a:ln/>
         </p:spPr>
         <p:txBody>
-          <a:bodyPr wrap="square" lIns="0" tIns="0" rIns="0" bIns="0" rtlCol="0" anchor="ctr"/>
+          <a:bodyPr wrap="square" lIns="0" tIns="0" rIns="0" bIns="0" rtlCol="0" anchor="ctr">
+            <a:normAutofit/>
+          </a:bodyPr>
           <a:lstStyle/>
           <a:p>
             <a:pPr indent="0" marL="0">
@@ -17125,7 +17560,9 @@
           <a:ln/>
         </p:spPr>
         <p:txBody>
-          <a:bodyPr wrap="square" lIns="0" tIns="0" rIns="0" bIns="0" rtlCol="0" anchor="ctr"/>
+          <a:bodyPr wrap="square" lIns="0" tIns="0" rIns="0" bIns="0" rtlCol="0" anchor="ctr">
+            <a:normAutofit/>
+          </a:bodyPr>
           <a:lstStyle/>
           <a:p>
             <a:pPr indent="0" marL="0">
@@ -17193,7 +17630,9 @@
           <a:ln/>
         </p:spPr>
         <p:txBody>
-          <a:bodyPr wrap="square" lIns="0" tIns="0" rIns="0" bIns="0" rtlCol="0" anchor="ctr"/>
+          <a:bodyPr wrap="square" lIns="0" tIns="0" rIns="0" bIns="0" rtlCol="0" anchor="ctr">
+            <a:normAutofit/>
+          </a:bodyPr>
           <a:lstStyle/>
           <a:p>
             <a:pPr indent="0" marL="0">
@@ -17232,7 +17671,9 @@
           <a:ln/>
         </p:spPr>
         <p:txBody>
-          <a:bodyPr wrap="square" lIns="0" tIns="0" rIns="0" bIns="0" rtlCol="0" anchor="ctr"/>
+          <a:bodyPr wrap="square" lIns="0" tIns="0" rIns="0" bIns="0" rtlCol="0" anchor="ctr">
+            <a:normAutofit/>
+          </a:bodyPr>
           <a:lstStyle/>
           <a:p>
             <a:pPr indent="0" marL="0">
@@ -17300,7 +17741,9 @@
           <a:ln/>
         </p:spPr>
         <p:txBody>
-          <a:bodyPr wrap="square" lIns="0" tIns="0" rIns="0" bIns="0" rtlCol="0" anchor="ctr"/>
+          <a:bodyPr wrap="square" lIns="0" tIns="0" rIns="0" bIns="0" rtlCol="0" anchor="ctr">
+            <a:normAutofit/>
+          </a:bodyPr>
           <a:lstStyle/>
           <a:p>
             <a:pPr indent="0" marL="0">
@@ -17339,7 +17782,9 @@
           <a:ln/>
         </p:spPr>
         <p:txBody>
-          <a:bodyPr wrap="square" lIns="0" tIns="0" rIns="0" bIns="0" rtlCol="0" anchor="ctr"/>
+          <a:bodyPr wrap="square" lIns="0" tIns="0" rIns="0" bIns="0" rtlCol="0" anchor="ctr">
+            <a:normAutofit/>
+          </a:bodyPr>
           <a:lstStyle/>
           <a:p>
             <a:pPr indent="0" marL="0">
@@ -17407,7 +17852,9 @@
           <a:ln/>
         </p:spPr>
         <p:txBody>
-          <a:bodyPr wrap="square" lIns="0" tIns="0" rIns="0" bIns="0" rtlCol="0" anchor="ctr"/>
+          <a:bodyPr wrap="square" lIns="0" tIns="0" rIns="0" bIns="0" rtlCol="0" anchor="ctr">
+            <a:normAutofit/>
+          </a:bodyPr>
           <a:lstStyle/>
           <a:p>
             <a:pPr indent="0" marL="0">
@@ -17446,7 +17893,9 @@
           <a:ln/>
         </p:spPr>
         <p:txBody>
-          <a:bodyPr wrap="square" lIns="0" tIns="0" rIns="0" bIns="0" rtlCol="0" anchor="ctr"/>
+          <a:bodyPr wrap="square" lIns="0" tIns="0" rIns="0" bIns="0" rtlCol="0" anchor="ctr">
+            <a:normAutofit/>
+          </a:bodyPr>
           <a:lstStyle/>
           <a:p>
             <a:pPr indent="0" marL="0">
@@ -17514,7 +17963,9 @@
           <a:ln/>
         </p:spPr>
         <p:txBody>
-          <a:bodyPr wrap="square" lIns="0" tIns="0" rIns="0" bIns="0" rtlCol="0" anchor="ctr"/>
+          <a:bodyPr wrap="square" lIns="0" tIns="0" rIns="0" bIns="0" rtlCol="0" anchor="ctr">
+            <a:normAutofit/>
+          </a:bodyPr>
           <a:lstStyle/>
           <a:p>
             <a:pPr indent="0" marL="0">
@@ -17553,7 +18004,9 @@
           <a:ln/>
         </p:spPr>
         <p:txBody>
-          <a:bodyPr wrap="square" lIns="0" tIns="0" rIns="0" bIns="0" rtlCol="0" anchor="ctr"/>
+          <a:bodyPr wrap="square" lIns="0" tIns="0" rIns="0" bIns="0" rtlCol="0" anchor="ctr">
+            <a:normAutofit/>
+          </a:bodyPr>
           <a:lstStyle/>
           <a:p>
             <a:pPr indent="0" marL="0">
@@ -17615,16 +18068,18 @@
         <p:spPr>
           <a:xfrm>
             <a:off x="502920" y="822960"/>
-            <a:ext cx="4206240" cy="3108960"/>
-          </a:xfrm>
-          <a:prstGeom prst="rect">
-            <a:avLst/>
-          </a:prstGeom>
-          <a:noFill/>
-          <a:ln/>
-        </p:spPr>
-        <p:txBody>
-          <a:bodyPr wrap="square" lIns="0" tIns="0" rIns="0" bIns="0" rtlCol="0" anchor="ctr"/>
+            <a:ext cx="4206240" cy="4315121"/>
+          </a:xfrm>
+          <a:prstGeom prst="rect">
+            <a:avLst/>
+          </a:prstGeom>
+          <a:noFill/>
+          <a:ln/>
+        </p:spPr>
+        <p:txBody>
+          <a:bodyPr wrap="square" lIns="0" tIns="0" rIns="0" bIns="0" rtlCol="0" anchor="ctr">
+            <a:normAutofit/>
+          </a:bodyPr>
           <a:lstStyle/>
           <a:p>
             <a:pPr indent="0" marL="0">
@@ -17654,16 +18109,18 @@
         <p:spPr>
           <a:xfrm>
             <a:off x="914400" y="3977640"/>
-            <a:ext cx="10332720" cy="868680"/>
-          </a:xfrm>
-          <a:prstGeom prst="rect">
-            <a:avLst/>
-          </a:prstGeom>
-          <a:noFill/>
-          <a:ln/>
-        </p:spPr>
-        <p:txBody>
-          <a:bodyPr wrap="square" lIns="0" tIns="0" rIns="0" bIns="0" rtlCol="0" anchor="ctr"/>
+            <a:ext cx="10332720" cy="877655"/>
+          </a:xfrm>
+          <a:prstGeom prst="rect">
+            <a:avLst/>
+          </a:prstGeom>
+          <a:noFill/>
+          <a:ln/>
+        </p:spPr>
+        <p:txBody>
+          <a:bodyPr wrap="square" lIns="0" tIns="0" rIns="0" bIns="0" rtlCol="0" anchor="ctr">
+            <a:normAutofit/>
+          </a:bodyPr>
           <a:lstStyle/>
           <a:p>
             <a:pPr indent="0" marL="0">
@@ -17702,7 +18159,9 @@
           <a:ln/>
         </p:spPr>
         <p:txBody>
-          <a:bodyPr wrap="square" lIns="0" tIns="0" rIns="0" bIns="0" rtlCol="0" anchor="ctr"/>
+          <a:bodyPr wrap="square" lIns="0" tIns="0" rIns="0" bIns="0" rtlCol="0" anchor="ctr">
+            <a:normAutofit/>
+          </a:bodyPr>
           <a:lstStyle/>
           <a:p>
             <a:pPr indent="0" marL="0">
@@ -17741,10 +18200,12 @@
           <a:ln/>
         </p:spPr>
         <p:txBody>
-          <a:bodyPr wrap="square" lIns="0" tIns="0" rIns="0" bIns="0" rtlCol="0" anchor="t"/>
-          <a:lstStyle/>
-          <a:p>
-            <a:pPr marL="152400" indent="-152400">
+          <a:bodyPr wrap="square" lIns="0" tIns="0" rIns="0" bIns="0" rtlCol="0" anchor="t">
+            <a:normAutofit/>
+          </a:bodyPr>
+          <a:lstStyle/>
+          <a:p>
+            <a:pPr algn="l" marL="152400" indent="-152400">
               <a:spcAft>
                 <a:spcPts val="1000"/>
               </a:spcAft>
@@ -17765,7 +18226,7 @@
             <a:endParaRPr lang="en-US" sz="1400" dirty="0"/>
           </a:p>
           <a:p>
-            <a:pPr marL="152400" indent="-152400">
+            <a:pPr algn="l" marL="152400" indent="-152400">
               <a:spcAft>
                 <a:spcPts val="1000"/>
               </a:spcAft>
@@ -17786,7 +18247,7 @@
             <a:endParaRPr lang="en-US" sz="1400" dirty="0"/>
           </a:p>
           <a:p>
-            <a:pPr marL="152400" indent="-152400">
+            <a:pPr algn="l" marL="152400" indent="-152400">
               <a:spcAft>
                 <a:spcPts val="1000"/>
               </a:spcAft>
@@ -17807,7 +18268,7 @@
             <a:endParaRPr lang="en-US" sz="1400" dirty="0"/>
           </a:p>
           <a:p>
-            <a:pPr marL="152400" indent="-152400">
+            <a:pPr algn="l" marL="152400" indent="-152400">
               <a:spcAft>
                 <a:spcPts val="1000"/>
               </a:spcAft>
@@ -17847,7 +18308,9 @@
           <a:ln/>
         </p:spPr>
         <p:txBody>
-          <a:bodyPr wrap="square" lIns="0" tIns="0" rIns="0" bIns="0" rtlCol="0" anchor="ctr"/>
+          <a:bodyPr wrap="square" lIns="0" tIns="0" rIns="0" bIns="0" rtlCol="0" anchor="ctr">
+            <a:normAutofit/>
+          </a:bodyPr>
           <a:lstStyle/>
           <a:p>
             <a:pPr algn="r" indent="0" marL="0">
@@ -17938,7 +18401,9 @@
           <a:ln/>
         </p:spPr>
         <p:txBody>
-          <a:bodyPr wrap="square" lIns="0" tIns="0" rIns="0" bIns="0" rtlCol="0" anchor="ctr"/>
+          <a:bodyPr wrap="square" lIns="0" tIns="0" rIns="0" bIns="0" rtlCol="0" anchor="ctr">
+            <a:normAutofit/>
+          </a:bodyPr>
           <a:lstStyle/>
           <a:p>
             <a:pPr indent="0" marL="0">
@@ -17977,7 +18442,9 @@
           <a:ln/>
         </p:spPr>
         <p:txBody>
-          <a:bodyPr wrap="square" lIns="0" tIns="0" rIns="0" bIns="0" rtlCol="0" anchor="ctr"/>
+          <a:bodyPr wrap="square" lIns="0" tIns="0" rIns="0" bIns="0" rtlCol="0" anchor="ctr">
+            <a:normAutofit/>
+          </a:bodyPr>
           <a:lstStyle/>
           <a:p>
             <a:pPr indent="0" marL="0">
@@ -18016,7 +18483,9 @@
           <a:ln/>
         </p:spPr>
         <p:txBody>
-          <a:bodyPr wrap="square" lIns="0" tIns="0" rIns="0" bIns="0" rtlCol="0" anchor="ctr"/>
+          <a:bodyPr wrap="square" lIns="0" tIns="0" rIns="0" bIns="0" rtlCol="0" anchor="ctr">
+            <a:normAutofit/>
+          </a:bodyPr>
           <a:lstStyle/>
           <a:p>
             <a:pPr algn="r" indent="0" marL="0">
@@ -18055,7 +18524,9 @@
           <a:ln/>
         </p:spPr>
         <p:txBody>
-          <a:bodyPr wrap="square" lIns="0" tIns="0" rIns="0" bIns="0" rtlCol="0" anchor="ctr"/>
+          <a:bodyPr wrap="square" lIns="0" tIns="0" rIns="0" bIns="0" rtlCol="0" anchor="ctr">
+            <a:normAutofit/>
+          </a:bodyPr>
           <a:lstStyle/>
           <a:p>
             <a:pPr indent="0" marL="0">
@@ -18070,7 +18541,7 @@
                 <a:ea typeface="微软雅黑" pitchFamily="34" charset="-122"/>
                 <a:cs typeface="微软雅黑" pitchFamily="34" charset="-120"/>
               </a:rPr>
-              <a:t>帮扶管理信息系统 v1.12.10</a:t>
+              <a:t>帮扶管理信息系统 v1.12.11</a:t>
             </a:r>
             <a:endParaRPr lang="en-US" sz="1050" dirty="0"/>
           </a:p>
@@ -18145,7 +18616,9 @@
           <a:ln/>
         </p:spPr>
         <p:txBody>
-          <a:bodyPr wrap="square" lIns="0" tIns="0" rIns="0" bIns="0" rtlCol="0" anchor="ctr"/>
+          <a:bodyPr wrap="square" lIns="0" tIns="0" rIns="0" bIns="0" rtlCol="0" anchor="ctr">
+            <a:normAutofit/>
+          </a:bodyPr>
           <a:lstStyle/>
           <a:p>
             <a:pPr algn="ctr" indent="0" marL="0">
@@ -18184,7 +18657,9 @@
           <a:ln/>
         </p:spPr>
         <p:txBody>
-          <a:bodyPr wrap="square" lIns="0" tIns="0" rIns="0" bIns="0" rtlCol="0" anchor="ctr"/>
+          <a:bodyPr wrap="square" lIns="0" tIns="0" rIns="0" bIns="0" rtlCol="0" anchor="ctr">
+            <a:normAutofit/>
+          </a:bodyPr>
           <a:lstStyle/>
           <a:p>
             <a:pPr indent="0" marL="0">
@@ -18223,7 +18698,9 @@
           <a:ln/>
         </p:spPr>
         <p:txBody>
-          <a:bodyPr wrap="square" lIns="0" tIns="0" rIns="0" bIns="0" rtlCol="0" anchor="ctr"/>
+          <a:bodyPr wrap="square" lIns="0" tIns="0" rIns="0" bIns="0" rtlCol="0" anchor="ctr">
+            <a:normAutofit/>
+          </a:bodyPr>
           <a:lstStyle/>
           <a:p>
             <a:pPr indent="0" marL="0">
@@ -18313,7 +18790,9 @@
           <a:ln/>
         </p:spPr>
         <p:txBody>
-          <a:bodyPr wrap="square" lIns="0" tIns="0" rIns="0" bIns="0" rtlCol="0" anchor="ctr"/>
+          <a:bodyPr wrap="square" lIns="0" tIns="0" rIns="0" bIns="0" rtlCol="0" anchor="ctr">
+            <a:normAutofit/>
+          </a:bodyPr>
           <a:lstStyle/>
           <a:p>
             <a:pPr algn="ctr" indent="0" marL="0">
@@ -18352,7 +18831,9 @@
           <a:ln/>
         </p:spPr>
         <p:txBody>
-          <a:bodyPr wrap="square" lIns="0" tIns="0" rIns="0" bIns="0" rtlCol="0" anchor="ctr"/>
+          <a:bodyPr wrap="square" lIns="0" tIns="0" rIns="0" bIns="0" rtlCol="0" anchor="ctr">
+            <a:normAutofit/>
+          </a:bodyPr>
           <a:lstStyle/>
           <a:p>
             <a:pPr indent="0" marL="0">
@@ -18391,7 +18872,9 @@
           <a:ln/>
         </p:spPr>
         <p:txBody>
-          <a:bodyPr wrap="square" lIns="0" tIns="0" rIns="0" bIns="0" rtlCol="0" anchor="ctr"/>
+          <a:bodyPr wrap="square" lIns="0" tIns="0" rIns="0" bIns="0" rtlCol="0" anchor="ctr">
+            <a:normAutofit/>
+          </a:bodyPr>
           <a:lstStyle/>
           <a:p>
             <a:pPr indent="0" marL="0">
@@ -18481,7 +18964,9 @@
           <a:ln/>
         </p:spPr>
         <p:txBody>
-          <a:bodyPr wrap="square" lIns="0" tIns="0" rIns="0" bIns="0" rtlCol="0" anchor="ctr"/>
+          <a:bodyPr wrap="square" lIns="0" tIns="0" rIns="0" bIns="0" rtlCol="0" anchor="ctr">
+            <a:normAutofit/>
+          </a:bodyPr>
           <a:lstStyle/>
           <a:p>
             <a:pPr algn="ctr" indent="0" marL="0">
@@ -18520,7 +19005,9 @@
           <a:ln/>
         </p:spPr>
         <p:txBody>
-          <a:bodyPr wrap="square" lIns="0" tIns="0" rIns="0" bIns="0" rtlCol="0" anchor="ctr"/>
+          <a:bodyPr wrap="square" lIns="0" tIns="0" rIns="0" bIns="0" rtlCol="0" anchor="ctr">
+            <a:normAutofit/>
+          </a:bodyPr>
           <a:lstStyle/>
           <a:p>
             <a:pPr indent="0" marL="0">
@@ -18559,7 +19046,9 @@
           <a:ln/>
         </p:spPr>
         <p:txBody>
-          <a:bodyPr wrap="square" lIns="0" tIns="0" rIns="0" bIns="0" rtlCol="0" anchor="ctr"/>
+          <a:bodyPr wrap="square" lIns="0" tIns="0" rIns="0" bIns="0" rtlCol="0" anchor="ctr">
+            <a:normAutofit/>
+          </a:bodyPr>
           <a:lstStyle/>
           <a:p>
             <a:pPr indent="0" marL="0">
@@ -18649,7 +19138,9 @@
           <a:ln/>
         </p:spPr>
         <p:txBody>
-          <a:bodyPr wrap="square" lIns="0" tIns="0" rIns="0" bIns="0" rtlCol="0" anchor="ctr"/>
+          <a:bodyPr wrap="square" lIns="0" tIns="0" rIns="0" bIns="0" rtlCol="0" anchor="ctr">
+            <a:normAutofit/>
+          </a:bodyPr>
           <a:lstStyle/>
           <a:p>
             <a:pPr algn="ctr" indent="0" marL="0">
@@ -18688,7 +19179,9 @@
           <a:ln/>
         </p:spPr>
         <p:txBody>
-          <a:bodyPr wrap="square" lIns="0" tIns="0" rIns="0" bIns="0" rtlCol="0" anchor="ctr"/>
+          <a:bodyPr wrap="square" lIns="0" tIns="0" rIns="0" bIns="0" rtlCol="0" anchor="ctr">
+            <a:normAutofit/>
+          </a:bodyPr>
           <a:lstStyle/>
           <a:p>
             <a:pPr indent="0" marL="0">
@@ -18727,7 +19220,9 @@
           <a:ln/>
         </p:spPr>
         <p:txBody>
-          <a:bodyPr wrap="square" lIns="0" tIns="0" rIns="0" bIns="0" rtlCol="0" anchor="ctr"/>
+          <a:bodyPr wrap="square" lIns="0" tIns="0" rIns="0" bIns="0" rtlCol="0" anchor="ctr">
+            <a:normAutofit/>
+          </a:bodyPr>
           <a:lstStyle/>
           <a:p>
             <a:pPr indent="0" marL="0">
@@ -18766,7 +19261,9 @@
           <a:ln/>
         </p:spPr>
         <p:txBody>
-          <a:bodyPr wrap="square" lIns="0" tIns="0" rIns="0" bIns="0" rtlCol="0" anchor="t"/>
+          <a:bodyPr wrap="square" lIns="0" tIns="0" rIns="0" bIns="0" rtlCol="0" anchor="t">
+            <a:normAutofit/>
+          </a:bodyPr>
           <a:lstStyle/>
           <a:p>
             <a:pPr algn="l" marL="152400" indent="-152400">
@@ -18903,7 +19400,9 @@
           <a:ln/>
         </p:spPr>
         <p:txBody>
-          <a:bodyPr wrap="square" lIns="0" tIns="0" rIns="0" bIns="0" rtlCol="0" anchor="ctr"/>
+          <a:bodyPr wrap="square" lIns="0" tIns="0" rIns="0" bIns="0" rtlCol="0" anchor="ctr">
+            <a:normAutofit/>
+          </a:bodyPr>
           <a:lstStyle/>
           <a:p>
             <a:pPr indent="0" marL="0">
@@ -18942,7 +19441,9 @@
           <a:ln/>
         </p:spPr>
         <p:txBody>
-          <a:bodyPr wrap="square" lIns="0" tIns="0" rIns="0" bIns="0" rtlCol="0" anchor="ctr"/>
+          <a:bodyPr wrap="square" lIns="0" tIns="0" rIns="0" bIns="0" rtlCol="0" anchor="ctr">
+            <a:normAutofit/>
+          </a:bodyPr>
           <a:lstStyle/>
           <a:p>
             <a:pPr indent="0" marL="0">
@@ -18981,7 +19482,9 @@
           <a:ln/>
         </p:spPr>
         <p:txBody>
-          <a:bodyPr wrap="square" lIns="0" tIns="0" rIns="0" bIns="0" rtlCol="0" anchor="ctr"/>
+          <a:bodyPr wrap="square" lIns="0" tIns="0" rIns="0" bIns="0" rtlCol="0" anchor="ctr">
+            <a:normAutofit/>
+          </a:bodyPr>
           <a:lstStyle/>
           <a:p>
             <a:pPr algn="r" indent="0" marL="0">
@@ -19020,7 +19523,9 @@
           <a:ln/>
         </p:spPr>
         <p:txBody>
-          <a:bodyPr wrap="square" lIns="0" tIns="0" rIns="0" bIns="0" rtlCol="0" anchor="ctr"/>
+          <a:bodyPr wrap="square" lIns="0" tIns="0" rIns="0" bIns="0" rtlCol="0" anchor="ctr">
+            <a:normAutofit/>
+          </a:bodyPr>
           <a:lstStyle/>
           <a:p>
             <a:pPr indent="0" marL="0">
@@ -19035,7 +19540,7 @@
                 <a:ea typeface="微软雅黑" pitchFamily="34" charset="-122"/>
                 <a:cs typeface="微软雅黑" pitchFamily="34" charset="-120"/>
               </a:rPr>
-              <a:t>帮扶管理信息系统 v1.12.10</a:t>
+              <a:t>帮扶管理信息系统 v1.12.11</a:t>
             </a:r>
             <a:endParaRPr lang="en-US" sz="1050" dirty="0"/>
           </a:p>
@@ -19088,7 +19593,9 @@
           <a:ln/>
         </p:spPr>
         <p:txBody>
-          <a:bodyPr wrap="square" lIns="0" tIns="0" rIns="0" bIns="0" rtlCol="0" anchor="ctr"/>
+          <a:bodyPr wrap="square" lIns="0" tIns="0" rIns="0" bIns="0" rtlCol="0" anchor="ctr">
+            <a:normAutofit/>
+          </a:bodyPr>
           <a:lstStyle/>
           <a:p>
             <a:pPr indent="0" marL="0">
@@ -19127,7 +19634,9 @@
           <a:ln/>
         </p:spPr>
         <p:txBody>
-          <a:bodyPr wrap="square" lIns="0" tIns="0" rIns="0" bIns="0" rtlCol="0" anchor="ctr"/>
+          <a:bodyPr wrap="square" lIns="0" tIns="0" rIns="0" bIns="0" rtlCol="0" anchor="ctr">
+            <a:normAutofit/>
+          </a:bodyPr>
           <a:lstStyle/>
           <a:p>
             <a:pPr indent="0" marL="0">
@@ -19166,7 +19675,9 @@
           <a:ln/>
         </p:spPr>
         <p:txBody>
-          <a:bodyPr wrap="square" lIns="0" tIns="0" rIns="0" bIns="0" rtlCol="0" anchor="ctr"/>
+          <a:bodyPr wrap="square" lIns="0" tIns="0" rIns="0" bIns="0" rtlCol="0" anchor="ctr">
+            <a:normAutofit/>
+          </a:bodyPr>
           <a:lstStyle/>
           <a:p>
             <a:pPr indent="0" marL="0">
@@ -19234,7 +19745,9 @@
           <a:ln/>
         </p:spPr>
         <p:txBody>
-          <a:bodyPr wrap="square" lIns="0" tIns="0" rIns="0" bIns="0" rtlCol="0" anchor="ctr"/>
+          <a:bodyPr wrap="square" lIns="0" tIns="0" rIns="0" bIns="0" rtlCol="0" anchor="ctr">
+            <a:normAutofit/>
+          </a:bodyPr>
           <a:lstStyle/>
           <a:p>
             <a:pPr indent="0" marL="0">
@@ -19273,7 +19786,9 @@
           <a:ln/>
         </p:spPr>
         <p:txBody>
-          <a:bodyPr wrap="square" lIns="0" tIns="0" rIns="0" bIns="0" rtlCol="0" anchor="ctr"/>
+          <a:bodyPr wrap="square" lIns="0" tIns="0" rIns="0" bIns="0" rtlCol="0" anchor="ctr">
+            <a:normAutofit/>
+          </a:bodyPr>
           <a:lstStyle/>
           <a:p>
             <a:pPr indent="0" marL="0">
@@ -19312,7 +19827,9 @@
           <a:ln/>
         </p:spPr>
         <p:txBody>
-          <a:bodyPr wrap="square" lIns="0" tIns="0" rIns="0" bIns="0" rtlCol="0" anchor="ctr"/>
+          <a:bodyPr wrap="square" lIns="0" tIns="0" rIns="0" bIns="0" rtlCol="0" anchor="ctr">
+            <a:normAutofit/>
+          </a:bodyPr>
           <a:lstStyle/>
           <a:p>
             <a:pPr indent="0" marL="0">
@@ -19380,7 +19897,9 @@
           <a:ln/>
         </p:spPr>
         <p:txBody>
-          <a:bodyPr wrap="square" lIns="0" tIns="0" rIns="0" bIns="0" rtlCol="0" anchor="ctr"/>
+          <a:bodyPr wrap="square" lIns="0" tIns="0" rIns="0" bIns="0" rtlCol="0" anchor="ctr">
+            <a:normAutofit/>
+          </a:bodyPr>
           <a:lstStyle/>
           <a:p>
             <a:pPr indent="0" marL="0">
@@ -19419,7 +19938,9 @@
           <a:ln/>
         </p:spPr>
         <p:txBody>
-          <a:bodyPr wrap="square" lIns="0" tIns="0" rIns="0" bIns="0" rtlCol="0" anchor="ctr"/>
+          <a:bodyPr wrap="square" lIns="0" tIns="0" rIns="0" bIns="0" rtlCol="0" anchor="ctr">
+            <a:normAutofit/>
+          </a:bodyPr>
           <a:lstStyle/>
           <a:p>
             <a:pPr indent="0" marL="0">
@@ -19458,7 +19979,9 @@
           <a:ln/>
         </p:spPr>
         <p:txBody>
-          <a:bodyPr wrap="square" lIns="0" tIns="0" rIns="0" bIns="0" rtlCol="0" anchor="ctr"/>
+          <a:bodyPr wrap="square" lIns="0" tIns="0" rIns="0" bIns="0" rtlCol="0" anchor="ctr">
+            <a:normAutofit/>
+          </a:bodyPr>
           <a:lstStyle/>
           <a:p>
             <a:pPr indent="0" marL="0">
@@ -19526,7 +20049,9 @@
           <a:ln/>
         </p:spPr>
         <p:txBody>
-          <a:bodyPr wrap="square" lIns="0" tIns="0" rIns="0" bIns="0" rtlCol="0" anchor="ctr"/>
+          <a:bodyPr wrap="square" lIns="0" tIns="0" rIns="0" bIns="0" rtlCol="0" anchor="ctr">
+            <a:normAutofit/>
+          </a:bodyPr>
           <a:lstStyle/>
           <a:p>
             <a:pPr indent="0" marL="0">
@@ -19565,7 +20090,9 @@
           <a:ln/>
         </p:spPr>
         <p:txBody>
-          <a:bodyPr wrap="square" lIns="0" tIns="0" rIns="0" bIns="0" rtlCol="0" anchor="t"/>
+          <a:bodyPr wrap="square" lIns="0" tIns="0" rIns="0" bIns="0" rtlCol="0" anchor="t">
+            <a:normAutofit/>
+          </a:bodyPr>
           <a:lstStyle/>
           <a:p>
             <a:pPr algn="l" marL="152400" indent="-152400">
@@ -19702,7 +20229,9 @@
           <a:ln/>
         </p:spPr>
         <p:txBody>
-          <a:bodyPr wrap="square" lIns="0" tIns="0" rIns="0" bIns="0" rtlCol="0" anchor="ctr"/>
+          <a:bodyPr wrap="square" lIns="0" tIns="0" rIns="0" bIns="0" rtlCol="0" anchor="ctr">
+            <a:normAutofit/>
+          </a:bodyPr>
           <a:lstStyle/>
           <a:p>
             <a:pPr indent="0" marL="0">
@@ -19741,7 +20270,9 @@
           <a:ln/>
         </p:spPr>
         <p:txBody>
-          <a:bodyPr wrap="square" lIns="0" tIns="0" rIns="0" bIns="0" rtlCol="0" anchor="ctr"/>
+          <a:bodyPr wrap="square" lIns="0" tIns="0" rIns="0" bIns="0" rtlCol="0" anchor="ctr">
+            <a:normAutofit/>
+          </a:bodyPr>
           <a:lstStyle/>
           <a:p>
             <a:pPr indent="0" marL="0">
@@ -19780,7 +20311,9 @@
           <a:ln/>
         </p:spPr>
         <p:txBody>
-          <a:bodyPr wrap="square" lIns="0" tIns="0" rIns="0" bIns="0" rtlCol="0" anchor="ctr"/>
+          <a:bodyPr wrap="square" lIns="0" tIns="0" rIns="0" bIns="0" rtlCol="0" anchor="ctr">
+            <a:normAutofit/>
+          </a:bodyPr>
           <a:lstStyle/>
           <a:p>
             <a:pPr algn="r" indent="0" marL="0">
@@ -19819,7 +20352,9 @@
           <a:ln/>
         </p:spPr>
         <p:txBody>
-          <a:bodyPr wrap="square" lIns="0" tIns="0" rIns="0" bIns="0" rtlCol="0" anchor="ctr"/>
+          <a:bodyPr wrap="square" lIns="0" tIns="0" rIns="0" bIns="0" rtlCol="0" anchor="ctr">
+            <a:normAutofit/>
+          </a:bodyPr>
           <a:lstStyle/>
           <a:p>
             <a:pPr indent="0" marL="0">
@@ -19834,7 +20369,7 @@
                 <a:ea typeface="微软雅黑" pitchFamily="34" charset="-122"/>
                 <a:cs typeface="微软雅黑" pitchFamily="34" charset="-120"/>
               </a:rPr>
-              <a:t>帮扶管理信息系统 v1.12.10</a:t>
+              <a:t>帮扶管理信息系统 v1.12.11</a:t>
             </a:r>
             <a:endParaRPr lang="en-US" sz="1050" dirty="0"/>
           </a:p>
@@ -19887,7 +20422,9 @@
           <a:ln/>
         </p:spPr>
         <p:txBody>
-          <a:bodyPr wrap="square" lIns="0" tIns="0" rIns="0" bIns="0" rtlCol="0" anchor="ctr"/>
+          <a:bodyPr wrap="square" lIns="0" tIns="0" rIns="0" bIns="0" rtlCol="0" anchor="ctr">
+            <a:normAutofit/>
+          </a:bodyPr>
           <a:lstStyle/>
           <a:p>
             <a:pPr indent="0" marL="0">
@@ -19916,12 +20453,12 @@
         </p:nvSpPr>
         <p:spPr>
           <a:xfrm>
-            <a:off x="868680" y="2331720"/>
-            <a:ext cx="1737360" cy="502920"/>
+            <a:off x="868680" y="2286000"/>
+            <a:ext cx="1965960" cy="603504"/>
           </a:xfrm>
           <a:prstGeom prst="roundRect">
             <a:avLst>
-              <a:gd name="adj" fmla="val 9091"/>
+              <a:gd name="adj" fmla="val 7576"/>
             </a:avLst>
           </a:prstGeom>
           <a:solidFill>
@@ -19938,24 +20475,26 @@
         </p:nvSpPr>
         <p:spPr>
           <a:xfrm>
-            <a:off x="868680" y="2331720"/>
-            <a:ext cx="1737360" cy="502920"/>
-          </a:xfrm>
-          <a:prstGeom prst="rect">
-            <a:avLst/>
-          </a:prstGeom>
-          <a:noFill/>
-          <a:ln/>
-        </p:spPr>
-        <p:txBody>
-          <a:bodyPr wrap="square" lIns="0" tIns="0" rIns="0" bIns="0" rtlCol="0" anchor="ctr"/>
+            <a:off x="868680" y="2286000"/>
+            <a:ext cx="1965960" cy="603504"/>
+          </a:xfrm>
+          <a:prstGeom prst="rect">
+            <a:avLst/>
+          </a:prstGeom>
+          <a:noFill/>
+          <a:ln/>
+        </p:spPr>
+        <p:txBody>
+          <a:bodyPr wrap="square" lIns="0" tIns="0" rIns="0" bIns="0" rtlCol="0" anchor="ctr">
+            <a:normAutofit/>
+          </a:bodyPr>
           <a:lstStyle/>
           <a:p>
             <a:pPr algn="ctr" indent="0" marL="0">
               <a:buNone/>
             </a:pPr>
             <a:r>
-              <a:rPr lang="en-US" sz="1150" b="1" dirty="0">
+              <a:rPr lang="en-US" sz="1100" b="1" dirty="0">
                 <a:solidFill>
                   <a:srgbClr val="1A2E24"/>
                 </a:solidFill>
@@ -19965,7 +20504,7 @@
               </a:rPr>
               <a:t>ORM 写入 · 明文</a:t>
             </a:r>
-            <a:endParaRPr lang="en-US" sz="1150" dirty="0"/>
+            <a:endParaRPr lang="en-US" sz="1100" dirty="0"/>
           </a:p>
         </p:txBody>
       </p:sp>
@@ -19977,8 +20516,8 @@
         </p:nvSpPr>
         <p:spPr>
           <a:xfrm>
-            <a:off x="2651760" y="2578608"/>
-            <a:ext cx="274320" cy="0"/>
+            <a:off x="2871216" y="2587752"/>
+            <a:ext cx="219456" cy="0"/>
           </a:xfrm>
           <a:prstGeom prst="line">
             <a:avLst/>
@@ -20001,12 +20540,12 @@
         </p:nvSpPr>
         <p:spPr>
           <a:xfrm>
-            <a:off x="868680" y="2990088"/>
-            <a:ext cx="1737360" cy="502920"/>
+            <a:off x="868680" y="2999232"/>
+            <a:ext cx="1965960" cy="603504"/>
           </a:xfrm>
           <a:prstGeom prst="roundRect">
             <a:avLst>
-              <a:gd name="adj" fmla="val 9091"/>
+              <a:gd name="adj" fmla="val 7576"/>
             </a:avLst>
           </a:prstGeom>
           <a:solidFill>
@@ -20023,24 +20562,26 @@
         </p:nvSpPr>
         <p:spPr>
           <a:xfrm>
-            <a:off x="868680" y="2990088"/>
-            <a:ext cx="1737360" cy="502920"/>
-          </a:xfrm>
-          <a:prstGeom prst="rect">
-            <a:avLst/>
-          </a:prstGeom>
-          <a:noFill/>
-          <a:ln/>
-        </p:spPr>
-        <p:txBody>
-          <a:bodyPr wrap="square" lIns="0" tIns="0" rIns="0" bIns="0" rtlCol="0" anchor="ctr"/>
+            <a:off x="868680" y="2999232"/>
+            <a:ext cx="1965960" cy="603504"/>
+          </a:xfrm>
+          <a:prstGeom prst="rect">
+            <a:avLst/>
+          </a:prstGeom>
+          <a:noFill/>
+          <a:ln/>
+        </p:spPr>
+        <p:txBody>
+          <a:bodyPr wrap="square" lIns="0" tIns="0" rIns="0" bIns="0" rtlCol="0" anchor="ctr">
+            <a:normAutofit/>
+          </a:bodyPr>
           <a:lstStyle/>
           <a:p>
             <a:pPr algn="ctr" indent="0" marL="0">
               <a:buNone/>
             </a:pPr>
             <a:r>
-              <a:rPr lang="en-US" sz="1150" b="1" dirty="0">
+              <a:rPr lang="en-US" sz="1100" b="1" dirty="0">
                 <a:solidFill>
                   <a:srgbClr val="1A2E24"/>
                 </a:solidFill>
@@ -20050,7 +20591,7 @@
               </a:rPr>
               <a:t>EncryptedText · AES-SIV 加密</a:t>
             </a:r>
-            <a:endParaRPr lang="en-US" sz="1150" dirty="0"/>
+            <a:endParaRPr lang="en-US" sz="1100" dirty="0"/>
           </a:p>
         </p:txBody>
       </p:sp>
@@ -20062,8 +20603,8 @@
         </p:nvSpPr>
         <p:spPr>
           <a:xfrm>
-            <a:off x="2651760" y="3236976"/>
-            <a:ext cx="274320" cy="0"/>
+            <a:off x="2871216" y="3300984"/>
+            <a:ext cx="219456" cy="0"/>
           </a:xfrm>
           <a:prstGeom prst="line">
             <a:avLst/>
@@ -20086,12 +20627,12 @@
         </p:nvSpPr>
         <p:spPr>
           <a:xfrm>
-            <a:off x="868680" y="3648456"/>
-            <a:ext cx="1737360" cy="502920"/>
+            <a:off x="868680" y="3712464"/>
+            <a:ext cx="1965960" cy="603504"/>
           </a:xfrm>
           <a:prstGeom prst="roundRect">
             <a:avLst>
-              <a:gd name="adj" fmla="val 9091"/>
+              <a:gd name="adj" fmla="val 7576"/>
             </a:avLst>
           </a:prstGeom>
           <a:solidFill>
@@ -20108,24 +20649,26 @@
         </p:nvSpPr>
         <p:spPr>
           <a:xfrm>
-            <a:off x="868680" y="3648456"/>
-            <a:ext cx="1737360" cy="502920"/>
-          </a:xfrm>
-          <a:prstGeom prst="rect">
-            <a:avLst/>
-          </a:prstGeom>
-          <a:noFill/>
-          <a:ln/>
-        </p:spPr>
-        <p:txBody>
-          <a:bodyPr wrap="square" lIns="0" tIns="0" rIns="0" bIns="0" rtlCol="0" anchor="ctr"/>
+            <a:off x="868680" y="3712464"/>
+            <a:ext cx="1965960" cy="603504"/>
+          </a:xfrm>
+          <a:prstGeom prst="rect">
+            <a:avLst/>
+          </a:prstGeom>
+          <a:noFill/>
+          <a:ln/>
+        </p:spPr>
+        <p:txBody>
+          <a:bodyPr wrap="square" lIns="0" tIns="0" rIns="0" bIns="0" rtlCol="0" anchor="ctr">
+            <a:normAutofit/>
+          </a:bodyPr>
           <a:lstStyle/>
           <a:p>
             <a:pPr algn="ctr" indent="0" marL="0">
               <a:buNone/>
             </a:pPr>
             <a:r>
-              <a:rPr lang="en-US" sz="1150" b="1" dirty="0">
+              <a:rPr lang="en-US" sz="1100" b="1" dirty="0">
                 <a:solidFill>
                   <a:srgbClr val="FFFFFF"/>
                 </a:solidFill>
@@ -20135,7 +20678,7 @@
               </a:rPr>
               <a:t>SQLite · enc.v1: 密文</a:t>
             </a:r>
-            <a:endParaRPr lang="en-US" sz="1150" dirty="0"/>
+            <a:endParaRPr lang="en-US" sz="1100" dirty="0"/>
           </a:p>
         </p:txBody>
       </p:sp>
@@ -20147,17 +20690,19 @@
         </p:nvSpPr>
         <p:spPr>
           <a:xfrm>
-            <a:off x="3246120" y="2331720"/>
-            <a:ext cx="3063240" cy="1920240"/>
-          </a:xfrm>
-          <a:prstGeom prst="rect">
-            <a:avLst/>
-          </a:prstGeom>
-          <a:noFill/>
-          <a:ln/>
-        </p:spPr>
-        <p:txBody>
-          <a:bodyPr wrap="square" lIns="0" tIns="0" rIns="0" bIns="0" rtlCol="0" anchor="ctr"/>
+            <a:off x="3154680" y="2331720"/>
+            <a:ext cx="2697480" cy="1920240"/>
+          </a:xfrm>
+          <a:prstGeom prst="rect">
+            <a:avLst/>
+          </a:prstGeom>
+          <a:noFill/>
+          <a:ln/>
+        </p:spPr>
+        <p:txBody>
+          <a:bodyPr wrap="square" lIns="0" tIns="0" rIns="0" bIns="0" rtlCol="0" anchor="ctr">
+            <a:normAutofit/>
+          </a:bodyPr>
           <a:lstStyle/>
           <a:p>
             <a:pPr marL="152400" indent="-152400">
@@ -20250,7 +20795,9 @@
           <a:ln/>
         </p:spPr>
         <p:txBody>
-          <a:bodyPr wrap="square" lIns="0" tIns="0" rIns="0" bIns="0" rtlCol="0" anchor="ctr"/>
+          <a:bodyPr wrap="square" lIns="0" tIns="0" rIns="0" bIns="0" rtlCol="0" anchor="ctr">
+            <a:normAutofit/>
+          </a:bodyPr>
           <a:lstStyle/>
           <a:p>
             <a:pPr indent="0" marL="0">
@@ -20289,7 +20836,9 @@
           <a:ln/>
         </p:spPr>
         <p:txBody>
-          <a:bodyPr wrap="square" lIns="0" tIns="0" rIns="0" bIns="0" rtlCol="0" anchor="t"/>
+          <a:bodyPr wrap="square" lIns="0" tIns="0" rIns="0" bIns="0" rtlCol="0" anchor="t">
+            <a:normAutofit/>
+          </a:bodyPr>
           <a:lstStyle/>
           <a:p>
             <a:pPr algn="l" marL="152400" indent="-152400">
@@ -20424,7 +20973,9 @@
           <a:ln/>
         </p:spPr>
         <p:txBody>
-          <a:bodyPr wrap="square" lIns="0" tIns="0" rIns="0" bIns="0" rtlCol="0" anchor="ctr"/>
+          <a:bodyPr wrap="square" lIns="0" tIns="0" rIns="0" bIns="0" rtlCol="0" anchor="ctr">
+            <a:normAutofit/>
+          </a:bodyPr>
           <a:lstStyle/>
           <a:p>
             <a:pPr indent="0" marL="0">
@@ -20463,7 +21014,9 @@
           <a:ln/>
         </p:spPr>
         <p:txBody>
-          <a:bodyPr wrap="square" lIns="0" tIns="0" rIns="0" bIns="0" rtlCol="0" anchor="ctr"/>
+          <a:bodyPr wrap="square" lIns="0" tIns="0" rIns="0" bIns="0" rtlCol="0" anchor="ctr">
+            <a:normAutofit/>
+          </a:bodyPr>
           <a:lstStyle/>
           <a:p>
             <a:pPr indent="0" marL="0">
@@ -20554,7 +21107,9 @@
           <a:ln/>
         </p:spPr>
         <p:txBody>
-          <a:bodyPr wrap="square" lIns="0" tIns="0" rIns="0" bIns="0" rtlCol="0" anchor="ctr"/>
+          <a:bodyPr wrap="square" lIns="0" tIns="0" rIns="0" bIns="0" rtlCol="0" anchor="ctr">
+            <a:normAutofit/>
+          </a:bodyPr>
           <a:lstStyle/>
           <a:p>
             <a:pPr indent="0" marL="0">
@@ -20593,7 +21148,9 @@
           <a:ln/>
         </p:spPr>
         <p:txBody>
-          <a:bodyPr wrap="square" lIns="0" tIns="0" rIns="0" bIns="0" rtlCol="0" anchor="ctr"/>
+          <a:bodyPr wrap="square" lIns="0" tIns="0" rIns="0" bIns="0" rtlCol="0" anchor="ctr">
+            <a:normAutofit/>
+          </a:bodyPr>
           <a:lstStyle/>
           <a:p>
             <a:pPr indent="0" marL="0">
@@ -20632,7 +21189,9 @@
           <a:ln/>
         </p:spPr>
         <p:txBody>
-          <a:bodyPr wrap="square" lIns="0" tIns="0" rIns="0" bIns="0" rtlCol="0" anchor="ctr"/>
+          <a:bodyPr wrap="square" lIns="0" tIns="0" rIns="0" bIns="0" rtlCol="0" anchor="ctr">
+            <a:normAutofit/>
+          </a:bodyPr>
           <a:lstStyle/>
           <a:p>
             <a:pPr algn="r" indent="0" marL="0">
@@ -20671,7 +21230,9 @@
           <a:ln/>
         </p:spPr>
         <p:txBody>
-          <a:bodyPr wrap="square" lIns="0" tIns="0" rIns="0" bIns="0" rtlCol="0" anchor="ctr"/>
+          <a:bodyPr wrap="square" lIns="0" tIns="0" rIns="0" bIns="0" rtlCol="0" anchor="ctr">
+            <a:normAutofit/>
+          </a:bodyPr>
           <a:lstStyle/>
           <a:p>
             <a:pPr indent="0" marL="0">
@@ -20686,7 +21247,7 @@
                 <a:ea typeface="微软雅黑" pitchFamily="34" charset="-122"/>
                 <a:cs typeface="微软雅黑" pitchFamily="34" charset="-120"/>
               </a:rPr>
-              <a:t>帮扶管理信息系统 v1.12.10</a:t>
+              <a:t>帮扶管理信息系统 v1.12.11</a:t>
             </a:r>
             <a:endParaRPr lang="en-US" sz="1050" dirty="0"/>
           </a:p>
@@ -20730,7 +21291,9 @@
           <a:ln/>
         </p:spPr>
         <p:txBody>
-          <a:bodyPr wrap="square" lIns="0" tIns="0" rIns="0" bIns="0" rtlCol="0" anchor="ctr"/>
+          <a:bodyPr wrap="square" lIns="0" tIns="0" rIns="0" bIns="0" rtlCol="0" anchor="ctr">
+            <a:normAutofit/>
+          </a:bodyPr>
           <a:lstStyle/>
           <a:p>
             <a:pPr indent="0" marL="0">
@@ -20769,7 +21332,9 @@
           <a:ln/>
         </p:spPr>
         <p:txBody>
-          <a:bodyPr wrap="square" lIns="0" tIns="0" rIns="0" bIns="0" rtlCol="0" anchor="ctr"/>
+          <a:bodyPr wrap="square" lIns="0" tIns="0" rIns="0" bIns="0" rtlCol="0" anchor="ctr">
+            <a:normAutofit/>
+          </a:bodyPr>
           <a:lstStyle/>
           <a:p>
             <a:pPr indent="0" marL="0">
@@ -20828,7 +21393,9 @@
           <a:ln/>
         </p:spPr>
         <p:txBody>
-          <a:bodyPr wrap="square" lIns="0" tIns="0" rIns="0" bIns="0" rtlCol="0" anchor="ctr"/>
+          <a:bodyPr wrap="square" lIns="0" tIns="0" rIns="0" bIns="0" rtlCol="0" anchor="ctr">
+            <a:normAutofit/>
+          </a:bodyPr>
           <a:lstStyle/>
           <a:p>
             <a:pPr indent="0" marL="0">
@@ -20867,7 +21434,9 @@
           <a:ln/>
         </p:spPr>
         <p:txBody>
-          <a:bodyPr wrap="square" lIns="0" tIns="0" rIns="0" bIns="0" rtlCol="0" anchor="ctr"/>
+          <a:bodyPr wrap="square" lIns="0" tIns="0" rIns="0" bIns="0" rtlCol="0" anchor="ctr">
+            <a:normAutofit/>
+          </a:bodyPr>
           <a:lstStyle/>
           <a:p>
             <a:pPr indent="0" marL="0">
@@ -20926,7 +21495,9 @@
           <a:ln/>
         </p:spPr>
         <p:txBody>
-          <a:bodyPr wrap="square" lIns="0" tIns="0" rIns="0" bIns="0" rtlCol="0" anchor="ctr"/>
+          <a:bodyPr wrap="square" lIns="0" tIns="0" rIns="0" bIns="0" rtlCol="0" anchor="ctr">
+            <a:normAutofit/>
+          </a:bodyPr>
           <a:lstStyle/>
           <a:p>
             <a:pPr indent="0" marL="0">
@@ -20965,7 +21536,9 @@
           <a:ln/>
         </p:spPr>
         <p:txBody>
-          <a:bodyPr wrap="square" lIns="0" tIns="0" rIns="0" bIns="0" rtlCol="0" anchor="ctr"/>
+          <a:bodyPr wrap="square" lIns="0" tIns="0" rIns="0" bIns="0" rtlCol="0" anchor="ctr">
+            <a:normAutofit/>
+          </a:bodyPr>
           <a:lstStyle/>
           <a:p>
             <a:pPr indent="0" marL="0">
@@ -21024,7 +21597,9 @@
           <a:ln/>
         </p:spPr>
         <p:txBody>
-          <a:bodyPr wrap="square" lIns="0" tIns="0" rIns="0" bIns="0" rtlCol="0" anchor="ctr"/>
+          <a:bodyPr wrap="square" lIns="0" tIns="0" rIns="0" bIns="0" rtlCol="0" anchor="ctr">
+            <a:normAutofit/>
+          </a:bodyPr>
           <a:lstStyle/>
           <a:p>
             <a:pPr indent="0" marL="0">
@@ -21063,7 +21638,9 @@
           <a:ln/>
         </p:spPr>
         <p:txBody>
-          <a:bodyPr wrap="square" lIns="0" tIns="0" rIns="0" bIns="0" rtlCol="0" anchor="ctr"/>
+          <a:bodyPr wrap="square" lIns="0" tIns="0" rIns="0" bIns="0" rtlCol="0" anchor="ctr">
+            <a:normAutofit/>
+          </a:bodyPr>
           <a:lstStyle/>
           <a:p>
             <a:pPr indent="0" marL="0">
@@ -21122,7 +21699,9 @@
           <a:ln/>
         </p:spPr>
         <p:txBody>
-          <a:bodyPr wrap="square" lIns="0" tIns="0" rIns="0" bIns="0" rtlCol="0" anchor="ctr"/>
+          <a:bodyPr wrap="square" lIns="0" tIns="0" rIns="0" bIns="0" rtlCol="0" anchor="ctr">
+            <a:normAutofit/>
+          </a:bodyPr>
           <a:lstStyle/>
           <a:p>
             <a:pPr indent="0" marL="0">
@@ -21161,7 +21740,9 @@
           <a:ln/>
         </p:spPr>
         <p:txBody>
-          <a:bodyPr wrap="square" lIns="0" tIns="0" rIns="0" bIns="0" rtlCol="0" anchor="ctr"/>
+          <a:bodyPr wrap="square" lIns="0" tIns="0" rIns="0" bIns="0" rtlCol="0" anchor="ctr">
+            <a:normAutofit/>
+          </a:bodyPr>
           <a:lstStyle/>
           <a:p>
             <a:pPr indent="0" marL="0">
@@ -21220,7 +21801,9 @@
           <a:ln/>
         </p:spPr>
         <p:txBody>
-          <a:bodyPr wrap="square" lIns="0" tIns="0" rIns="0" bIns="0" rtlCol="0" anchor="ctr"/>
+          <a:bodyPr wrap="square" lIns="0" tIns="0" rIns="0" bIns="0" rtlCol="0" anchor="ctr">
+            <a:normAutofit/>
+          </a:bodyPr>
           <a:lstStyle/>
           <a:p>
             <a:pPr indent="0" marL="0">
@@ -21259,7 +21842,9 @@
           <a:ln/>
         </p:spPr>
         <p:txBody>
-          <a:bodyPr wrap="square" lIns="0" tIns="0" rIns="0" bIns="0" rtlCol="0" anchor="ctr"/>
+          <a:bodyPr wrap="square" lIns="0" tIns="0" rIns="0" bIns="0" rtlCol="0" anchor="ctr">
+            <a:normAutofit/>
+          </a:bodyPr>
           <a:lstStyle/>
           <a:p>
             <a:pPr indent="0" marL="0">
@@ -21321,16 +21906,18 @@
         <p:spPr>
           <a:xfrm>
             <a:off x="502920" y="822960"/>
-            <a:ext cx="4206240" cy="3108960"/>
-          </a:xfrm>
-          <a:prstGeom prst="rect">
-            <a:avLst/>
-          </a:prstGeom>
-          <a:noFill/>
-          <a:ln/>
-        </p:spPr>
-        <p:txBody>
-          <a:bodyPr wrap="square" lIns="0" tIns="0" rIns="0" bIns="0" rtlCol="0" anchor="ctr"/>
+            <a:ext cx="4206240" cy="4315121"/>
+          </a:xfrm>
+          <a:prstGeom prst="rect">
+            <a:avLst/>
+          </a:prstGeom>
+          <a:noFill/>
+          <a:ln/>
+        </p:spPr>
+        <p:txBody>
+          <a:bodyPr wrap="square" lIns="0" tIns="0" rIns="0" bIns="0" rtlCol="0" anchor="ctr">
+            <a:normAutofit/>
+          </a:bodyPr>
           <a:lstStyle/>
           <a:p>
             <a:pPr indent="0" marL="0">
@@ -21360,16 +21947,18 @@
         <p:spPr>
           <a:xfrm>
             <a:off x="914400" y="3977640"/>
-            <a:ext cx="10332720" cy="868680"/>
-          </a:xfrm>
-          <a:prstGeom prst="rect">
-            <a:avLst/>
-          </a:prstGeom>
-          <a:noFill/>
-          <a:ln/>
-        </p:spPr>
-        <p:txBody>
-          <a:bodyPr wrap="square" lIns="0" tIns="0" rIns="0" bIns="0" rtlCol="0" anchor="ctr"/>
+            <a:ext cx="10332720" cy="877655"/>
+          </a:xfrm>
+          <a:prstGeom prst="rect">
+            <a:avLst/>
+          </a:prstGeom>
+          <a:noFill/>
+          <a:ln/>
+        </p:spPr>
+        <p:txBody>
+          <a:bodyPr wrap="square" lIns="0" tIns="0" rIns="0" bIns="0" rtlCol="0" anchor="ctr">
+            <a:normAutofit/>
+          </a:bodyPr>
           <a:lstStyle/>
           <a:p>
             <a:pPr indent="0" marL="0">
@@ -21408,7 +21997,9 @@
           <a:ln/>
         </p:spPr>
         <p:txBody>
-          <a:bodyPr wrap="square" lIns="0" tIns="0" rIns="0" bIns="0" rtlCol="0" anchor="ctr"/>
+          <a:bodyPr wrap="square" lIns="0" tIns="0" rIns="0" bIns="0" rtlCol="0" anchor="ctr">
+            <a:normAutofit/>
+          </a:bodyPr>
           <a:lstStyle/>
           <a:p>
             <a:pPr indent="0" marL="0">
@@ -21447,10 +22038,12 @@
           <a:ln/>
         </p:spPr>
         <p:txBody>
-          <a:bodyPr wrap="square" lIns="0" tIns="0" rIns="0" bIns="0" rtlCol="0" anchor="t"/>
-          <a:lstStyle/>
-          <a:p>
-            <a:pPr marL="152400" indent="-152400">
+          <a:bodyPr wrap="square" lIns="0" tIns="0" rIns="0" bIns="0" rtlCol="0" anchor="t">
+            <a:normAutofit/>
+          </a:bodyPr>
+          <a:lstStyle/>
+          <a:p>
+            <a:pPr algn="l" marL="152400" indent="-152400">
               <a:spcAft>
                 <a:spcPts val="1000"/>
               </a:spcAft>
@@ -21471,7 +22064,7 @@
             <a:endParaRPr lang="en-US" sz="1400" dirty="0"/>
           </a:p>
           <a:p>
-            <a:pPr marL="152400" indent="-152400">
+            <a:pPr algn="l" marL="152400" indent="-152400">
               <a:spcAft>
                 <a:spcPts val="1000"/>
               </a:spcAft>
@@ -21492,7 +22085,7 @@
             <a:endParaRPr lang="en-US" sz="1400" dirty="0"/>
           </a:p>
           <a:p>
-            <a:pPr marL="152400" indent="-152400">
+            <a:pPr algn="l" marL="152400" indent="-152400">
               <a:spcAft>
                 <a:spcPts val="1000"/>
               </a:spcAft>
@@ -21513,7 +22106,7 @@
             <a:endParaRPr lang="en-US" sz="1400" dirty="0"/>
           </a:p>
           <a:p>
-            <a:pPr marL="152400" indent="-152400">
+            <a:pPr algn="l" marL="152400" indent="-152400">
               <a:spcAft>
                 <a:spcPts val="1000"/>
               </a:spcAft>
@@ -21553,7 +22146,9 @@
           <a:ln/>
         </p:spPr>
         <p:txBody>
-          <a:bodyPr wrap="square" lIns="0" tIns="0" rIns="0" bIns="0" rtlCol="0" anchor="ctr"/>
+          <a:bodyPr wrap="square" lIns="0" tIns="0" rIns="0" bIns="0" rtlCol="0" anchor="ctr">
+            <a:normAutofit/>
+          </a:bodyPr>
           <a:lstStyle/>
           <a:p>
             <a:pPr algn="r" indent="0" marL="0">
@@ -21644,7 +22239,9 @@
           <a:ln/>
         </p:spPr>
         <p:txBody>
-          <a:bodyPr wrap="square" lIns="0" tIns="0" rIns="0" bIns="0" rtlCol="0" anchor="ctr"/>
+          <a:bodyPr wrap="square" lIns="0" tIns="0" rIns="0" bIns="0" rtlCol="0" anchor="ctr">
+            <a:normAutofit/>
+          </a:bodyPr>
           <a:lstStyle/>
           <a:p>
             <a:pPr indent="0" marL="0">
@@ -21683,7 +22280,9 @@
           <a:ln/>
         </p:spPr>
         <p:txBody>
-          <a:bodyPr wrap="square" lIns="0" tIns="0" rIns="0" bIns="0" rtlCol="0" anchor="ctr"/>
+          <a:bodyPr wrap="square" lIns="0" tIns="0" rIns="0" bIns="0" rtlCol="0" anchor="ctr">
+            <a:normAutofit/>
+          </a:bodyPr>
           <a:lstStyle/>
           <a:p>
             <a:pPr indent="0" marL="0">
@@ -21722,7 +22321,9 @@
           <a:ln/>
         </p:spPr>
         <p:txBody>
-          <a:bodyPr wrap="square" lIns="0" tIns="0" rIns="0" bIns="0" rtlCol="0" anchor="ctr"/>
+          <a:bodyPr wrap="square" lIns="0" tIns="0" rIns="0" bIns="0" rtlCol="0" anchor="ctr">
+            <a:normAutofit/>
+          </a:bodyPr>
           <a:lstStyle/>
           <a:p>
             <a:pPr algn="r" indent="0" marL="0">
@@ -21761,7 +22362,9 @@
           <a:ln/>
         </p:spPr>
         <p:txBody>
-          <a:bodyPr wrap="square" lIns="0" tIns="0" rIns="0" bIns="0" rtlCol="0" anchor="ctr"/>
+          <a:bodyPr wrap="square" lIns="0" tIns="0" rIns="0" bIns="0" rtlCol="0" anchor="ctr">
+            <a:normAutofit/>
+          </a:bodyPr>
           <a:lstStyle/>
           <a:p>
             <a:pPr indent="0" marL="0">
@@ -21776,7 +22379,7 @@
                 <a:ea typeface="微软雅黑" pitchFamily="34" charset="-122"/>
                 <a:cs typeface="微软雅黑" pitchFamily="34" charset="-120"/>
               </a:rPr>
-              <a:t>帮扶管理信息系统 v1.12.10</a:t>
+              <a:t>帮扶管理信息系统 v1.12.11</a:t>
             </a:r>
             <a:endParaRPr lang="en-US" sz="1050" dirty="0"/>
           </a:p>
@@ -21820,7 +22423,9 @@
           <a:ln/>
         </p:spPr>
         <p:txBody>
-          <a:bodyPr wrap="square" lIns="0" tIns="0" rIns="0" bIns="0" rtlCol="0" anchor="ctr"/>
+          <a:bodyPr wrap="square" lIns="0" tIns="0" rIns="0" bIns="0" rtlCol="0" anchor="ctr">
+            <a:normAutofit/>
+          </a:bodyPr>
           <a:lstStyle/>
           <a:p>
             <a:pPr indent="0" marL="0">
@@ -21879,7 +22484,9 @@
           <a:ln/>
         </p:spPr>
         <p:txBody>
-          <a:bodyPr wrap="square" lIns="0" tIns="0" rIns="0" bIns="0" rtlCol="0" anchor="ctr"/>
+          <a:bodyPr wrap="square" lIns="0" tIns="0" rIns="0" bIns="0" rtlCol="0" anchor="ctr">
+            <a:normAutofit/>
+          </a:bodyPr>
           <a:lstStyle/>
           <a:p>
             <a:pPr indent="0" marL="0">
@@ -21938,7 +22545,9 @@
           <a:ln/>
         </p:spPr>
         <p:txBody>
-          <a:bodyPr wrap="square" lIns="0" tIns="0" rIns="0" bIns="0" rtlCol="0" anchor="ctr"/>
+          <a:bodyPr wrap="square" lIns="0" tIns="0" rIns="0" bIns="0" rtlCol="0" anchor="ctr">
+            <a:normAutofit/>
+          </a:bodyPr>
           <a:lstStyle/>
           <a:p>
             <a:pPr indent="0" marL="0">
@@ -21997,7 +22606,9 @@
           <a:ln/>
         </p:spPr>
         <p:txBody>
-          <a:bodyPr wrap="square" lIns="0" tIns="0" rIns="0" bIns="0" rtlCol="0" anchor="ctr"/>
+          <a:bodyPr wrap="square" lIns="0" tIns="0" rIns="0" bIns="0" rtlCol="0" anchor="ctr">
+            <a:normAutofit/>
+          </a:bodyPr>
           <a:lstStyle/>
           <a:p>
             <a:pPr indent="0" marL="0">
@@ -22056,7 +22667,9 @@
           <a:ln/>
         </p:spPr>
         <p:txBody>
-          <a:bodyPr wrap="square" lIns="0" tIns="0" rIns="0" bIns="0" rtlCol="0" anchor="ctr"/>
+          <a:bodyPr wrap="square" lIns="0" tIns="0" rIns="0" bIns="0" rtlCol="0" anchor="ctr">
+            <a:normAutofit/>
+          </a:bodyPr>
           <a:lstStyle/>
           <a:p>
             <a:pPr indent="0" marL="0">
@@ -22095,7 +22708,9 @@
           <a:ln/>
         </p:spPr>
         <p:txBody>
-          <a:bodyPr wrap="square" lIns="0" tIns="0" rIns="0" bIns="0" rtlCol="0" anchor="t"/>
+          <a:bodyPr wrap="square" lIns="0" tIns="0" rIns="0" bIns="0" rtlCol="0" anchor="t">
+            <a:normAutofit/>
+          </a:bodyPr>
           <a:lstStyle/>
           <a:p>
             <a:pPr algn="l" marL="152400" indent="-152400">
@@ -22245,16 +22860,18 @@
         <p:spPr>
           <a:xfrm>
             <a:off x="502920" y="822960"/>
-            <a:ext cx="4206240" cy="3108960"/>
-          </a:xfrm>
-          <a:prstGeom prst="rect">
-            <a:avLst/>
-          </a:prstGeom>
-          <a:noFill/>
-          <a:ln/>
-        </p:spPr>
-        <p:txBody>
-          <a:bodyPr wrap="square" lIns="0" tIns="0" rIns="0" bIns="0" rtlCol="0" anchor="ctr"/>
+            <a:ext cx="4206240" cy="4315121"/>
+          </a:xfrm>
+          <a:prstGeom prst="rect">
+            <a:avLst/>
+          </a:prstGeom>
+          <a:noFill/>
+          <a:ln/>
+        </p:spPr>
+        <p:txBody>
+          <a:bodyPr wrap="square" lIns="0" tIns="0" rIns="0" bIns="0" rtlCol="0" anchor="ctr">
+            <a:normAutofit/>
+          </a:bodyPr>
           <a:lstStyle/>
           <a:p>
             <a:pPr indent="0" marL="0">
@@ -22284,16 +22901,18 @@
         <p:spPr>
           <a:xfrm>
             <a:off x="914400" y="3977640"/>
-            <a:ext cx="10332720" cy="868680"/>
-          </a:xfrm>
-          <a:prstGeom prst="rect">
-            <a:avLst/>
-          </a:prstGeom>
-          <a:noFill/>
-          <a:ln/>
-        </p:spPr>
-        <p:txBody>
-          <a:bodyPr wrap="square" lIns="0" tIns="0" rIns="0" bIns="0" rtlCol="0" anchor="ctr"/>
+            <a:ext cx="10332720" cy="877655"/>
+          </a:xfrm>
+          <a:prstGeom prst="rect">
+            <a:avLst/>
+          </a:prstGeom>
+          <a:noFill/>
+          <a:ln/>
+        </p:spPr>
+        <p:txBody>
+          <a:bodyPr wrap="square" lIns="0" tIns="0" rIns="0" bIns="0" rtlCol="0" anchor="ctr">
+            <a:normAutofit/>
+          </a:bodyPr>
           <a:lstStyle/>
           <a:p>
             <a:pPr indent="0" marL="0">
@@ -22332,7 +22951,9 @@
           <a:ln/>
         </p:spPr>
         <p:txBody>
-          <a:bodyPr wrap="square" lIns="0" tIns="0" rIns="0" bIns="0" rtlCol="0" anchor="ctr"/>
+          <a:bodyPr wrap="square" lIns="0" tIns="0" rIns="0" bIns="0" rtlCol="0" anchor="ctr">
+            <a:normAutofit/>
+          </a:bodyPr>
           <a:lstStyle/>
           <a:p>
             <a:pPr indent="0" marL="0">
@@ -22371,10 +22992,12 @@
           <a:ln/>
         </p:spPr>
         <p:txBody>
-          <a:bodyPr wrap="square" lIns="0" tIns="0" rIns="0" bIns="0" rtlCol="0" anchor="t"/>
-          <a:lstStyle/>
-          <a:p>
-            <a:pPr marL="152400" indent="-152400">
+          <a:bodyPr wrap="square" lIns="0" tIns="0" rIns="0" bIns="0" rtlCol="0" anchor="t">
+            <a:normAutofit/>
+          </a:bodyPr>
+          <a:lstStyle/>
+          <a:p>
+            <a:pPr algn="l" marL="152400" indent="-152400">
               <a:spcAft>
                 <a:spcPts val="1000"/>
               </a:spcAft>
@@ -22390,12 +23013,12 @@
                 <a:ea typeface="微软雅黑" pitchFamily="34" charset="-122"/>
                 <a:cs typeface="微软雅黑" pitchFamily="34" charset="-120"/>
               </a:rPr>
-              <a:t>15,833 项自动化测试</a:t>
+              <a:t>18,203 项自动化测试（后端 11,916 + 前端 6,287）</a:t>
             </a:r>
             <a:endParaRPr lang="en-US" sz="1400" dirty="0"/>
           </a:p>
           <a:p>
-            <a:pPr marL="152400" indent="-152400">
+            <a:pPr algn="l" marL="152400" indent="-152400">
               <a:spcAft>
                 <a:spcPts val="1000"/>
               </a:spcAft>
@@ -22416,7 +23039,7 @@
             <a:endParaRPr lang="en-US" sz="1400" dirty="0"/>
           </a:p>
           <a:p>
-            <a:pPr marL="152400" indent="-152400">
+            <a:pPr algn="l" marL="152400" indent="-152400">
               <a:spcAft>
                 <a:spcPts val="1000"/>
               </a:spcAft>
@@ -22432,12 +23055,12 @@
                 <a:ea typeface="微软雅黑" pitchFamily="34" charset="-122"/>
                 <a:cs typeface="微软雅黑" pitchFamily="34" charset="-120"/>
               </a:rPr>
-              <a:t>CI/CD 流水线</a:t>
+              <a:t>CI/CD 流水线（PR Checks 7 作业）</a:t>
             </a:r>
             <a:endParaRPr lang="en-US" sz="1400" dirty="0"/>
           </a:p>
           <a:p>
-            <a:pPr marL="152400" indent="-152400">
+            <a:pPr algn="l" marL="152400" indent="-152400">
               <a:spcAft>
                 <a:spcPts val="1000"/>
               </a:spcAft>
@@ -22458,7 +23081,7 @@
             <a:endParaRPr lang="en-US" sz="1400" dirty="0"/>
           </a:p>
           <a:p>
-            <a:pPr marL="152400" indent="-152400">
+            <a:pPr algn="l" marL="152400" indent="-152400">
               <a:spcAft>
                 <a:spcPts val="1000"/>
               </a:spcAft>
@@ -22478,6 +23101,27 @@
             </a:r>
             <a:endParaRPr lang="en-US" sz="1400" dirty="0"/>
           </a:p>
+          <a:p>
+            <a:pPr algn="l" marL="152400" indent="-152400">
+              <a:spcAft>
+                <a:spcPts val="1000"/>
+              </a:spcAft>
+              <a:buSzPct val="100000"/>
+              <a:buChar char="▪"/>
+            </a:pPr>
+            <a:r>
+              <a:rPr lang="en-US" sz="1400" dirty="0">
+                <a:solidFill>
+                  <a:srgbClr val="D7E2DB"/>
+                </a:solidFill>
+                <a:latin typeface="微软雅黑" pitchFamily="34" charset="0"/>
+                <a:ea typeface="微软雅黑" pitchFamily="34" charset="-122"/>
+                <a:cs typeface="微软雅黑" pitchFamily="34" charset="-120"/>
+              </a:rPr>
+              <a:t>6 项预防棘轮门禁 + 11 个真实 HTTP 探针</a:t>
+            </a:r>
+            <a:endParaRPr lang="en-US" sz="1400" dirty="0"/>
+          </a:p>
         </p:txBody>
       </p:sp>
       <p:sp>
@@ -22498,7 +23142,9 @@
           <a:ln/>
         </p:spPr>
         <p:txBody>
-          <a:bodyPr wrap="square" lIns="0" tIns="0" rIns="0" bIns="0" rtlCol="0" anchor="ctr"/>
+          <a:bodyPr wrap="square" lIns="0" tIns="0" rIns="0" bIns="0" rtlCol="0" anchor="ctr">
+            <a:normAutofit/>
+          </a:bodyPr>
           <a:lstStyle/>
           <a:p>
             <a:pPr algn="r" indent="0" marL="0">
@@ -22589,7 +23235,9 @@
           <a:ln/>
         </p:spPr>
         <p:txBody>
-          <a:bodyPr wrap="square" lIns="0" tIns="0" rIns="0" bIns="0" rtlCol="0" anchor="ctr"/>
+          <a:bodyPr wrap="square" lIns="0" tIns="0" rIns="0" bIns="0" rtlCol="0" anchor="ctr">
+            <a:normAutofit/>
+          </a:bodyPr>
           <a:lstStyle/>
           <a:p>
             <a:pPr indent="0" marL="0">
@@ -22628,7 +23276,9 @@
           <a:ln/>
         </p:spPr>
         <p:txBody>
-          <a:bodyPr wrap="square" lIns="0" tIns="0" rIns="0" bIns="0" rtlCol="0" anchor="ctr"/>
+          <a:bodyPr wrap="square" lIns="0" tIns="0" rIns="0" bIns="0" rtlCol="0" anchor="ctr">
+            <a:normAutofit/>
+          </a:bodyPr>
           <a:lstStyle/>
           <a:p>
             <a:pPr indent="0" marL="0">
@@ -22667,7 +23317,9 @@
           <a:ln/>
         </p:spPr>
         <p:txBody>
-          <a:bodyPr wrap="square" lIns="0" tIns="0" rIns="0" bIns="0" rtlCol="0" anchor="ctr"/>
+          <a:bodyPr wrap="square" lIns="0" tIns="0" rIns="0" bIns="0" rtlCol="0" anchor="ctr">
+            <a:normAutofit/>
+          </a:bodyPr>
           <a:lstStyle/>
           <a:p>
             <a:pPr algn="r" indent="0" marL="0">
@@ -22706,7 +23358,9 @@
           <a:ln/>
         </p:spPr>
         <p:txBody>
-          <a:bodyPr wrap="square" lIns="0" tIns="0" rIns="0" bIns="0" rtlCol="0" anchor="ctr"/>
+          <a:bodyPr wrap="square" lIns="0" tIns="0" rIns="0" bIns="0" rtlCol="0" anchor="ctr">
+            <a:normAutofit/>
+          </a:bodyPr>
           <a:lstStyle/>
           <a:p>
             <a:pPr indent="0" marL="0">
@@ -22721,7 +23375,7 @@
                 <a:ea typeface="微软雅黑" pitchFamily="34" charset="-122"/>
                 <a:cs typeface="微软雅黑" pitchFamily="34" charset="-120"/>
               </a:rPr>
-              <a:t>帮扶管理信息系统 v1.12.10</a:t>
+              <a:t>帮扶管理信息系统 v1.12.11</a:t>
             </a:r>
             <a:endParaRPr lang="en-US" sz="1050" dirty="0"/>
           </a:p>
@@ -22761,7 +23415,9 @@
           <a:ln/>
         </p:spPr>
         <p:txBody>
-          <a:bodyPr wrap="square" lIns="0" tIns="0" rIns="0" bIns="0" rtlCol="0" anchor="ctr"/>
+          <a:bodyPr wrap="square" lIns="0" tIns="0" rIns="0" bIns="0" rtlCol="0" anchor="ctr">
+            <a:normAutofit/>
+          </a:bodyPr>
           <a:lstStyle/>
           <a:p>
             <a:pPr indent="0" marL="0">
@@ -22776,7 +23432,7 @@
                 <a:ea typeface="微软雅黑" pitchFamily="34" charset="-122"/>
                 <a:cs typeface="微软雅黑" pitchFamily="34" charset="-120"/>
               </a:rPr>
-              <a:t>数据来源：v1.12.10 全量本地实测（2026-10-02）· 后端与前端覆盖率均 100%</a:t>
+              <a:t>数据来源：v1.12.11 仓库实测 · 后端 11,916 / 前端 6,287 用例 · 覆盖率 100%</a:t>
             </a:r>
             <a:endParaRPr lang="en-US" sz="1100" dirty="0"/>
           </a:p>
@@ -22791,11 +23447,11 @@
         <p:spPr>
           <a:xfrm>
             <a:off x="6949440" y="1783080"/>
-            <a:ext cx="4800600" cy="3840480"/>
+            <a:ext cx="4800600" cy="4480560"/>
           </a:xfrm>
           <a:prstGeom prst="roundRect">
             <a:avLst>
-              <a:gd name="adj" fmla="val 1667"/>
+              <a:gd name="adj" fmla="val 1429"/>
             </a:avLst>
           </a:prstGeom>
           <a:solidFill>
@@ -22819,17 +23475,19 @@
         </p:nvSpPr>
         <p:spPr>
           <a:xfrm>
-            <a:off x="7242048" y="2011680"/>
-            <a:ext cx="2743200" cy="365760"/>
-          </a:xfrm>
-          <a:prstGeom prst="rect">
-            <a:avLst/>
-          </a:prstGeom>
-          <a:noFill/>
-          <a:ln/>
-        </p:spPr>
-        <p:txBody>
-          <a:bodyPr wrap="square" lIns="0" tIns="0" rIns="0" bIns="0" rtlCol="0" anchor="ctr"/>
+            <a:off x="7242048" y="1965960"/>
+            <a:ext cx="4215384" cy="335756"/>
+          </a:xfrm>
+          <a:prstGeom prst="rect">
+            <a:avLst/>
+          </a:prstGeom>
+          <a:noFill/>
+          <a:ln/>
+        </p:spPr>
+        <p:txBody>
+          <a:bodyPr wrap="square" lIns="0" tIns="0" rIns="0" bIns="0" rtlCol="0" anchor="ctr">
+            <a:normAutofit/>
+          </a:bodyPr>
           <a:lstStyle/>
           <a:p>
             <a:pPr indent="0" marL="0">
@@ -22858,17 +23516,19 @@
         </p:nvSpPr>
         <p:spPr>
           <a:xfrm>
-            <a:off x="7242048" y="2450592"/>
-            <a:ext cx="4297680" cy="3017520"/>
-          </a:xfrm>
-          <a:prstGeom prst="rect">
-            <a:avLst/>
-          </a:prstGeom>
-          <a:noFill/>
-          <a:ln/>
-        </p:spPr>
-        <p:txBody>
-          <a:bodyPr wrap="square" lIns="0" tIns="0" rIns="0" bIns="0" rtlCol="0" anchor="t"/>
+            <a:off x="7242048" y="2384012"/>
+            <a:ext cx="4215384" cy="3733324"/>
+          </a:xfrm>
+          <a:prstGeom prst="rect">
+            <a:avLst/>
+          </a:prstGeom>
+          <a:noFill/>
+          <a:ln/>
+        </p:spPr>
+        <p:txBody>
+          <a:bodyPr wrap="square" lIns="0" tIns="0" rIns="0" bIns="0" rtlCol="0" anchor="t">
+            <a:normAutofit/>
+          </a:bodyPr>
           <a:lstStyle/>
           <a:p>
             <a:pPr algn="l" marL="152400" indent="-152400">
@@ -22879,7 +23539,7 @@
               <a:buChar char="▪"/>
             </a:pPr>
             <a:r>
-              <a:rPr lang="en-US" sz="1250" dirty="0">
+              <a:rPr lang="en-US" sz="1100" dirty="0">
                 <a:solidFill>
                   <a:srgbClr val="1A2E24"/>
                 </a:solidFill>
@@ -22889,7 +23549,7 @@
               </a:rPr>
               <a:t>前后端覆盖率门禁均 100%（CI 硬阈值，12 个源码分组全约束）</a:t>
             </a:r>
-            <a:endParaRPr lang="en-US" sz="1250" dirty="0"/>
+            <a:endParaRPr lang="en-US" sz="1100" dirty="0"/>
           </a:p>
           <a:p>
             <a:pPr algn="l" marL="152400" indent="-152400">
@@ -22900,7 +23560,7 @@
               <a:buChar char="▪"/>
             </a:pPr>
             <a:r>
-              <a:rPr lang="en-US" sz="1250" dirty="0">
+              <a:rPr lang="en-US" sz="1100" dirty="0">
                 <a:solidFill>
                   <a:srgbClr val="1A2E24"/>
                 </a:solidFill>
@@ -22910,7 +23570,7 @@
               </a:rPr>
               <a:t>新增接口/页面必须配套测试（协作约定强制）</a:t>
             </a:r>
-            <a:endParaRPr lang="en-US" sz="1250" dirty="0"/>
+            <a:endParaRPr lang="en-US" sz="1100" dirty="0"/>
           </a:p>
           <a:p>
             <a:pPr algn="l" marL="152400" indent="-152400">
@@ -22921,7 +23581,7 @@
               <a:buChar char="▪"/>
             </a:pPr>
             <a:r>
-              <a:rPr lang="en-US" sz="1250" dirty="0">
+              <a:rPr lang="en-US" sz="1100" dirty="0">
                 <a:solidFill>
                   <a:srgbClr val="1A2E24"/>
                 </a:solidFill>
@@ -22931,7 +23591,7 @@
               </a:rPr>
               <a:t>弱断言治理：安全守卫补真实断言（开放重定向 / javascript: 协议防线）</a:t>
             </a:r>
-            <a:endParaRPr lang="en-US" sz="1250" dirty="0"/>
+            <a:endParaRPr lang="en-US" sz="1100" dirty="0"/>
           </a:p>
           <a:p>
             <a:pPr algn="l" marL="152400" indent="-152400">
@@ -22942,7 +23602,7 @@
               <a:buChar char="▪"/>
             </a:pPr>
             <a:r>
-              <a:rPr lang="en-US" sz="1250" dirty="0">
+              <a:rPr lang="en-US" sz="1100" dirty="0">
                 <a:solidFill>
                   <a:srgbClr val="1A2E24"/>
                 </a:solidFill>
@@ -22952,7 +23612,7 @@
               </a:rPr>
               <a:t>安全回归：限流签名 / loopback 门禁 / 错误不泄露 / PII 加密 / 组织守卫 均有专项锁定</a:t>
             </a:r>
-            <a:endParaRPr lang="en-US" sz="1250" dirty="0"/>
+            <a:endParaRPr lang="en-US" sz="1100" dirty="0"/>
           </a:p>
           <a:p>
             <a:pPr algn="l" marL="152400" indent="-152400">
@@ -22963,7 +23623,7 @@
               <a:buChar char="▪"/>
             </a:pPr>
             <a:r>
-              <a:rPr lang="en-US" sz="1250" dirty="0">
+              <a:rPr lang="en-US" sz="1100" dirty="0">
                 <a:solidFill>
                   <a:srgbClr val="1A2E24"/>
                 </a:solidFill>
@@ -22971,9 +23631,9 @@
                 <a:ea typeface="微软雅黑" pitchFamily="34" charset="-122"/>
                 <a:cs typeface="微软雅黑" pitchFamily="34" charset="-120"/>
               </a:rPr>
-              <a:t>0 个 skip 滥用：仅 13 个平台专属跳过（Win/Linux 差异）</a:t>
-            </a:r>
-            <a:endParaRPr lang="en-US" sz="1250" dirty="0"/>
+              <a:t>6 项预防棘轮门禁接入 CI（os._exit / 上传限长 / 无界读 / 子进程编码 / 目录替换 / 周期任务注册），NEW=0</a:t>
+            </a:r>
+            <a:endParaRPr lang="en-US" sz="1100" dirty="0"/>
           </a:p>
           <a:p>
             <a:pPr algn="l" marL="152400" indent="-152400">
@@ -22984,7 +23644,7 @@
               <a:buChar char="▪"/>
             </a:pPr>
             <a:r>
-              <a:rPr lang="en-US" sz="1250" dirty="0">
+              <a:rPr lang="en-US" sz="1100" dirty="0">
                 <a:solidFill>
                   <a:srgbClr val="1A2E24"/>
                 </a:solidFill>
@@ -22992,9 +23652,30 @@
                 <a:ea typeface="微软雅黑" pitchFamily="34" charset="-122"/>
                 <a:cs typeface="微软雅黑" pitchFamily="34" charset="-120"/>
               </a:rPr>
-              <a:t>已知 flaky 用例公开记录，不允许静默重试掩盖</a:t>
-            </a:r>
-            <a:endParaRPr lang="en-US" sz="1250" dirty="0"/>
+              <a:t>11 个真实 HTTP 探针脚本（backend/tests/probe/）：与运行时刻 / 时区无关</a:t>
+            </a:r>
+            <a:endParaRPr lang="en-US" sz="1100" dirty="0"/>
+          </a:p>
+          <a:p>
+            <a:pPr algn="l" marL="152400" indent="-152400">
+              <a:spcAft>
+                <a:spcPts val="900"/>
+              </a:spcAft>
+              <a:buSzPct val="100000"/>
+              <a:buChar char="▪"/>
+            </a:pPr>
+            <a:r>
+              <a:rPr lang="en-US" sz="1100" dirty="0">
+                <a:solidFill>
+                  <a:srgbClr val="1A2E24"/>
+                </a:solidFill>
+                <a:latin typeface="微软雅黑" pitchFamily="34" charset="0"/>
+                <a:ea typeface="微软雅黑" pitchFamily="34" charset="-122"/>
+                <a:cs typeface="微软雅黑" pitchFamily="34" charset="-120"/>
+              </a:rPr>
+              <a:t>0 个 skip 滥用：仅 13 个平台专属跳过（Win/Linux 差异）；flaky 用例公开记录</a:t>
+            </a:r>
+            <a:endParaRPr lang="en-US" sz="1100" dirty="0"/>
           </a:p>
         </p:txBody>
       </p:sp>
@@ -23068,7 +23749,9 @@
           <a:ln/>
         </p:spPr>
         <p:txBody>
-          <a:bodyPr wrap="square" lIns="0" tIns="0" rIns="0" bIns="0" rtlCol="0" anchor="ctr"/>
+          <a:bodyPr wrap="square" lIns="0" tIns="0" rIns="0" bIns="0" rtlCol="0" anchor="ctr">
+            <a:normAutofit/>
+          </a:bodyPr>
           <a:lstStyle/>
           <a:p>
             <a:pPr indent="0" marL="0">
@@ -23107,7 +23790,9 @@
           <a:ln/>
         </p:spPr>
         <p:txBody>
-          <a:bodyPr wrap="square" lIns="0" tIns="0" rIns="0" bIns="0" rtlCol="0" anchor="ctr"/>
+          <a:bodyPr wrap="square" lIns="0" tIns="0" rIns="0" bIns="0" rtlCol="0" anchor="ctr">
+            <a:normAutofit/>
+          </a:bodyPr>
           <a:lstStyle/>
           <a:p>
             <a:pPr indent="0" marL="0">
@@ -23146,7 +23831,9 @@
           <a:ln/>
         </p:spPr>
         <p:txBody>
-          <a:bodyPr wrap="square" lIns="0" tIns="0" rIns="0" bIns="0" rtlCol="0" anchor="ctr"/>
+          <a:bodyPr wrap="square" lIns="0" tIns="0" rIns="0" bIns="0" rtlCol="0" anchor="ctr">
+            <a:normAutofit/>
+          </a:bodyPr>
           <a:lstStyle/>
           <a:p>
             <a:pPr algn="r" indent="0" marL="0">
@@ -23185,7 +23872,9 @@
           <a:ln/>
         </p:spPr>
         <p:txBody>
-          <a:bodyPr wrap="square" lIns="0" tIns="0" rIns="0" bIns="0" rtlCol="0" anchor="ctr"/>
+          <a:bodyPr wrap="square" lIns="0" tIns="0" rIns="0" bIns="0" rtlCol="0" anchor="ctr">
+            <a:normAutofit/>
+          </a:bodyPr>
           <a:lstStyle/>
           <a:p>
             <a:pPr indent="0" marL="0">
@@ -23200,7 +23889,7 @@
                 <a:ea typeface="微软雅黑" pitchFamily="34" charset="-122"/>
                 <a:cs typeface="微软雅黑" pitchFamily="34" charset="-120"/>
               </a:rPr>
-              <a:t>帮扶管理信息系统 v1.12.10</a:t>
+              <a:t>帮扶管理信息系统 v1.12.11</a:t>
             </a:r>
             <a:endParaRPr lang="en-US" sz="1050" dirty="0"/>
           </a:p>
@@ -23246,7 +23935,9 @@
           <a:ln/>
         </p:spPr>
         <p:txBody>
-          <a:bodyPr wrap="square" lIns="0" tIns="0" rIns="0" bIns="0" rtlCol="0" anchor="ctr"/>
+          <a:bodyPr wrap="square" lIns="0" tIns="0" rIns="0" bIns="0" rtlCol="0" anchor="ctr">
+            <a:normAutofit/>
+          </a:bodyPr>
           <a:lstStyle/>
           <a:p>
             <a:pPr indent="0" marL="0">
@@ -23285,7 +23976,9 @@
           <a:ln/>
         </p:spPr>
         <p:txBody>
-          <a:bodyPr wrap="square" lIns="0" tIns="0" rIns="0" bIns="0" rtlCol="0" anchor="ctr"/>
+          <a:bodyPr wrap="square" lIns="0" tIns="0" rIns="0" bIns="0" rtlCol="0" anchor="ctr">
+            <a:normAutofit/>
+          </a:bodyPr>
           <a:lstStyle/>
           <a:p>
             <a:pPr indent="0" marL="0">
@@ -23346,7 +24039,9 @@
           <a:ln/>
         </p:spPr>
         <p:txBody>
-          <a:bodyPr wrap="square" lIns="0" tIns="0" rIns="0" bIns="0" rtlCol="0" anchor="ctr"/>
+          <a:bodyPr wrap="square" lIns="0" tIns="0" rIns="0" bIns="0" rtlCol="0" anchor="ctr">
+            <a:normAutofit/>
+          </a:bodyPr>
           <a:lstStyle/>
           <a:p>
             <a:pPr indent="0" marL="0">
@@ -23385,7 +24080,9 @@
           <a:ln/>
         </p:spPr>
         <p:txBody>
-          <a:bodyPr wrap="square" lIns="0" tIns="0" rIns="0" bIns="0" rtlCol="0" anchor="ctr"/>
+          <a:bodyPr wrap="square" lIns="0" tIns="0" rIns="0" bIns="0" rtlCol="0" anchor="ctr">
+            <a:normAutofit/>
+          </a:bodyPr>
           <a:lstStyle/>
           <a:p>
             <a:pPr indent="0" marL="0">
@@ -23446,7 +24143,9 @@
           <a:ln/>
         </p:spPr>
         <p:txBody>
-          <a:bodyPr wrap="square" lIns="0" tIns="0" rIns="0" bIns="0" rtlCol="0" anchor="ctr"/>
+          <a:bodyPr wrap="square" lIns="0" tIns="0" rIns="0" bIns="0" rtlCol="0" anchor="ctr">
+            <a:normAutofit/>
+          </a:bodyPr>
           <a:lstStyle/>
           <a:p>
             <a:pPr indent="0" marL="0">
@@ -23485,7 +24184,9 @@
           <a:ln/>
         </p:spPr>
         <p:txBody>
-          <a:bodyPr wrap="square" lIns="0" tIns="0" rIns="0" bIns="0" rtlCol="0" anchor="ctr"/>
+          <a:bodyPr wrap="square" lIns="0" tIns="0" rIns="0" bIns="0" rtlCol="0" anchor="ctr">
+            <a:normAutofit/>
+          </a:bodyPr>
           <a:lstStyle/>
           <a:p>
             <a:pPr indent="0" marL="0">
@@ -23546,7 +24247,9 @@
           <a:ln/>
         </p:spPr>
         <p:txBody>
-          <a:bodyPr wrap="square" lIns="0" tIns="0" rIns="0" bIns="0" rtlCol="0" anchor="ctr"/>
+          <a:bodyPr wrap="square" lIns="0" tIns="0" rIns="0" bIns="0" rtlCol="0" anchor="ctr">
+            <a:normAutofit/>
+          </a:bodyPr>
           <a:lstStyle/>
           <a:p>
             <a:pPr indent="0" marL="0">
@@ -23585,7 +24288,9 @@
           <a:ln/>
         </p:spPr>
         <p:txBody>
-          <a:bodyPr wrap="square" lIns="0" tIns="0" rIns="0" bIns="0" rtlCol="0" anchor="ctr"/>
+          <a:bodyPr wrap="square" lIns="0" tIns="0" rIns="0" bIns="0" rtlCol="0" anchor="ctr">
+            <a:normAutofit/>
+          </a:bodyPr>
           <a:lstStyle/>
           <a:p>
             <a:pPr indent="0" marL="0">
@@ -23624,7 +24329,9 @@
           <a:ln/>
         </p:spPr>
         <p:txBody>
-          <a:bodyPr wrap="square" lIns="0" tIns="0" rIns="0" bIns="0" rtlCol="0" anchor="ctr"/>
+          <a:bodyPr wrap="square" lIns="0" tIns="0" rIns="0" bIns="0" rtlCol="0" anchor="ctr">
+            <a:normAutofit/>
+          </a:bodyPr>
           <a:lstStyle/>
           <a:p>
             <a:pPr indent="0" marL="0">
@@ -23715,7 +24422,9 @@
           <a:ln/>
         </p:spPr>
         <p:txBody>
-          <a:bodyPr wrap="square" lIns="0" tIns="0" rIns="0" bIns="0" rtlCol="0" anchor="ctr"/>
+          <a:bodyPr wrap="square" lIns="0" tIns="0" rIns="0" bIns="0" rtlCol="0" anchor="ctr">
+            <a:normAutofit/>
+          </a:bodyPr>
           <a:lstStyle/>
           <a:p>
             <a:pPr indent="0" marL="0">
@@ -23754,7 +24463,9 @@
           <a:ln/>
         </p:spPr>
         <p:txBody>
-          <a:bodyPr wrap="square" lIns="0" tIns="0" rIns="0" bIns="0" rtlCol="0" anchor="ctr"/>
+          <a:bodyPr wrap="square" lIns="0" tIns="0" rIns="0" bIns="0" rtlCol="0" anchor="ctr">
+            <a:normAutofit/>
+          </a:bodyPr>
           <a:lstStyle/>
           <a:p>
             <a:pPr indent="0" marL="0">
@@ -23793,7 +24504,9 @@
           <a:ln/>
         </p:spPr>
         <p:txBody>
-          <a:bodyPr wrap="square" lIns="0" tIns="0" rIns="0" bIns="0" rtlCol="0" anchor="ctr"/>
+          <a:bodyPr wrap="square" lIns="0" tIns="0" rIns="0" bIns="0" rtlCol="0" anchor="ctr">
+            <a:normAutofit/>
+          </a:bodyPr>
           <a:lstStyle/>
           <a:p>
             <a:pPr algn="r" indent="0" marL="0">
@@ -23832,7 +24545,9 @@
           <a:ln/>
         </p:spPr>
         <p:txBody>
-          <a:bodyPr wrap="square" lIns="0" tIns="0" rIns="0" bIns="0" rtlCol="0" anchor="ctr"/>
+          <a:bodyPr wrap="square" lIns="0" tIns="0" rIns="0" bIns="0" rtlCol="0" anchor="ctr">
+            <a:normAutofit/>
+          </a:bodyPr>
           <a:lstStyle/>
           <a:p>
             <a:pPr indent="0" marL="0">
@@ -23847,7 +24562,7 @@
                 <a:ea typeface="微软雅黑" pitchFamily="34" charset="-122"/>
                 <a:cs typeface="微软雅黑" pitchFamily="34" charset="-120"/>
               </a:rPr>
-              <a:t>帮扶管理信息系统 v1.12.10</a:t>
+              <a:t>帮扶管理信息系统 v1.12.11</a:t>
             </a:r>
             <a:endParaRPr lang="en-US" sz="1050" dirty="0"/>
           </a:p>
@@ -23900,7 +24615,9 @@
           <a:ln/>
         </p:spPr>
         <p:txBody>
-          <a:bodyPr wrap="square" lIns="0" tIns="0" rIns="0" bIns="0" rtlCol="0" anchor="ctr"/>
+          <a:bodyPr wrap="square" lIns="0" tIns="0" rIns="0" bIns="0" rtlCol="0" anchor="ctr">
+            <a:normAutofit/>
+          </a:bodyPr>
           <a:lstStyle/>
           <a:p>
             <a:pPr indent="0" marL="0">
@@ -23939,7 +24656,9 @@
           <a:ln/>
         </p:spPr>
         <p:txBody>
-          <a:bodyPr wrap="square" lIns="0" tIns="0" rIns="0" bIns="0" rtlCol="0" anchor="t"/>
+          <a:bodyPr wrap="square" lIns="0" tIns="0" rIns="0" bIns="0" rtlCol="0" anchor="t">
+            <a:normAutofit/>
+          </a:bodyPr>
           <a:lstStyle/>
           <a:p>
             <a:pPr algn="l" marL="152400" indent="-152400">
@@ -24095,7 +24814,9 @@
           <a:ln/>
         </p:spPr>
         <p:txBody>
-          <a:bodyPr wrap="square" lIns="0" tIns="0" rIns="0" bIns="0" rtlCol="0" anchor="ctr"/>
+          <a:bodyPr wrap="square" lIns="0" tIns="0" rIns="0" bIns="0" rtlCol="0" anchor="ctr">
+            <a:normAutofit/>
+          </a:bodyPr>
           <a:lstStyle/>
           <a:p>
             <a:pPr indent="0" marL="0">
@@ -24134,7 +24855,9 @@
           <a:ln/>
         </p:spPr>
         <p:txBody>
-          <a:bodyPr wrap="square" lIns="0" tIns="0" rIns="0" bIns="0" rtlCol="0" anchor="t"/>
+          <a:bodyPr wrap="square" lIns="0" tIns="0" rIns="0" bIns="0" rtlCol="0" anchor="t">
+            <a:normAutofit/>
+          </a:bodyPr>
           <a:lstStyle/>
           <a:p>
             <a:pPr algn="l" marL="152400" indent="-152400">
@@ -24313,7 +25036,9 @@
           <a:ln/>
         </p:spPr>
         <p:txBody>
-          <a:bodyPr wrap="square" lIns="0" tIns="0" rIns="0" bIns="0" rtlCol="0" anchor="ctr"/>
+          <a:bodyPr wrap="square" lIns="0" tIns="0" rIns="0" bIns="0" rtlCol="0" anchor="ctr">
+            <a:normAutofit/>
+          </a:bodyPr>
           <a:lstStyle/>
           <a:p>
             <a:pPr indent="0" marL="0">
@@ -24352,7 +25077,9 @@
           <a:ln/>
         </p:spPr>
         <p:txBody>
-          <a:bodyPr wrap="square" lIns="0" tIns="0" rIns="0" bIns="0" rtlCol="0" anchor="ctr"/>
+          <a:bodyPr wrap="square" lIns="0" tIns="0" rIns="0" bIns="0" rtlCol="0" anchor="ctr">
+            <a:normAutofit/>
+          </a:bodyPr>
           <a:lstStyle/>
           <a:p>
             <a:pPr indent="0" marL="0">
@@ -24391,7 +25118,9 @@
           <a:ln/>
         </p:spPr>
         <p:txBody>
-          <a:bodyPr wrap="square" lIns="0" tIns="0" rIns="0" bIns="0" rtlCol="0" anchor="ctr"/>
+          <a:bodyPr wrap="square" lIns="0" tIns="0" rIns="0" bIns="0" rtlCol="0" anchor="ctr">
+            <a:normAutofit/>
+          </a:bodyPr>
           <a:lstStyle/>
           <a:p>
             <a:pPr algn="r" indent="0" marL="0">
@@ -24430,7 +25159,9 @@
           <a:ln/>
         </p:spPr>
         <p:txBody>
-          <a:bodyPr wrap="square" lIns="0" tIns="0" rIns="0" bIns="0" rtlCol="0" anchor="ctr"/>
+          <a:bodyPr wrap="square" lIns="0" tIns="0" rIns="0" bIns="0" rtlCol="0" anchor="ctr">
+            <a:normAutofit/>
+          </a:bodyPr>
           <a:lstStyle/>
           <a:p>
             <a:pPr indent="0" marL="0">
@@ -24445,7 +25176,7 @@
                 <a:ea typeface="微软雅黑" pitchFamily="34" charset="-122"/>
                 <a:cs typeface="微软雅黑" pitchFamily="34" charset="-120"/>
               </a:rPr>
-              <a:t>帮扶管理信息系统 v1.12.10</a:t>
+              <a:t>帮扶管理信息系统 v1.12.11</a:t>
             </a:r>
             <a:endParaRPr lang="en-US" sz="1050" dirty="0"/>
           </a:p>
@@ -24498,7 +25229,9 @@
           <a:ln/>
         </p:spPr>
         <p:txBody>
-          <a:bodyPr wrap="square" lIns="0" tIns="0" rIns="0" bIns="0" rtlCol="0" anchor="ctr"/>
+          <a:bodyPr wrap="square" lIns="0" tIns="0" rIns="0" bIns="0" rtlCol="0" anchor="ctr">
+            <a:normAutofit/>
+          </a:bodyPr>
           <a:lstStyle/>
           <a:p>
             <a:pPr indent="0" marL="0">
@@ -24537,7 +25270,9 @@
           <a:ln/>
         </p:spPr>
         <p:txBody>
-          <a:bodyPr wrap="square" lIns="0" tIns="0" rIns="0" bIns="0" rtlCol="0" anchor="t"/>
+          <a:bodyPr wrap="square" lIns="0" tIns="0" rIns="0" bIns="0" rtlCol="0" anchor="t">
+            <a:normAutofit/>
+          </a:bodyPr>
           <a:lstStyle/>
           <a:p>
             <a:pPr algn="l" marL="152400" indent="-152400">
@@ -24693,7 +25428,9 @@
           <a:ln/>
         </p:spPr>
         <p:txBody>
-          <a:bodyPr wrap="square" lIns="0" tIns="0" rIns="0" bIns="0" rtlCol="0" anchor="ctr"/>
+          <a:bodyPr wrap="square" lIns="0" tIns="0" rIns="0" bIns="0" rtlCol="0" anchor="ctr">
+            <a:normAutofit/>
+          </a:bodyPr>
           <a:lstStyle/>
           <a:p>
             <a:pPr indent="0" marL="0">
@@ -24732,7 +25469,9 @@
           <a:ln/>
         </p:spPr>
         <p:txBody>
-          <a:bodyPr wrap="square" lIns="0" tIns="0" rIns="0" bIns="0" rtlCol="0" anchor="t"/>
+          <a:bodyPr wrap="square" lIns="0" tIns="0" rIns="0" bIns="0" rtlCol="0" anchor="t">
+            <a:normAutofit/>
+          </a:bodyPr>
           <a:lstStyle/>
           <a:p>
             <a:pPr algn="l" marL="152400" indent="-152400">
@@ -24903,16 +25642,18 @@
         <p:spPr>
           <a:xfrm>
             <a:off x="502920" y="822960"/>
-            <a:ext cx="4206240" cy="3108960"/>
-          </a:xfrm>
-          <a:prstGeom prst="rect">
-            <a:avLst/>
-          </a:prstGeom>
-          <a:noFill/>
-          <a:ln/>
-        </p:spPr>
-        <p:txBody>
-          <a:bodyPr wrap="square" lIns="0" tIns="0" rIns="0" bIns="0" rtlCol="0" anchor="ctr"/>
+            <a:ext cx="4206240" cy="4315121"/>
+          </a:xfrm>
+          <a:prstGeom prst="rect">
+            <a:avLst/>
+          </a:prstGeom>
+          <a:noFill/>
+          <a:ln/>
+        </p:spPr>
+        <p:txBody>
+          <a:bodyPr wrap="square" lIns="0" tIns="0" rIns="0" bIns="0" rtlCol="0" anchor="ctr">
+            <a:normAutofit/>
+          </a:bodyPr>
           <a:lstStyle/>
           <a:p>
             <a:pPr indent="0" marL="0">
@@ -24942,16 +25683,18 @@
         <p:spPr>
           <a:xfrm>
             <a:off x="914400" y="3977640"/>
-            <a:ext cx="10332720" cy="868680"/>
-          </a:xfrm>
-          <a:prstGeom prst="rect">
-            <a:avLst/>
-          </a:prstGeom>
-          <a:noFill/>
-          <a:ln/>
-        </p:spPr>
-        <p:txBody>
-          <a:bodyPr wrap="square" lIns="0" tIns="0" rIns="0" bIns="0" rtlCol="0" anchor="ctr"/>
+            <a:ext cx="10332720" cy="877655"/>
+          </a:xfrm>
+          <a:prstGeom prst="rect">
+            <a:avLst/>
+          </a:prstGeom>
+          <a:noFill/>
+          <a:ln/>
+        </p:spPr>
+        <p:txBody>
+          <a:bodyPr wrap="square" lIns="0" tIns="0" rIns="0" bIns="0" rtlCol="0" anchor="ctr">
+            <a:normAutofit/>
+          </a:bodyPr>
           <a:lstStyle/>
           <a:p>
             <a:pPr indent="0" marL="0">
@@ -24990,7 +25733,9 @@
           <a:ln/>
         </p:spPr>
         <p:txBody>
-          <a:bodyPr wrap="square" lIns="0" tIns="0" rIns="0" bIns="0" rtlCol="0" anchor="ctr"/>
+          <a:bodyPr wrap="square" lIns="0" tIns="0" rIns="0" bIns="0" rtlCol="0" anchor="ctr">
+            <a:normAutofit/>
+          </a:bodyPr>
           <a:lstStyle/>
           <a:p>
             <a:pPr indent="0" marL="0">
@@ -25029,10 +25774,12 @@
           <a:ln/>
         </p:spPr>
         <p:txBody>
-          <a:bodyPr wrap="square" lIns="0" tIns="0" rIns="0" bIns="0" rtlCol="0" anchor="t"/>
-          <a:lstStyle/>
-          <a:p>
-            <a:pPr marL="152400" indent="-152400">
+          <a:bodyPr wrap="square" lIns="0" tIns="0" rIns="0" bIns="0" rtlCol="0" anchor="t">
+            <a:normAutofit/>
+          </a:bodyPr>
+          <a:lstStyle/>
+          <a:p>
+            <a:pPr algn="l" marL="152400" indent="-152400">
               <a:spcAft>
                 <a:spcPts val="1000"/>
               </a:spcAft>
@@ -25053,7 +25800,7 @@
             <a:endParaRPr lang="en-US" sz="1400" dirty="0"/>
           </a:p>
           <a:p>
-            <a:pPr marL="152400" indent="-152400">
+            <a:pPr algn="l" marL="152400" indent="-152400">
               <a:spcAft>
                 <a:spcPts val="1000"/>
               </a:spcAft>
@@ -25074,7 +25821,7 @@
             <a:endParaRPr lang="en-US" sz="1400" dirty="0"/>
           </a:p>
           <a:p>
-            <a:pPr marL="152400" indent="-152400">
+            <a:pPr algn="l" marL="152400" indent="-152400">
               <a:spcAft>
                 <a:spcPts val="1000"/>
               </a:spcAft>
@@ -25095,7 +25842,7 @@
             <a:endParaRPr lang="en-US" sz="1400" dirty="0"/>
           </a:p>
           <a:p>
-            <a:pPr marL="152400" indent="-152400">
+            <a:pPr algn="l" marL="152400" indent="-152400">
               <a:spcAft>
                 <a:spcPts val="1000"/>
               </a:spcAft>
@@ -25135,7 +25882,9 @@
           <a:ln/>
         </p:spPr>
         <p:txBody>
-          <a:bodyPr wrap="square" lIns="0" tIns="0" rIns="0" bIns="0" rtlCol="0" anchor="ctr"/>
+          <a:bodyPr wrap="square" lIns="0" tIns="0" rIns="0" bIns="0" rtlCol="0" anchor="ctr">
+            <a:normAutofit/>
+          </a:bodyPr>
           <a:lstStyle/>
           <a:p>
             <a:pPr algn="r" indent="0" marL="0">
@@ -25226,7 +25975,9 @@
           <a:ln/>
         </p:spPr>
         <p:txBody>
-          <a:bodyPr wrap="square" lIns="0" tIns="0" rIns="0" bIns="0" rtlCol="0" anchor="ctr"/>
+          <a:bodyPr wrap="square" lIns="0" tIns="0" rIns="0" bIns="0" rtlCol="0" anchor="ctr">
+            <a:normAutofit/>
+          </a:bodyPr>
           <a:lstStyle/>
           <a:p>
             <a:pPr indent="0" marL="0">
@@ -25265,7 +26016,9 @@
           <a:ln/>
         </p:spPr>
         <p:txBody>
-          <a:bodyPr wrap="square" lIns="0" tIns="0" rIns="0" bIns="0" rtlCol="0" anchor="ctr"/>
+          <a:bodyPr wrap="square" lIns="0" tIns="0" rIns="0" bIns="0" rtlCol="0" anchor="ctr">
+            <a:normAutofit/>
+          </a:bodyPr>
           <a:lstStyle/>
           <a:p>
             <a:pPr indent="0" marL="0">
@@ -25304,7 +26057,9 @@
           <a:ln/>
         </p:spPr>
         <p:txBody>
-          <a:bodyPr wrap="square" lIns="0" tIns="0" rIns="0" bIns="0" rtlCol="0" anchor="ctr"/>
+          <a:bodyPr wrap="square" lIns="0" tIns="0" rIns="0" bIns="0" rtlCol="0" anchor="ctr">
+            <a:normAutofit/>
+          </a:bodyPr>
           <a:lstStyle/>
           <a:p>
             <a:pPr algn="r" indent="0" marL="0">
@@ -25343,7 +26098,9 @@
           <a:ln/>
         </p:spPr>
         <p:txBody>
-          <a:bodyPr wrap="square" lIns="0" tIns="0" rIns="0" bIns="0" rtlCol="0" anchor="ctr"/>
+          <a:bodyPr wrap="square" lIns="0" tIns="0" rIns="0" bIns="0" rtlCol="0" anchor="ctr">
+            <a:normAutofit/>
+          </a:bodyPr>
           <a:lstStyle/>
           <a:p>
             <a:pPr indent="0" marL="0">
@@ -25358,7 +26115,7 @@
                 <a:ea typeface="微软雅黑" pitchFamily="34" charset="-122"/>
                 <a:cs typeface="微软雅黑" pitchFamily="34" charset="-120"/>
               </a:rPr>
-              <a:t>帮扶管理信息系统 v1.12.10</a:t>
+              <a:t>帮扶管理信息系统 v1.12.11</a:t>
             </a:r>
             <a:endParaRPr lang="en-US" sz="1050" dirty="0"/>
           </a:p>
@@ -25411,7 +26168,9 @@
           <a:ln/>
         </p:spPr>
         <p:txBody>
-          <a:bodyPr wrap="square" lIns="0" tIns="0" rIns="0" bIns="0" rtlCol="0" anchor="ctr"/>
+          <a:bodyPr wrap="square" lIns="0" tIns="0" rIns="0" bIns="0" rtlCol="0" anchor="ctr">
+            <a:normAutofit/>
+          </a:bodyPr>
           <a:lstStyle/>
           <a:p>
             <a:pPr indent="0" marL="0">
@@ -25472,7 +26231,9 @@
           <a:ln/>
         </p:spPr>
         <p:txBody>
-          <a:bodyPr wrap="square" lIns="0" tIns="0" rIns="0" bIns="0" rtlCol="0" anchor="ctr"/>
+          <a:bodyPr wrap="square" lIns="0" tIns="0" rIns="0" bIns="0" rtlCol="0" anchor="ctr">
+            <a:normAutofit/>
+          </a:bodyPr>
           <a:lstStyle/>
           <a:p>
             <a:pPr algn="ctr" indent="0" marL="0">
@@ -25511,7 +26272,9 @@
           <a:ln/>
         </p:spPr>
         <p:txBody>
-          <a:bodyPr wrap="square" lIns="0" tIns="0" rIns="0" bIns="0" rtlCol="0" anchor="t"/>
+          <a:bodyPr wrap="square" lIns="0" tIns="0" rIns="0" bIns="0" rtlCol="0" anchor="t">
+            <a:normAutofit/>
+          </a:bodyPr>
           <a:lstStyle/>
           <a:p>
             <a:pPr algn="l" marL="152400" indent="-152400">
@@ -25617,7 +26380,9 @@
           <a:ln/>
         </p:spPr>
         <p:txBody>
-          <a:bodyPr wrap="square" lIns="0" tIns="0" rIns="0" bIns="0" rtlCol="0" anchor="ctr"/>
+          <a:bodyPr wrap="square" lIns="0" tIns="0" rIns="0" bIns="0" rtlCol="0" anchor="ctr">
+            <a:normAutofit/>
+          </a:bodyPr>
           <a:lstStyle/>
           <a:p>
             <a:pPr indent="0" marL="0">
@@ -25674,7 +26439,9 @@
           <a:ln/>
         </p:spPr>
         <p:txBody>
-          <a:bodyPr wrap="square" lIns="0" tIns="0" rIns="0" bIns="0" rtlCol="0" anchor="ctr"/>
+          <a:bodyPr wrap="square" lIns="0" tIns="0" rIns="0" bIns="0" rtlCol="0" anchor="ctr">
+            <a:normAutofit/>
+          </a:bodyPr>
           <a:lstStyle/>
           <a:p>
             <a:pPr indent="0" marL="0">
@@ -25735,7 +26502,9 @@
           <a:ln/>
         </p:spPr>
         <p:txBody>
-          <a:bodyPr wrap="square" lIns="0" tIns="0" rIns="0" bIns="0" rtlCol="0" anchor="ctr"/>
+          <a:bodyPr wrap="square" lIns="0" tIns="0" rIns="0" bIns="0" rtlCol="0" anchor="ctr">
+            <a:normAutofit/>
+          </a:bodyPr>
           <a:lstStyle/>
           <a:p>
             <a:pPr algn="ctr" indent="0" marL="0">
@@ -25774,7 +26543,9 @@
           <a:ln/>
         </p:spPr>
         <p:txBody>
-          <a:bodyPr wrap="square" lIns="0" tIns="0" rIns="0" bIns="0" rtlCol="0" anchor="t"/>
+          <a:bodyPr wrap="square" lIns="0" tIns="0" rIns="0" bIns="0" rtlCol="0" anchor="t">
+            <a:normAutofit/>
+          </a:bodyPr>
           <a:lstStyle/>
           <a:p>
             <a:pPr algn="l" marL="152400" indent="-152400">
@@ -25880,7 +26651,9 @@
           <a:ln/>
         </p:spPr>
         <p:txBody>
-          <a:bodyPr wrap="square" lIns="0" tIns="0" rIns="0" bIns="0" rtlCol="0" anchor="ctr"/>
+          <a:bodyPr wrap="square" lIns="0" tIns="0" rIns="0" bIns="0" rtlCol="0" anchor="ctr">
+            <a:normAutofit/>
+          </a:bodyPr>
           <a:lstStyle/>
           <a:p>
             <a:pPr indent="0" marL="0">
@@ -25937,7 +26710,9 @@
           <a:ln/>
         </p:spPr>
         <p:txBody>
-          <a:bodyPr wrap="square" lIns="0" tIns="0" rIns="0" bIns="0" rtlCol="0" anchor="ctr"/>
+          <a:bodyPr wrap="square" lIns="0" tIns="0" rIns="0" bIns="0" rtlCol="0" anchor="ctr">
+            <a:normAutofit/>
+          </a:bodyPr>
           <a:lstStyle/>
           <a:p>
             <a:pPr indent="0" marL="0">
@@ -25998,7 +26773,9 @@
           <a:ln/>
         </p:spPr>
         <p:txBody>
-          <a:bodyPr wrap="square" lIns="0" tIns="0" rIns="0" bIns="0" rtlCol="0" anchor="ctr"/>
+          <a:bodyPr wrap="square" lIns="0" tIns="0" rIns="0" bIns="0" rtlCol="0" anchor="ctr">
+            <a:normAutofit/>
+          </a:bodyPr>
           <a:lstStyle/>
           <a:p>
             <a:pPr algn="ctr" indent="0" marL="0">
@@ -26037,7 +26814,9 @@
           <a:ln/>
         </p:spPr>
         <p:txBody>
-          <a:bodyPr wrap="square" lIns="0" tIns="0" rIns="0" bIns="0" rtlCol="0" anchor="t"/>
+          <a:bodyPr wrap="square" lIns="0" tIns="0" rIns="0" bIns="0" rtlCol="0" anchor="t">
+            <a:normAutofit/>
+          </a:bodyPr>
           <a:lstStyle/>
           <a:p>
             <a:pPr algn="l" marL="152400" indent="-152400">
@@ -26143,7 +26922,9 @@
           <a:ln/>
         </p:spPr>
         <p:txBody>
-          <a:bodyPr wrap="square" lIns="0" tIns="0" rIns="0" bIns="0" rtlCol="0" anchor="ctr"/>
+          <a:bodyPr wrap="square" lIns="0" tIns="0" rIns="0" bIns="0" rtlCol="0" anchor="ctr">
+            <a:normAutofit/>
+          </a:bodyPr>
           <a:lstStyle/>
           <a:p>
             <a:pPr indent="0" marL="0">
@@ -26171,7 +26952,9 @@
           <a:ln/>
         </p:spPr>
         <p:txBody>
-          <a:bodyPr wrap="square" lIns="0" tIns="0" rIns="0" bIns="0" rtlCol="0" anchor="ctr"/>
+          <a:bodyPr wrap="square" lIns="0" tIns="0" rIns="0" bIns="0" rtlCol="0" anchor="ctr">
+            <a:normAutofit/>
+          </a:bodyPr>
           <a:lstStyle/>
           <a:p>
             <a:pPr indent="0" marL="0">
@@ -26262,7 +27045,9 @@
           <a:ln/>
         </p:spPr>
         <p:txBody>
-          <a:bodyPr wrap="square" lIns="0" tIns="0" rIns="0" bIns="0" rtlCol="0" anchor="ctr"/>
+          <a:bodyPr wrap="square" lIns="0" tIns="0" rIns="0" bIns="0" rtlCol="0" anchor="ctr">
+            <a:normAutofit/>
+          </a:bodyPr>
           <a:lstStyle/>
           <a:p>
             <a:pPr indent="0" marL="0">
@@ -26301,7 +27086,9 @@
           <a:ln/>
         </p:spPr>
         <p:txBody>
-          <a:bodyPr wrap="square" lIns="0" tIns="0" rIns="0" bIns="0" rtlCol="0" anchor="ctr"/>
+          <a:bodyPr wrap="square" lIns="0" tIns="0" rIns="0" bIns="0" rtlCol="0" anchor="ctr">
+            <a:normAutofit/>
+          </a:bodyPr>
           <a:lstStyle/>
           <a:p>
             <a:pPr indent="0" marL="0">
@@ -26340,7 +27127,9 @@
           <a:ln/>
         </p:spPr>
         <p:txBody>
-          <a:bodyPr wrap="square" lIns="0" tIns="0" rIns="0" bIns="0" rtlCol="0" anchor="ctr"/>
+          <a:bodyPr wrap="square" lIns="0" tIns="0" rIns="0" bIns="0" rtlCol="0" anchor="ctr">
+            <a:normAutofit/>
+          </a:bodyPr>
           <a:lstStyle/>
           <a:p>
             <a:pPr algn="r" indent="0" marL="0">
@@ -26379,7 +27168,9 @@
           <a:ln/>
         </p:spPr>
         <p:txBody>
-          <a:bodyPr wrap="square" lIns="0" tIns="0" rIns="0" bIns="0" rtlCol="0" anchor="ctr"/>
+          <a:bodyPr wrap="square" lIns="0" tIns="0" rIns="0" bIns="0" rtlCol="0" anchor="ctr">
+            <a:normAutofit/>
+          </a:bodyPr>
           <a:lstStyle/>
           <a:p>
             <a:pPr indent="0" marL="0">
@@ -26394,7 +27185,7 @@
                 <a:ea typeface="微软雅黑" pitchFamily="34" charset="-122"/>
                 <a:cs typeface="微软雅黑" pitchFamily="34" charset="-120"/>
               </a:rPr>
-              <a:t>帮扶管理信息系统 v1.12.10</a:t>
+              <a:t>帮扶管理信息系统 v1.12.11</a:t>
             </a:r>
             <a:endParaRPr lang="en-US" sz="1050" dirty="0"/>
           </a:p>
@@ -26437,17 +27228,19 @@
         </p:nvSpPr>
         <p:spPr>
           <a:xfrm>
-            <a:off x="749808" y="1874520"/>
-            <a:ext cx="3657600" cy="365760"/>
-          </a:xfrm>
-          <a:prstGeom prst="rect">
-            <a:avLst/>
-          </a:prstGeom>
-          <a:noFill/>
-          <a:ln/>
-        </p:spPr>
-        <p:txBody>
-          <a:bodyPr wrap="square" lIns="0" tIns="0" rIns="0" bIns="0" rtlCol="0" anchor="ctr"/>
+            <a:off x="749808" y="1828800"/>
+            <a:ext cx="4901184" cy="355092"/>
+          </a:xfrm>
+          <a:prstGeom prst="rect">
+            <a:avLst/>
+          </a:prstGeom>
+          <a:noFill/>
+          <a:ln/>
+        </p:spPr>
+        <p:txBody>
+          <a:bodyPr wrap="square" lIns="0" tIns="0" rIns="0" bIns="0" rtlCol="0" anchor="ctr">
+            <a:normAutofit/>
+          </a:bodyPr>
           <a:lstStyle/>
           <a:p>
             <a:pPr indent="0" marL="0">
@@ -26476,17 +27269,19 @@
         </p:nvSpPr>
         <p:spPr>
           <a:xfrm>
-            <a:off x="749808" y="2331720"/>
-            <a:ext cx="4937760" cy="3566160"/>
-          </a:xfrm>
-          <a:prstGeom prst="rect">
-            <a:avLst/>
-          </a:prstGeom>
-          <a:noFill/>
-          <a:ln/>
-        </p:spPr>
-        <p:txBody>
-          <a:bodyPr wrap="square" lIns="0" tIns="0" rIns="0" bIns="0" rtlCol="0" anchor="t"/>
+            <a:off x="749808" y="2266188"/>
+            <a:ext cx="4901184" cy="3713988"/>
+          </a:xfrm>
+          <a:prstGeom prst="rect">
+            <a:avLst/>
+          </a:prstGeom>
+          <a:noFill/>
+          <a:ln/>
+        </p:spPr>
+        <p:txBody>
+          <a:bodyPr wrap="square" lIns="0" tIns="0" rIns="0" bIns="0" rtlCol="0" anchor="t">
+            <a:normAutofit/>
+          </a:bodyPr>
           <a:lstStyle/>
           <a:p>
             <a:pPr algn="l" marL="152400" indent="-152400">
@@ -26505,7 +27300,7 @@
                 <a:ea typeface="微软雅黑" pitchFamily="34" charset="-122"/>
                 <a:cs typeface="微软雅黑" pitchFamily="34" charset="-120"/>
               </a:rPr>
-              <a:t>备份包必含数据库本体，缺失即抛错（fail-loud）</a:t>
+              <a:t>备份包必含数据库本体，缺失即抛错（fail-loud）；列表标注 is_encrypted / database_included</a:t>
             </a:r>
             <a:endParaRPr lang="en-US" sz="1300" dirty="0"/>
           </a:p>
@@ -26526,7 +27321,7 @@
                 <a:ea typeface="微软雅黑" pitchFamily="34" charset="-122"/>
                 <a:cs typeface="微软雅黑" pitchFamily="34" charset="-120"/>
               </a:rPr>
-              <a:t>列表标注 is_encrypted / database_included</a:t>
+              <a:t>上传恢复：8MB 分块流式落盘防 OOM、10GB 防御上限；上传前内存预校验（加密标记 / 损坏 ZIP / 缺库文件）→ 拒绝零残留</a:t>
             </a:r>
             <a:endParaRPr lang="en-US" sz="1300" dirty="0"/>
           </a:p>
@@ -26547,7 +27342,7 @@
                 <a:ea typeface="微软雅黑" pitchFamily="34" charset="-122"/>
                 <a:cs typeface="微软雅黑" pitchFamily="34" charset="-120"/>
               </a:rPr>
-              <a:t>上传恢复：8MB 分块流式落盘防 OOM，10GB 防御上限</a:t>
+              <a:t>恢复流程 WAL 安全：先释放连接池再覆盖数据库文件</a:t>
             </a:r>
             <a:endParaRPr lang="en-US" sz="1300" dirty="0"/>
           </a:p>
@@ -26589,7 +27384,7 @@
                 <a:ea typeface="微软雅黑" pitchFamily="34" charset="-122"/>
                 <a:cs typeface="微软雅黑" pitchFamily="34" charset="-120"/>
               </a:rPr>
-              <a:t>路径单一来源：以会话引擎/DATABASE_URL 为准（历史错源事故根治）</a:t>
+              <a:t>路径单一来源：以会话引擎 / DATABASE_URL 为准（历史错源事故根治）</a:t>
             </a:r>
             <a:endParaRPr lang="en-US" sz="1300" dirty="0"/>
           </a:p>
@@ -26632,17 +27427,19 @@
         </p:nvSpPr>
         <p:spPr>
           <a:xfrm>
-            <a:off x="6556248" y="1874520"/>
-            <a:ext cx="4114800" cy="365760"/>
-          </a:xfrm>
-          <a:prstGeom prst="rect">
-            <a:avLst/>
-          </a:prstGeom>
-          <a:noFill/>
-          <a:ln/>
-        </p:spPr>
-        <p:txBody>
-          <a:bodyPr wrap="square" lIns="0" tIns="0" rIns="0" bIns="0" rtlCol="0" anchor="ctr"/>
+            <a:off x="6556248" y="1828800"/>
+            <a:ext cx="4901184" cy="355092"/>
+          </a:xfrm>
+          <a:prstGeom prst="rect">
+            <a:avLst/>
+          </a:prstGeom>
+          <a:noFill/>
+          <a:ln/>
+        </p:spPr>
+        <p:txBody>
+          <a:bodyPr wrap="square" lIns="0" tIns="0" rIns="0" bIns="0" rtlCol="0" anchor="ctr">
+            <a:normAutofit/>
+          </a:bodyPr>
           <a:lstStyle/>
           <a:p>
             <a:pPr indent="0" marL="0">
@@ -26671,17 +27468,19 @@
         </p:nvSpPr>
         <p:spPr>
           <a:xfrm>
-            <a:off x="6556248" y="2331720"/>
-            <a:ext cx="4937760" cy="3566160"/>
-          </a:xfrm>
-          <a:prstGeom prst="rect">
-            <a:avLst/>
-          </a:prstGeom>
-          <a:noFill/>
-          <a:ln/>
-        </p:spPr>
-        <p:txBody>
-          <a:bodyPr wrap="square" lIns="0" tIns="0" rIns="0" bIns="0" rtlCol="0" anchor="t"/>
+            <a:off x="6556248" y="2266188"/>
+            <a:ext cx="4901184" cy="3713988"/>
+          </a:xfrm>
+          <a:prstGeom prst="rect">
+            <a:avLst/>
+          </a:prstGeom>
+          <a:noFill/>
+          <a:ln/>
+        </p:spPr>
+        <p:txBody>
+          <a:bodyPr wrap="square" lIns="0" tIns="0" rIns="0" bIns="0" rtlCol="0" anchor="t">
+            <a:normAutofit/>
+          </a:bodyPr>
           <a:lstStyle/>
           <a:p>
             <a:pPr algn="l" marL="152400" indent="-152400">
@@ -26785,6 +27584,27 @@
                 <a:cs typeface="微软雅黑" pitchFamily="34" charset="-120"/>
               </a:rPr>
               <a:t>机器码三级回退：Windows 重装也能通过通行码恢复授权</a:t>
+            </a:r>
+            <a:endParaRPr lang="en-US" sz="1300" dirty="0"/>
+          </a:p>
+          <a:p>
+            <a:pPr algn="l" marL="152400" indent="-152400">
+              <a:spcAft>
+                <a:spcPts val="1000"/>
+              </a:spcAft>
+              <a:buSzPct val="100000"/>
+              <a:buChar char="▪"/>
+            </a:pPr>
+            <a:r>
+              <a:rPr lang="en-US" sz="1300" dirty="0">
+                <a:solidFill>
+                  <a:srgbClr val="1A2E24"/>
+                </a:solidFill>
+                <a:latin typeface="微软雅黑" pitchFamily="34" charset="0"/>
+                <a:ea typeface="微软雅黑" pitchFamily="34" charset="-122"/>
+                <a:cs typeface="微软雅黑" pitchFamily="34" charset="-120"/>
+              </a:rPr>
+              <a:t>升级期间写请求闸门（maintenance gate）挡住并发写入</a:t>
             </a:r>
             <a:endParaRPr lang="en-US" sz="1300" dirty="0"/>
           </a:p>
@@ -26860,7 +27680,9 @@
           <a:ln/>
         </p:spPr>
         <p:txBody>
-          <a:bodyPr wrap="square" lIns="0" tIns="0" rIns="0" bIns="0" rtlCol="0" anchor="ctr"/>
+          <a:bodyPr wrap="square" lIns="0" tIns="0" rIns="0" bIns="0" rtlCol="0" anchor="ctr">
+            <a:normAutofit/>
+          </a:bodyPr>
           <a:lstStyle/>
           <a:p>
             <a:pPr indent="0" marL="0">
@@ -26899,7 +27721,9 @@
           <a:ln/>
         </p:spPr>
         <p:txBody>
-          <a:bodyPr wrap="square" lIns="0" tIns="0" rIns="0" bIns="0" rtlCol="0" anchor="ctr"/>
+          <a:bodyPr wrap="square" lIns="0" tIns="0" rIns="0" bIns="0" rtlCol="0" anchor="ctr">
+            <a:normAutofit/>
+          </a:bodyPr>
           <a:lstStyle/>
           <a:p>
             <a:pPr indent="0" marL="0">
@@ -26938,7 +27762,9 @@
           <a:ln/>
         </p:spPr>
         <p:txBody>
-          <a:bodyPr wrap="square" lIns="0" tIns="0" rIns="0" bIns="0" rtlCol="0" anchor="ctr"/>
+          <a:bodyPr wrap="square" lIns="0" tIns="0" rIns="0" bIns="0" rtlCol="0" anchor="ctr">
+            <a:normAutofit/>
+          </a:bodyPr>
           <a:lstStyle/>
           <a:p>
             <a:pPr algn="r" indent="0" marL="0">
@@ -26977,7 +27803,9 @@
           <a:ln/>
         </p:spPr>
         <p:txBody>
-          <a:bodyPr wrap="square" lIns="0" tIns="0" rIns="0" bIns="0" rtlCol="0" anchor="ctr"/>
+          <a:bodyPr wrap="square" lIns="0" tIns="0" rIns="0" bIns="0" rtlCol="0" anchor="ctr">
+            <a:normAutofit/>
+          </a:bodyPr>
           <a:lstStyle/>
           <a:p>
             <a:pPr indent="0" marL="0">
@@ -26992,7 +27820,7 @@
                 <a:ea typeface="微软雅黑" pitchFamily="34" charset="-122"/>
                 <a:cs typeface="微软雅黑" pitchFamily="34" charset="-120"/>
               </a:rPr>
-              <a:t>帮扶管理信息系统 v1.12.10</a:t>
+              <a:t>帮扶管理信息系统 v1.12.11</a:t>
             </a:r>
             <a:endParaRPr lang="en-US" sz="1050" dirty="0"/>
           </a:p>
@@ -27059,7 +27887,9 @@
           <a:ln/>
         </p:spPr>
         <p:txBody>
-          <a:bodyPr wrap="square" lIns="0" tIns="0" rIns="0" bIns="0" rtlCol="0" anchor="ctr"/>
+          <a:bodyPr wrap="square" lIns="0" tIns="0" rIns="0" bIns="0" rtlCol="0" anchor="ctr">
+            <a:normAutofit/>
+          </a:bodyPr>
           <a:lstStyle/>
           <a:p>
             <a:pPr algn="ctr" indent="0" marL="0">
@@ -27098,7 +27928,9 @@
           <a:ln/>
         </p:spPr>
         <p:txBody>
-          <a:bodyPr wrap="square" lIns="0" tIns="0" rIns="0" bIns="0" rtlCol="0" anchor="ctr"/>
+          <a:bodyPr wrap="square" lIns="0" tIns="0" rIns="0" bIns="0" rtlCol="0" anchor="ctr">
+            <a:normAutofit/>
+          </a:bodyPr>
           <a:lstStyle/>
           <a:p>
             <a:pPr algn="ctr" indent="0" marL="0">
@@ -27127,17 +27959,19 @@
         </p:nvSpPr>
         <p:spPr>
           <a:xfrm>
-            <a:off x="320040" y="3566160"/>
-            <a:ext cx="1965960" cy="1737360"/>
-          </a:xfrm>
-          <a:prstGeom prst="rect">
-            <a:avLst/>
-          </a:prstGeom>
-          <a:noFill/>
-          <a:ln/>
-        </p:spPr>
-        <p:txBody>
-          <a:bodyPr wrap="square" lIns="0" tIns="0" rIns="0" bIns="0" rtlCol="0" anchor="ctr"/>
+            <a:off x="320040" y="3520440"/>
+            <a:ext cx="1965960" cy="1810512"/>
+          </a:xfrm>
+          <a:prstGeom prst="rect">
+            <a:avLst/>
+          </a:prstGeom>
+          <a:noFill/>
+          <a:ln/>
+        </p:spPr>
+        <p:txBody>
+          <a:bodyPr wrap="square" lIns="0" tIns="0" rIns="0" bIns="0" rtlCol="0" anchor="ctr">
+            <a:normAutofit/>
+          </a:bodyPr>
           <a:lstStyle/>
           <a:p>
             <a:pPr algn="l" indent="0" marL="0">
@@ -27196,7 +28030,9 @@
           <a:ln/>
         </p:spPr>
         <p:txBody>
-          <a:bodyPr wrap="square" lIns="0" tIns="0" rIns="0" bIns="0" rtlCol="0" anchor="ctr"/>
+          <a:bodyPr wrap="square" lIns="0" tIns="0" rIns="0" bIns="0" rtlCol="0" anchor="ctr">
+            <a:normAutofit/>
+          </a:bodyPr>
           <a:lstStyle/>
           <a:p>
             <a:pPr algn="ctr" indent="0" marL="0">
@@ -27235,7 +28071,9 @@
           <a:ln/>
         </p:spPr>
         <p:txBody>
-          <a:bodyPr wrap="square" lIns="0" tIns="0" rIns="0" bIns="0" rtlCol="0" anchor="ctr"/>
+          <a:bodyPr wrap="square" lIns="0" tIns="0" rIns="0" bIns="0" rtlCol="0" anchor="ctr">
+            <a:normAutofit/>
+          </a:bodyPr>
           <a:lstStyle/>
           <a:p>
             <a:pPr algn="ctr" indent="0" marL="0">
@@ -27264,17 +28102,19 @@
         </p:nvSpPr>
         <p:spPr>
           <a:xfrm>
-            <a:off x="2560320" y="3566160"/>
-            <a:ext cx="1965960" cy="1737360"/>
-          </a:xfrm>
-          <a:prstGeom prst="rect">
-            <a:avLst/>
-          </a:prstGeom>
-          <a:noFill/>
-          <a:ln/>
-        </p:spPr>
-        <p:txBody>
-          <a:bodyPr wrap="square" lIns="0" tIns="0" rIns="0" bIns="0" rtlCol="0" anchor="ctr"/>
+            <a:off x="2560320" y="3520440"/>
+            <a:ext cx="1965960" cy="1810512"/>
+          </a:xfrm>
+          <a:prstGeom prst="rect">
+            <a:avLst/>
+          </a:prstGeom>
+          <a:noFill/>
+          <a:ln/>
+        </p:spPr>
+        <p:txBody>
+          <a:bodyPr wrap="square" lIns="0" tIns="0" rIns="0" bIns="0" rtlCol="0" anchor="ctr">
+            <a:normAutofit/>
+          </a:bodyPr>
           <a:lstStyle/>
           <a:p>
             <a:pPr algn="l" indent="0" marL="0">
@@ -27333,7 +28173,9 @@
           <a:ln/>
         </p:spPr>
         <p:txBody>
-          <a:bodyPr wrap="square" lIns="0" tIns="0" rIns="0" bIns="0" rtlCol="0" anchor="ctr"/>
+          <a:bodyPr wrap="square" lIns="0" tIns="0" rIns="0" bIns="0" rtlCol="0" anchor="ctr">
+            <a:normAutofit/>
+          </a:bodyPr>
           <a:lstStyle/>
           <a:p>
             <a:pPr algn="ctr" indent="0" marL="0">
@@ -27372,7 +28214,9 @@
           <a:ln/>
         </p:spPr>
         <p:txBody>
-          <a:bodyPr wrap="square" lIns="0" tIns="0" rIns="0" bIns="0" rtlCol="0" anchor="ctr"/>
+          <a:bodyPr wrap="square" lIns="0" tIns="0" rIns="0" bIns="0" rtlCol="0" anchor="ctr">
+            <a:normAutofit/>
+          </a:bodyPr>
           <a:lstStyle/>
           <a:p>
             <a:pPr algn="ctr" indent="0" marL="0">
@@ -27401,17 +28245,19 @@
         </p:nvSpPr>
         <p:spPr>
           <a:xfrm>
-            <a:off x="4800600" y="3566160"/>
-            <a:ext cx="1965960" cy="1737360"/>
-          </a:xfrm>
-          <a:prstGeom prst="rect">
-            <a:avLst/>
-          </a:prstGeom>
-          <a:noFill/>
-          <a:ln/>
-        </p:spPr>
-        <p:txBody>
-          <a:bodyPr wrap="square" lIns="0" tIns="0" rIns="0" bIns="0" rtlCol="0" anchor="ctr"/>
+            <a:off x="4800600" y="3520440"/>
+            <a:ext cx="1965960" cy="1810512"/>
+          </a:xfrm>
+          <a:prstGeom prst="rect">
+            <a:avLst/>
+          </a:prstGeom>
+          <a:noFill/>
+          <a:ln/>
+        </p:spPr>
+        <p:txBody>
+          <a:bodyPr wrap="square" lIns="0" tIns="0" rIns="0" bIns="0" rtlCol="0" anchor="ctr">
+            <a:normAutofit/>
+          </a:bodyPr>
           <a:lstStyle/>
           <a:p>
             <a:pPr algn="l" indent="0" marL="0">
@@ -27470,7 +28316,9 @@
           <a:ln/>
         </p:spPr>
         <p:txBody>
-          <a:bodyPr wrap="square" lIns="0" tIns="0" rIns="0" bIns="0" rtlCol="0" anchor="ctr"/>
+          <a:bodyPr wrap="square" lIns="0" tIns="0" rIns="0" bIns="0" rtlCol="0" anchor="ctr">
+            <a:normAutofit/>
+          </a:bodyPr>
           <a:lstStyle/>
           <a:p>
             <a:pPr algn="ctr" indent="0" marL="0">
@@ -27509,7 +28357,9 @@
           <a:ln/>
         </p:spPr>
         <p:txBody>
-          <a:bodyPr wrap="square" lIns="0" tIns="0" rIns="0" bIns="0" rtlCol="0" anchor="ctr"/>
+          <a:bodyPr wrap="square" lIns="0" tIns="0" rIns="0" bIns="0" rtlCol="0" anchor="ctr">
+            <a:normAutofit/>
+          </a:bodyPr>
           <a:lstStyle/>
           <a:p>
             <a:pPr algn="ctr" indent="0" marL="0">
@@ -27538,17 +28388,19 @@
         </p:nvSpPr>
         <p:spPr>
           <a:xfrm>
-            <a:off x="7040880" y="3566160"/>
-            <a:ext cx="1965960" cy="1737360"/>
-          </a:xfrm>
-          <a:prstGeom prst="rect">
-            <a:avLst/>
-          </a:prstGeom>
-          <a:noFill/>
-          <a:ln/>
-        </p:spPr>
-        <p:txBody>
-          <a:bodyPr wrap="square" lIns="0" tIns="0" rIns="0" bIns="0" rtlCol="0" anchor="ctr"/>
+            <a:off x="7040880" y="3520440"/>
+            <a:ext cx="1965960" cy="1810512"/>
+          </a:xfrm>
+          <a:prstGeom prst="rect">
+            <a:avLst/>
+          </a:prstGeom>
+          <a:noFill/>
+          <a:ln/>
+        </p:spPr>
+        <p:txBody>
+          <a:bodyPr wrap="square" lIns="0" tIns="0" rIns="0" bIns="0" rtlCol="0" anchor="ctr">
+            <a:normAutofit/>
+          </a:bodyPr>
           <a:lstStyle/>
           <a:p>
             <a:pPr algn="l" indent="0" marL="0">
@@ -27607,7 +28459,9 @@
           <a:ln/>
         </p:spPr>
         <p:txBody>
-          <a:bodyPr wrap="square" lIns="0" tIns="0" rIns="0" bIns="0" rtlCol="0" anchor="ctr"/>
+          <a:bodyPr wrap="square" lIns="0" tIns="0" rIns="0" bIns="0" rtlCol="0" anchor="ctr">
+            <a:normAutofit/>
+          </a:bodyPr>
           <a:lstStyle/>
           <a:p>
             <a:pPr algn="ctr" indent="0" marL="0">
@@ -27646,7 +28500,9 @@
           <a:ln/>
         </p:spPr>
         <p:txBody>
-          <a:bodyPr wrap="square" lIns="0" tIns="0" rIns="0" bIns="0" rtlCol="0" anchor="ctr"/>
+          <a:bodyPr wrap="square" lIns="0" tIns="0" rIns="0" bIns="0" rtlCol="0" anchor="ctr">
+            <a:normAutofit/>
+          </a:bodyPr>
           <a:lstStyle/>
           <a:p>
             <a:pPr algn="ctr" indent="0" marL="0">
@@ -27675,24 +28531,26 @@
         </p:nvSpPr>
         <p:spPr>
           <a:xfrm>
-            <a:off x="9281160" y="3566160"/>
-            <a:ext cx="1965960" cy="1737360"/>
-          </a:xfrm>
-          <a:prstGeom prst="rect">
-            <a:avLst/>
-          </a:prstGeom>
-          <a:noFill/>
-          <a:ln/>
-        </p:spPr>
-        <p:txBody>
-          <a:bodyPr wrap="square" lIns="0" tIns="0" rIns="0" bIns="0" rtlCol="0" anchor="ctr"/>
+            <a:off x="9281160" y="3520440"/>
+            <a:ext cx="1965960" cy="1810512"/>
+          </a:xfrm>
+          <a:prstGeom prst="rect">
+            <a:avLst/>
+          </a:prstGeom>
+          <a:noFill/>
+          <a:ln/>
+        </p:spPr>
+        <p:txBody>
+          <a:bodyPr wrap="square" lIns="0" tIns="0" rIns="0" bIns="0" rtlCol="0" anchor="ctr">
+            <a:normAutofit/>
+          </a:bodyPr>
           <a:lstStyle/>
           <a:p>
             <a:pPr algn="l" indent="0" marL="0">
               <a:buNone/>
             </a:pPr>
             <a:r>
-              <a:rPr lang="en-US" sz="1150" dirty="0">
+              <a:rPr lang="en-US" sz="1100" dirty="0">
                 <a:solidFill>
                   <a:srgbClr val="5F6F66"/>
                 </a:solidFill>
@@ -27702,7 +28560,7 @@
               </a:rPr>
               <a:t>跨平台 CI 双红根因修复：归档恢复穿越判定去平台化（Windows 风格路径曾绕过校验）、审批时间轴断言去时区依赖（UTC runner 与本地结论相反）+ 测试会话数据根隔离契约（Linux 上 override 曾被短路忽略）</a:t>
             </a:r>
-            <a:endParaRPr lang="en-US" sz="1150" dirty="0"/>
+            <a:endParaRPr lang="en-US" sz="1100" dirty="0"/>
           </a:p>
         </p:txBody>
       </p:sp>
@@ -27714,12 +28572,12 @@
         </p:nvSpPr>
         <p:spPr>
           <a:xfrm>
-            <a:off x="457200" y="5440680"/>
-            <a:ext cx="11274552" cy="914400"/>
+            <a:off x="457200" y="5394960"/>
+            <a:ext cx="11274552" cy="868680"/>
           </a:xfrm>
           <a:prstGeom prst="roundRect">
             <a:avLst>
-              <a:gd name="adj" fmla="val 7000"/>
+              <a:gd name="adj" fmla="val 7368"/>
             </a:avLst>
           </a:prstGeom>
           <a:solidFill>
@@ -27743,17 +28601,19 @@
         </p:nvSpPr>
         <p:spPr>
           <a:xfrm>
-            <a:off x="749808" y="5440680"/>
-            <a:ext cx="10607040" cy="914400"/>
-          </a:xfrm>
-          <a:prstGeom prst="rect">
-            <a:avLst/>
-          </a:prstGeom>
-          <a:noFill/>
-          <a:ln/>
-        </p:spPr>
-        <p:txBody>
-          <a:bodyPr wrap="square" lIns="0" tIns="0" rIns="0" bIns="0" rtlCol="0" anchor="ctr"/>
+            <a:off x="749808" y="5394960"/>
+            <a:ext cx="10607040" cy="868680"/>
+          </a:xfrm>
+          <a:prstGeom prst="rect">
+            <a:avLst/>
+          </a:prstGeom>
+          <a:noFill/>
+          <a:ln/>
+        </p:spPr>
+        <p:txBody>
+          <a:bodyPr wrap="square" lIns="0" tIns="0" rIns="0" bIns="0" rtlCol="0" anchor="ctr">
+            <a:normAutofit/>
+          </a:bodyPr>
           <a:lstStyle/>
           <a:p>
             <a:pPr indent="0" marL="0">
@@ -27768,7 +28628,7 @@
                 <a:ea typeface="微软雅黑" pitchFamily="34" charset="-122"/>
                 <a:cs typeface="微软雅黑" pitchFamily="34" charset="-120"/>
               </a:rPr>
-              <a:t>净效果：11,915 后端用例（覆盖率 100%）+ 6,287 前端用例全绿；Windows x64 与麒麟 ARM64 两个离线安装包由 GitHub Actions 全自动构建并发布 Release</a:t>
+              <a:t>净效果：11,916 后端用例（覆盖率 100%）+ 6,287 前端用例全绿；Windows x64 与麒麟 ARM64 两个离线安装包由 GitHub Actions 全自动构建并发布 Release</a:t>
             </a:r>
             <a:endParaRPr lang="en-US" sz="1350" dirty="0"/>
           </a:p>
@@ -27844,7 +28704,9 @@
           <a:ln/>
         </p:spPr>
         <p:txBody>
-          <a:bodyPr wrap="square" lIns="0" tIns="0" rIns="0" bIns="0" rtlCol="0" anchor="ctr"/>
+          <a:bodyPr wrap="square" lIns="0" tIns="0" rIns="0" bIns="0" rtlCol="0" anchor="ctr">
+            <a:normAutofit/>
+          </a:bodyPr>
           <a:lstStyle/>
           <a:p>
             <a:pPr indent="0" marL="0">
@@ -27883,7 +28745,9 @@
           <a:ln/>
         </p:spPr>
         <p:txBody>
-          <a:bodyPr wrap="square" lIns="0" tIns="0" rIns="0" bIns="0" rtlCol="0" anchor="ctr"/>
+          <a:bodyPr wrap="square" lIns="0" tIns="0" rIns="0" bIns="0" rtlCol="0" anchor="ctr">
+            <a:normAutofit/>
+          </a:bodyPr>
           <a:lstStyle/>
           <a:p>
             <a:pPr indent="0" marL="0">
@@ -27922,7 +28786,9 @@
           <a:ln/>
         </p:spPr>
         <p:txBody>
-          <a:bodyPr wrap="square" lIns="0" tIns="0" rIns="0" bIns="0" rtlCol="0" anchor="ctr"/>
+          <a:bodyPr wrap="square" lIns="0" tIns="0" rIns="0" bIns="0" rtlCol="0" anchor="ctr">
+            <a:normAutofit/>
+          </a:bodyPr>
           <a:lstStyle/>
           <a:p>
             <a:pPr algn="r" indent="0" marL="0">
@@ -27961,7 +28827,9 @@
           <a:ln/>
         </p:spPr>
         <p:txBody>
-          <a:bodyPr wrap="square" lIns="0" tIns="0" rIns="0" bIns="0" rtlCol="0" anchor="ctr"/>
+          <a:bodyPr wrap="square" lIns="0" tIns="0" rIns="0" bIns="0" rtlCol="0" anchor="ctr">
+            <a:normAutofit/>
+          </a:bodyPr>
           <a:lstStyle/>
           <a:p>
             <a:pPr indent="0" marL="0">
@@ -27976,7 +28844,7 @@
                 <a:ea typeface="微软雅黑" pitchFamily="34" charset="-122"/>
                 <a:cs typeface="微软雅黑" pitchFamily="34" charset="-120"/>
               </a:rPr>
-              <a:t>帮扶管理信息系统 v1.12.10</a:t>
+              <a:t>帮扶管理信息系统 v1.12.11</a:t>
             </a:r>
             <a:endParaRPr lang="en-US" sz="1050" dirty="0"/>
           </a:p>
@@ -28000,7 +28868,9 @@
           <a:ln/>
         </p:spPr>
         <p:txBody>
-          <a:bodyPr wrap="square" lIns="0" tIns="0" rIns="0" bIns="0" rtlCol="0" anchor="ctr"/>
+          <a:bodyPr wrap="square" lIns="0" tIns="0" rIns="0" bIns="0" rtlCol="0" anchor="ctr">
+            <a:normAutofit/>
+          </a:bodyPr>
           <a:lstStyle/>
           <a:p>
             <a:pPr indent="0" marL="0">
@@ -28059,7 +28929,9 @@
           <a:ln/>
         </p:spPr>
         <p:txBody>
-          <a:bodyPr wrap="square" lIns="0" tIns="0" rIns="0" bIns="0" rtlCol="0" anchor="ctr"/>
+          <a:bodyPr wrap="square" lIns="0" tIns="0" rIns="0" bIns="0" rtlCol="0" anchor="ctr">
+            <a:normAutofit/>
+          </a:bodyPr>
           <a:lstStyle/>
           <a:p>
             <a:pPr indent="0" marL="0">
@@ -28098,7 +28970,9 @@
           <a:ln/>
         </p:spPr>
         <p:txBody>
-          <a:bodyPr wrap="square" lIns="0" tIns="0" rIns="0" bIns="0" rtlCol="0" anchor="ctr"/>
+          <a:bodyPr wrap="square" lIns="0" tIns="0" rIns="0" bIns="0" rtlCol="0" anchor="ctr">
+            <a:normAutofit/>
+          </a:bodyPr>
           <a:lstStyle/>
           <a:p>
             <a:pPr indent="0" marL="0">
@@ -28157,7 +29031,9 @@
           <a:ln/>
         </p:spPr>
         <p:txBody>
-          <a:bodyPr wrap="square" lIns="0" tIns="0" rIns="0" bIns="0" rtlCol="0" anchor="ctr"/>
+          <a:bodyPr wrap="square" lIns="0" tIns="0" rIns="0" bIns="0" rtlCol="0" anchor="ctr">
+            <a:normAutofit/>
+          </a:bodyPr>
           <a:lstStyle/>
           <a:p>
             <a:pPr indent="0" marL="0">
@@ -28196,7 +29072,9 @@
           <a:ln/>
         </p:spPr>
         <p:txBody>
-          <a:bodyPr wrap="square" lIns="0" tIns="0" rIns="0" bIns="0" rtlCol="0" anchor="ctr"/>
+          <a:bodyPr wrap="square" lIns="0" tIns="0" rIns="0" bIns="0" rtlCol="0" anchor="ctr">
+            <a:normAutofit/>
+          </a:bodyPr>
           <a:lstStyle/>
           <a:p>
             <a:pPr indent="0" marL="0">
@@ -28255,7 +29133,9 @@
           <a:ln/>
         </p:spPr>
         <p:txBody>
-          <a:bodyPr wrap="square" lIns="0" tIns="0" rIns="0" bIns="0" rtlCol="0" anchor="ctr"/>
+          <a:bodyPr wrap="square" lIns="0" tIns="0" rIns="0" bIns="0" rtlCol="0" anchor="ctr">
+            <a:normAutofit/>
+          </a:bodyPr>
           <a:lstStyle/>
           <a:p>
             <a:pPr indent="0" marL="0">
@@ -28294,7 +29174,9 @@
           <a:ln/>
         </p:spPr>
         <p:txBody>
-          <a:bodyPr wrap="square" lIns="0" tIns="0" rIns="0" bIns="0" rtlCol="0" anchor="ctr"/>
+          <a:bodyPr wrap="square" lIns="0" tIns="0" rIns="0" bIns="0" rtlCol="0" anchor="ctr">
+            <a:normAutofit/>
+          </a:bodyPr>
           <a:lstStyle/>
           <a:p>
             <a:pPr indent="0" marL="0">
@@ -28385,7 +29267,9 @@
           <a:ln/>
         </p:spPr>
         <p:txBody>
-          <a:bodyPr wrap="square" lIns="0" tIns="0" rIns="0" bIns="0" rtlCol="0" anchor="ctr"/>
+          <a:bodyPr wrap="square" lIns="0" tIns="0" rIns="0" bIns="0" rtlCol="0" anchor="ctr">
+            <a:normAutofit/>
+          </a:bodyPr>
           <a:lstStyle/>
           <a:p>
             <a:pPr indent="0" marL="0">
@@ -28424,7 +29308,9 @@
           <a:ln/>
         </p:spPr>
         <p:txBody>
-          <a:bodyPr wrap="square" lIns="0" tIns="0" rIns="0" bIns="0" rtlCol="0" anchor="ctr"/>
+          <a:bodyPr wrap="square" lIns="0" tIns="0" rIns="0" bIns="0" rtlCol="0" anchor="ctr">
+            <a:normAutofit/>
+          </a:bodyPr>
           <a:lstStyle/>
           <a:p>
             <a:pPr indent="0" marL="0">
@@ -28463,7 +29349,9 @@
           <a:ln/>
         </p:spPr>
         <p:txBody>
-          <a:bodyPr wrap="square" lIns="0" tIns="0" rIns="0" bIns="0" rtlCol="0" anchor="ctr"/>
+          <a:bodyPr wrap="square" lIns="0" tIns="0" rIns="0" bIns="0" rtlCol="0" anchor="ctr">
+            <a:normAutofit/>
+          </a:bodyPr>
           <a:lstStyle/>
           <a:p>
             <a:pPr algn="r" indent="0" marL="0">
@@ -28502,7 +29390,9 @@
           <a:ln/>
         </p:spPr>
         <p:txBody>
-          <a:bodyPr wrap="square" lIns="0" tIns="0" rIns="0" bIns="0" rtlCol="0" anchor="ctr"/>
+          <a:bodyPr wrap="square" lIns="0" tIns="0" rIns="0" bIns="0" rtlCol="0" anchor="ctr">
+            <a:normAutofit/>
+          </a:bodyPr>
           <a:lstStyle/>
           <a:p>
             <a:pPr indent="0" marL="0">
@@ -28517,7 +29407,7 @@
                 <a:ea typeface="微软雅黑" pitchFamily="34" charset="-122"/>
                 <a:cs typeface="微软雅黑" pitchFamily="34" charset="-120"/>
               </a:rPr>
-              <a:t>帮扶管理信息系统 v1.12.10</a:t>
+              <a:t>帮扶管理信息系统 v1.12.11</a:t>
             </a:r>
             <a:endParaRPr lang="en-US" sz="1050" dirty="0"/>
           </a:p>
@@ -28570,7 +29460,9 @@
           <a:ln/>
         </p:spPr>
         <p:txBody>
-          <a:bodyPr wrap="square" lIns="0" tIns="0" rIns="0" bIns="0" rtlCol="0" anchor="ctr"/>
+          <a:bodyPr wrap="square" lIns="0" tIns="0" rIns="0" bIns="0" rtlCol="0" anchor="ctr">
+            <a:normAutofit/>
+          </a:bodyPr>
           <a:lstStyle/>
           <a:p>
             <a:pPr indent="0" marL="0">
@@ -28609,7 +29501,9 @@
           <a:ln/>
         </p:spPr>
         <p:txBody>
-          <a:bodyPr wrap="square" lIns="0" tIns="0" rIns="0" bIns="0" rtlCol="0" anchor="ctr"/>
+          <a:bodyPr wrap="square" lIns="0" tIns="0" rIns="0" bIns="0" rtlCol="0" anchor="ctr">
+            <a:normAutofit/>
+          </a:bodyPr>
           <a:lstStyle/>
           <a:p>
             <a:pPr indent="0" marL="0">
@@ -28677,7 +29571,9 @@
           <a:ln/>
         </p:spPr>
         <p:txBody>
-          <a:bodyPr wrap="square" lIns="0" tIns="0" rIns="0" bIns="0" rtlCol="0" anchor="ctr"/>
+          <a:bodyPr wrap="square" lIns="0" tIns="0" rIns="0" bIns="0" rtlCol="0" anchor="ctr">
+            <a:normAutofit/>
+          </a:bodyPr>
           <a:lstStyle/>
           <a:p>
             <a:pPr indent="0" marL="0">
@@ -28716,7 +29612,9 @@
           <a:ln/>
         </p:spPr>
         <p:txBody>
-          <a:bodyPr wrap="square" lIns="0" tIns="0" rIns="0" bIns="0" rtlCol="0" anchor="ctr"/>
+          <a:bodyPr wrap="square" lIns="0" tIns="0" rIns="0" bIns="0" rtlCol="0" anchor="ctr">
+            <a:normAutofit/>
+          </a:bodyPr>
           <a:lstStyle/>
           <a:p>
             <a:pPr indent="0" marL="0">
@@ -28784,7 +29682,9 @@
           <a:ln/>
         </p:spPr>
         <p:txBody>
-          <a:bodyPr wrap="square" lIns="0" tIns="0" rIns="0" bIns="0" rtlCol="0" anchor="ctr"/>
+          <a:bodyPr wrap="square" lIns="0" tIns="0" rIns="0" bIns="0" rtlCol="0" anchor="ctr">
+            <a:normAutofit/>
+          </a:bodyPr>
           <a:lstStyle/>
           <a:p>
             <a:pPr indent="0" marL="0">
@@ -28823,7 +29723,9 @@
           <a:ln/>
         </p:spPr>
         <p:txBody>
-          <a:bodyPr wrap="square" lIns="0" tIns="0" rIns="0" bIns="0" rtlCol="0" anchor="ctr"/>
+          <a:bodyPr wrap="square" lIns="0" tIns="0" rIns="0" bIns="0" rtlCol="0" anchor="ctr">
+            <a:normAutofit/>
+          </a:bodyPr>
           <a:lstStyle/>
           <a:p>
             <a:pPr indent="0" marL="0">
@@ -28891,7 +29793,9 @@
           <a:ln/>
         </p:spPr>
         <p:txBody>
-          <a:bodyPr wrap="square" lIns="0" tIns="0" rIns="0" bIns="0" rtlCol="0" anchor="ctr"/>
+          <a:bodyPr wrap="square" lIns="0" tIns="0" rIns="0" bIns="0" rtlCol="0" anchor="ctr">
+            <a:normAutofit/>
+          </a:bodyPr>
           <a:lstStyle/>
           <a:p>
             <a:pPr indent="0" marL="0">
@@ -28930,7 +29834,9 @@
           <a:ln/>
         </p:spPr>
         <p:txBody>
-          <a:bodyPr wrap="square" lIns="0" tIns="0" rIns="0" bIns="0" rtlCol="0" anchor="ctr"/>
+          <a:bodyPr wrap="square" lIns="0" tIns="0" rIns="0" bIns="0" rtlCol="0" anchor="ctr">
+            <a:normAutofit/>
+          </a:bodyPr>
           <a:lstStyle/>
           <a:p>
             <a:pPr indent="0" marL="0">
@@ -28998,7 +29904,9 @@
           <a:ln/>
         </p:spPr>
         <p:txBody>
-          <a:bodyPr wrap="square" lIns="0" tIns="0" rIns="0" bIns="0" rtlCol="0" anchor="ctr"/>
+          <a:bodyPr wrap="square" lIns="0" tIns="0" rIns="0" bIns="0" rtlCol="0" anchor="ctr">
+            <a:normAutofit/>
+          </a:bodyPr>
           <a:lstStyle/>
           <a:p>
             <a:pPr indent="0" marL="0">
@@ -29037,7 +29945,9 @@
           <a:ln/>
         </p:spPr>
         <p:txBody>
-          <a:bodyPr wrap="square" lIns="0" tIns="0" rIns="0" bIns="0" rtlCol="0" anchor="ctr"/>
+          <a:bodyPr wrap="square" lIns="0" tIns="0" rIns="0" bIns="0" rtlCol="0" anchor="ctr">
+            <a:normAutofit/>
+          </a:bodyPr>
           <a:lstStyle/>
           <a:p>
             <a:pPr indent="0" marL="0">
@@ -29105,7 +30015,9 @@
           <a:ln/>
         </p:spPr>
         <p:txBody>
-          <a:bodyPr wrap="square" lIns="0" tIns="0" rIns="0" bIns="0" rtlCol="0" anchor="ctr"/>
+          <a:bodyPr wrap="square" lIns="0" tIns="0" rIns="0" bIns="0" rtlCol="0" anchor="ctr">
+            <a:normAutofit/>
+          </a:bodyPr>
           <a:lstStyle/>
           <a:p>
             <a:pPr indent="0" marL="0">
@@ -29144,7 +30056,9 @@
           <a:ln/>
         </p:spPr>
         <p:txBody>
-          <a:bodyPr wrap="square" lIns="0" tIns="0" rIns="0" bIns="0" rtlCol="0" anchor="ctr"/>
+          <a:bodyPr wrap="square" lIns="0" tIns="0" rIns="0" bIns="0" rtlCol="0" anchor="ctr">
+            <a:normAutofit/>
+          </a:bodyPr>
           <a:lstStyle/>
           <a:p>
             <a:pPr indent="0" marL="0">
@@ -29255,7 +30169,9 @@
           <a:ln/>
         </p:spPr>
         <p:txBody>
-          <a:bodyPr wrap="square" lIns="0" tIns="0" rIns="0" bIns="0" rtlCol="0" anchor="ctr"/>
+          <a:bodyPr wrap="square" lIns="0" tIns="0" rIns="0" bIns="0" rtlCol="0" anchor="ctr">
+            <a:normAutofit/>
+          </a:bodyPr>
           <a:lstStyle/>
           <a:p>
             <a:pPr indent="0" marL="0">
@@ -29285,16 +30201,18 @@
         <p:spPr>
           <a:xfrm>
             <a:off x="877824" y="2743200"/>
-            <a:ext cx="10058400" cy="1097280"/>
-          </a:xfrm>
-          <a:prstGeom prst="rect">
-            <a:avLst/>
-          </a:prstGeom>
-          <a:noFill/>
-          <a:ln/>
-        </p:spPr>
-        <p:txBody>
-          <a:bodyPr wrap="square" lIns="0" tIns="0" rIns="0" bIns="0" rtlCol="0" anchor="ctr"/>
+            <a:ext cx="10058400" cy="1325880"/>
+          </a:xfrm>
+          <a:prstGeom prst="rect">
+            <a:avLst/>
+          </a:prstGeom>
+          <a:noFill/>
+          <a:ln/>
+        </p:spPr>
+        <p:txBody>
+          <a:bodyPr wrap="square" lIns="0" tIns="0" rIns="0" bIns="0" rtlCol="0" anchor="ctr">
+            <a:normAutofit/>
+          </a:bodyPr>
           <a:lstStyle/>
           <a:p>
             <a:pPr indent="0" marL="0">
@@ -29333,7 +30251,9 @@
           <a:ln/>
         </p:spPr>
         <p:txBody>
-          <a:bodyPr wrap="square" lIns="0" tIns="0" rIns="0" bIns="0" rtlCol="0" anchor="ctr"/>
+          <a:bodyPr wrap="square" lIns="0" tIns="0" rIns="0" bIns="0" rtlCol="0" anchor="ctr">
+            <a:normAutofit/>
+          </a:bodyPr>
           <a:lstStyle/>
           <a:p>
             <a:pPr indent="0" marL="0">
@@ -29348,7 +30268,7 @@
                 <a:ea typeface="微软雅黑" pitchFamily="34" charset="-122"/>
                 <a:cs typeface="微软雅黑" pitchFamily="34" charset="-120"/>
               </a:rPr>
-              <a:t>帮扶管理信息系统 v1.12.8  ·  仓库：github.com/lzh745200/MRRS  ·  完整文档见 docs/ 目录</a:t>
+              <a:t>帮扶管理信息系统 v1.12.11  ·  仓库：github.com/lzh745200/MRRS  ·  完整文档见 docs/ 目录</a:t>
             </a:r>
             <a:endParaRPr lang="en-US" sz="1350" dirty="0"/>
           </a:p>
@@ -29372,7 +30292,9 @@
           <a:ln/>
         </p:spPr>
         <p:txBody>
-          <a:bodyPr wrap="square" lIns="0" tIns="0" rIns="0" bIns="0" rtlCol="0" anchor="ctr"/>
+          <a:bodyPr wrap="square" lIns="0" tIns="0" rIns="0" bIns="0" rtlCol="0" anchor="ctr">
+            <a:normAutofit/>
+          </a:bodyPr>
           <a:lstStyle/>
           <a:p>
             <a:pPr indent="0" marL="0">
@@ -29387,7 +30309,7 @@
                 <a:ea typeface="微软雅黑" pitchFamily="34" charset="-122"/>
                 <a:cs typeface="微软雅黑" pitchFamily="34" charset="-120"/>
               </a:rPr>
-              <a:t>11,915 后端用例（覆盖率 100%）+ 6,287 前端用例 全绿守护 · Windows x64 / 麒麟 ARM64 双平台离线交付</a:t>
+              <a:t>11,916 后端用例（覆盖率 100%）+ 6,287 前端用例 全绿守护 · Windows x64 / 麒麟 ARM64 双平台离线交付</a:t>
             </a:r>
             <a:endParaRPr lang="en-US" sz="1350" dirty="0"/>
           </a:p>
@@ -29463,7 +30385,9 @@
           <a:ln/>
         </p:spPr>
         <p:txBody>
-          <a:bodyPr wrap="square" lIns="0" tIns="0" rIns="0" bIns="0" rtlCol="0" anchor="ctr"/>
+          <a:bodyPr wrap="square" lIns="0" tIns="0" rIns="0" bIns="0" rtlCol="0" anchor="ctr">
+            <a:normAutofit/>
+          </a:bodyPr>
           <a:lstStyle/>
           <a:p>
             <a:pPr indent="0" marL="0">
@@ -29502,7 +30426,9 @@
           <a:ln/>
         </p:spPr>
         <p:txBody>
-          <a:bodyPr wrap="square" lIns="0" tIns="0" rIns="0" bIns="0" rtlCol="0" anchor="ctr"/>
+          <a:bodyPr wrap="square" lIns="0" tIns="0" rIns="0" bIns="0" rtlCol="0" anchor="ctr">
+            <a:normAutofit/>
+          </a:bodyPr>
           <a:lstStyle/>
           <a:p>
             <a:pPr indent="0" marL="0">
@@ -29541,7 +30467,9 @@
           <a:ln/>
         </p:spPr>
         <p:txBody>
-          <a:bodyPr wrap="square" lIns="0" tIns="0" rIns="0" bIns="0" rtlCol="0" anchor="ctr"/>
+          <a:bodyPr wrap="square" lIns="0" tIns="0" rIns="0" bIns="0" rtlCol="0" anchor="ctr">
+            <a:normAutofit/>
+          </a:bodyPr>
           <a:lstStyle/>
           <a:p>
             <a:pPr algn="r" indent="0" marL="0">
@@ -29580,7 +30508,9 @@
           <a:ln/>
         </p:spPr>
         <p:txBody>
-          <a:bodyPr wrap="square" lIns="0" tIns="0" rIns="0" bIns="0" rtlCol="0" anchor="ctr"/>
+          <a:bodyPr wrap="square" lIns="0" tIns="0" rIns="0" bIns="0" rtlCol="0" anchor="ctr">
+            <a:normAutofit/>
+          </a:bodyPr>
           <a:lstStyle/>
           <a:p>
             <a:pPr indent="0" marL="0">
@@ -29595,7 +30525,7 @@
                 <a:ea typeface="微软雅黑" pitchFamily="34" charset="-122"/>
                 <a:cs typeface="微软雅黑" pitchFamily="34" charset="-120"/>
               </a:rPr>
-              <a:t>帮扶管理信息系统 v1.12.10</a:t>
+              <a:t>帮扶管理信息系统 v1.12.11</a:t>
             </a:r>
             <a:endParaRPr lang="en-US" sz="1050" dirty="0"/>
           </a:p>
@@ -29659,16 +30589,18 @@
         <p:spPr>
           <a:xfrm>
             <a:off x="1024128" y="1874520"/>
-            <a:ext cx="4206240" cy="411480"/>
-          </a:xfrm>
-          <a:prstGeom prst="rect">
-            <a:avLst/>
-          </a:prstGeom>
-          <a:noFill/>
-          <a:ln/>
-        </p:spPr>
-        <p:txBody>
-          <a:bodyPr wrap="square" lIns="0" tIns="0" rIns="0" bIns="0" rtlCol="0" anchor="ctr"/>
+            <a:ext cx="4206240" cy="426487"/>
+          </a:xfrm>
+          <a:prstGeom prst="rect">
+            <a:avLst/>
+          </a:prstGeom>
+          <a:noFill/>
+          <a:ln/>
+        </p:spPr>
+        <p:txBody>
+          <a:bodyPr wrap="square" lIns="0" tIns="0" rIns="0" bIns="0" rtlCol="0" anchor="ctr">
+            <a:normAutofit/>
+          </a:bodyPr>
           <a:lstStyle/>
           <a:p>
             <a:pPr indent="0" marL="0">
@@ -29707,7 +30639,9 @@
           <a:ln/>
         </p:spPr>
         <p:txBody>
-          <a:bodyPr wrap="square" lIns="0" tIns="0" rIns="0" bIns="0" rtlCol="0" anchor="ctr"/>
+          <a:bodyPr wrap="square" lIns="0" tIns="0" rIns="0" bIns="0" rtlCol="0" anchor="ctr">
+            <a:normAutofit/>
+          </a:bodyPr>
           <a:lstStyle/>
           <a:p>
             <a:pPr indent="0" marL="0">
@@ -29786,16 +30720,18 @@
         <p:spPr>
           <a:xfrm>
             <a:off x="6830568" y="1874520"/>
-            <a:ext cx="4206240" cy="411480"/>
-          </a:xfrm>
-          <a:prstGeom prst="rect">
-            <a:avLst/>
-          </a:prstGeom>
-          <a:noFill/>
-          <a:ln/>
-        </p:spPr>
-        <p:txBody>
-          <a:bodyPr wrap="square" lIns="0" tIns="0" rIns="0" bIns="0" rtlCol="0" anchor="ctr"/>
+            <a:ext cx="4206240" cy="426487"/>
+          </a:xfrm>
+          <a:prstGeom prst="rect">
+            <a:avLst/>
+          </a:prstGeom>
+          <a:noFill/>
+          <a:ln/>
+        </p:spPr>
+        <p:txBody>
+          <a:bodyPr wrap="square" lIns="0" tIns="0" rIns="0" bIns="0" rtlCol="0" anchor="ctr">
+            <a:normAutofit/>
+          </a:bodyPr>
           <a:lstStyle/>
           <a:p>
             <a:pPr indent="0" marL="0">
@@ -29834,7 +30770,9 @@
           <a:ln/>
         </p:spPr>
         <p:txBody>
-          <a:bodyPr wrap="square" lIns="0" tIns="0" rIns="0" bIns="0" rtlCol="0" anchor="ctr"/>
+          <a:bodyPr wrap="square" lIns="0" tIns="0" rIns="0" bIns="0" rtlCol="0" anchor="ctr">
+            <a:normAutofit/>
+          </a:bodyPr>
           <a:lstStyle/>
           <a:p>
             <a:pPr indent="0" marL="0">
@@ -29913,16 +30851,18 @@
         <p:spPr>
           <a:xfrm>
             <a:off x="1024128" y="4160520"/>
-            <a:ext cx="4206240" cy="411480"/>
-          </a:xfrm>
-          <a:prstGeom prst="rect">
-            <a:avLst/>
-          </a:prstGeom>
-          <a:noFill/>
-          <a:ln/>
-        </p:spPr>
-        <p:txBody>
-          <a:bodyPr wrap="square" lIns="0" tIns="0" rIns="0" bIns="0" rtlCol="0" anchor="ctr"/>
+            <a:ext cx="4206240" cy="426487"/>
+          </a:xfrm>
+          <a:prstGeom prst="rect">
+            <a:avLst/>
+          </a:prstGeom>
+          <a:noFill/>
+          <a:ln/>
+        </p:spPr>
+        <p:txBody>
+          <a:bodyPr wrap="square" lIns="0" tIns="0" rIns="0" bIns="0" rtlCol="0" anchor="ctr">
+            <a:normAutofit/>
+          </a:bodyPr>
           <a:lstStyle/>
           <a:p>
             <a:pPr indent="0" marL="0">
@@ -29961,7 +30901,9 @@
           <a:ln/>
         </p:spPr>
         <p:txBody>
-          <a:bodyPr wrap="square" lIns="0" tIns="0" rIns="0" bIns="0" rtlCol="0" anchor="ctr"/>
+          <a:bodyPr wrap="square" lIns="0" tIns="0" rIns="0" bIns="0" rtlCol="0" anchor="ctr">
+            <a:normAutofit/>
+          </a:bodyPr>
           <a:lstStyle/>
           <a:p>
             <a:pPr indent="0" marL="0">
@@ -30040,16 +30982,18 @@
         <p:spPr>
           <a:xfrm>
             <a:off x="6830568" y="4160520"/>
-            <a:ext cx="4206240" cy="411480"/>
-          </a:xfrm>
-          <a:prstGeom prst="rect">
-            <a:avLst/>
-          </a:prstGeom>
-          <a:noFill/>
-          <a:ln/>
-        </p:spPr>
-        <p:txBody>
-          <a:bodyPr wrap="square" lIns="0" tIns="0" rIns="0" bIns="0" rtlCol="0" anchor="ctr"/>
+            <a:ext cx="4206240" cy="426487"/>
+          </a:xfrm>
+          <a:prstGeom prst="rect">
+            <a:avLst/>
+          </a:prstGeom>
+          <a:noFill/>
+          <a:ln/>
+        </p:spPr>
+        <p:txBody>
+          <a:bodyPr wrap="square" lIns="0" tIns="0" rIns="0" bIns="0" rtlCol="0" anchor="ctr">
+            <a:normAutofit/>
+          </a:bodyPr>
           <a:lstStyle/>
           <a:p>
             <a:pPr indent="0" marL="0">
@@ -30088,7 +31032,9 @@
           <a:ln/>
         </p:spPr>
         <p:txBody>
-          <a:bodyPr wrap="square" lIns="0" tIns="0" rIns="0" bIns="0" rtlCol="0" anchor="ctr"/>
+          <a:bodyPr wrap="square" lIns="0" tIns="0" rIns="0" bIns="0" rtlCol="0" anchor="ctr">
+            <a:normAutofit/>
+          </a:bodyPr>
           <a:lstStyle/>
           <a:p>
             <a:pPr indent="0" marL="0">
@@ -30179,7 +31125,9 @@
           <a:ln/>
         </p:spPr>
         <p:txBody>
-          <a:bodyPr wrap="square" lIns="0" tIns="0" rIns="0" bIns="0" rtlCol="0" anchor="ctr"/>
+          <a:bodyPr wrap="square" lIns="0" tIns="0" rIns="0" bIns="0" rtlCol="0" anchor="ctr">
+            <a:normAutofit/>
+          </a:bodyPr>
           <a:lstStyle/>
           <a:p>
             <a:pPr indent="0" marL="0">
@@ -30218,7 +31166,9 @@
           <a:ln/>
         </p:spPr>
         <p:txBody>
-          <a:bodyPr wrap="square" lIns="0" tIns="0" rIns="0" bIns="0" rtlCol="0" anchor="ctr"/>
+          <a:bodyPr wrap="square" lIns="0" tIns="0" rIns="0" bIns="0" rtlCol="0" anchor="ctr">
+            <a:normAutofit/>
+          </a:bodyPr>
           <a:lstStyle/>
           <a:p>
             <a:pPr indent="0" marL="0">
@@ -30257,7 +31207,9 @@
           <a:ln/>
         </p:spPr>
         <p:txBody>
-          <a:bodyPr wrap="square" lIns="0" tIns="0" rIns="0" bIns="0" rtlCol="0" anchor="ctr"/>
+          <a:bodyPr wrap="square" lIns="0" tIns="0" rIns="0" bIns="0" rtlCol="0" anchor="ctr">
+            <a:normAutofit/>
+          </a:bodyPr>
           <a:lstStyle/>
           <a:p>
             <a:pPr algn="r" indent="0" marL="0">
@@ -30296,7 +31248,9 @@
           <a:ln/>
         </p:spPr>
         <p:txBody>
-          <a:bodyPr wrap="square" lIns="0" tIns="0" rIns="0" bIns="0" rtlCol="0" anchor="ctr"/>
+          <a:bodyPr wrap="square" lIns="0" tIns="0" rIns="0" bIns="0" rtlCol="0" anchor="ctr">
+            <a:normAutofit/>
+          </a:bodyPr>
           <a:lstStyle/>
           <a:p>
             <a:pPr indent="0" marL="0">
@@ -30311,7 +31265,7 @@
                 <a:ea typeface="微软雅黑" pitchFamily="34" charset="-122"/>
                 <a:cs typeface="微软雅黑" pitchFamily="34" charset="-120"/>
               </a:rPr>
-              <a:t>帮扶管理信息系统 v1.12.10</a:t>
+              <a:t>帮扶管理信息系统 v1.12.11</a:t>
             </a:r>
             <a:endParaRPr lang="en-US" sz="1050" dirty="0"/>
           </a:p>
@@ -30326,16 +31280,18 @@
         <p:spPr>
           <a:xfrm>
             <a:off x="502920" y="1920240"/>
-            <a:ext cx="2743200" cy="777240"/>
-          </a:xfrm>
-          <a:prstGeom prst="rect">
-            <a:avLst/>
-          </a:prstGeom>
-          <a:noFill/>
-          <a:ln/>
-        </p:spPr>
-        <p:txBody>
-          <a:bodyPr wrap="square" lIns="0" tIns="0" rIns="0" bIns="0" rtlCol="0" anchor="ctr"/>
+            <a:ext cx="2743200" cy="877655"/>
+          </a:xfrm>
+          <a:prstGeom prst="rect">
+            <a:avLst/>
+          </a:prstGeom>
+          <a:noFill/>
+          <a:ln/>
+        </p:spPr>
+        <p:txBody>
+          <a:bodyPr wrap="square" lIns="0" tIns="0" rIns="0" bIns="0" rtlCol="0" anchor="ctr">
+            <a:normAutofit/>
+          </a:bodyPr>
           <a:lstStyle/>
           <a:p>
             <a:pPr algn="ctr" indent="0" marL="0">
@@ -30350,7 +31306,7 @@
                 <a:ea typeface="微软雅黑" pitchFamily="34" charset="-122"/>
                 <a:cs typeface="微软雅黑" pitchFamily="34" charset="-120"/>
               </a:rPr>
-              <a:t>11,915</a:t>
+              <a:t>11,916</a:t>
             </a:r>
             <a:endParaRPr lang="en-US" sz="4000" dirty="0"/>
           </a:p>
@@ -30364,17 +31320,19 @@
         </p:nvSpPr>
         <p:spPr>
           <a:xfrm>
-            <a:off x="502920" y="2724912"/>
-            <a:ext cx="2743200" cy="502920"/>
-          </a:xfrm>
-          <a:prstGeom prst="rect">
-            <a:avLst/>
-          </a:prstGeom>
-          <a:noFill/>
-          <a:ln/>
-        </p:spPr>
-        <p:txBody>
-          <a:bodyPr wrap="square" lIns="0" tIns="0" rIns="0" bIns="0" rtlCol="0" anchor="ctr"/>
+            <a:off x="502920" y="2825327"/>
+            <a:ext cx="2743200" cy="457200"/>
+          </a:xfrm>
+          <a:prstGeom prst="rect">
+            <a:avLst/>
+          </a:prstGeom>
+          <a:noFill/>
+          <a:ln/>
+        </p:spPr>
+        <p:txBody>
+          <a:bodyPr wrap="square" lIns="0" tIns="0" rIns="0" bIns="0" rtlCol="0" anchor="ctr">
+            <a:normAutofit/>
+          </a:bodyPr>
           <a:lstStyle/>
           <a:p>
             <a:pPr algn="ctr" indent="0" marL="0">
@@ -30404,16 +31362,18 @@
         <p:spPr>
           <a:xfrm>
             <a:off x="3566160" y="1920240"/>
-            <a:ext cx="2743200" cy="777240"/>
-          </a:xfrm>
-          <a:prstGeom prst="rect">
-            <a:avLst/>
-          </a:prstGeom>
-          <a:noFill/>
-          <a:ln/>
-        </p:spPr>
-        <p:txBody>
-          <a:bodyPr wrap="square" lIns="0" tIns="0" rIns="0" bIns="0" rtlCol="0" anchor="ctr"/>
+            <a:ext cx="2743200" cy="877655"/>
+          </a:xfrm>
+          <a:prstGeom prst="rect">
+            <a:avLst/>
+          </a:prstGeom>
+          <a:noFill/>
+          <a:ln/>
+        </p:spPr>
+        <p:txBody>
+          <a:bodyPr wrap="square" lIns="0" tIns="0" rIns="0" bIns="0" rtlCol="0" anchor="ctr">
+            <a:normAutofit/>
+          </a:bodyPr>
           <a:lstStyle/>
           <a:p>
             <a:pPr algn="ctr" indent="0" marL="0">
@@ -30442,17 +31402,19 @@
         </p:nvSpPr>
         <p:spPr>
           <a:xfrm>
-            <a:off x="3566160" y="2724912"/>
-            <a:ext cx="2743200" cy="502920"/>
-          </a:xfrm>
-          <a:prstGeom prst="rect">
-            <a:avLst/>
-          </a:prstGeom>
-          <a:noFill/>
-          <a:ln/>
-        </p:spPr>
-        <p:txBody>
-          <a:bodyPr wrap="square" lIns="0" tIns="0" rIns="0" bIns="0" rtlCol="0" anchor="ctr"/>
+            <a:off x="3566160" y="2825327"/>
+            <a:ext cx="2743200" cy="457200"/>
+          </a:xfrm>
+          <a:prstGeom prst="rect">
+            <a:avLst/>
+          </a:prstGeom>
+          <a:noFill/>
+          <a:ln/>
+        </p:spPr>
+        <p:txBody>
+          <a:bodyPr wrap="square" lIns="0" tIns="0" rIns="0" bIns="0" rtlCol="0" anchor="ctr">
+            <a:normAutofit/>
+          </a:bodyPr>
           <a:lstStyle/>
           <a:p>
             <a:pPr algn="ctr" indent="0" marL="0">
@@ -30482,16 +31444,18 @@
         <p:spPr>
           <a:xfrm>
             <a:off x="6629400" y="1920240"/>
-            <a:ext cx="2743200" cy="777240"/>
-          </a:xfrm>
-          <a:prstGeom prst="rect">
-            <a:avLst/>
-          </a:prstGeom>
-          <a:noFill/>
-          <a:ln/>
-        </p:spPr>
-        <p:txBody>
-          <a:bodyPr wrap="square" lIns="0" tIns="0" rIns="0" bIns="0" rtlCol="0" anchor="ctr"/>
+            <a:ext cx="2743200" cy="877655"/>
+          </a:xfrm>
+          <a:prstGeom prst="rect">
+            <a:avLst/>
+          </a:prstGeom>
+          <a:noFill/>
+          <a:ln/>
+        </p:spPr>
+        <p:txBody>
+          <a:bodyPr wrap="square" lIns="0" tIns="0" rIns="0" bIns="0" rtlCol="0" anchor="ctr">
+            <a:normAutofit/>
+          </a:bodyPr>
           <a:lstStyle/>
           <a:p>
             <a:pPr algn="ctr" indent="0" marL="0">
@@ -30520,17 +31484,19 @@
         </p:nvSpPr>
         <p:spPr>
           <a:xfrm>
-            <a:off x="6629400" y="2724912"/>
-            <a:ext cx="2743200" cy="502920"/>
-          </a:xfrm>
-          <a:prstGeom prst="rect">
-            <a:avLst/>
-          </a:prstGeom>
-          <a:noFill/>
-          <a:ln/>
-        </p:spPr>
-        <p:txBody>
-          <a:bodyPr wrap="square" lIns="0" tIns="0" rIns="0" bIns="0" rtlCol="0" anchor="ctr"/>
+            <a:off x="6629400" y="2825327"/>
+            <a:ext cx="2743200" cy="457200"/>
+          </a:xfrm>
+          <a:prstGeom prst="rect">
+            <a:avLst/>
+          </a:prstGeom>
+          <a:noFill/>
+          <a:ln/>
+        </p:spPr>
+        <p:txBody>
+          <a:bodyPr wrap="square" lIns="0" tIns="0" rIns="0" bIns="0" rtlCol="0" anchor="ctr">
+            <a:normAutofit/>
+          </a:bodyPr>
           <a:lstStyle/>
           <a:p>
             <a:pPr algn="ctr" indent="0" marL="0">
@@ -30560,16 +31526,18 @@
         <p:spPr>
           <a:xfrm>
             <a:off x="9692640" y="1920240"/>
-            <a:ext cx="2194560" cy="777240"/>
-          </a:xfrm>
-          <a:prstGeom prst="rect">
-            <a:avLst/>
-          </a:prstGeom>
-          <a:noFill/>
-          <a:ln/>
-        </p:spPr>
-        <p:txBody>
-          <a:bodyPr wrap="square" lIns="0" tIns="0" rIns="0" bIns="0" rtlCol="0" anchor="ctr"/>
+            <a:ext cx="2194560" cy="877655"/>
+          </a:xfrm>
+          <a:prstGeom prst="rect">
+            <a:avLst/>
+          </a:prstGeom>
+          <a:noFill/>
+          <a:ln/>
+        </p:spPr>
+        <p:txBody>
+          <a:bodyPr wrap="square" lIns="0" tIns="0" rIns="0" bIns="0" rtlCol="0" anchor="ctr">
+            <a:normAutofit/>
+          </a:bodyPr>
           <a:lstStyle/>
           <a:p>
             <a:pPr algn="ctr" indent="0" marL="0">
@@ -30598,17 +31566,19 @@
         </p:nvSpPr>
         <p:spPr>
           <a:xfrm>
-            <a:off x="9692640" y="2724912"/>
-            <a:ext cx="2194560" cy="502920"/>
-          </a:xfrm>
-          <a:prstGeom prst="rect">
-            <a:avLst/>
-          </a:prstGeom>
-          <a:noFill/>
-          <a:ln/>
-        </p:spPr>
-        <p:txBody>
-          <a:bodyPr wrap="square" lIns="0" tIns="0" rIns="0" bIns="0" rtlCol="0" anchor="ctr"/>
+            <a:off x="9692640" y="2825327"/>
+            <a:ext cx="2194560" cy="457200"/>
+          </a:xfrm>
+          <a:prstGeom prst="rect">
+            <a:avLst/>
+          </a:prstGeom>
+          <a:noFill/>
+          <a:ln/>
+        </p:spPr>
+        <p:txBody>
+          <a:bodyPr wrap="square" lIns="0" tIns="0" rIns="0" bIns="0" rtlCol="0" anchor="ctr">
+            <a:normAutofit/>
+          </a:bodyPr>
           <a:lstStyle/>
           <a:p>
             <a:pPr algn="ctr" indent="0" marL="0">
@@ -30661,16 +31631,18 @@
         <p:spPr>
           <a:xfrm>
             <a:off x="502920" y="3977640"/>
-            <a:ext cx="2743200" cy="777240"/>
-          </a:xfrm>
-          <a:prstGeom prst="rect">
-            <a:avLst/>
-          </a:prstGeom>
-          <a:noFill/>
-          <a:ln/>
-        </p:spPr>
-        <p:txBody>
-          <a:bodyPr wrap="square" lIns="0" tIns="0" rIns="0" bIns="0" rtlCol="0" anchor="ctr"/>
+            <a:ext cx="2743200" cy="877655"/>
+          </a:xfrm>
+          <a:prstGeom prst="rect">
+            <a:avLst/>
+          </a:prstGeom>
+          <a:noFill/>
+          <a:ln/>
+        </p:spPr>
+        <p:txBody>
+          <a:bodyPr wrap="square" lIns="0" tIns="0" rIns="0" bIns="0" rtlCol="0" anchor="ctr">
+            <a:normAutofit/>
+          </a:bodyPr>
           <a:lstStyle/>
           <a:p>
             <a:pPr algn="ctr" indent="0" marL="0">
@@ -30685,7 +31657,7 @@
                 <a:ea typeface="微软雅黑" pitchFamily="34" charset="-122"/>
                 <a:cs typeface="微软雅黑" pitchFamily="34" charset="-120"/>
               </a:rPr>
-              <a:t>49</a:t>
+              <a:t>93</a:t>
             </a:r>
             <a:endParaRPr lang="en-US" sz="4000" dirty="0"/>
           </a:p>
@@ -30699,17 +31671,19 @@
         </p:nvSpPr>
         <p:spPr>
           <a:xfrm>
-            <a:off x="502920" y="4782312"/>
-            <a:ext cx="2743200" cy="502920"/>
-          </a:xfrm>
-          <a:prstGeom prst="rect">
-            <a:avLst/>
-          </a:prstGeom>
-          <a:noFill/>
-          <a:ln/>
-        </p:spPr>
-        <p:txBody>
-          <a:bodyPr wrap="square" lIns="0" tIns="0" rIns="0" bIns="0" rtlCol="0" anchor="ctr"/>
+            <a:off x="502920" y="4882727"/>
+            <a:ext cx="2743200" cy="457200"/>
+          </a:xfrm>
+          <a:prstGeom prst="rect">
+            <a:avLst/>
+          </a:prstGeom>
+          <a:noFill/>
+          <a:ln/>
+        </p:spPr>
+        <p:txBody>
+          <a:bodyPr wrap="square" lIns="0" tIns="0" rIns="0" bIns="0" rtlCol="0" anchor="ctr">
+            <a:normAutofit/>
+          </a:bodyPr>
           <a:lstStyle/>
           <a:p>
             <a:pPr algn="ctr" indent="0" marL="0">
@@ -30724,7 +31698,7 @@
                 <a:ea typeface="微软雅黑" pitchFamily="34" charset="-122"/>
                 <a:cs typeface="微软雅黑" pitchFamily="34" charset="-120"/>
               </a:rPr>
-              <a:t>后端 API 路由模块</a:t>
+              <a:t>后端 API 模块（api/v1 含子包）</a:t>
             </a:r>
             <a:endParaRPr lang="en-US" sz="1300" dirty="0"/>
           </a:p>
@@ -30739,16 +31713,18 @@
         <p:spPr>
           <a:xfrm>
             <a:off x="3566160" y="3977640"/>
-            <a:ext cx="2743200" cy="777240"/>
-          </a:xfrm>
-          <a:prstGeom prst="rect">
-            <a:avLst/>
-          </a:prstGeom>
-          <a:noFill/>
-          <a:ln/>
-        </p:spPr>
-        <p:txBody>
-          <a:bodyPr wrap="square" lIns="0" tIns="0" rIns="0" bIns="0" rtlCol="0" anchor="ctr"/>
+            <a:ext cx="2743200" cy="877655"/>
+          </a:xfrm>
+          <a:prstGeom prst="rect">
+            <a:avLst/>
+          </a:prstGeom>
+          <a:noFill/>
+          <a:ln/>
+        </p:spPr>
+        <p:txBody>
+          <a:bodyPr wrap="square" lIns="0" tIns="0" rIns="0" bIns="0" rtlCol="0" anchor="ctr">
+            <a:normAutofit/>
+          </a:bodyPr>
           <a:lstStyle/>
           <a:p>
             <a:pPr algn="ctr" indent="0" marL="0">
@@ -30763,7 +31739,7 @@
                 <a:ea typeface="微软雅黑" pitchFamily="34" charset="-122"/>
                 <a:cs typeface="微软雅黑" pitchFamily="34" charset="-120"/>
               </a:rPr>
-              <a:t>90</a:t>
+              <a:t>100</a:t>
             </a:r>
             <a:endParaRPr lang="en-US" sz="4000" dirty="0"/>
           </a:p>
@@ -30777,17 +31753,19 @@
         </p:nvSpPr>
         <p:spPr>
           <a:xfrm>
-            <a:off x="3566160" y="4782312"/>
-            <a:ext cx="2743200" cy="502920"/>
-          </a:xfrm>
-          <a:prstGeom prst="rect">
-            <a:avLst/>
-          </a:prstGeom>
-          <a:noFill/>
-          <a:ln/>
-        </p:spPr>
-        <p:txBody>
-          <a:bodyPr wrap="square" lIns="0" tIns="0" rIns="0" bIns="0" rtlCol="0" anchor="ctr"/>
+            <a:off x="3566160" y="4882727"/>
+            <a:ext cx="2743200" cy="457200"/>
+          </a:xfrm>
+          <a:prstGeom prst="rect">
+            <a:avLst/>
+          </a:prstGeom>
+          <a:noFill/>
+          <a:ln/>
+        </p:spPr>
+        <p:txBody>
+          <a:bodyPr wrap="square" lIns="0" tIns="0" rIns="0" bIns="0" rtlCol="0" anchor="ctr">
+            <a:normAutofit/>
+          </a:bodyPr>
           <a:lstStyle/>
           <a:p>
             <a:pPr algn="ctr" indent="0" marL="0">
@@ -30802,7 +31780,7 @@
                 <a:ea typeface="微软雅黑" pitchFamily="34" charset="-122"/>
                 <a:cs typeface="微软雅黑" pitchFamily="34" charset="-120"/>
               </a:rPr>
-              <a:t>后端服务（83 + 7 子包）</a:t>
+              <a:t>后端服务（100 + 13 子包）</a:t>
             </a:r>
             <a:endParaRPr lang="en-US" sz="1300" dirty="0"/>
           </a:p>
@@ -30817,16 +31795,18 @@
         <p:spPr>
           <a:xfrm>
             <a:off x="6629400" y="3977640"/>
-            <a:ext cx="2743200" cy="777240"/>
-          </a:xfrm>
-          <a:prstGeom prst="rect">
-            <a:avLst/>
-          </a:prstGeom>
-          <a:noFill/>
-          <a:ln/>
-        </p:spPr>
-        <p:txBody>
-          <a:bodyPr wrap="square" lIns="0" tIns="0" rIns="0" bIns="0" rtlCol="0" anchor="ctr"/>
+            <a:ext cx="2743200" cy="877655"/>
+          </a:xfrm>
+          <a:prstGeom prst="rect">
+            <a:avLst/>
+          </a:prstGeom>
+          <a:noFill/>
+          <a:ln/>
+        </p:spPr>
+        <p:txBody>
+          <a:bodyPr wrap="square" lIns="0" tIns="0" rIns="0" bIns="0" rtlCol="0" anchor="ctr">
+            <a:normAutofit/>
+          </a:bodyPr>
           <a:lstStyle/>
           <a:p>
             <a:pPr algn="ctr" indent="0" marL="0">
@@ -30855,17 +31835,19 @@
         </p:nvSpPr>
         <p:spPr>
           <a:xfrm>
-            <a:off x="6629400" y="4782312"/>
-            <a:ext cx="2743200" cy="502920"/>
-          </a:xfrm>
-          <a:prstGeom prst="rect">
-            <a:avLst/>
-          </a:prstGeom>
-          <a:noFill/>
-          <a:ln/>
-        </p:spPr>
-        <p:txBody>
-          <a:bodyPr wrap="square" lIns="0" tIns="0" rIns="0" bIns="0" rtlCol="0" anchor="ctr"/>
+            <a:off x="6629400" y="4882727"/>
+            <a:ext cx="2743200" cy="457200"/>
+          </a:xfrm>
+          <a:prstGeom prst="rect">
+            <a:avLst/>
+          </a:prstGeom>
+          <a:noFill/>
+          <a:ln/>
+        </p:spPr>
+        <p:txBody>
+          <a:bodyPr wrap="square" lIns="0" tIns="0" rIns="0" bIns="0" rtlCol="0" anchor="ctr">
+            <a:normAutofit/>
+          </a:bodyPr>
           <a:lstStyle/>
           <a:p>
             <a:pPr algn="ctr" indent="0" marL="0">
@@ -30895,16 +31877,18 @@
         <p:spPr>
           <a:xfrm>
             <a:off x="9692640" y="3977640"/>
-            <a:ext cx="2194560" cy="777240"/>
-          </a:xfrm>
-          <a:prstGeom prst="rect">
-            <a:avLst/>
-          </a:prstGeom>
-          <a:noFill/>
-          <a:ln/>
-        </p:spPr>
-        <p:txBody>
-          <a:bodyPr wrap="square" lIns="0" tIns="0" rIns="0" bIns="0" rtlCol="0" anchor="ctr"/>
+            <a:ext cx="2194560" cy="877655"/>
+          </a:xfrm>
+          <a:prstGeom prst="rect">
+            <a:avLst/>
+          </a:prstGeom>
+          <a:noFill/>
+          <a:ln/>
+        </p:spPr>
+        <p:txBody>
+          <a:bodyPr wrap="square" lIns="0" tIns="0" rIns="0" bIns="0" rtlCol="0" anchor="ctr">
+            <a:normAutofit/>
+          </a:bodyPr>
           <a:lstStyle/>
           <a:p>
             <a:pPr algn="ctr" indent="0" marL="0">
@@ -30933,17 +31917,19 @@
         </p:nvSpPr>
         <p:spPr>
           <a:xfrm>
-            <a:off x="9692640" y="4782312"/>
-            <a:ext cx="2194560" cy="502920"/>
-          </a:xfrm>
-          <a:prstGeom prst="rect">
-            <a:avLst/>
-          </a:prstGeom>
-          <a:noFill/>
-          <a:ln/>
-        </p:spPr>
-        <p:txBody>
-          <a:bodyPr wrap="square" lIns="0" tIns="0" rIns="0" bIns="0" rtlCol="0" anchor="ctr"/>
+            <a:off x="9692640" y="4882727"/>
+            <a:ext cx="2194560" cy="457200"/>
+          </a:xfrm>
+          <a:prstGeom prst="rect">
+            <a:avLst/>
+          </a:prstGeom>
+          <a:noFill/>
+          <a:ln/>
+        </p:spPr>
+        <p:txBody>
+          <a:bodyPr wrap="square" lIns="0" tIns="0" rIns="0" bIns="0" rtlCol="0" anchor="ctr">
+            <a:normAutofit/>
+          </a:bodyPr>
           <a:lstStyle/>
           <a:p>
             <a:pPr algn="ctr" indent="0" marL="0">
@@ -30982,7 +31968,9 @@
           <a:ln/>
         </p:spPr>
         <p:txBody>
-          <a:bodyPr wrap="square" lIns="0" tIns="0" rIns="0" bIns="0" rtlCol="0" anchor="ctr"/>
+          <a:bodyPr wrap="square" lIns="0" tIns="0" rIns="0" bIns="0" rtlCol="0" anchor="ctr">
+            <a:normAutofit/>
+          </a:bodyPr>
           <a:lstStyle/>
           <a:p>
             <a:pPr indent="0" marL="0">
@@ -30997,7 +31985,7 @@
                 <a:ea typeface="微软雅黑" pitchFamily="34" charset="-122"/>
                 <a:cs typeface="微软雅黑" pitchFamily="34" charset="-120"/>
               </a:rPr>
-              <a:t>数据来源：仓库实测（2026-10-02，v1.12.11）—— 后端 11,915 用例全绿 / 覆盖率 100% · 前端 6,287 用例全绿 · flake8 0 · bandit 0 中高危 · vue-tsc 0 · eslint 0 警告</a:t>
+              <a:t>数据来源：仓库实测（v1.12.11）—— 后端 11,916 用例全绿 / 覆盖率 100% · 前端 6,287 用例全绿 · flake8 0 · bandit 0 中高危 · vue-tsc 0 · eslint 0 警告</a:t>
             </a:r>
             <a:endParaRPr lang="en-US" sz="1200" dirty="0"/>
           </a:p>
@@ -31044,16 +32032,18 @@
         <p:spPr>
           <a:xfrm>
             <a:off x="502920" y="822960"/>
-            <a:ext cx="4206240" cy="3108960"/>
-          </a:xfrm>
-          <a:prstGeom prst="rect">
-            <a:avLst/>
-          </a:prstGeom>
-          <a:noFill/>
-          <a:ln/>
-        </p:spPr>
-        <p:txBody>
-          <a:bodyPr wrap="square" lIns="0" tIns="0" rIns="0" bIns="0" rtlCol="0" anchor="ctr"/>
+            <a:ext cx="4206240" cy="4315121"/>
+          </a:xfrm>
+          <a:prstGeom prst="rect">
+            <a:avLst/>
+          </a:prstGeom>
+          <a:noFill/>
+          <a:ln/>
+        </p:spPr>
+        <p:txBody>
+          <a:bodyPr wrap="square" lIns="0" tIns="0" rIns="0" bIns="0" rtlCol="0" anchor="ctr">
+            <a:normAutofit/>
+          </a:bodyPr>
           <a:lstStyle/>
           <a:p>
             <a:pPr indent="0" marL="0">
@@ -31083,16 +32073,18 @@
         <p:spPr>
           <a:xfrm>
             <a:off x="914400" y="3977640"/>
-            <a:ext cx="10332720" cy="868680"/>
-          </a:xfrm>
-          <a:prstGeom prst="rect">
-            <a:avLst/>
-          </a:prstGeom>
-          <a:noFill/>
-          <a:ln/>
-        </p:spPr>
-        <p:txBody>
-          <a:bodyPr wrap="square" lIns="0" tIns="0" rIns="0" bIns="0" rtlCol="0" anchor="ctr"/>
+            <a:ext cx="10332720" cy="877655"/>
+          </a:xfrm>
+          <a:prstGeom prst="rect">
+            <a:avLst/>
+          </a:prstGeom>
+          <a:noFill/>
+          <a:ln/>
+        </p:spPr>
+        <p:txBody>
+          <a:bodyPr wrap="square" lIns="0" tIns="0" rIns="0" bIns="0" rtlCol="0" anchor="ctr">
+            <a:normAutofit/>
+          </a:bodyPr>
           <a:lstStyle/>
           <a:p>
             <a:pPr indent="0" marL="0">
@@ -31131,7 +32123,9 @@
           <a:ln/>
         </p:spPr>
         <p:txBody>
-          <a:bodyPr wrap="square" lIns="0" tIns="0" rIns="0" bIns="0" rtlCol="0" anchor="ctr"/>
+          <a:bodyPr wrap="square" lIns="0" tIns="0" rIns="0" bIns="0" rtlCol="0" anchor="ctr">
+            <a:normAutofit/>
+          </a:bodyPr>
           <a:lstStyle/>
           <a:p>
             <a:pPr indent="0" marL="0">
@@ -31170,10 +32164,12 @@
           <a:ln/>
         </p:spPr>
         <p:txBody>
-          <a:bodyPr wrap="square" lIns="0" tIns="0" rIns="0" bIns="0" rtlCol="0" anchor="t"/>
-          <a:lstStyle/>
-          <a:p>
-            <a:pPr marL="152400" indent="-152400">
+          <a:bodyPr wrap="square" lIns="0" tIns="0" rIns="0" bIns="0" rtlCol="0" anchor="t">
+            <a:normAutofit/>
+          </a:bodyPr>
+          <a:lstStyle/>
+          <a:p>
+            <a:pPr algn="l" marL="152400" indent="-152400">
               <a:spcAft>
                 <a:spcPts val="1000"/>
               </a:spcAft>
@@ -31194,7 +32190,7 @@
             <a:endParaRPr lang="en-US" sz="1400" dirty="0"/>
           </a:p>
           <a:p>
-            <a:pPr marL="152400" indent="-152400">
+            <a:pPr algn="l" marL="152400" indent="-152400">
               <a:spcAft>
                 <a:spcPts val="1000"/>
               </a:spcAft>
@@ -31215,7 +32211,7 @@
             <a:endParaRPr lang="en-US" sz="1400" dirty="0"/>
           </a:p>
           <a:p>
-            <a:pPr marL="152400" indent="-152400">
+            <a:pPr algn="l" marL="152400" indent="-152400">
               <a:spcAft>
                 <a:spcPts val="1000"/>
               </a:spcAft>
@@ -31236,7 +32232,7 @@
             <a:endParaRPr lang="en-US" sz="1400" dirty="0"/>
           </a:p>
           <a:p>
-            <a:pPr marL="152400" indent="-152400">
+            <a:pPr algn="l" marL="152400" indent="-152400">
               <a:spcAft>
                 <a:spcPts val="1000"/>
               </a:spcAft>
@@ -31276,7 +32272,9 @@
           <a:ln/>
         </p:spPr>
         <p:txBody>
-          <a:bodyPr wrap="square" lIns="0" tIns="0" rIns="0" bIns="0" rtlCol="0" anchor="ctr"/>
+          <a:bodyPr wrap="square" lIns="0" tIns="0" rIns="0" bIns="0" rtlCol="0" anchor="ctr">
+            <a:normAutofit/>
+          </a:bodyPr>
           <a:lstStyle/>
           <a:p>
             <a:pPr algn="r" indent="0" marL="0">
@@ -31367,7 +32365,9 @@
           <a:ln/>
         </p:spPr>
         <p:txBody>
-          <a:bodyPr wrap="square" lIns="0" tIns="0" rIns="0" bIns="0" rtlCol="0" anchor="ctr"/>
+          <a:bodyPr wrap="square" lIns="0" tIns="0" rIns="0" bIns="0" rtlCol="0" anchor="ctr">
+            <a:normAutofit/>
+          </a:bodyPr>
           <a:lstStyle/>
           <a:p>
             <a:pPr indent="0" marL="0">
@@ -31406,7 +32406,9 @@
           <a:ln/>
         </p:spPr>
         <p:txBody>
-          <a:bodyPr wrap="square" lIns="0" tIns="0" rIns="0" bIns="0" rtlCol="0" anchor="ctr"/>
+          <a:bodyPr wrap="square" lIns="0" tIns="0" rIns="0" bIns="0" rtlCol="0" anchor="ctr">
+            <a:normAutofit/>
+          </a:bodyPr>
           <a:lstStyle/>
           <a:p>
             <a:pPr indent="0" marL="0">
@@ -31445,7 +32447,9 @@
           <a:ln/>
         </p:spPr>
         <p:txBody>
-          <a:bodyPr wrap="square" lIns="0" tIns="0" rIns="0" bIns="0" rtlCol="0" anchor="ctr"/>
+          <a:bodyPr wrap="square" lIns="0" tIns="0" rIns="0" bIns="0" rtlCol="0" anchor="ctr">
+            <a:normAutofit/>
+          </a:bodyPr>
           <a:lstStyle/>
           <a:p>
             <a:pPr algn="r" indent="0" marL="0">
@@ -31484,7 +32488,9 @@
           <a:ln/>
         </p:spPr>
         <p:txBody>
-          <a:bodyPr wrap="square" lIns="0" tIns="0" rIns="0" bIns="0" rtlCol="0" anchor="ctr"/>
+          <a:bodyPr wrap="square" lIns="0" tIns="0" rIns="0" bIns="0" rtlCol="0" anchor="ctr">
+            <a:normAutofit/>
+          </a:bodyPr>
           <a:lstStyle/>
           <a:p>
             <a:pPr indent="0" marL="0">
@@ -31499,7 +32505,7 @@
                 <a:ea typeface="微软雅黑" pitchFamily="34" charset="-122"/>
                 <a:cs typeface="微软雅黑" pitchFamily="34" charset="-120"/>
               </a:rPr>
-              <a:t>帮扶管理信息系统 v1.12.10</a:t>
+              <a:t>帮扶管理信息系统 v1.12.11</a:t>
             </a:r>
             <a:endParaRPr lang="en-US" sz="1050" dirty="0"/>
           </a:p>
@@ -31552,7 +32558,9 @@
           <a:ln/>
         </p:spPr>
         <p:txBody>
-          <a:bodyPr wrap="square" lIns="0" tIns="0" rIns="0" bIns="0" rtlCol="0" anchor="ctr"/>
+          <a:bodyPr wrap="square" lIns="0" tIns="0" rIns="0" bIns="0" rtlCol="0" anchor="ctr">
+            <a:normAutofit/>
+          </a:bodyPr>
           <a:lstStyle/>
           <a:p>
             <a:pPr indent="0" marL="0">
@@ -31591,7 +32599,9 @@
           <a:ln/>
         </p:spPr>
         <p:txBody>
-          <a:bodyPr wrap="square" lIns="0" tIns="0" rIns="0" bIns="0" rtlCol="0" anchor="ctr"/>
+          <a:bodyPr wrap="square" lIns="0" tIns="0" rIns="0" bIns="0" rtlCol="0" anchor="ctr">
+            <a:normAutofit/>
+          </a:bodyPr>
           <a:lstStyle/>
           <a:p>
             <a:pPr indent="0" marL="0">
@@ -31630,7 +32640,9 @@
           <a:ln/>
         </p:spPr>
         <p:txBody>
-          <a:bodyPr wrap="square" lIns="0" tIns="0" rIns="0" bIns="0" rtlCol="0" anchor="t"/>
+          <a:bodyPr wrap="square" lIns="0" tIns="0" rIns="0" bIns="0" rtlCol="0" anchor="t">
+            <a:normAutofit/>
+          </a:bodyPr>
           <a:lstStyle/>
           <a:p>
             <a:pPr algn="l" marL="152400" indent="-152400">
@@ -31765,7 +32777,9 @@
           <a:ln/>
         </p:spPr>
         <p:txBody>
-          <a:bodyPr wrap="square" lIns="0" tIns="0" rIns="0" bIns="0" rtlCol="0" anchor="ctr"/>
+          <a:bodyPr wrap="square" lIns="0" tIns="0" rIns="0" bIns="0" rtlCol="0" anchor="ctr">
+            <a:normAutofit/>
+          </a:bodyPr>
           <a:lstStyle/>
           <a:p>
             <a:pPr indent="0" marL="0">
@@ -31804,7 +32818,9 @@
           <a:ln/>
         </p:spPr>
         <p:txBody>
-          <a:bodyPr wrap="square" lIns="0" tIns="0" rIns="0" bIns="0" rtlCol="0" anchor="ctr"/>
+          <a:bodyPr wrap="square" lIns="0" tIns="0" rIns="0" bIns="0" rtlCol="0" anchor="ctr">
+            <a:normAutofit/>
+          </a:bodyPr>
           <a:lstStyle/>
           <a:p>
             <a:pPr indent="0" marL="0">
@@ -31843,7 +32859,9 @@
           <a:ln/>
         </p:spPr>
         <p:txBody>
-          <a:bodyPr wrap="square" lIns="0" tIns="0" rIns="0" bIns="0" rtlCol="0" anchor="t"/>
+          <a:bodyPr wrap="square" lIns="0" tIns="0" rIns="0" bIns="0" rtlCol="0" anchor="t">
+            <a:normAutofit/>
+          </a:bodyPr>
           <a:lstStyle/>
           <a:p>
             <a:pPr algn="l" marL="152400" indent="-152400">
@@ -31978,7 +32996,9 @@
           <a:ln/>
         </p:spPr>
         <p:txBody>
-          <a:bodyPr wrap="square" lIns="0" tIns="0" rIns="0" bIns="0" rtlCol="0" anchor="ctr"/>
+          <a:bodyPr wrap="square" lIns="0" tIns="0" rIns="0" bIns="0" rtlCol="0" anchor="ctr">
+            <a:normAutofit/>
+          </a:bodyPr>
           <a:lstStyle/>
           <a:p>
             <a:pPr indent="0" marL="0">
@@ -32017,7 +33037,9 @@
           <a:ln/>
         </p:spPr>
         <p:txBody>
-          <a:bodyPr wrap="square" lIns="0" tIns="0" rIns="0" bIns="0" rtlCol="0" anchor="ctr"/>
+          <a:bodyPr wrap="square" lIns="0" tIns="0" rIns="0" bIns="0" rtlCol="0" anchor="ctr">
+            <a:normAutofit/>
+          </a:bodyPr>
           <a:lstStyle/>
           <a:p>
             <a:pPr indent="0" marL="0">
@@ -32056,7 +33078,9 @@
           <a:ln/>
         </p:spPr>
         <p:txBody>
-          <a:bodyPr wrap="square" lIns="0" tIns="0" rIns="0" bIns="0" rtlCol="0" anchor="t"/>
+          <a:bodyPr wrap="square" lIns="0" tIns="0" rIns="0" bIns="0" rtlCol="0" anchor="t">
+            <a:normAutofit/>
+          </a:bodyPr>
           <a:lstStyle/>
           <a:p>
             <a:pPr algn="l" marL="152400" indent="-152400">
@@ -32191,7 +33215,9 @@
           <a:ln/>
         </p:spPr>
         <p:txBody>
-          <a:bodyPr wrap="square" lIns="0" tIns="0" rIns="0" bIns="0" rtlCol="0" anchor="ctr"/>
+          <a:bodyPr wrap="square" lIns="0" tIns="0" rIns="0" bIns="0" rtlCol="0" anchor="ctr">
+            <a:normAutofit/>
+          </a:bodyPr>
           <a:lstStyle/>
           <a:p>
             <a:pPr indent="0" marL="0">
@@ -32230,7 +33256,9 @@
           <a:ln/>
         </p:spPr>
         <p:txBody>
-          <a:bodyPr wrap="square" lIns="0" tIns="0" rIns="0" bIns="0" rtlCol="0" anchor="ctr"/>
+          <a:bodyPr wrap="square" lIns="0" tIns="0" rIns="0" bIns="0" rtlCol="0" anchor="ctr">
+            <a:normAutofit/>
+          </a:bodyPr>
           <a:lstStyle/>
           <a:p>
             <a:pPr indent="0" marL="0">
@@ -32269,7 +33297,9 @@
           <a:ln/>
         </p:spPr>
         <p:txBody>
-          <a:bodyPr wrap="square" lIns="0" tIns="0" rIns="0" bIns="0" rtlCol="0" anchor="t"/>
+          <a:bodyPr wrap="square" lIns="0" tIns="0" rIns="0" bIns="0" rtlCol="0" anchor="t">
+            <a:normAutofit/>
+          </a:bodyPr>
           <a:lstStyle/>
           <a:p>
             <a:pPr algn="l" marL="152400" indent="-152400">
@@ -32427,7 +33457,9 @@
           <a:ln/>
         </p:spPr>
         <p:txBody>
-          <a:bodyPr wrap="square" lIns="0" tIns="0" rIns="0" bIns="0" rtlCol="0" anchor="ctr"/>
+          <a:bodyPr wrap="square" lIns="0" tIns="0" rIns="0" bIns="0" rtlCol="0" anchor="ctr">
+            <a:normAutofit/>
+          </a:bodyPr>
           <a:lstStyle/>
           <a:p>
             <a:pPr indent="0" marL="0">
@@ -32466,7 +33498,9 @@
           <a:ln/>
         </p:spPr>
         <p:txBody>
-          <a:bodyPr wrap="square" lIns="0" tIns="0" rIns="0" bIns="0" rtlCol="0" anchor="ctr"/>
+          <a:bodyPr wrap="square" lIns="0" tIns="0" rIns="0" bIns="0" rtlCol="0" anchor="ctr">
+            <a:normAutofit/>
+          </a:bodyPr>
           <a:lstStyle/>
           <a:p>
             <a:pPr indent="0" marL="0">
@@ -32505,7 +33539,9 @@
           <a:ln/>
         </p:spPr>
         <p:txBody>
-          <a:bodyPr wrap="square" lIns="0" tIns="0" rIns="0" bIns="0" rtlCol="0" anchor="ctr"/>
+          <a:bodyPr wrap="square" lIns="0" tIns="0" rIns="0" bIns="0" rtlCol="0" anchor="ctr">
+            <a:normAutofit/>
+          </a:bodyPr>
           <a:lstStyle/>
           <a:p>
             <a:pPr algn="r" indent="0" marL="0">
@@ -32544,7 +33580,9 @@
           <a:ln/>
         </p:spPr>
         <p:txBody>
-          <a:bodyPr wrap="square" lIns="0" tIns="0" rIns="0" bIns="0" rtlCol="0" anchor="ctr"/>
+          <a:bodyPr wrap="square" lIns="0" tIns="0" rIns="0" bIns="0" rtlCol="0" anchor="ctr">
+            <a:normAutofit/>
+          </a:bodyPr>
           <a:lstStyle/>
           <a:p>
             <a:pPr indent="0" marL="0">
@@ -32559,7 +33597,7 @@
                 <a:ea typeface="微软雅黑" pitchFamily="34" charset="-122"/>
                 <a:cs typeface="微软雅黑" pitchFamily="34" charset="-120"/>
               </a:rPr>
-              <a:t>帮扶管理信息系统 v1.12.10</a:t>
+              <a:t>帮扶管理信息系统 v1.12.11</a:t>
             </a:r>
             <a:endParaRPr lang="en-US" sz="1050" dirty="0"/>
           </a:p>
@@ -32605,7 +33643,9 @@
           <a:ln/>
         </p:spPr>
         <p:txBody>
-          <a:bodyPr wrap="square" lIns="0" tIns="0" rIns="0" bIns="0" rtlCol="0" anchor="ctr"/>
+          <a:bodyPr wrap="square" lIns="0" tIns="0" rIns="0" bIns="0" rtlCol="0" anchor="ctr">
+            <a:normAutofit/>
+          </a:bodyPr>
           <a:lstStyle/>
           <a:p>
             <a:pPr indent="0" marL="0">
@@ -32644,7 +33684,9 @@
           <a:ln/>
         </p:spPr>
         <p:txBody>
-          <a:bodyPr wrap="square" lIns="0" tIns="0" rIns="0" bIns="0" rtlCol="0" anchor="ctr"/>
+          <a:bodyPr wrap="square" lIns="0" tIns="0" rIns="0" bIns="0" rtlCol="0" anchor="ctr">
+            <a:normAutofit/>
+          </a:bodyPr>
           <a:lstStyle/>
           <a:p>
             <a:pPr indent="0" marL="0">
@@ -32729,7 +33771,9 @@
           <a:ln/>
         </p:spPr>
         <p:txBody>
-          <a:bodyPr wrap="square" lIns="0" tIns="0" rIns="0" bIns="0" rtlCol="0" anchor="ctr"/>
+          <a:bodyPr wrap="square" lIns="0" tIns="0" rIns="0" bIns="0" rtlCol="0" anchor="ctr">
+            <a:normAutofit/>
+          </a:bodyPr>
           <a:lstStyle/>
           <a:p>
             <a:pPr indent="0" marL="0">
@@ -32768,7 +33812,9 @@
           <a:ln/>
         </p:spPr>
         <p:txBody>
-          <a:bodyPr wrap="square" lIns="0" tIns="0" rIns="0" bIns="0" rtlCol="0" anchor="ctr"/>
+          <a:bodyPr wrap="square" lIns="0" tIns="0" rIns="0" bIns="0" rtlCol="0" anchor="ctr">
+            <a:normAutofit/>
+          </a:bodyPr>
           <a:lstStyle/>
           <a:p>
             <a:pPr indent="0" marL="0">
@@ -32853,7 +33899,9 @@
           <a:ln/>
         </p:spPr>
         <p:txBody>
-          <a:bodyPr wrap="square" lIns="0" tIns="0" rIns="0" bIns="0" rtlCol="0" anchor="ctr"/>
+          <a:bodyPr wrap="square" lIns="0" tIns="0" rIns="0" bIns="0" rtlCol="0" anchor="ctr">
+            <a:normAutofit/>
+          </a:bodyPr>
           <a:lstStyle/>
           <a:p>
             <a:pPr indent="0" marL="0">
@@ -32892,7 +33940,9 @@
           <a:ln/>
         </p:spPr>
         <p:txBody>
-          <a:bodyPr wrap="square" lIns="0" tIns="0" rIns="0" bIns="0" rtlCol="0" anchor="ctr"/>
+          <a:bodyPr wrap="square" lIns="0" tIns="0" rIns="0" bIns="0" rtlCol="0" anchor="ctr">
+            <a:normAutofit/>
+          </a:bodyPr>
           <a:lstStyle/>
           <a:p>
             <a:pPr indent="0" marL="0">
@@ -32907,7 +33957,7 @@
                 <a:ea typeface="微软雅黑" pitchFamily="34" charset="-122"/>
                 <a:cs typeface="微软雅黑" pitchFamily="34" charset="-120"/>
               </a:rPr>
-              <a:t>49 路由 · 数据范围过滤 · 限流 · 审计中间件 · 统一信封</a:t>
+              <a:t>93 API 模块 · 数据范围过滤 · 限流 · 审计中间件 · 统一信封</a:t>
             </a:r>
             <a:endParaRPr lang="en-US" sz="1250" dirty="0"/>
           </a:p>
@@ -32977,7 +34027,9 @@
           <a:ln/>
         </p:spPr>
         <p:txBody>
-          <a:bodyPr wrap="square" lIns="0" tIns="0" rIns="0" bIns="0" rtlCol="0" anchor="ctr"/>
+          <a:bodyPr wrap="square" lIns="0" tIns="0" rIns="0" bIns="0" rtlCol="0" anchor="ctr">
+            <a:normAutofit/>
+          </a:bodyPr>
           <a:lstStyle/>
           <a:p>
             <a:pPr indent="0" marL="0">
@@ -33016,7 +34068,9 @@
           <a:ln/>
         </p:spPr>
         <p:txBody>
-          <a:bodyPr wrap="square" lIns="0" tIns="0" rIns="0" bIns="0" rtlCol="0" anchor="ctr"/>
+          <a:bodyPr wrap="square" lIns="0" tIns="0" rIns="0" bIns="0" rtlCol="0" anchor="ctr">
+            <a:normAutofit/>
+          </a:bodyPr>
           <a:lstStyle/>
           <a:p>
             <a:pPr indent="0" marL="0">
@@ -33031,7 +34085,7 @@
                 <a:ea typeface="微软雅黑" pitchFamily="34" charset="-122"/>
                 <a:cs typeface="微软雅黑" pitchFamily="34" charset="-120"/>
               </a:rPr>
-              <a:t>WAL · 37 迁移 · EncryptedText 加密列 · 备份/恢复</a:t>
+              <a:t>WAL · 45 迁移 · EncryptedText 加密列 · 备份/恢复</a:t>
             </a:r>
             <a:endParaRPr lang="en-US" sz="1250" dirty="0"/>
           </a:p>
@@ -33055,7 +34109,9 @@
           <a:ln/>
         </p:spPr>
         <p:txBody>
-          <a:bodyPr wrap="square" lIns="0" tIns="0" rIns="0" bIns="0" rtlCol="0" anchor="ctr"/>
+          <a:bodyPr wrap="square" lIns="0" tIns="0" rIns="0" bIns="0" rtlCol="0" anchor="ctr">
+            <a:normAutofit/>
+          </a:bodyPr>
           <a:lstStyle/>
           <a:p>
             <a:pPr indent="0" marL="0">

--- a/帮扶管理信息系统介绍.pptx
+++ b/帮扶管理信息系统介绍.pptx
@@ -249,10 +249,10 @@
                 <c:formatCode>General</c:formatCode>
                 <c:ptCount val="2"/>
                 <c:pt idx="0">
-                  <c:v>11916</c:v>
+                  <c:v>11944</c:v>
                 </c:pt>
                 <c:pt idx="1">
-                  <c:v>6287</c:v>
+                  <c:v>6304</c:v>
                 </c:pt>
               </c:numCache>
             </c:numRef>
@@ -4964,7 +4964,7 @@
                 <a:ea typeface="微软雅黑" pitchFamily="34" charset="-122"/>
                 <a:cs typeface="微软雅黑" pitchFamily="34" charset="-120"/>
               </a:rPr>
-              <a:t>V1.12.11  |  2026-10-02  |  FastAPI + Vue 3 + Electron + SQLite</a:t>
+              <a:t>V1.12.12  |  2026-10-03  |  FastAPI + Vue 3 + Electron + SQLite</a:t>
             </a:r>
             <a:endParaRPr lang="en-US" sz="1250" dirty="0"/>
           </a:p>
@@ -5180,7 +5180,7 @@
                 <a:ea typeface="微软雅黑" pitchFamily="34" charset="-122"/>
                 <a:cs typeface="微软雅黑" pitchFamily="34" charset="-120"/>
               </a:rPr>
-              <a:t>帮扶管理信息系统 v1.12.11</a:t>
+              <a:t>帮扶管理信息系统 v1.12.12</a:t>
             </a:r>
             <a:endParaRPr lang="en-US" sz="1050" dirty="0"/>
           </a:p>
@@ -5358,7 +5358,7 @@
                 <a:ea typeface="微软雅黑" pitchFamily="34" charset="-122"/>
                 <a:cs typeface="微软雅黑" pitchFamily="34" charset="-120"/>
               </a:rPr>
-              <a:t>302 个测试文件 · 6,287 个用例</a:t>
+              <a:t>302 个测试文件 · 6,304 个用例</a:t>
             </a:r>
             <a:endParaRPr lang="en-US" sz="1350" dirty="0"/>
           </a:p>
@@ -5794,7 +5794,7 @@
                 <a:ea typeface="微软雅黑" pitchFamily="34" charset="-122"/>
                 <a:cs typeface="微软雅黑" pitchFamily="34" charset="-120"/>
               </a:rPr>
-              <a:t>帮扶管理信息系统 v1.12.11</a:t>
+              <a:t>帮扶管理信息系统 v1.12.12</a:t>
             </a:r>
             <a:endParaRPr lang="en-US" sz="1050" dirty="0"/>
           </a:p>
@@ -6698,7 +6698,7 @@
                 <a:ea typeface="微软雅黑" pitchFamily="34" charset="-122"/>
                 <a:cs typeface="微软雅黑" pitchFamily="34" charset="-120"/>
               </a:rPr>
-              <a:t>帮扶管理信息系统 v1.12.11</a:t>
+              <a:t>帮扶管理信息系统 v1.12.12</a:t>
             </a:r>
             <a:endParaRPr lang="en-US" sz="1050" dirty="0"/>
           </a:p>
@@ -7312,7 +7312,7 @@
                 <a:ea typeface="微软雅黑" pitchFamily="34" charset="-122"/>
                 <a:cs typeface="微软雅黑" pitchFamily="34" charset="-120"/>
               </a:rPr>
-              <a:t>帮扶管理信息系统 v1.12.11</a:t>
+              <a:t>帮扶管理信息系统 v1.12.12</a:t>
             </a:r>
             <a:endParaRPr lang="en-US" sz="1050" dirty="0"/>
           </a:p>
@@ -8685,7 +8685,7 @@
                 <a:ea typeface="微软雅黑" pitchFamily="34" charset="-122"/>
                 <a:cs typeface="微软雅黑" pitchFamily="34" charset="-120"/>
               </a:rPr>
-              <a:t>帮扶管理信息系统 v1.12.11</a:t>
+              <a:t>帮扶管理信息系统 v1.12.12</a:t>
             </a:r>
             <a:endParaRPr lang="en-US" sz="1050" dirty="0"/>
           </a:p>
@@ -9854,7 +9854,7 @@
                 <a:ea typeface="微软雅黑" pitchFamily="34" charset="-122"/>
                 <a:cs typeface="微软雅黑" pitchFamily="34" charset="-120"/>
               </a:rPr>
-              <a:t>帮扶管理信息系统 v1.12.11</a:t>
+              <a:t>帮扶管理信息系统 v1.12.12</a:t>
             </a:r>
             <a:endParaRPr lang="en-US" sz="1050" dirty="0"/>
           </a:p>
@@ -10468,7 +10468,7 @@
                 <a:ea typeface="微软雅黑" pitchFamily="34" charset="-122"/>
                 <a:cs typeface="微软雅黑" pitchFamily="34" charset="-120"/>
               </a:rPr>
-              <a:t>帮扶管理信息系统 v1.12.11</a:t>
+              <a:t>帮扶管理信息系统 v1.12.12</a:t>
             </a:r>
             <a:endParaRPr lang="en-US" sz="1050" dirty="0"/>
           </a:p>
@@ -11296,7 +11296,7 @@
                 <a:ea typeface="微软雅黑" pitchFamily="34" charset="-122"/>
                 <a:cs typeface="微软雅黑" pitchFamily="34" charset="-120"/>
               </a:rPr>
-              <a:t>帮扶管理信息系统 v1.12.11</a:t>
+              <a:t>帮扶管理信息系统 v1.12.12</a:t>
             </a:r>
             <a:endParaRPr lang="en-US" sz="1050" dirty="0"/>
           </a:p>
@@ -12007,7 +12007,7 @@
                 <a:ea typeface="微软雅黑" pitchFamily="34" charset="-122"/>
                 <a:cs typeface="微软雅黑" pitchFamily="34" charset="-120"/>
               </a:rPr>
-              <a:t>帮扶管理信息系统 v1.12.11</a:t>
+              <a:t>帮扶管理信息系统 v1.12.12</a:t>
             </a:r>
             <a:endParaRPr lang="en-US" sz="1050" dirty="0"/>
           </a:p>
@@ -14144,7 +14144,7 @@
                 <a:ea typeface="微软雅黑" pitchFamily="34" charset="-122"/>
                 <a:cs typeface="微软雅黑" pitchFamily="34" charset="-120"/>
               </a:rPr>
-              <a:t>18,203 项自动化测试 · CI/CD · 依赖自检</a:t>
+              <a:t>18,248 项自动化测试 · CI/CD · 依赖自检</a:t>
             </a:r>
             <a:endParaRPr lang="en-US" sz="1200" dirty="0"/>
           </a:p>
@@ -14505,7 +14505,7 @@
                 <a:ea typeface="微软雅黑" pitchFamily="34" charset="-122"/>
                 <a:cs typeface="微软雅黑" pitchFamily="34" charset="-120"/>
               </a:rPr>
-              <a:t>帮扶管理信息系统 v1.12.11</a:t>
+              <a:t>帮扶管理信息系统 v1.12.12</a:t>
             </a:r>
             <a:endParaRPr lang="en-US" sz="1050" dirty="0"/>
           </a:p>
@@ -15119,7 +15119,7 @@
                 <a:ea typeface="微软雅黑" pitchFamily="34" charset="-122"/>
                 <a:cs typeface="微软雅黑" pitchFamily="34" charset="-120"/>
               </a:rPr>
-              <a:t>帮扶管理信息系统 v1.12.11</a:t>
+              <a:t>帮扶管理信息系统 v1.12.12</a:t>
             </a:r>
             <a:endParaRPr lang="en-US" sz="1050" dirty="0"/>
           </a:p>
@@ -15790,7 +15790,7 @@
                 <a:ea typeface="微软雅黑" pitchFamily="34" charset="-122"/>
                 <a:cs typeface="微软雅黑" pitchFamily="34" charset="-120"/>
               </a:rPr>
-              <a:t>帮扶管理信息系统 v1.12.11</a:t>
+              <a:t>帮扶管理信息系统 v1.12.12</a:t>
             </a:r>
             <a:endParaRPr lang="en-US" sz="1050" dirty="0"/>
           </a:p>
@@ -16473,7 +16473,7 @@
                 <a:ea typeface="微软雅黑" pitchFamily="34" charset="-122"/>
                 <a:cs typeface="微软雅黑" pitchFamily="34" charset="-120"/>
               </a:rPr>
-              <a:t>帮扶管理信息系统 v1.12.11</a:t>
+              <a:t>帮扶管理信息系统 v1.12.12</a:t>
             </a:r>
             <a:endParaRPr lang="en-US" sz="1050" dirty="0"/>
           </a:p>
@@ -17355,7 +17355,7 @@
                 <a:ea typeface="微软雅黑" pitchFamily="34" charset="-122"/>
                 <a:cs typeface="微软雅黑" pitchFamily="34" charset="-120"/>
               </a:rPr>
-              <a:t>帮扶管理信息系统 v1.12.11</a:t>
+              <a:t>帮扶管理信息系统 v1.12.12</a:t>
             </a:r>
             <a:endParaRPr lang="en-US" sz="1050" dirty="0"/>
           </a:p>
@@ -18541,7 +18541,7 @@
                 <a:ea typeface="微软雅黑" pitchFamily="34" charset="-122"/>
                 <a:cs typeface="微软雅黑" pitchFamily="34" charset="-120"/>
               </a:rPr>
-              <a:t>帮扶管理信息系统 v1.12.11</a:t>
+              <a:t>帮扶管理信息系统 v1.12.12</a:t>
             </a:r>
             <a:endParaRPr lang="en-US" sz="1050" dirty="0"/>
           </a:p>
@@ -19540,7 +19540,7 @@
                 <a:ea typeface="微软雅黑" pitchFamily="34" charset="-122"/>
                 <a:cs typeface="微软雅黑" pitchFamily="34" charset="-120"/>
               </a:rPr>
-              <a:t>帮扶管理信息系统 v1.12.11</a:t>
+              <a:t>帮扶管理信息系统 v1.12.12</a:t>
             </a:r>
             <a:endParaRPr lang="en-US" sz="1050" dirty="0"/>
           </a:p>
@@ -20369,7 +20369,7 @@
                 <a:ea typeface="微软雅黑" pitchFamily="34" charset="-122"/>
                 <a:cs typeface="微软雅黑" pitchFamily="34" charset="-120"/>
               </a:rPr>
-              <a:t>帮扶管理信息系统 v1.12.11</a:t>
+              <a:t>帮扶管理信息系统 v1.12.12</a:t>
             </a:r>
             <a:endParaRPr lang="en-US" sz="1050" dirty="0"/>
           </a:p>
@@ -21247,7 +21247,7 @@
                 <a:ea typeface="微软雅黑" pitchFamily="34" charset="-122"/>
                 <a:cs typeface="微软雅黑" pitchFamily="34" charset="-120"/>
               </a:rPr>
-              <a:t>帮扶管理信息系统 v1.12.11</a:t>
+              <a:t>帮扶管理信息系统 v1.12.12</a:t>
             </a:r>
             <a:endParaRPr lang="en-US" sz="1050" dirty="0"/>
           </a:p>
@@ -22379,7 +22379,7 @@
                 <a:ea typeface="微软雅黑" pitchFamily="34" charset="-122"/>
                 <a:cs typeface="微软雅黑" pitchFamily="34" charset="-120"/>
               </a:rPr>
-              <a:t>帮扶管理信息系统 v1.12.11</a:t>
+              <a:t>帮扶管理信息系统 v1.12.12</a:t>
             </a:r>
             <a:endParaRPr lang="en-US" sz="1050" dirty="0"/>
           </a:p>
@@ -23013,7 +23013,7 @@
                 <a:ea typeface="微软雅黑" pitchFamily="34" charset="-122"/>
                 <a:cs typeface="微软雅黑" pitchFamily="34" charset="-120"/>
               </a:rPr>
-              <a:t>18,203 项自动化测试（后端 11,916 + 前端 6,287）</a:t>
+              <a:t>18,248 项自动化测试（后端 11,944 + 前端 6,304）</a:t>
             </a:r>
             <a:endParaRPr lang="en-US" sz="1400" dirty="0"/>
           </a:p>
@@ -23375,7 +23375,7 @@
                 <a:ea typeface="微软雅黑" pitchFamily="34" charset="-122"/>
                 <a:cs typeface="微软雅黑" pitchFamily="34" charset="-120"/>
               </a:rPr>
-              <a:t>帮扶管理信息系统 v1.12.11</a:t>
+              <a:t>帮扶管理信息系统 v1.12.12</a:t>
             </a:r>
             <a:endParaRPr lang="en-US" sz="1050" dirty="0"/>
           </a:p>
@@ -23432,7 +23432,7 @@
                 <a:ea typeface="微软雅黑" pitchFamily="34" charset="-122"/>
                 <a:cs typeface="微软雅黑" pitchFamily="34" charset="-120"/>
               </a:rPr>
-              <a:t>数据来源：v1.12.11 仓库实测 · 后端 11,916 / 前端 6,287 用例 · 覆盖率 100%</a:t>
+              <a:t>数据来源：v1.12.12 仓库实测 · 后端 11,944 / 前端 6,304 用例 · 覆盖率 100%</a:t>
             </a:r>
             <a:endParaRPr lang="en-US" sz="1100" dirty="0"/>
           </a:p>
@@ -23889,7 +23889,7 @@
                 <a:ea typeface="微软雅黑" pitchFamily="34" charset="-122"/>
                 <a:cs typeface="微软雅黑" pitchFamily="34" charset="-120"/>
               </a:rPr>
-              <a:t>帮扶管理信息系统 v1.12.11</a:t>
+              <a:t>帮扶管理信息系统 v1.12.12</a:t>
             </a:r>
             <a:endParaRPr lang="en-US" sz="1050" dirty="0"/>
           </a:p>
@@ -24562,7 +24562,7 @@
                 <a:ea typeface="微软雅黑" pitchFamily="34" charset="-122"/>
                 <a:cs typeface="微软雅黑" pitchFamily="34" charset="-120"/>
               </a:rPr>
-              <a:t>帮扶管理信息系统 v1.12.11</a:t>
+              <a:t>帮扶管理信息系统 v1.12.12</a:t>
             </a:r>
             <a:endParaRPr lang="en-US" sz="1050" dirty="0"/>
           </a:p>
@@ -25176,7 +25176,7 @@
                 <a:ea typeface="微软雅黑" pitchFamily="34" charset="-122"/>
                 <a:cs typeface="微软雅黑" pitchFamily="34" charset="-120"/>
               </a:rPr>
-              <a:t>帮扶管理信息系统 v1.12.11</a:t>
+              <a:t>帮扶管理信息系统 v1.12.12</a:t>
             </a:r>
             <a:endParaRPr lang="en-US" sz="1050" dirty="0"/>
           </a:p>
@@ -26115,7 +26115,7 @@
                 <a:ea typeface="微软雅黑" pitchFamily="34" charset="-122"/>
                 <a:cs typeface="微软雅黑" pitchFamily="34" charset="-120"/>
               </a:rPr>
-              <a:t>帮扶管理信息系统 v1.12.11</a:t>
+              <a:t>帮扶管理信息系统 v1.12.12</a:t>
             </a:r>
             <a:endParaRPr lang="en-US" sz="1050" dirty="0"/>
           </a:p>
@@ -27185,7 +27185,7 @@
                 <a:ea typeface="微软雅黑" pitchFamily="34" charset="-122"/>
                 <a:cs typeface="微软雅黑" pitchFamily="34" charset="-120"/>
               </a:rPr>
-              <a:t>帮扶管理信息系统 v1.12.11</a:t>
+              <a:t>帮扶管理信息系统 v1.12.12</a:t>
             </a:r>
             <a:endParaRPr lang="en-US" sz="1050" dirty="0"/>
           </a:p>
@@ -27820,7 +27820,7 @@
                 <a:ea typeface="微软雅黑" pitchFamily="34" charset="-122"/>
                 <a:cs typeface="微软雅黑" pitchFamily="34" charset="-120"/>
               </a:rPr>
-              <a:t>帮扶管理信息系统 v1.12.11</a:t>
+              <a:t>帮扶管理信息系统 v1.12.12</a:t>
             </a:r>
             <a:endParaRPr lang="en-US" sz="1050" dirty="0"/>
           </a:p>
@@ -28628,7 +28628,7 @@
                 <a:ea typeface="微软雅黑" pitchFamily="34" charset="-122"/>
                 <a:cs typeface="微软雅黑" pitchFamily="34" charset="-120"/>
               </a:rPr>
-              <a:t>净效果：11,916 后端用例（覆盖率 100%）+ 6,287 前端用例全绿；Windows x64 与麒麟 ARM64 两个离线安装包由 GitHub Actions 全自动构建并发布 Release</a:t>
+              <a:t>净效果：11,944 后端用例（覆盖率 100%）+ 6,304 前端用例全绿；Windows x64 与麒麟 ARM64 两个离线安装包由 GitHub Actions 全自动构建并发布 Release</a:t>
             </a:r>
             <a:endParaRPr lang="en-US" sz="1350" dirty="0"/>
           </a:p>
@@ -28844,7 +28844,7 @@
                 <a:ea typeface="微软雅黑" pitchFamily="34" charset="-122"/>
                 <a:cs typeface="微软雅黑" pitchFamily="34" charset="-120"/>
               </a:rPr>
-              <a:t>帮扶管理信息系统 v1.12.11</a:t>
+              <a:t>帮扶管理信息系统 v1.12.12</a:t>
             </a:r>
             <a:endParaRPr lang="en-US" sz="1050" dirty="0"/>
           </a:p>
@@ -29407,7 +29407,7 @@
                 <a:ea typeface="微软雅黑" pitchFamily="34" charset="-122"/>
                 <a:cs typeface="微软雅黑" pitchFamily="34" charset="-120"/>
               </a:rPr>
-              <a:t>帮扶管理信息系统 v1.12.11</a:t>
+              <a:t>帮扶管理信息系统 v1.12.12</a:t>
             </a:r>
             <a:endParaRPr lang="en-US" sz="1050" dirty="0"/>
           </a:p>
@@ -30268,7 +30268,7 @@
                 <a:ea typeface="微软雅黑" pitchFamily="34" charset="-122"/>
                 <a:cs typeface="微软雅黑" pitchFamily="34" charset="-120"/>
               </a:rPr>
-              <a:t>帮扶管理信息系统 v1.12.11  ·  仓库：github.com/lzh745200/MRRS  ·  完整文档见 docs/ 目录</a:t>
+              <a:t>帮扶管理信息系统 v1.12.12  ·  仓库：github.com/lzh745200/MRRS  ·  完整文档见 docs/ 目录</a:t>
             </a:r>
             <a:endParaRPr lang="en-US" sz="1350" dirty="0"/>
           </a:p>
@@ -30309,7 +30309,7 @@
                 <a:ea typeface="微软雅黑" pitchFamily="34" charset="-122"/>
                 <a:cs typeface="微软雅黑" pitchFamily="34" charset="-120"/>
               </a:rPr>
-              <a:t>11,916 后端用例（覆盖率 100%）+ 6,287 前端用例 全绿守护 · Windows x64 / 麒麟 ARM64 双平台离线交付</a:t>
+              <a:t>11,944 后端用例（覆盖率 100%）+ 6,304 前端用例 全绿守护 · Windows x64 / 麒麟 ARM64 双平台离线交付</a:t>
             </a:r>
             <a:endParaRPr lang="en-US" sz="1350" dirty="0"/>
           </a:p>
@@ -30525,7 +30525,7 @@
                 <a:ea typeface="微软雅黑" pitchFamily="34" charset="-122"/>
                 <a:cs typeface="微软雅黑" pitchFamily="34" charset="-120"/>
               </a:rPr>
-              <a:t>帮扶管理信息系统 v1.12.11</a:t>
+              <a:t>帮扶管理信息系统 v1.12.12</a:t>
             </a:r>
             <a:endParaRPr lang="en-US" sz="1050" dirty="0"/>
           </a:p>
@@ -31265,7 +31265,7 @@
                 <a:ea typeface="微软雅黑" pitchFamily="34" charset="-122"/>
                 <a:cs typeface="微软雅黑" pitchFamily="34" charset="-120"/>
               </a:rPr>
-              <a:t>帮扶管理信息系统 v1.12.11</a:t>
+              <a:t>帮扶管理信息系统 v1.12.12</a:t>
             </a:r>
             <a:endParaRPr lang="en-US" sz="1050" dirty="0"/>
           </a:p>
@@ -31306,7 +31306,7 @@
                 <a:ea typeface="微软雅黑" pitchFamily="34" charset="-122"/>
                 <a:cs typeface="微软雅黑" pitchFamily="34" charset="-120"/>
               </a:rPr>
-              <a:t>11,916</a:t>
+              <a:t>11,944</a:t>
             </a:r>
             <a:endParaRPr lang="en-US" sz="4000" dirty="0"/>
           </a:p>
@@ -31388,7 +31388,7 @@
                 <a:ea typeface="微软雅黑" pitchFamily="34" charset="-122"/>
                 <a:cs typeface="微软雅黑" pitchFamily="34" charset="-120"/>
               </a:rPr>
-              <a:t>6,287</a:t>
+              <a:t>6,304</a:t>
             </a:r>
             <a:endParaRPr lang="en-US" sz="4000" dirty="0"/>
           </a:p>
@@ -31985,7 +31985,7 @@
                 <a:ea typeface="微软雅黑" pitchFamily="34" charset="-122"/>
                 <a:cs typeface="微软雅黑" pitchFamily="34" charset="-120"/>
               </a:rPr>
-              <a:t>数据来源：仓库实测（v1.12.11）—— 后端 11,916 用例全绿 / 覆盖率 100% · 前端 6,287 用例全绿 · flake8 0 · bandit 0 中高危 · vue-tsc 0 · eslint 0 警告</a:t>
+              <a:t>数据来源：仓库实测（v1.12.12）—— 后端 11,944 用例全绿 / 覆盖率 100% · 前端 6,304 用例全绿 · flake8 0 · bandit 0 中高危 · vue-tsc 0 · eslint 0 警告</a:t>
             </a:r>
             <a:endParaRPr lang="en-US" sz="1200" dirty="0"/>
           </a:p>
@@ -32505,7 +32505,7 @@
                 <a:ea typeface="微软雅黑" pitchFamily="34" charset="-122"/>
                 <a:cs typeface="微软雅黑" pitchFamily="34" charset="-120"/>
               </a:rPr>
-              <a:t>帮扶管理信息系统 v1.12.11</a:t>
+              <a:t>帮扶管理信息系统 v1.12.12</a:t>
             </a:r>
             <a:endParaRPr lang="en-US" sz="1050" dirty="0"/>
           </a:p>
@@ -33597,7 +33597,7 @@
                 <a:ea typeface="微软雅黑" pitchFamily="34" charset="-122"/>
                 <a:cs typeface="微软雅黑" pitchFamily="34" charset="-120"/>
               </a:rPr>
-              <a:t>帮扶管理信息系统 v1.12.11</a:t>
+              <a:t>帮扶管理信息系统 v1.12.12</a:t>
             </a:r>
             <a:endParaRPr lang="en-US" sz="1050" dirty="0"/>
           </a:p>

--- a/帮扶管理信息系统介绍.pptx
+++ b/帮扶管理信息系统介绍.pptx
@@ -249,7 +249,7 @@
                 <c:formatCode>General</c:formatCode>
                 <c:ptCount val="2"/>
                 <c:pt idx="0">
-                  <c:v>11944</c:v>
+                  <c:v>11948</c:v>
                 </c:pt>
                 <c:pt idx="1">
                   <c:v>6304</c:v>
@@ -4964,7 +4964,7 @@
                 <a:ea typeface="微软雅黑" pitchFamily="34" charset="-122"/>
                 <a:cs typeface="微软雅黑" pitchFamily="34" charset="-120"/>
               </a:rPr>
-              <a:t>V1.12.12  |  2026-10-03  |  FastAPI + Vue 3 + Electron + SQLite</a:t>
+              <a:t>V1.12.13  |  2026-10-05  |  FastAPI + Vue 3 + Electron + SQLite</a:t>
             </a:r>
             <a:endParaRPr lang="en-US" sz="1250" dirty="0"/>
           </a:p>
@@ -5180,7 +5180,7 @@
                 <a:ea typeface="微软雅黑" pitchFamily="34" charset="-122"/>
                 <a:cs typeface="微软雅黑" pitchFamily="34" charset="-120"/>
               </a:rPr>
-              <a:t>帮扶管理信息系统 v1.12.12</a:t>
+              <a:t>帮扶管理信息系统 v1.12.13</a:t>
             </a:r>
             <a:endParaRPr lang="en-US" sz="1050" dirty="0"/>
           </a:p>
@@ -5794,7 +5794,7 @@
                 <a:ea typeface="微软雅黑" pitchFamily="34" charset="-122"/>
                 <a:cs typeface="微软雅黑" pitchFamily="34" charset="-120"/>
               </a:rPr>
-              <a:t>帮扶管理信息系统 v1.12.12</a:t>
+              <a:t>帮扶管理信息系统 v1.12.13</a:t>
             </a:r>
             <a:endParaRPr lang="en-US" sz="1050" dirty="0"/>
           </a:p>
@@ -6698,7 +6698,7 @@
                 <a:ea typeface="微软雅黑" pitchFamily="34" charset="-122"/>
                 <a:cs typeface="微软雅黑" pitchFamily="34" charset="-120"/>
               </a:rPr>
-              <a:t>帮扶管理信息系统 v1.12.12</a:t>
+              <a:t>帮扶管理信息系统 v1.12.13</a:t>
             </a:r>
             <a:endParaRPr lang="en-US" sz="1050" dirty="0"/>
           </a:p>
@@ -7312,7 +7312,7 @@
                 <a:ea typeface="微软雅黑" pitchFamily="34" charset="-122"/>
                 <a:cs typeface="微软雅黑" pitchFamily="34" charset="-120"/>
               </a:rPr>
-              <a:t>帮扶管理信息系统 v1.12.12</a:t>
+              <a:t>帮扶管理信息系统 v1.12.13</a:t>
             </a:r>
             <a:endParaRPr lang="en-US" sz="1050" dirty="0"/>
           </a:p>
@@ -8685,7 +8685,7 @@
                 <a:ea typeface="微软雅黑" pitchFamily="34" charset="-122"/>
                 <a:cs typeface="微软雅黑" pitchFamily="34" charset="-120"/>
               </a:rPr>
-              <a:t>帮扶管理信息系统 v1.12.12</a:t>
+              <a:t>帮扶管理信息系统 v1.12.13</a:t>
             </a:r>
             <a:endParaRPr lang="en-US" sz="1050" dirty="0"/>
           </a:p>
@@ -9854,7 +9854,7 @@
                 <a:ea typeface="微软雅黑" pitchFamily="34" charset="-122"/>
                 <a:cs typeface="微软雅黑" pitchFamily="34" charset="-120"/>
               </a:rPr>
-              <a:t>帮扶管理信息系统 v1.12.12</a:t>
+              <a:t>帮扶管理信息系统 v1.12.13</a:t>
             </a:r>
             <a:endParaRPr lang="en-US" sz="1050" dirty="0"/>
           </a:p>
@@ -10468,7 +10468,7 @@
                 <a:ea typeface="微软雅黑" pitchFamily="34" charset="-122"/>
                 <a:cs typeface="微软雅黑" pitchFamily="34" charset="-120"/>
               </a:rPr>
-              <a:t>帮扶管理信息系统 v1.12.12</a:t>
+              <a:t>帮扶管理信息系统 v1.12.13</a:t>
             </a:r>
             <a:endParaRPr lang="en-US" sz="1050" dirty="0"/>
           </a:p>
@@ -11296,7 +11296,7 @@
                 <a:ea typeface="微软雅黑" pitchFamily="34" charset="-122"/>
                 <a:cs typeface="微软雅黑" pitchFamily="34" charset="-120"/>
               </a:rPr>
-              <a:t>帮扶管理信息系统 v1.12.12</a:t>
+              <a:t>帮扶管理信息系统 v1.12.13</a:t>
             </a:r>
             <a:endParaRPr lang="en-US" sz="1050" dirty="0"/>
           </a:p>
@@ -12007,7 +12007,7 @@
                 <a:ea typeface="微软雅黑" pitchFamily="34" charset="-122"/>
                 <a:cs typeface="微软雅黑" pitchFamily="34" charset="-120"/>
               </a:rPr>
-              <a:t>帮扶管理信息系统 v1.12.12</a:t>
+              <a:t>帮扶管理信息系统 v1.12.13</a:t>
             </a:r>
             <a:endParaRPr lang="en-US" sz="1050" dirty="0"/>
           </a:p>
@@ -14144,7 +14144,7 @@
                 <a:ea typeface="微软雅黑" pitchFamily="34" charset="-122"/>
                 <a:cs typeface="微软雅黑" pitchFamily="34" charset="-120"/>
               </a:rPr>
-              <a:t>18,248 项自动化测试 · CI/CD · 依赖自检</a:t>
+              <a:t>18,252 项自动化测试 · CI/CD · 依赖自检</a:t>
             </a:r>
             <a:endParaRPr lang="en-US" sz="1200" dirty="0"/>
           </a:p>
@@ -14505,7 +14505,7 @@
                 <a:ea typeface="微软雅黑" pitchFamily="34" charset="-122"/>
                 <a:cs typeface="微软雅黑" pitchFamily="34" charset="-120"/>
               </a:rPr>
-              <a:t>帮扶管理信息系统 v1.12.12</a:t>
+              <a:t>帮扶管理信息系统 v1.12.13</a:t>
             </a:r>
             <a:endParaRPr lang="en-US" sz="1050" dirty="0"/>
           </a:p>
@@ -15119,7 +15119,7 @@
                 <a:ea typeface="微软雅黑" pitchFamily="34" charset="-122"/>
                 <a:cs typeface="微软雅黑" pitchFamily="34" charset="-120"/>
               </a:rPr>
-              <a:t>帮扶管理信息系统 v1.12.12</a:t>
+              <a:t>帮扶管理信息系统 v1.12.13</a:t>
             </a:r>
             <a:endParaRPr lang="en-US" sz="1050" dirty="0"/>
           </a:p>
@@ -15790,7 +15790,7 @@
                 <a:ea typeface="微软雅黑" pitchFamily="34" charset="-122"/>
                 <a:cs typeface="微软雅黑" pitchFamily="34" charset="-120"/>
               </a:rPr>
-              <a:t>帮扶管理信息系统 v1.12.12</a:t>
+              <a:t>帮扶管理信息系统 v1.12.13</a:t>
             </a:r>
             <a:endParaRPr lang="en-US" sz="1050" dirty="0"/>
           </a:p>
@@ -16473,7 +16473,7 @@
                 <a:ea typeface="微软雅黑" pitchFamily="34" charset="-122"/>
                 <a:cs typeface="微软雅黑" pitchFamily="34" charset="-120"/>
               </a:rPr>
-              <a:t>帮扶管理信息系统 v1.12.12</a:t>
+              <a:t>帮扶管理信息系统 v1.12.13</a:t>
             </a:r>
             <a:endParaRPr lang="en-US" sz="1050" dirty="0"/>
           </a:p>
@@ -17355,7 +17355,7 @@
                 <a:ea typeface="微软雅黑" pitchFamily="34" charset="-122"/>
                 <a:cs typeface="微软雅黑" pitchFamily="34" charset="-120"/>
               </a:rPr>
-              <a:t>帮扶管理信息系统 v1.12.12</a:t>
+              <a:t>帮扶管理信息系统 v1.12.13</a:t>
             </a:r>
             <a:endParaRPr lang="en-US" sz="1050" dirty="0"/>
           </a:p>
@@ -18541,7 +18541,7 @@
                 <a:ea typeface="微软雅黑" pitchFamily="34" charset="-122"/>
                 <a:cs typeface="微软雅黑" pitchFamily="34" charset="-120"/>
               </a:rPr>
-              <a:t>帮扶管理信息系统 v1.12.12</a:t>
+              <a:t>帮扶管理信息系统 v1.12.13</a:t>
             </a:r>
             <a:endParaRPr lang="en-US" sz="1050" dirty="0"/>
           </a:p>
@@ -19540,7 +19540,7 @@
                 <a:ea typeface="微软雅黑" pitchFamily="34" charset="-122"/>
                 <a:cs typeface="微软雅黑" pitchFamily="34" charset="-120"/>
               </a:rPr>
-              <a:t>帮扶管理信息系统 v1.12.12</a:t>
+              <a:t>帮扶管理信息系统 v1.12.13</a:t>
             </a:r>
             <a:endParaRPr lang="en-US" sz="1050" dirty="0"/>
           </a:p>
@@ -20369,7 +20369,7 @@
                 <a:ea typeface="微软雅黑" pitchFamily="34" charset="-122"/>
                 <a:cs typeface="微软雅黑" pitchFamily="34" charset="-120"/>
               </a:rPr>
-              <a:t>帮扶管理信息系统 v1.12.12</a:t>
+              <a:t>帮扶管理信息系统 v1.12.13</a:t>
             </a:r>
             <a:endParaRPr lang="en-US" sz="1050" dirty="0"/>
           </a:p>
@@ -21247,7 +21247,7 @@
                 <a:ea typeface="微软雅黑" pitchFamily="34" charset="-122"/>
                 <a:cs typeface="微软雅黑" pitchFamily="34" charset="-120"/>
               </a:rPr>
-              <a:t>帮扶管理信息系统 v1.12.12</a:t>
+              <a:t>帮扶管理信息系统 v1.12.13</a:t>
             </a:r>
             <a:endParaRPr lang="en-US" sz="1050" dirty="0"/>
           </a:p>
@@ -22379,7 +22379,7 @@
                 <a:ea typeface="微软雅黑" pitchFamily="34" charset="-122"/>
                 <a:cs typeface="微软雅黑" pitchFamily="34" charset="-120"/>
               </a:rPr>
-              <a:t>帮扶管理信息系统 v1.12.12</a:t>
+              <a:t>帮扶管理信息系统 v1.12.13</a:t>
             </a:r>
             <a:endParaRPr lang="en-US" sz="1050" dirty="0"/>
           </a:p>
@@ -23013,7 +23013,7 @@
                 <a:ea typeface="微软雅黑" pitchFamily="34" charset="-122"/>
                 <a:cs typeface="微软雅黑" pitchFamily="34" charset="-120"/>
               </a:rPr>
-              <a:t>18,248 项自动化测试（后端 11,944 + 前端 6,304）</a:t>
+              <a:t>18,252 项自动化测试（后端 11,948 + 前端 6,304）</a:t>
             </a:r>
             <a:endParaRPr lang="en-US" sz="1400" dirty="0"/>
           </a:p>
@@ -23375,7 +23375,7 @@
                 <a:ea typeface="微软雅黑" pitchFamily="34" charset="-122"/>
                 <a:cs typeface="微软雅黑" pitchFamily="34" charset="-120"/>
               </a:rPr>
-              <a:t>帮扶管理信息系统 v1.12.12</a:t>
+              <a:t>帮扶管理信息系统 v1.12.13</a:t>
             </a:r>
             <a:endParaRPr lang="en-US" sz="1050" dirty="0"/>
           </a:p>
@@ -23432,7 +23432,7 @@
                 <a:ea typeface="微软雅黑" pitchFamily="34" charset="-122"/>
                 <a:cs typeface="微软雅黑" pitchFamily="34" charset="-120"/>
               </a:rPr>
-              <a:t>数据来源：v1.12.12 仓库实测 · 后端 11,944 / 前端 6,304 用例 · 覆盖率 100%</a:t>
+              <a:t>数据来源：v1.12.13 仓库实测 · 后端 11,948 / 前端 6,304 用例 · 覆盖率 100%</a:t>
             </a:r>
             <a:endParaRPr lang="en-US" sz="1100" dirty="0"/>
           </a:p>
@@ -23889,7 +23889,7 @@
                 <a:ea typeface="微软雅黑" pitchFamily="34" charset="-122"/>
                 <a:cs typeface="微软雅黑" pitchFamily="34" charset="-120"/>
               </a:rPr>
-              <a:t>帮扶管理信息系统 v1.12.12</a:t>
+              <a:t>帮扶管理信息系统 v1.12.13</a:t>
             </a:r>
             <a:endParaRPr lang="en-US" sz="1050" dirty="0"/>
           </a:p>
@@ -24562,7 +24562,7 @@
                 <a:ea typeface="微软雅黑" pitchFamily="34" charset="-122"/>
                 <a:cs typeface="微软雅黑" pitchFamily="34" charset="-120"/>
               </a:rPr>
-              <a:t>帮扶管理信息系统 v1.12.12</a:t>
+              <a:t>帮扶管理信息系统 v1.12.13</a:t>
             </a:r>
             <a:endParaRPr lang="en-US" sz="1050" dirty="0"/>
           </a:p>
@@ -25176,7 +25176,7 @@
                 <a:ea typeface="微软雅黑" pitchFamily="34" charset="-122"/>
                 <a:cs typeface="微软雅黑" pitchFamily="34" charset="-120"/>
               </a:rPr>
-              <a:t>帮扶管理信息系统 v1.12.12</a:t>
+              <a:t>帮扶管理信息系统 v1.12.13</a:t>
             </a:r>
             <a:endParaRPr lang="en-US" sz="1050" dirty="0"/>
           </a:p>
@@ -26115,7 +26115,7 @@
                 <a:ea typeface="微软雅黑" pitchFamily="34" charset="-122"/>
                 <a:cs typeface="微软雅黑" pitchFamily="34" charset="-120"/>
               </a:rPr>
-              <a:t>帮扶管理信息系统 v1.12.12</a:t>
+              <a:t>帮扶管理信息系统 v1.12.13</a:t>
             </a:r>
             <a:endParaRPr lang="en-US" sz="1050" dirty="0"/>
           </a:p>
@@ -27185,7 +27185,7 @@
                 <a:ea typeface="微软雅黑" pitchFamily="34" charset="-122"/>
                 <a:cs typeface="微软雅黑" pitchFamily="34" charset="-120"/>
               </a:rPr>
-              <a:t>帮扶管理信息系统 v1.12.12</a:t>
+              <a:t>帮扶管理信息系统 v1.12.13</a:t>
             </a:r>
             <a:endParaRPr lang="en-US" sz="1050" dirty="0"/>
           </a:p>
@@ -27820,7 +27820,7 @@
                 <a:ea typeface="微软雅黑" pitchFamily="34" charset="-122"/>
                 <a:cs typeface="微软雅黑" pitchFamily="34" charset="-120"/>
               </a:rPr>
-              <a:t>帮扶管理信息系统 v1.12.12</a:t>
+              <a:t>帮扶管理信息系统 v1.12.13</a:t>
             </a:r>
             <a:endParaRPr lang="en-US" sz="1050" dirty="0"/>
           </a:p>
@@ -28628,7 +28628,7 @@
                 <a:ea typeface="微软雅黑" pitchFamily="34" charset="-122"/>
                 <a:cs typeface="微软雅黑" pitchFamily="34" charset="-120"/>
               </a:rPr>
-              <a:t>净效果：11,944 后端用例（覆盖率 100%）+ 6,304 前端用例全绿；Windows x64 与麒麟 ARM64 两个离线安装包由 GitHub Actions 全自动构建并发布 Release</a:t>
+              <a:t>净效果：11,948 后端用例（覆盖率 100%）+ 6,304 前端用例全绿；Windows x64 与麒麟 ARM64 两个离线安装包由 GitHub Actions 全自动构建并发布 Release</a:t>
             </a:r>
             <a:endParaRPr lang="en-US" sz="1350" dirty="0"/>
           </a:p>
@@ -28844,7 +28844,7 @@
                 <a:ea typeface="微软雅黑" pitchFamily="34" charset="-122"/>
                 <a:cs typeface="微软雅黑" pitchFamily="34" charset="-120"/>
               </a:rPr>
-              <a:t>帮扶管理信息系统 v1.12.12</a:t>
+              <a:t>帮扶管理信息系统 v1.12.13</a:t>
             </a:r>
             <a:endParaRPr lang="en-US" sz="1050" dirty="0"/>
           </a:p>
@@ -29407,7 +29407,7 @@
                 <a:ea typeface="微软雅黑" pitchFamily="34" charset="-122"/>
                 <a:cs typeface="微软雅黑" pitchFamily="34" charset="-120"/>
               </a:rPr>
-              <a:t>帮扶管理信息系统 v1.12.12</a:t>
+              <a:t>帮扶管理信息系统 v1.12.13</a:t>
             </a:r>
             <a:endParaRPr lang="en-US" sz="1050" dirty="0"/>
           </a:p>
@@ -30268,7 +30268,7 @@
                 <a:ea typeface="微软雅黑" pitchFamily="34" charset="-122"/>
                 <a:cs typeface="微软雅黑" pitchFamily="34" charset="-120"/>
               </a:rPr>
-              <a:t>帮扶管理信息系统 v1.12.12  ·  仓库：github.com/lzh745200/MRRS  ·  完整文档见 docs/ 目录</a:t>
+              <a:t>帮扶管理信息系统 v1.12.13  ·  仓库：github.com/lzh745200/MRRS  ·  完整文档见 docs/ 目录</a:t>
             </a:r>
             <a:endParaRPr lang="en-US" sz="1350" dirty="0"/>
           </a:p>
@@ -30309,7 +30309,7 @@
                 <a:ea typeface="微软雅黑" pitchFamily="34" charset="-122"/>
                 <a:cs typeface="微软雅黑" pitchFamily="34" charset="-120"/>
               </a:rPr>
-              <a:t>11,944 后端用例（覆盖率 100%）+ 6,304 前端用例 全绿守护 · Windows x64 / 麒麟 ARM64 双平台离线交付</a:t>
+              <a:t>11,948 后端用例（覆盖率 100%）+ 6,304 前端用例 全绿守护 · Windows x64 / 麒麟 ARM64 双平台离线交付</a:t>
             </a:r>
             <a:endParaRPr lang="en-US" sz="1350" dirty="0"/>
           </a:p>
@@ -30525,7 +30525,7 @@
                 <a:ea typeface="微软雅黑" pitchFamily="34" charset="-122"/>
                 <a:cs typeface="微软雅黑" pitchFamily="34" charset="-120"/>
               </a:rPr>
-              <a:t>帮扶管理信息系统 v1.12.12</a:t>
+              <a:t>帮扶管理信息系统 v1.12.13</a:t>
             </a:r>
             <a:endParaRPr lang="en-US" sz="1050" dirty="0"/>
           </a:p>
@@ -31265,7 +31265,7 @@
                 <a:ea typeface="微软雅黑" pitchFamily="34" charset="-122"/>
                 <a:cs typeface="微软雅黑" pitchFamily="34" charset="-120"/>
               </a:rPr>
-              <a:t>帮扶管理信息系统 v1.12.12</a:t>
+              <a:t>帮扶管理信息系统 v1.12.13</a:t>
             </a:r>
             <a:endParaRPr lang="en-US" sz="1050" dirty="0"/>
           </a:p>
@@ -31306,7 +31306,7 @@
                 <a:ea typeface="微软雅黑" pitchFamily="34" charset="-122"/>
                 <a:cs typeface="微软雅黑" pitchFamily="34" charset="-120"/>
               </a:rPr>
-              <a:t>11,944</a:t>
+              <a:t>11,948</a:t>
             </a:r>
             <a:endParaRPr lang="en-US" sz="4000" dirty="0"/>
           </a:p>
@@ -31985,7 +31985,7 @@
                 <a:ea typeface="微软雅黑" pitchFamily="34" charset="-122"/>
                 <a:cs typeface="微软雅黑" pitchFamily="34" charset="-120"/>
               </a:rPr>
-              <a:t>数据来源：仓库实测（v1.12.12）—— 后端 11,944 用例全绿 / 覆盖率 100% · 前端 6,304 用例全绿 · flake8 0 · bandit 0 中高危 · vue-tsc 0 · eslint 0 警告</a:t>
+              <a:t>数据来源：仓库实测（v1.12.13）—— 后端 11,948 用例全绿 / 覆盖率 100% · 前端 6,304 用例全绿 · flake8 0 · bandit 0 中高危 · vue-tsc 0 · eslint 0 警告</a:t>
             </a:r>
             <a:endParaRPr lang="en-US" sz="1200" dirty="0"/>
           </a:p>
@@ -32505,7 +32505,7 @@
                 <a:ea typeface="微软雅黑" pitchFamily="34" charset="-122"/>
                 <a:cs typeface="微软雅黑" pitchFamily="34" charset="-120"/>
               </a:rPr>
-              <a:t>帮扶管理信息系统 v1.12.12</a:t>
+              <a:t>帮扶管理信息系统 v1.12.13</a:t>
             </a:r>
             <a:endParaRPr lang="en-US" sz="1050" dirty="0"/>
           </a:p>
@@ -33597,7 +33597,7 @@
                 <a:ea typeface="微软雅黑" pitchFamily="34" charset="-122"/>
                 <a:cs typeface="微软雅黑" pitchFamily="34" charset="-120"/>
               </a:rPr>
-              <a:t>帮扶管理信息系统 v1.12.12</a:t>
+              <a:t>帮扶管理信息系统 v1.12.13</a:t>
             </a:r>
             <a:endParaRPr lang="en-US" sz="1050" dirty="0"/>
           </a:p>

--- a/帮扶管理信息系统介绍.pptx
+++ b/帮扶管理信息系统介绍.pptx
@@ -249,10 +249,10 @@
                 <c:formatCode>General</c:formatCode>
                 <c:ptCount val="2"/>
                 <c:pt idx="0">
-                  <c:v>11948</c:v>
+                  <c:v>12005</c:v>
                 </c:pt>
                 <c:pt idx="1">
-                  <c:v>6304</c:v>
+                  <c:v>6315</c:v>
                 </c:pt>
               </c:numCache>
             </c:numRef>
@@ -4964,7 +4964,7 @@
                 <a:ea typeface="微软雅黑" pitchFamily="34" charset="-122"/>
                 <a:cs typeface="微软雅黑" pitchFamily="34" charset="-120"/>
               </a:rPr>
-              <a:t>V1.12.13  |  2026-10-05  |  FastAPI + Vue 3 + Electron + SQLite</a:t>
+              <a:t>V1.12.14  |  2026-10-06  |  FastAPI + Vue 3 + Electron + SQLite</a:t>
             </a:r>
             <a:endParaRPr lang="en-US" sz="1250" dirty="0"/>
           </a:p>
@@ -5180,7 +5180,7 @@
                 <a:ea typeface="微软雅黑" pitchFamily="34" charset="-122"/>
                 <a:cs typeface="微软雅黑" pitchFamily="34" charset="-120"/>
               </a:rPr>
-              <a:t>帮扶管理信息系统 v1.12.13</a:t>
+              <a:t>帮扶管理信息系统 v1.12.14</a:t>
             </a:r>
             <a:endParaRPr lang="en-US" sz="1050" dirty="0"/>
           </a:p>
@@ -5358,7 +5358,7 @@
                 <a:ea typeface="微软雅黑" pitchFamily="34" charset="-122"/>
                 <a:cs typeface="微软雅黑" pitchFamily="34" charset="-120"/>
               </a:rPr>
-              <a:t>302 个测试文件 · 6,304 个用例</a:t>
+              <a:t>302 个测试文件 · 6,315 个用例</a:t>
             </a:r>
             <a:endParaRPr lang="en-US" sz="1350" dirty="0"/>
           </a:p>
@@ -5794,7 +5794,7 @@
                 <a:ea typeface="微软雅黑" pitchFamily="34" charset="-122"/>
                 <a:cs typeface="微软雅黑" pitchFamily="34" charset="-120"/>
               </a:rPr>
-              <a:t>帮扶管理信息系统 v1.12.13</a:t>
+              <a:t>帮扶管理信息系统 v1.12.14</a:t>
             </a:r>
             <a:endParaRPr lang="en-US" sz="1050" dirty="0"/>
           </a:p>
@@ -6698,7 +6698,7 @@
                 <a:ea typeface="微软雅黑" pitchFamily="34" charset="-122"/>
                 <a:cs typeface="微软雅黑" pitchFamily="34" charset="-120"/>
               </a:rPr>
-              <a:t>帮扶管理信息系统 v1.12.13</a:t>
+              <a:t>帮扶管理信息系统 v1.12.14</a:t>
             </a:r>
             <a:endParaRPr lang="en-US" sz="1050" dirty="0"/>
           </a:p>
@@ -7312,7 +7312,7 @@
                 <a:ea typeface="微软雅黑" pitchFamily="34" charset="-122"/>
                 <a:cs typeface="微软雅黑" pitchFamily="34" charset="-120"/>
               </a:rPr>
-              <a:t>帮扶管理信息系统 v1.12.13</a:t>
+              <a:t>帮扶管理信息系统 v1.12.14</a:t>
             </a:r>
             <a:endParaRPr lang="en-US" sz="1050" dirty="0"/>
           </a:p>
@@ -8685,7 +8685,7 @@
                 <a:ea typeface="微软雅黑" pitchFamily="34" charset="-122"/>
                 <a:cs typeface="微软雅黑" pitchFamily="34" charset="-120"/>
               </a:rPr>
-              <a:t>帮扶管理信息系统 v1.12.13</a:t>
+              <a:t>帮扶管理信息系统 v1.12.14</a:t>
             </a:r>
             <a:endParaRPr lang="en-US" sz="1050" dirty="0"/>
           </a:p>
@@ -9854,7 +9854,7 @@
                 <a:ea typeface="微软雅黑" pitchFamily="34" charset="-122"/>
                 <a:cs typeface="微软雅黑" pitchFamily="34" charset="-120"/>
               </a:rPr>
-              <a:t>帮扶管理信息系统 v1.12.13</a:t>
+              <a:t>帮扶管理信息系统 v1.12.14</a:t>
             </a:r>
             <a:endParaRPr lang="en-US" sz="1050" dirty="0"/>
           </a:p>
@@ -10468,7 +10468,7 @@
                 <a:ea typeface="微软雅黑" pitchFamily="34" charset="-122"/>
                 <a:cs typeface="微软雅黑" pitchFamily="34" charset="-120"/>
               </a:rPr>
-              <a:t>帮扶管理信息系统 v1.12.13</a:t>
+              <a:t>帮扶管理信息系统 v1.12.14</a:t>
             </a:r>
             <a:endParaRPr lang="en-US" sz="1050" dirty="0"/>
           </a:p>
@@ -11296,7 +11296,7 @@
                 <a:ea typeface="微软雅黑" pitchFamily="34" charset="-122"/>
                 <a:cs typeface="微软雅黑" pitchFamily="34" charset="-120"/>
               </a:rPr>
-              <a:t>帮扶管理信息系统 v1.12.13</a:t>
+              <a:t>帮扶管理信息系统 v1.12.14</a:t>
             </a:r>
             <a:endParaRPr lang="en-US" sz="1050" dirty="0"/>
           </a:p>
@@ -12007,7 +12007,7 @@
                 <a:ea typeface="微软雅黑" pitchFamily="34" charset="-122"/>
                 <a:cs typeface="微软雅黑" pitchFamily="34" charset="-120"/>
               </a:rPr>
-              <a:t>帮扶管理信息系统 v1.12.13</a:t>
+              <a:t>帮扶管理信息系统 v1.12.14</a:t>
             </a:r>
             <a:endParaRPr lang="en-US" sz="1050" dirty="0"/>
           </a:p>
@@ -14144,7 +14144,7 @@
                 <a:ea typeface="微软雅黑" pitchFamily="34" charset="-122"/>
                 <a:cs typeface="微软雅黑" pitchFamily="34" charset="-120"/>
               </a:rPr>
-              <a:t>18,252 项自动化测试 · CI/CD · 依赖自检</a:t>
+              <a:t>18,320 项自动化测试 · CI/CD · 依赖自检</a:t>
             </a:r>
             <a:endParaRPr lang="en-US" sz="1200" dirty="0"/>
           </a:p>
@@ -14505,7 +14505,7 @@
                 <a:ea typeface="微软雅黑" pitchFamily="34" charset="-122"/>
                 <a:cs typeface="微软雅黑" pitchFamily="34" charset="-120"/>
               </a:rPr>
-              <a:t>帮扶管理信息系统 v1.12.13</a:t>
+              <a:t>帮扶管理信息系统 v1.12.14</a:t>
             </a:r>
             <a:endParaRPr lang="en-US" sz="1050" dirty="0"/>
           </a:p>
@@ -15119,7 +15119,7 @@
                 <a:ea typeface="微软雅黑" pitchFamily="34" charset="-122"/>
                 <a:cs typeface="微软雅黑" pitchFamily="34" charset="-120"/>
               </a:rPr>
-              <a:t>帮扶管理信息系统 v1.12.13</a:t>
+              <a:t>帮扶管理信息系统 v1.12.14</a:t>
             </a:r>
             <a:endParaRPr lang="en-US" sz="1050" dirty="0"/>
           </a:p>
@@ -15790,7 +15790,7 @@
                 <a:ea typeface="微软雅黑" pitchFamily="34" charset="-122"/>
                 <a:cs typeface="微软雅黑" pitchFamily="34" charset="-120"/>
               </a:rPr>
-              <a:t>帮扶管理信息系统 v1.12.13</a:t>
+              <a:t>帮扶管理信息系统 v1.12.14</a:t>
             </a:r>
             <a:endParaRPr lang="en-US" sz="1050" dirty="0"/>
           </a:p>
@@ -16473,7 +16473,7 @@
                 <a:ea typeface="微软雅黑" pitchFamily="34" charset="-122"/>
                 <a:cs typeface="微软雅黑" pitchFamily="34" charset="-120"/>
               </a:rPr>
-              <a:t>帮扶管理信息系统 v1.12.13</a:t>
+              <a:t>帮扶管理信息系统 v1.12.14</a:t>
             </a:r>
             <a:endParaRPr lang="en-US" sz="1050" dirty="0"/>
           </a:p>
@@ -17355,7 +17355,7 @@
                 <a:ea typeface="微软雅黑" pitchFamily="34" charset="-122"/>
                 <a:cs typeface="微软雅黑" pitchFamily="34" charset="-120"/>
               </a:rPr>
-              <a:t>帮扶管理信息系统 v1.12.13</a:t>
+              <a:t>帮扶管理信息系统 v1.12.14</a:t>
             </a:r>
             <a:endParaRPr lang="en-US" sz="1050" dirty="0"/>
           </a:p>
@@ -18541,7 +18541,7 @@
                 <a:ea typeface="微软雅黑" pitchFamily="34" charset="-122"/>
                 <a:cs typeface="微软雅黑" pitchFamily="34" charset="-120"/>
               </a:rPr>
-              <a:t>帮扶管理信息系统 v1.12.13</a:t>
+              <a:t>帮扶管理信息系统 v1.12.14</a:t>
             </a:r>
             <a:endParaRPr lang="en-US" sz="1050" dirty="0"/>
           </a:p>
@@ -19540,7 +19540,7 @@
                 <a:ea typeface="微软雅黑" pitchFamily="34" charset="-122"/>
                 <a:cs typeface="微软雅黑" pitchFamily="34" charset="-120"/>
               </a:rPr>
-              <a:t>帮扶管理信息系统 v1.12.13</a:t>
+              <a:t>帮扶管理信息系统 v1.12.14</a:t>
             </a:r>
             <a:endParaRPr lang="en-US" sz="1050" dirty="0"/>
           </a:p>
@@ -20369,7 +20369,7 @@
                 <a:ea typeface="微软雅黑" pitchFamily="34" charset="-122"/>
                 <a:cs typeface="微软雅黑" pitchFamily="34" charset="-120"/>
               </a:rPr>
-              <a:t>帮扶管理信息系统 v1.12.13</a:t>
+              <a:t>帮扶管理信息系统 v1.12.14</a:t>
             </a:r>
             <a:endParaRPr lang="en-US" sz="1050" dirty="0"/>
           </a:p>
@@ -21247,7 +21247,7 @@
                 <a:ea typeface="微软雅黑" pitchFamily="34" charset="-122"/>
                 <a:cs typeface="微软雅黑" pitchFamily="34" charset="-120"/>
               </a:rPr>
-              <a:t>帮扶管理信息系统 v1.12.13</a:t>
+              <a:t>帮扶管理信息系统 v1.12.14</a:t>
             </a:r>
             <a:endParaRPr lang="en-US" sz="1050" dirty="0"/>
           </a:p>
@@ -22379,7 +22379,7 @@
                 <a:ea typeface="微软雅黑" pitchFamily="34" charset="-122"/>
                 <a:cs typeface="微软雅黑" pitchFamily="34" charset="-120"/>
               </a:rPr>
-              <a:t>帮扶管理信息系统 v1.12.13</a:t>
+              <a:t>帮扶管理信息系统 v1.12.14</a:t>
             </a:r>
             <a:endParaRPr lang="en-US" sz="1050" dirty="0"/>
           </a:p>
@@ -23013,7 +23013,7 @@
                 <a:ea typeface="微软雅黑" pitchFamily="34" charset="-122"/>
                 <a:cs typeface="微软雅黑" pitchFamily="34" charset="-120"/>
               </a:rPr>
-              <a:t>18,252 项自动化测试（后端 11,948 + 前端 6,304）</a:t>
+              <a:t>18,320 项自动化测试（后端 12,005 + 前端 6,315）</a:t>
             </a:r>
             <a:endParaRPr lang="en-US" sz="1400" dirty="0"/>
           </a:p>
@@ -23375,7 +23375,7 @@
                 <a:ea typeface="微软雅黑" pitchFamily="34" charset="-122"/>
                 <a:cs typeface="微软雅黑" pitchFamily="34" charset="-120"/>
               </a:rPr>
-              <a:t>帮扶管理信息系统 v1.12.13</a:t>
+              <a:t>帮扶管理信息系统 v1.12.14</a:t>
             </a:r>
             <a:endParaRPr lang="en-US" sz="1050" dirty="0"/>
           </a:p>
@@ -23432,7 +23432,7 @@
                 <a:ea typeface="微软雅黑" pitchFamily="34" charset="-122"/>
                 <a:cs typeface="微软雅黑" pitchFamily="34" charset="-120"/>
               </a:rPr>
-              <a:t>数据来源：v1.12.13 仓库实测 · 后端 11,948 / 前端 6,304 用例 · 覆盖率 100%</a:t>
+              <a:t>数据来源：v1.12.14 仓库实测 · 后端 12,005 / 前端 6,315 用例 · 覆盖率 100%</a:t>
             </a:r>
             <a:endParaRPr lang="en-US" sz="1100" dirty="0"/>
           </a:p>
@@ -23889,7 +23889,7 @@
                 <a:ea typeface="微软雅黑" pitchFamily="34" charset="-122"/>
                 <a:cs typeface="微软雅黑" pitchFamily="34" charset="-120"/>
               </a:rPr>
-              <a:t>帮扶管理信息系统 v1.12.13</a:t>
+              <a:t>帮扶管理信息系统 v1.12.14</a:t>
             </a:r>
             <a:endParaRPr lang="en-US" sz="1050" dirty="0"/>
           </a:p>
@@ -24562,7 +24562,7 @@
                 <a:ea typeface="微软雅黑" pitchFamily="34" charset="-122"/>
                 <a:cs typeface="微软雅黑" pitchFamily="34" charset="-120"/>
               </a:rPr>
-              <a:t>帮扶管理信息系统 v1.12.13</a:t>
+              <a:t>帮扶管理信息系统 v1.12.14</a:t>
             </a:r>
             <a:endParaRPr lang="en-US" sz="1050" dirty="0"/>
           </a:p>
@@ -25176,7 +25176,7 @@
                 <a:ea typeface="微软雅黑" pitchFamily="34" charset="-122"/>
                 <a:cs typeface="微软雅黑" pitchFamily="34" charset="-120"/>
               </a:rPr>
-              <a:t>帮扶管理信息系统 v1.12.13</a:t>
+              <a:t>帮扶管理信息系统 v1.12.14</a:t>
             </a:r>
             <a:endParaRPr lang="en-US" sz="1050" dirty="0"/>
           </a:p>
@@ -26115,7 +26115,7 @@
                 <a:ea typeface="微软雅黑" pitchFamily="34" charset="-122"/>
                 <a:cs typeface="微软雅黑" pitchFamily="34" charset="-120"/>
               </a:rPr>
-              <a:t>帮扶管理信息系统 v1.12.13</a:t>
+              <a:t>帮扶管理信息系统 v1.12.14</a:t>
             </a:r>
             <a:endParaRPr lang="en-US" sz="1050" dirty="0"/>
           </a:p>
@@ -27185,7 +27185,7 @@
                 <a:ea typeface="微软雅黑" pitchFamily="34" charset="-122"/>
                 <a:cs typeface="微软雅黑" pitchFamily="34" charset="-120"/>
               </a:rPr>
-              <a:t>帮扶管理信息系统 v1.12.13</a:t>
+              <a:t>帮扶管理信息系统 v1.12.14</a:t>
             </a:r>
             <a:endParaRPr lang="en-US" sz="1050" dirty="0"/>
           </a:p>
@@ -27820,7 +27820,7 @@
                 <a:ea typeface="微软雅黑" pitchFamily="34" charset="-122"/>
                 <a:cs typeface="微软雅黑" pitchFamily="34" charset="-120"/>
               </a:rPr>
-              <a:t>帮扶管理信息系统 v1.12.13</a:t>
+              <a:t>帮扶管理信息系统 v1.12.14</a:t>
             </a:r>
             <a:endParaRPr lang="en-US" sz="1050" dirty="0"/>
           </a:p>
@@ -28628,7 +28628,7 @@
                 <a:ea typeface="微软雅黑" pitchFamily="34" charset="-122"/>
                 <a:cs typeface="微软雅黑" pitchFamily="34" charset="-120"/>
               </a:rPr>
-              <a:t>净效果：11,948 后端用例（覆盖率 100%）+ 6,304 前端用例全绿；Windows x64 与麒麟 ARM64 两个离线安装包由 GitHub Actions 全自动构建并发布 Release</a:t>
+              <a:t>净效果：12,005 后端用例（覆盖率 100%）+ 6,315 前端用例全绿；Windows x64 与麒麟 ARM64 两个离线安装包由 GitHub Actions 全自动构建并发布 Release</a:t>
             </a:r>
             <a:endParaRPr lang="en-US" sz="1350" dirty="0"/>
           </a:p>
@@ -28844,7 +28844,7 @@
                 <a:ea typeface="微软雅黑" pitchFamily="34" charset="-122"/>
                 <a:cs typeface="微软雅黑" pitchFamily="34" charset="-120"/>
               </a:rPr>
-              <a:t>帮扶管理信息系统 v1.12.13</a:t>
+              <a:t>帮扶管理信息系统 v1.12.14</a:t>
             </a:r>
             <a:endParaRPr lang="en-US" sz="1050" dirty="0"/>
           </a:p>
@@ -29407,7 +29407,7 @@
                 <a:ea typeface="微软雅黑" pitchFamily="34" charset="-122"/>
                 <a:cs typeface="微软雅黑" pitchFamily="34" charset="-120"/>
               </a:rPr>
-              <a:t>帮扶管理信息系统 v1.12.13</a:t>
+              <a:t>帮扶管理信息系统 v1.12.14</a:t>
             </a:r>
             <a:endParaRPr lang="en-US" sz="1050" dirty="0"/>
           </a:p>
@@ -30268,7 +30268,7 @@
                 <a:ea typeface="微软雅黑" pitchFamily="34" charset="-122"/>
                 <a:cs typeface="微软雅黑" pitchFamily="34" charset="-120"/>
               </a:rPr>
-              <a:t>帮扶管理信息系统 v1.12.13  ·  仓库：github.com/lzh745200/MRRS  ·  完整文档见 docs/ 目录</a:t>
+              <a:t>帮扶管理信息系统 v1.12.14  ·  仓库：github.com/lzh745200/MRRS  ·  完整文档见 docs/ 目录</a:t>
             </a:r>
             <a:endParaRPr lang="en-US" sz="1350" dirty="0"/>
           </a:p>
@@ -30309,7 +30309,7 @@
                 <a:ea typeface="微软雅黑" pitchFamily="34" charset="-122"/>
                 <a:cs typeface="微软雅黑" pitchFamily="34" charset="-120"/>
               </a:rPr>
-              <a:t>11,948 后端用例（覆盖率 100%）+ 6,304 前端用例 全绿守护 · Windows x64 / 麒麟 ARM64 双平台离线交付</a:t>
+              <a:t>12,005 后端用例（覆盖率 100%）+ 6,315 前端用例 全绿守护 · Windows x64 / 麒麟 ARM64 双平台离线交付</a:t>
             </a:r>
             <a:endParaRPr lang="en-US" sz="1350" dirty="0"/>
           </a:p>
@@ -30525,7 +30525,7 @@
                 <a:ea typeface="微软雅黑" pitchFamily="34" charset="-122"/>
                 <a:cs typeface="微软雅黑" pitchFamily="34" charset="-120"/>
               </a:rPr>
-              <a:t>帮扶管理信息系统 v1.12.13</a:t>
+              <a:t>帮扶管理信息系统 v1.12.14</a:t>
             </a:r>
             <a:endParaRPr lang="en-US" sz="1050" dirty="0"/>
           </a:p>
@@ -31265,7 +31265,7 @@
                 <a:ea typeface="微软雅黑" pitchFamily="34" charset="-122"/>
                 <a:cs typeface="微软雅黑" pitchFamily="34" charset="-120"/>
               </a:rPr>
-              <a:t>帮扶管理信息系统 v1.12.13</a:t>
+              <a:t>帮扶管理信息系统 v1.12.14</a:t>
             </a:r>
             <a:endParaRPr lang="en-US" sz="1050" dirty="0"/>
           </a:p>
@@ -31306,7 +31306,7 @@
                 <a:ea typeface="微软雅黑" pitchFamily="34" charset="-122"/>
                 <a:cs typeface="微软雅黑" pitchFamily="34" charset="-120"/>
               </a:rPr>
-              <a:t>11,948</a:t>
+              <a:t>12,005</a:t>
             </a:r>
             <a:endParaRPr lang="en-US" sz="4000" dirty="0"/>
           </a:p>
@@ -31388,7 +31388,7 @@
                 <a:ea typeface="微软雅黑" pitchFamily="34" charset="-122"/>
                 <a:cs typeface="微软雅黑" pitchFamily="34" charset="-120"/>
               </a:rPr>
-              <a:t>6,304</a:t>
+              <a:t>6,315</a:t>
             </a:r>
             <a:endParaRPr lang="en-US" sz="4000" dirty="0"/>
           </a:p>
@@ -31985,7 +31985,7 @@
                 <a:ea typeface="微软雅黑" pitchFamily="34" charset="-122"/>
                 <a:cs typeface="微软雅黑" pitchFamily="34" charset="-120"/>
               </a:rPr>
-              <a:t>数据来源：仓库实测（v1.12.13）—— 后端 11,948 用例全绿 / 覆盖率 100% · 前端 6,304 用例全绿 · flake8 0 · bandit 0 中高危 · vue-tsc 0 · eslint 0 警告</a:t>
+              <a:t>数据来源：仓库实测（v1.12.14）—— 后端 12,005 用例全绿 / 覆盖率 100% · 前端 6,315 用例全绿 · flake8 0 · bandit 0 中高危 · vue-tsc 0 · eslint 0 警告</a:t>
             </a:r>
             <a:endParaRPr lang="en-US" sz="1200" dirty="0"/>
           </a:p>
@@ -32505,7 +32505,7 @@
                 <a:ea typeface="微软雅黑" pitchFamily="34" charset="-122"/>
                 <a:cs typeface="微软雅黑" pitchFamily="34" charset="-120"/>
               </a:rPr>
-              <a:t>帮扶管理信息系统 v1.12.13</a:t>
+              <a:t>帮扶管理信息系统 v1.12.14</a:t>
             </a:r>
             <a:endParaRPr lang="en-US" sz="1050" dirty="0"/>
           </a:p>
@@ -33597,7 +33597,7 @@
                 <a:ea typeface="微软雅黑" pitchFamily="34" charset="-122"/>
                 <a:cs typeface="微软雅黑" pitchFamily="34" charset="-120"/>
               </a:rPr>
-              <a:t>帮扶管理信息系统 v1.12.13</a:t>
+              <a:t>帮扶管理信息系统 v1.12.14</a:t>
             </a:r>
             <a:endParaRPr lang="en-US" sz="1050" dirty="0"/>
           </a:p>

--- a/帮扶管理信息系统介绍.pptx
+++ b/帮扶管理信息系统介绍.pptx
@@ -252,7 +252,7 @@
                   <c:v>12005</c:v>
                 </c:pt>
                 <c:pt idx="1">
-                  <c:v>6315</c:v>
+                  <c:v>6330</c:v>
                 </c:pt>
               </c:numCache>
             </c:numRef>
@@ -5358,7 +5358,7 @@
                 <a:ea typeface="微软雅黑" pitchFamily="34" charset="-122"/>
                 <a:cs typeface="微软雅黑" pitchFamily="34" charset="-120"/>
               </a:rPr>
-              <a:t>302 个测试文件 · 6,315 个用例</a:t>
+              <a:t>302 个测试文件 · 6,330 个用例</a:t>
             </a:r>
             <a:endParaRPr lang="en-US" sz="1350" dirty="0"/>
           </a:p>
@@ -14144,7 +14144,7 @@
                 <a:ea typeface="微软雅黑" pitchFamily="34" charset="-122"/>
                 <a:cs typeface="微软雅黑" pitchFamily="34" charset="-120"/>
               </a:rPr>
-              <a:t>18,320 项自动化测试 · CI/CD · 依赖自检</a:t>
+              <a:t>18,335 项自动化测试 · CI/CD · 依赖自检</a:t>
             </a:r>
             <a:endParaRPr lang="en-US" sz="1200" dirty="0"/>
           </a:p>
@@ -23013,7 +23013,7 @@
                 <a:ea typeface="微软雅黑" pitchFamily="34" charset="-122"/>
                 <a:cs typeface="微软雅黑" pitchFamily="34" charset="-120"/>
               </a:rPr>
-              <a:t>18,320 项自动化测试（后端 12,005 + 前端 6,315）</a:t>
+              <a:t>18,335 项自动化测试（后端 12,005 + 前端 6,330）</a:t>
             </a:r>
             <a:endParaRPr lang="en-US" sz="1400" dirty="0"/>
           </a:p>
@@ -23432,7 +23432,7 @@
                 <a:ea typeface="微软雅黑" pitchFamily="34" charset="-122"/>
                 <a:cs typeface="微软雅黑" pitchFamily="34" charset="-120"/>
               </a:rPr>
-              <a:t>数据来源：v1.12.14 仓库实测 · 后端 12,005 / 前端 6,315 用例 · 覆盖率 100%</a:t>
+              <a:t>数据来源：v1.12.14 仓库实测 · 后端 12,005 / 前端 6,330 用例 · 覆盖率 100%</a:t>
             </a:r>
             <a:endParaRPr lang="en-US" sz="1100" dirty="0"/>
           </a:p>
@@ -28628,7 +28628,7 @@
                 <a:ea typeface="微软雅黑" pitchFamily="34" charset="-122"/>
                 <a:cs typeface="微软雅黑" pitchFamily="34" charset="-120"/>
               </a:rPr>
-              <a:t>净效果：12,005 后端用例（覆盖率 100%）+ 6,315 前端用例全绿；Windows x64 与麒麟 ARM64 两个离线安装包由 GitHub Actions 全自动构建并发布 Release</a:t>
+              <a:t>净效果：12,005 后端用例（覆盖率 100%）+ 6,330 前端用例全绿；Windows x64 与麒麟 ARM64 两个离线安装包由 GitHub Actions 全自动构建并发布 Release</a:t>
             </a:r>
             <a:endParaRPr lang="en-US" sz="1350" dirty="0"/>
           </a:p>
@@ -30309,7 +30309,7 @@
                 <a:ea typeface="微软雅黑" pitchFamily="34" charset="-122"/>
                 <a:cs typeface="微软雅黑" pitchFamily="34" charset="-120"/>
               </a:rPr>
-              <a:t>12,005 后端用例（覆盖率 100%）+ 6,315 前端用例 全绿守护 · Windows x64 / 麒麟 ARM64 双平台离线交付</a:t>
+              <a:t>12,005 后端用例（覆盖率 100%）+ 6,330 前端用例 全绿守护 · Windows x64 / 麒麟 ARM64 双平台离线交付</a:t>
             </a:r>
             <a:endParaRPr lang="en-US" sz="1350" dirty="0"/>
           </a:p>
@@ -31388,7 +31388,7 @@
                 <a:ea typeface="微软雅黑" pitchFamily="34" charset="-122"/>
                 <a:cs typeface="微软雅黑" pitchFamily="34" charset="-120"/>
               </a:rPr>
-              <a:t>6,315</a:t>
+              <a:t>6,330</a:t>
             </a:r>
             <a:endParaRPr lang="en-US" sz="4000" dirty="0"/>
           </a:p>
@@ -31985,7 +31985,7 @@
                 <a:ea typeface="微软雅黑" pitchFamily="34" charset="-122"/>
                 <a:cs typeface="微软雅黑" pitchFamily="34" charset="-120"/>
               </a:rPr>
-              <a:t>数据来源：仓库实测（v1.12.14）—— 后端 12,005 用例全绿 / 覆盖率 100% · 前端 6,315 用例全绿 · flake8 0 · bandit 0 中高危 · vue-tsc 0 · eslint 0 警告</a:t>
+              <a:t>数据来源：仓库实测（v1.12.14）—— 后端 12,005 用例全绿 / 覆盖率 100% · 前端 6,330 用例全绿 · flake8 0 · bandit 0 中高危 · vue-tsc 0 · eslint 0 警告</a:t>
             </a:r>
             <a:endParaRPr lang="en-US" sz="1200" dirty="0"/>
           </a:p>

--- a/帮扶管理信息系统介绍.pptx
+++ b/帮扶管理信息系统介绍.pptx
@@ -249,10 +249,10 @@
                 <c:formatCode>General</c:formatCode>
                 <c:ptCount val="2"/>
                 <c:pt idx="0">
-                  <c:v>12005</c:v>
+                  <c:v>12381</c:v>
                 </c:pt>
                 <c:pt idx="1">
-                  <c:v>6330</c:v>
+                  <c:v>6323</c:v>
                 </c:pt>
               </c:numCache>
             </c:numRef>
@@ -5358,7 +5358,7 @@
                 <a:ea typeface="微软雅黑" pitchFamily="34" charset="-122"/>
                 <a:cs typeface="微软雅黑" pitchFamily="34" charset="-120"/>
               </a:rPr>
-              <a:t>302 个测试文件 · 6,330 个用例</a:t>
+              <a:t>299 个测试文件 · 6,323 个用例</a:t>
             </a:r>
             <a:endParaRPr lang="en-US" sz="1350" dirty="0"/>
           </a:p>
@@ -5379,7 +5379,7 @@
                 <a:ea typeface="微软雅黑" pitchFamily="34" charset="-122"/>
                 <a:cs typeface="微软雅黑" pitchFamily="34" charset="-120"/>
               </a:rPr>
-              <a:t>覆盖率门禁 + lint --max-warnings=0 + vue-tsc 三重 CI 门禁</a:t>
+              <a:t>覆盖率门禁（行 + 分支 100%）+ lint --max-warnings=0 + vue-tsc 三重 CI 门禁</a:t>
             </a:r>
             <a:endParaRPr lang="en-US" sz="1350" dirty="0"/>
           </a:p>
@@ -14144,7 +14144,7 @@
                 <a:ea typeface="微软雅黑" pitchFamily="34" charset="-122"/>
                 <a:cs typeface="微软雅黑" pitchFamily="34" charset="-120"/>
               </a:rPr>
-              <a:t>18,335 项自动化测试 · CI/CD · 依赖自检</a:t>
+              <a:t>18,704 项自动化测试 · CI/CD · 依赖自检</a:t>
             </a:r>
             <a:endParaRPr lang="en-US" sz="1200" dirty="0"/>
           </a:p>
@@ -23013,7 +23013,7 @@
                 <a:ea typeface="微软雅黑" pitchFamily="34" charset="-122"/>
                 <a:cs typeface="微软雅黑" pitchFamily="34" charset="-120"/>
               </a:rPr>
-              <a:t>18,335 项自动化测试（后端 12,005 + 前端 6,330）</a:t>
+              <a:t>18,704 项自动化测试（后端 12,381 + 前端 6,323）</a:t>
             </a:r>
             <a:endParaRPr lang="en-US" sz="1400" dirty="0"/>
           </a:p>
@@ -23432,7 +23432,7 @@
                 <a:ea typeface="微软雅黑" pitchFamily="34" charset="-122"/>
                 <a:cs typeface="微软雅黑" pitchFamily="34" charset="-120"/>
               </a:rPr>
-              <a:t>数据来源：v1.12.14 仓库实测 · 后端 12,005 / 前端 6,330 用例 · 覆盖率 100%</a:t>
+              <a:t>数据来源：2026-10-07 仓库实测（v1.12.14）· 后端 12,381 / 前端 6,323 用例 · 行+分支覆盖率 100%（branch=True 严格门禁 + 棘轮）</a:t>
             </a:r>
             <a:endParaRPr lang="en-US" sz="1100" dirty="0"/>
           </a:p>
@@ -28628,7 +28628,7 @@
                 <a:ea typeface="微软雅黑" pitchFamily="34" charset="-122"/>
                 <a:cs typeface="微软雅黑" pitchFamily="34" charset="-120"/>
               </a:rPr>
-              <a:t>净效果：12,005 后端用例（覆盖率 100%）+ 6,330 前端用例全绿；Windows x64 与麒麟 ARM64 两个离线安装包由 GitHub Actions 全自动构建并发布 Release</a:t>
+              <a:t>净效果：12,381 后端用例（行+分支覆盖率 100%）+ 6,323 前端用例全绿；Windows x64 与麒麟 ARM64 两个离线安装包由 GitHub Actions 全自动构建并发布 Release</a:t>
             </a:r>
             <a:endParaRPr lang="en-US" sz="1350" dirty="0"/>
           </a:p>
@@ -30309,7 +30309,7 @@
                 <a:ea typeface="微软雅黑" pitchFamily="34" charset="-122"/>
                 <a:cs typeface="微软雅黑" pitchFamily="34" charset="-120"/>
               </a:rPr>
-              <a:t>12,005 后端用例（覆盖率 100%）+ 6,330 前端用例 全绿守护 · Windows x64 / 麒麟 ARM64 双平台离线交付</a:t>
+              <a:t>12,381 后端用例（行+分支覆盖率 100%）+ 6,323 前端用例 全绿守护 · Windows x64 / 麒麟 ARM64 双平台离线交付</a:t>
             </a:r>
             <a:endParaRPr lang="en-US" sz="1350" dirty="0"/>
           </a:p>
@@ -31306,7 +31306,7 @@
                 <a:ea typeface="微软雅黑" pitchFamily="34" charset="-122"/>
                 <a:cs typeface="微软雅黑" pitchFamily="34" charset="-120"/>
               </a:rPr>
-              <a:t>12,005</a:t>
+              <a:t>12,381</a:t>
             </a:r>
             <a:endParaRPr lang="en-US" sz="4000" dirty="0"/>
           </a:p>
@@ -31388,7 +31388,7 @@
                 <a:ea typeface="微软雅黑" pitchFamily="34" charset="-122"/>
                 <a:cs typeface="微软雅黑" pitchFamily="34" charset="-120"/>
               </a:rPr>
-              <a:t>6,330</a:t>
+              <a:t>6,323</a:t>
             </a:r>
             <a:endParaRPr lang="en-US" sz="4000" dirty="0"/>
           </a:p>
@@ -31985,7 +31985,7 @@
                 <a:ea typeface="微软雅黑" pitchFamily="34" charset="-122"/>
                 <a:cs typeface="微软雅黑" pitchFamily="34" charset="-120"/>
               </a:rPr>
-              <a:t>数据来源：仓库实测（v1.12.14）—— 后端 12,005 用例全绿 / 覆盖率 100% · 前端 6,330 用例全绿 · flake8 0 · bandit 0 中高危 · vue-tsc 0 · eslint 0 警告</a:t>
+              <a:t>数据来源：2026-10-07 仓库实测（v1.12.14）—— 后端 12,381 用例全绿 / 行+分支覆盖率 100%（branch=True 严格门禁）· 前端 6,323 用例全绿 · flake8 0 · bandit 0 中高危 · vue-tsc 0 · eslint 0 警告</a:t>
             </a:r>
             <a:endParaRPr lang="en-US" sz="1200" dirty="0"/>
           </a:p>

--- a/帮扶管理信息系统介绍.pptx
+++ b/帮扶管理信息系统介绍.pptx
@@ -14144,7 +14144,7 @@
                 <a:ea typeface="微软雅黑" pitchFamily="34" charset="-122"/>
                 <a:cs typeface="微软雅黑" pitchFamily="34" charset="-120"/>
               </a:rPr>
-              <a:t>18,704 项自动化测试 · CI/CD · 依赖自检</a:t>
+              <a:t>18,717 项自动化测试 · CI/CD · 依赖自检</a:t>
             </a:r>
             <a:endParaRPr lang="en-US" sz="1200" dirty="0"/>
           </a:p>
@@ -31306,7 +31306,7 @@
                 <a:ea typeface="微软雅黑" pitchFamily="34" charset="-122"/>
                 <a:cs typeface="微软雅黑" pitchFamily="34" charset="-120"/>
               </a:rPr>
-              <a:t>12,381</a:t>
+              <a:t>12,395</a:t>
             </a:r>
             <a:endParaRPr lang="en-US" sz="4000" dirty="0"/>
           </a:p>
@@ -31985,7 +31985,7 @@
                 <a:ea typeface="微软雅黑" pitchFamily="34" charset="-122"/>
                 <a:cs typeface="微软雅黑" pitchFamily="34" charset="-120"/>
               </a:rPr>
-              <a:t>数据来源：2026-10-07 仓库实测（v1.12.14）—— 后端 12,381 用例全绿 / 行+分支覆盖率 100%（branch=True 严格门禁）· 前端 6,323 用例全绿 · flake8 0 · bandit 0 中高危 · vue-tsc 0 · eslint 0 警告</a:t>
+              <a:t>数据来源：2026-10-08 仓库实测（v1.12.15）—— 后端 12,395 用例全绿 / 行+分支覆盖率 100%（branch=True 严格门禁）· 前端 6,323 用例全绿 · flake8 0 · bandit 0 中高危 · vue-tsc 0 · eslint 0 警告</a:t>
             </a:r>
             <a:endParaRPr lang="en-US" sz="1200" dirty="0"/>
           </a:p>

--- a/帮扶管理信息系统介绍.pptx
+++ b/帮扶管理信息系统介绍.pptx
@@ -4964,7 +4964,7 @@
                 <a:ea typeface="微软雅黑" pitchFamily="34" charset="-122"/>
                 <a:cs typeface="微软雅黑" pitchFamily="34" charset="-120"/>
               </a:rPr>
-              <a:t>V1.12.14  |  2026-10-06  |  FastAPI + Vue 3 + Electron + SQLite</a:t>
+              <a:t>V1.12.15  |  2026-10-08  |  FastAPI + Vue 3 + Electron + SQLite</a:t>
             </a:r>
             <a:endParaRPr lang="en-US" sz="1250" dirty="0"/>
           </a:p>
@@ -5180,7 +5180,7 @@
                 <a:ea typeface="微软雅黑" pitchFamily="34" charset="-122"/>
                 <a:cs typeface="微软雅黑" pitchFamily="34" charset="-120"/>
               </a:rPr>
-              <a:t>帮扶管理信息系统 v1.12.14</a:t>
+              <a:t>帮扶管理信息系统 v1.12.15</a:t>
             </a:r>
             <a:endParaRPr lang="en-US" sz="1050" dirty="0"/>
           </a:p>
@@ -5794,7 +5794,7 @@
                 <a:ea typeface="微软雅黑" pitchFamily="34" charset="-122"/>
                 <a:cs typeface="微软雅黑" pitchFamily="34" charset="-120"/>
               </a:rPr>
-              <a:t>帮扶管理信息系统 v1.12.14</a:t>
+              <a:t>帮扶管理信息系统 v1.12.15</a:t>
             </a:r>
             <a:endParaRPr lang="en-US" sz="1050" dirty="0"/>
           </a:p>
@@ -6698,7 +6698,7 @@
                 <a:ea typeface="微软雅黑" pitchFamily="34" charset="-122"/>
                 <a:cs typeface="微软雅黑" pitchFamily="34" charset="-120"/>
               </a:rPr>
-              <a:t>帮扶管理信息系统 v1.12.14</a:t>
+              <a:t>帮扶管理信息系统 v1.12.15</a:t>
             </a:r>
             <a:endParaRPr lang="en-US" sz="1050" dirty="0"/>
           </a:p>
@@ -7312,7 +7312,7 @@
                 <a:ea typeface="微软雅黑" pitchFamily="34" charset="-122"/>
                 <a:cs typeface="微软雅黑" pitchFamily="34" charset="-120"/>
               </a:rPr>
-              <a:t>帮扶管理信息系统 v1.12.14</a:t>
+              <a:t>帮扶管理信息系统 v1.12.15</a:t>
             </a:r>
             <a:endParaRPr lang="en-US" sz="1050" dirty="0"/>
           </a:p>
@@ -8685,7 +8685,7 @@
                 <a:ea typeface="微软雅黑" pitchFamily="34" charset="-122"/>
                 <a:cs typeface="微软雅黑" pitchFamily="34" charset="-120"/>
               </a:rPr>
-              <a:t>帮扶管理信息系统 v1.12.14</a:t>
+              <a:t>帮扶管理信息系统 v1.12.15</a:t>
             </a:r>
             <a:endParaRPr lang="en-US" sz="1050" dirty="0"/>
           </a:p>
@@ -9854,7 +9854,7 @@
                 <a:ea typeface="微软雅黑" pitchFamily="34" charset="-122"/>
                 <a:cs typeface="微软雅黑" pitchFamily="34" charset="-120"/>
               </a:rPr>
-              <a:t>帮扶管理信息系统 v1.12.14</a:t>
+              <a:t>帮扶管理信息系统 v1.12.15</a:t>
             </a:r>
             <a:endParaRPr lang="en-US" sz="1050" dirty="0"/>
           </a:p>
@@ -10468,7 +10468,7 @@
                 <a:ea typeface="微软雅黑" pitchFamily="34" charset="-122"/>
                 <a:cs typeface="微软雅黑" pitchFamily="34" charset="-120"/>
               </a:rPr>
-              <a:t>帮扶管理信息系统 v1.12.14</a:t>
+              <a:t>帮扶管理信息系统 v1.12.15</a:t>
             </a:r>
             <a:endParaRPr lang="en-US" sz="1050" dirty="0"/>
           </a:p>
@@ -11296,7 +11296,7 @@
                 <a:ea typeface="微软雅黑" pitchFamily="34" charset="-122"/>
                 <a:cs typeface="微软雅黑" pitchFamily="34" charset="-120"/>
               </a:rPr>
-              <a:t>帮扶管理信息系统 v1.12.14</a:t>
+              <a:t>帮扶管理信息系统 v1.12.15</a:t>
             </a:r>
             <a:endParaRPr lang="en-US" sz="1050" dirty="0"/>
           </a:p>
@@ -12007,7 +12007,7 @@
                 <a:ea typeface="微软雅黑" pitchFamily="34" charset="-122"/>
                 <a:cs typeface="微软雅黑" pitchFamily="34" charset="-120"/>
               </a:rPr>
-              <a:t>帮扶管理信息系统 v1.12.14</a:t>
+              <a:t>帮扶管理信息系统 v1.12.15</a:t>
             </a:r>
             <a:endParaRPr lang="en-US" sz="1050" dirty="0"/>
           </a:p>
@@ -14144,7 +14144,7 @@
                 <a:ea typeface="微软雅黑" pitchFamily="34" charset="-122"/>
                 <a:cs typeface="微软雅黑" pitchFamily="34" charset="-120"/>
               </a:rPr>
-              <a:t>18,717 项自动化测试 · CI/CD · 依赖自检</a:t>
+              <a:t>18,745 项自动化测试 · CI/CD · 依赖自检</a:t>
             </a:r>
             <a:endParaRPr lang="en-US" sz="1200" dirty="0"/>
           </a:p>
@@ -14505,7 +14505,7 @@
                 <a:ea typeface="微软雅黑" pitchFamily="34" charset="-122"/>
                 <a:cs typeface="微软雅黑" pitchFamily="34" charset="-120"/>
               </a:rPr>
-              <a:t>帮扶管理信息系统 v1.12.14</a:t>
+              <a:t>帮扶管理信息系统 v1.12.15</a:t>
             </a:r>
             <a:endParaRPr lang="en-US" sz="1050" dirty="0"/>
           </a:p>
@@ -15119,7 +15119,7 @@
                 <a:ea typeface="微软雅黑" pitchFamily="34" charset="-122"/>
                 <a:cs typeface="微软雅黑" pitchFamily="34" charset="-120"/>
               </a:rPr>
-              <a:t>帮扶管理信息系统 v1.12.14</a:t>
+              <a:t>帮扶管理信息系统 v1.12.15</a:t>
             </a:r>
             <a:endParaRPr lang="en-US" sz="1050" dirty="0"/>
           </a:p>
@@ -15790,7 +15790,7 @@
                 <a:ea typeface="微软雅黑" pitchFamily="34" charset="-122"/>
                 <a:cs typeface="微软雅黑" pitchFamily="34" charset="-120"/>
               </a:rPr>
-              <a:t>帮扶管理信息系统 v1.12.14</a:t>
+              <a:t>帮扶管理信息系统 v1.12.15</a:t>
             </a:r>
             <a:endParaRPr lang="en-US" sz="1050" dirty="0"/>
           </a:p>
@@ -16473,7 +16473,7 @@
                 <a:ea typeface="微软雅黑" pitchFamily="34" charset="-122"/>
                 <a:cs typeface="微软雅黑" pitchFamily="34" charset="-120"/>
               </a:rPr>
-              <a:t>帮扶管理信息系统 v1.12.14</a:t>
+              <a:t>帮扶管理信息系统 v1.12.15</a:t>
             </a:r>
             <a:endParaRPr lang="en-US" sz="1050" dirty="0"/>
           </a:p>
@@ -17355,7 +17355,7 @@
                 <a:ea typeface="微软雅黑" pitchFamily="34" charset="-122"/>
                 <a:cs typeface="微软雅黑" pitchFamily="34" charset="-120"/>
               </a:rPr>
-              <a:t>帮扶管理信息系统 v1.12.14</a:t>
+              <a:t>帮扶管理信息系统 v1.12.15</a:t>
             </a:r>
             <a:endParaRPr lang="en-US" sz="1050" dirty="0"/>
           </a:p>
@@ -18541,7 +18541,7 @@
                 <a:ea typeface="微软雅黑" pitchFamily="34" charset="-122"/>
                 <a:cs typeface="微软雅黑" pitchFamily="34" charset="-120"/>
               </a:rPr>
-              <a:t>帮扶管理信息系统 v1.12.14</a:t>
+              <a:t>帮扶管理信息系统 v1.12.15</a:t>
             </a:r>
             <a:endParaRPr lang="en-US" sz="1050" dirty="0"/>
           </a:p>
@@ -19540,7 +19540,7 @@
                 <a:ea typeface="微软雅黑" pitchFamily="34" charset="-122"/>
                 <a:cs typeface="微软雅黑" pitchFamily="34" charset="-120"/>
               </a:rPr>
-              <a:t>帮扶管理信息系统 v1.12.14</a:t>
+              <a:t>帮扶管理信息系统 v1.12.15</a:t>
             </a:r>
             <a:endParaRPr lang="en-US" sz="1050" dirty="0"/>
           </a:p>
@@ -20369,7 +20369,7 @@
                 <a:ea typeface="微软雅黑" pitchFamily="34" charset="-122"/>
                 <a:cs typeface="微软雅黑" pitchFamily="34" charset="-120"/>
               </a:rPr>
-              <a:t>帮扶管理信息系统 v1.12.14</a:t>
+              <a:t>帮扶管理信息系统 v1.12.15</a:t>
             </a:r>
             <a:endParaRPr lang="en-US" sz="1050" dirty="0"/>
           </a:p>
@@ -21247,7 +21247,7 @@
                 <a:ea typeface="微软雅黑" pitchFamily="34" charset="-122"/>
                 <a:cs typeface="微软雅黑" pitchFamily="34" charset="-120"/>
               </a:rPr>
-              <a:t>帮扶管理信息系统 v1.12.14</a:t>
+              <a:t>帮扶管理信息系统 v1.12.15</a:t>
             </a:r>
             <a:endParaRPr lang="en-US" sz="1050" dirty="0"/>
           </a:p>
@@ -22379,7 +22379,7 @@
                 <a:ea typeface="微软雅黑" pitchFamily="34" charset="-122"/>
                 <a:cs typeface="微软雅黑" pitchFamily="34" charset="-120"/>
               </a:rPr>
-              <a:t>帮扶管理信息系统 v1.12.14</a:t>
+              <a:t>帮扶管理信息系统 v1.12.15</a:t>
             </a:r>
             <a:endParaRPr lang="en-US" sz="1050" dirty="0"/>
           </a:p>
@@ -23013,7 +23013,7 @@
                 <a:ea typeface="微软雅黑" pitchFamily="34" charset="-122"/>
                 <a:cs typeface="微软雅黑" pitchFamily="34" charset="-120"/>
               </a:rPr>
-              <a:t>18,704 项自动化测试（后端 12,381 + 前端 6,323）</a:t>
+              <a:t>18,745 项自动化测试（后端 12,422 + 前端 6,323）</a:t>
             </a:r>
             <a:endParaRPr lang="en-US" sz="1400" dirty="0"/>
           </a:p>
@@ -23375,7 +23375,7 @@
                 <a:ea typeface="微软雅黑" pitchFamily="34" charset="-122"/>
                 <a:cs typeface="微软雅黑" pitchFamily="34" charset="-120"/>
               </a:rPr>
-              <a:t>帮扶管理信息系统 v1.12.14</a:t>
+              <a:t>帮扶管理信息系统 v1.12.15</a:t>
             </a:r>
             <a:endParaRPr lang="en-US" sz="1050" dirty="0"/>
           </a:p>
@@ -23424,7 +23424,7 @@
               <a:buNone/>
             </a:pPr>
             <a:r>
-              <a:rPr lang="en-US" sz="1100" dirty="0">
+              <a:rPr lang="en-US" sz="1050" dirty="0">
                 <a:solidFill>
                   <a:srgbClr val="5F6F66"/>
                 </a:solidFill>
@@ -23432,9 +23432,9 @@
                 <a:ea typeface="微软雅黑" pitchFamily="34" charset="-122"/>
                 <a:cs typeface="微软雅黑" pitchFamily="34" charset="-120"/>
               </a:rPr>
-              <a:t>数据来源：2026-10-07 仓库实测（v1.12.14）· 后端 12,381 / 前端 6,323 用例 · 行+分支覆盖率 100%（branch=True 严格门禁 + 棘轮）</a:t>
-            </a:r>
-            <a:endParaRPr lang="en-US" sz="1100" dirty="0"/>
+              <a:t>数据来源：2026-10-08 实测（v1.12.15）· 后端 12,422 / 前端 6,323 用例 · 覆盖率 100%（行+分支）</a:t>
+            </a:r>
+            <a:endParaRPr lang="en-US" sz="1050" dirty="0"/>
           </a:p>
         </p:txBody>
       </p:sp>
@@ -23889,7 +23889,7 @@
                 <a:ea typeface="微软雅黑" pitchFamily="34" charset="-122"/>
                 <a:cs typeface="微软雅黑" pitchFamily="34" charset="-120"/>
               </a:rPr>
-              <a:t>帮扶管理信息系统 v1.12.14</a:t>
+              <a:t>帮扶管理信息系统 v1.12.15</a:t>
             </a:r>
             <a:endParaRPr lang="en-US" sz="1050" dirty="0"/>
           </a:p>
@@ -24562,7 +24562,7 @@
                 <a:ea typeface="微软雅黑" pitchFamily="34" charset="-122"/>
                 <a:cs typeface="微软雅黑" pitchFamily="34" charset="-120"/>
               </a:rPr>
-              <a:t>帮扶管理信息系统 v1.12.14</a:t>
+              <a:t>帮扶管理信息系统 v1.12.15</a:t>
             </a:r>
             <a:endParaRPr lang="en-US" sz="1050" dirty="0"/>
           </a:p>
@@ -25176,7 +25176,7 @@
                 <a:ea typeface="微软雅黑" pitchFamily="34" charset="-122"/>
                 <a:cs typeface="微软雅黑" pitchFamily="34" charset="-120"/>
               </a:rPr>
-              <a:t>帮扶管理信息系统 v1.12.14</a:t>
+              <a:t>帮扶管理信息系统 v1.12.15</a:t>
             </a:r>
             <a:endParaRPr lang="en-US" sz="1050" dirty="0"/>
           </a:p>
@@ -26115,7 +26115,7 @@
                 <a:ea typeface="微软雅黑" pitchFamily="34" charset="-122"/>
                 <a:cs typeface="微软雅黑" pitchFamily="34" charset="-120"/>
               </a:rPr>
-              <a:t>帮扶管理信息系统 v1.12.14</a:t>
+              <a:t>帮扶管理信息系统 v1.12.15</a:t>
             </a:r>
             <a:endParaRPr lang="en-US" sz="1050" dirty="0"/>
           </a:p>
@@ -27185,7 +27185,7 @@
                 <a:ea typeface="微软雅黑" pitchFamily="34" charset="-122"/>
                 <a:cs typeface="微软雅黑" pitchFamily="34" charset="-120"/>
               </a:rPr>
-              <a:t>帮扶管理信息系统 v1.12.14</a:t>
+              <a:t>帮扶管理信息系统 v1.12.15</a:t>
             </a:r>
             <a:endParaRPr lang="en-US" sz="1050" dirty="0"/>
           </a:p>
@@ -27820,7 +27820,7 @@
                 <a:ea typeface="微软雅黑" pitchFamily="34" charset="-122"/>
                 <a:cs typeface="微软雅黑" pitchFamily="34" charset="-120"/>
               </a:rPr>
-              <a:t>帮扶管理信息系统 v1.12.14</a:t>
+              <a:t>帮扶管理信息系统 v1.12.15</a:t>
             </a:r>
             <a:endParaRPr lang="en-US" sz="1050" dirty="0"/>
           </a:p>
@@ -28628,7 +28628,7 @@
                 <a:ea typeface="微软雅黑" pitchFamily="34" charset="-122"/>
                 <a:cs typeface="微软雅黑" pitchFamily="34" charset="-120"/>
               </a:rPr>
-              <a:t>净效果：12,381 后端用例（行+分支覆盖率 100%）+ 6,323 前端用例全绿；Windows x64 与麒麟 ARM64 两个离线安装包由 GitHub Actions 全自动构建并发布 Release</a:t>
+              <a:t>净效果：12,422 后端用例（行+分支覆盖率 100%）+ 6,323 前端用例全绿；Windows x64 与麒麟 ARM64 两个离线安装包由 GitHub Actions 全自动构建并发布 Release</a:t>
             </a:r>
             <a:endParaRPr lang="en-US" sz="1350" dirty="0"/>
           </a:p>
@@ -28844,7 +28844,7 @@
                 <a:ea typeface="微软雅黑" pitchFamily="34" charset="-122"/>
                 <a:cs typeface="微软雅黑" pitchFamily="34" charset="-120"/>
               </a:rPr>
-              <a:t>帮扶管理信息系统 v1.12.14</a:t>
+              <a:t>帮扶管理信息系统 v1.12.15</a:t>
             </a:r>
             <a:endParaRPr lang="en-US" sz="1050" dirty="0"/>
           </a:p>
@@ -29407,7 +29407,7 @@
                 <a:ea typeface="微软雅黑" pitchFamily="34" charset="-122"/>
                 <a:cs typeface="微软雅黑" pitchFamily="34" charset="-120"/>
               </a:rPr>
-              <a:t>帮扶管理信息系统 v1.12.14</a:t>
+              <a:t>帮扶管理信息系统 v1.12.15</a:t>
             </a:r>
             <a:endParaRPr lang="en-US" sz="1050" dirty="0"/>
           </a:p>
@@ -30268,7 +30268,7 @@
                 <a:ea typeface="微软雅黑" pitchFamily="34" charset="-122"/>
                 <a:cs typeface="微软雅黑" pitchFamily="34" charset="-120"/>
               </a:rPr>
-              <a:t>帮扶管理信息系统 v1.12.14  ·  仓库：github.com/lzh745200/MRRS  ·  完整文档见 docs/ 目录</a:t>
+              <a:t>帮扶管理信息系统 v1.12.15  ·  仓库：github.com/lzh745200/MRRS  ·  完整文档见 docs/ 目录</a:t>
             </a:r>
             <a:endParaRPr lang="en-US" sz="1350" dirty="0"/>
           </a:p>
@@ -30309,7 +30309,7 @@
                 <a:ea typeface="微软雅黑" pitchFamily="34" charset="-122"/>
                 <a:cs typeface="微软雅黑" pitchFamily="34" charset="-120"/>
               </a:rPr>
-              <a:t>12,381 后端用例（行+分支覆盖率 100%）+ 6,323 前端用例 全绿守护 · Windows x64 / 麒麟 ARM64 双平台离线交付</a:t>
+              <a:t>12,422 后端用例（行+分支覆盖率 100%）+ 6,323 前端用例 全绿守护 · Windows x64 / 麒麟 ARM64 双平台离线交付</a:t>
             </a:r>
             <a:endParaRPr lang="en-US" sz="1350" dirty="0"/>
           </a:p>
@@ -30525,7 +30525,7 @@
                 <a:ea typeface="微软雅黑" pitchFamily="34" charset="-122"/>
                 <a:cs typeface="微软雅黑" pitchFamily="34" charset="-120"/>
               </a:rPr>
-              <a:t>帮扶管理信息系统 v1.12.14</a:t>
+              <a:t>帮扶管理信息系统 v1.12.15</a:t>
             </a:r>
             <a:endParaRPr lang="en-US" sz="1050" dirty="0"/>
           </a:p>
@@ -31265,7 +31265,7 @@
                 <a:ea typeface="微软雅黑" pitchFamily="34" charset="-122"/>
                 <a:cs typeface="微软雅黑" pitchFamily="34" charset="-120"/>
               </a:rPr>
-              <a:t>帮扶管理信息系统 v1.12.14</a:t>
+              <a:t>帮扶管理信息系统 v1.12.15</a:t>
             </a:r>
             <a:endParaRPr lang="en-US" sz="1050" dirty="0"/>
           </a:p>
@@ -31306,7 +31306,7 @@
                 <a:ea typeface="微软雅黑" pitchFamily="34" charset="-122"/>
                 <a:cs typeface="微软雅黑" pitchFamily="34" charset="-120"/>
               </a:rPr>
-              <a:t>12,395</a:t>
+              <a:t>12,422</a:t>
             </a:r>
             <a:endParaRPr lang="en-US" sz="4000" dirty="0"/>
           </a:p>
@@ -31977,7 +31977,7 @@
               <a:buNone/>
             </a:pPr>
             <a:r>
-              <a:rPr lang="en-US" sz="1200" dirty="0">
+              <a:rPr lang="en-US" sz="1000" dirty="0">
                 <a:solidFill>
                   <a:srgbClr val="5F6F66"/>
                 </a:solidFill>
@@ -31985,9 +31985,9 @@
                 <a:ea typeface="微软雅黑" pitchFamily="34" charset="-122"/>
                 <a:cs typeface="微软雅黑" pitchFamily="34" charset="-120"/>
               </a:rPr>
-              <a:t>数据来源：2026-10-08 仓库实测（v1.12.15）—— 后端 12,395 用例全绿 / 行+分支覆盖率 100%（branch=True 严格门禁）· 前端 6,323 用例全绿 · flake8 0 · bandit 0 中高危 · vue-tsc 0 · eslint 0 警告</a:t>
-            </a:r>
-            <a:endParaRPr lang="en-US" sz="1200" dirty="0"/>
+              <a:t>数据来源：2026-10-08 仓库实测（v1.12.15）—— 后端 12,422 用例全绿 / 行+分支覆盖率 100%（branch=True 严格门禁）· 前端 6,323 用例全绿 · flake8 0 · bandit 0 中高危 · vue-tsc 0 · eslint 0 警告</a:t>
+            </a:r>
+            <a:endParaRPr lang="en-US" sz="1000" dirty="0"/>
           </a:p>
         </p:txBody>
       </p:sp>
@@ -32505,7 +32505,7 @@
                 <a:ea typeface="微软雅黑" pitchFamily="34" charset="-122"/>
                 <a:cs typeface="微软雅黑" pitchFamily="34" charset="-120"/>
               </a:rPr>
-              <a:t>帮扶管理信息系统 v1.12.14</a:t>
+              <a:t>帮扶管理信息系统 v1.12.15</a:t>
             </a:r>
             <a:endParaRPr lang="en-US" sz="1050" dirty="0"/>
           </a:p>
@@ -33597,7 +33597,7 @@
                 <a:ea typeface="微软雅黑" pitchFamily="34" charset="-122"/>
                 <a:cs typeface="微软雅黑" pitchFamily="34" charset="-120"/>
               </a:rPr>
-              <a:t>帮扶管理信息系统 v1.12.14</a:t>
+              <a:t>帮扶管理信息系统 v1.12.15</a:t>
             </a:r>
             <a:endParaRPr lang="en-US" sz="1050" dirty="0"/>
           </a:p>

--- a/帮扶管理信息系统介绍.pptx
+++ b/帮扶管理信息系统介绍.pptx
@@ -4701,6 +4701,10 @@
           </a:solidFill>
           <a:ln/>
         </p:spPr>
+        <p:txBody>
+          <a:bodyPr/>
+          <a:p/>
+        </p:txBody>
       </p:sp>
       <p:sp>
         <p:nvSpPr>
@@ -4721,6 +4725,10 @@
           </a:solidFill>
           <a:ln/>
         </p:spPr>
+        <p:txBody>
+          <a:bodyPr/>
+          <a:p/>
+        </p:txBody>
       </p:sp>
       <p:sp>
         <p:nvSpPr>
@@ -4741,6 +4749,10 @@
           </a:solidFill>
           <a:ln/>
         </p:spPr>
+        <p:txBody>
+          <a:bodyPr/>
+          <a:p/>
+        </p:txBody>
       </p:sp>
       <p:sp>
         <p:nvSpPr>
@@ -4964,7 +4976,7 @@
                 <a:ea typeface="微软雅黑" pitchFamily="34" charset="-122"/>
                 <a:cs typeface="微软雅黑" pitchFamily="34" charset="-120"/>
               </a:rPr>
-              <a:t>V1.12.15  |  2026-10-08  |  FastAPI + Vue 3 + Electron + SQLite</a:t>
+              <a:t>V1.12.17  |  2026-10-17  |  FastAPI + Vue 3 + Electron + SQLite</a:t>
             </a:r>
             <a:endParaRPr lang="en-US" sz="1250" dirty="0"/>
           </a:p>
@@ -5021,6 +5033,10 @@
           </a:solidFill>
           <a:ln/>
         </p:spPr>
+        <p:txBody>
+          <a:bodyPr/>
+          <a:p/>
+        </p:txBody>
       </p:sp>
       <p:sp>
         <p:nvSpPr>
@@ -5180,7 +5196,7 @@
                 <a:ea typeface="微软雅黑" pitchFamily="34" charset="-122"/>
                 <a:cs typeface="微软雅黑" pitchFamily="34" charset="-120"/>
               </a:rPr>
-              <a:t>帮扶管理信息系统 v1.12.15</a:t>
+              <a:t>帮扶管理信息系统 v1.12.17</a:t>
             </a:r>
             <a:endParaRPr lang="en-US" sz="1050" dirty="0"/>
           </a:p>
@@ -5214,6 +5230,10 @@
             </a:outerShdw>
           </a:effectLst>
         </p:spPr>
+        <p:txBody>
+          <a:bodyPr/>
+          <a:p/>
+        </p:txBody>
       </p:sp>
       <p:sp>
         <p:nvSpPr>
@@ -5358,7 +5378,7 @@
                 <a:ea typeface="微软雅黑" pitchFamily="34" charset="-122"/>
                 <a:cs typeface="微软雅黑" pitchFamily="34" charset="-120"/>
               </a:rPr>
-              <a:t>299 个测试文件 · 6,323 个用例</a:t>
+              <a:t>299 个测试文件 · 6363 个用例</a:t>
             </a:r>
             <a:endParaRPr lang="en-US" sz="1350" dirty="0"/>
           </a:p>
@@ -5413,6 +5433,10 @@
             </a:outerShdw>
           </a:effectLst>
         </p:spPr>
+        <p:txBody>
+          <a:bodyPr/>
+          <a:p/>
+        </p:txBody>
       </p:sp>
       <p:sp>
         <p:nvSpPr>
@@ -5635,6 +5659,10 @@
           </a:solidFill>
           <a:ln/>
         </p:spPr>
+        <p:txBody>
+          <a:bodyPr/>
+          <a:p/>
+        </p:txBody>
       </p:sp>
       <p:sp>
         <p:nvSpPr>
@@ -5794,7 +5822,7 @@
                 <a:ea typeface="微软雅黑" pitchFamily="34" charset="-122"/>
                 <a:cs typeface="微软雅黑" pitchFamily="34" charset="-120"/>
               </a:rPr>
-              <a:t>帮扶管理信息系统 v1.12.15</a:t>
+              <a:t>帮扶管理信息系统 v1.12.17</a:t>
             </a:r>
             <a:endParaRPr lang="en-US" sz="1050" dirty="0"/>
           </a:p>
@@ -5819,6 +5847,10 @@
           </a:solidFill>
           <a:ln/>
         </p:spPr>
+        <p:txBody>
+          <a:bodyPr/>
+          <a:p/>
+        </p:txBody>
       </p:sp>
       <p:sp>
         <p:nvSpPr>
@@ -5921,6 +5953,10 @@
           </a:solidFill>
           <a:ln/>
         </p:spPr>
+        <p:txBody>
+          <a:bodyPr/>
+          <a:p/>
+        </p:txBody>
       </p:sp>
       <p:sp>
         <p:nvSpPr>
@@ -6023,6 +6059,10 @@
           </a:solidFill>
           <a:ln/>
         </p:spPr>
+        <p:txBody>
+          <a:bodyPr/>
+          <a:p/>
+        </p:txBody>
       </p:sp>
       <p:sp>
         <p:nvSpPr>
@@ -6125,6 +6165,10 @@
           </a:solidFill>
           <a:ln/>
         </p:spPr>
+        <p:txBody>
+          <a:bodyPr/>
+          <a:p/>
+        </p:txBody>
       </p:sp>
       <p:sp>
         <p:nvSpPr>
@@ -6227,6 +6271,10 @@
           </a:solidFill>
           <a:ln/>
         </p:spPr>
+        <p:txBody>
+          <a:bodyPr/>
+          <a:p/>
+        </p:txBody>
       </p:sp>
       <p:sp>
         <p:nvSpPr>
@@ -6338,6 +6386,10 @@
             </a:outerShdw>
           </a:effectLst>
         </p:spPr>
+        <p:txBody>
+          <a:bodyPr/>
+          <a:p/>
+        </p:txBody>
       </p:sp>
       <p:sp>
         <p:nvSpPr>
@@ -6539,6 +6591,10 @@
           </a:solidFill>
           <a:ln/>
         </p:spPr>
+        <p:txBody>
+          <a:bodyPr/>
+          <a:p/>
+        </p:txBody>
       </p:sp>
       <p:sp>
         <p:nvSpPr>
@@ -6698,7 +6754,7 @@
                 <a:ea typeface="微软雅黑" pitchFamily="34" charset="-122"/>
                 <a:cs typeface="微软雅黑" pitchFamily="34" charset="-120"/>
               </a:rPr>
-              <a:t>帮扶管理信息系统 v1.12.15</a:t>
+              <a:t>帮扶管理信息系统 v1.12.17</a:t>
             </a:r>
             <a:endParaRPr lang="en-US" sz="1050" dirty="0"/>
           </a:p>
@@ -6732,6 +6788,10 @@
             </a:outerShdw>
           </a:effectLst>
         </p:spPr>
+        <p:txBody>
+          <a:bodyPr/>
+          <a:p/>
+        </p:txBody>
       </p:sp>
       <p:sp>
         <p:nvSpPr>
@@ -6931,6 +6991,10 @@
             </a:outerShdw>
           </a:effectLst>
         </p:spPr>
+        <p:txBody>
+          <a:bodyPr/>
+          <a:p/>
+        </p:txBody>
       </p:sp>
       <p:sp>
         <p:nvSpPr>
@@ -7153,6 +7217,10 @@
           </a:solidFill>
           <a:ln/>
         </p:spPr>
+        <p:txBody>
+          <a:bodyPr/>
+          <a:p/>
+        </p:txBody>
       </p:sp>
       <p:sp>
         <p:nvSpPr>
@@ -7312,7 +7380,7 @@
                 <a:ea typeface="微软雅黑" pitchFamily="34" charset="-122"/>
                 <a:cs typeface="微软雅黑" pitchFamily="34" charset="-120"/>
               </a:rPr>
-              <a:t>帮扶管理信息系统 v1.12.15</a:t>
+              <a:t>帮扶管理信息系统 v1.12.17</a:t>
             </a:r>
             <a:endParaRPr lang="en-US" sz="1050" dirty="0"/>
           </a:p>
@@ -7346,6 +7414,10 @@
             </a:outerShdw>
           </a:effectLst>
         </p:spPr>
+        <p:txBody>
+          <a:bodyPr/>
+          <a:p/>
+        </p:txBody>
       </p:sp>
       <p:sp>
         <p:nvSpPr>
@@ -7503,6 +7575,10 @@
             </a:outerShdw>
           </a:effectLst>
         </p:spPr>
+        <p:txBody>
+          <a:bodyPr/>
+          <a:p/>
+        </p:txBody>
       </p:sp>
       <p:sp>
         <p:nvSpPr>
@@ -7653,6 +7729,10 @@
           </a:solidFill>
           <a:ln/>
         </p:spPr>
+        <p:txBody>
+          <a:bodyPr/>
+          <a:p/>
+        </p:txBody>
       </p:sp>
       <p:sp>
         <p:nvSpPr>
@@ -7718,6 +7798,10 @@
             <a:tailEnd type="triangle"/>
           </a:ln>
         </p:spPr>
+        <p:txBody>
+          <a:bodyPr/>
+          <a:p/>
+        </p:txBody>
       </p:sp>
       <p:sp>
         <p:nvSpPr>
@@ -7740,6 +7824,10 @@
           </a:solidFill>
           <a:ln/>
         </p:spPr>
+        <p:txBody>
+          <a:bodyPr/>
+          <a:p/>
+        </p:txBody>
       </p:sp>
       <p:sp>
         <p:nvSpPr>
@@ -7805,6 +7893,10 @@
             <a:tailEnd type="triangle"/>
           </a:ln>
         </p:spPr>
+        <p:txBody>
+          <a:bodyPr/>
+          <a:p/>
+        </p:txBody>
       </p:sp>
       <p:sp>
         <p:nvSpPr>
@@ -7827,6 +7919,10 @@
           </a:solidFill>
           <a:ln/>
         </p:spPr>
+        <p:txBody>
+          <a:bodyPr/>
+          <a:p/>
+        </p:txBody>
       </p:sp>
       <p:sp>
         <p:nvSpPr>
@@ -7892,6 +7988,10 @@
             <a:tailEnd type="triangle"/>
           </a:ln>
         </p:spPr>
+        <p:txBody>
+          <a:bodyPr/>
+          <a:p/>
+        </p:txBody>
       </p:sp>
       <p:sp>
         <p:nvSpPr>
@@ -7914,6 +8014,10 @@
           </a:solidFill>
           <a:ln/>
         </p:spPr>
+        <p:txBody>
+          <a:bodyPr/>
+          <a:p/>
+        </p:txBody>
       </p:sp>
       <p:sp>
         <p:nvSpPr>
@@ -7979,6 +8083,10 @@
             <a:tailEnd type="triangle"/>
           </a:ln>
         </p:spPr>
+        <p:txBody>
+          <a:bodyPr/>
+          <a:p/>
+        </p:txBody>
       </p:sp>
       <p:sp>
         <p:nvSpPr>
@@ -8001,6 +8109,10 @@
           </a:solidFill>
           <a:ln/>
         </p:spPr>
+        <p:txBody>
+          <a:bodyPr/>
+          <a:p/>
+        </p:txBody>
       </p:sp>
       <p:sp>
         <p:nvSpPr>
@@ -8066,6 +8178,10 @@
             <a:tailEnd type="triangle"/>
           </a:ln>
         </p:spPr>
+        <p:txBody>
+          <a:bodyPr/>
+          <a:p/>
+        </p:txBody>
       </p:sp>
       <p:sp>
         <p:nvSpPr>
@@ -8088,6 +8204,10 @@
           </a:solidFill>
           <a:ln/>
         </p:spPr>
+        <p:txBody>
+          <a:bodyPr/>
+          <a:p/>
+        </p:txBody>
       </p:sp>
       <p:sp>
         <p:nvSpPr>
@@ -8526,6 +8646,10 @@
           </a:solidFill>
           <a:ln/>
         </p:spPr>
+        <p:txBody>
+          <a:bodyPr/>
+          <a:p/>
+        </p:txBody>
       </p:sp>
       <p:sp>
         <p:nvSpPr>
@@ -8685,7 +8809,7 @@
                 <a:ea typeface="微软雅黑" pitchFamily="34" charset="-122"/>
                 <a:cs typeface="微软雅黑" pitchFamily="34" charset="-120"/>
               </a:rPr>
-              <a:t>帮扶管理信息系统 v1.12.15</a:t>
+              <a:t>帮扶管理信息系统 v1.12.17</a:t>
             </a:r>
             <a:endParaRPr lang="en-US" sz="1050" dirty="0"/>
           </a:p>
@@ -8719,6 +8843,10 @@
             </a:outerShdw>
           </a:effectLst>
         </p:spPr>
+        <p:txBody>
+          <a:bodyPr/>
+          <a:p/>
+        </p:txBody>
       </p:sp>
       <p:sp>
         <p:nvSpPr>
@@ -8871,6 +8999,10 @@
             </a:outerShdw>
           </a:effectLst>
         </p:spPr>
+        <p:txBody>
+          <a:bodyPr/>
+          <a:p/>
+        </p:txBody>
       </p:sp>
       <p:sp>
         <p:nvSpPr>
@@ -9023,6 +9155,10 @@
             </a:outerShdw>
           </a:effectLst>
         </p:spPr>
+        <p:txBody>
+          <a:bodyPr/>
+          <a:p/>
+        </p:txBody>
       </p:sp>
       <p:sp>
         <p:nvSpPr>
@@ -9175,6 +9311,10 @@
             </a:outerShdw>
           </a:effectLst>
         </p:spPr>
+        <p:txBody>
+          <a:bodyPr/>
+          <a:p/>
+        </p:txBody>
       </p:sp>
       <p:sp>
         <p:nvSpPr>
@@ -9327,6 +9467,10 @@
             </a:outerShdw>
           </a:effectLst>
         </p:spPr>
+        <p:txBody>
+          <a:bodyPr/>
+          <a:p/>
+        </p:txBody>
       </p:sp>
       <p:sp>
         <p:nvSpPr>
@@ -9479,6 +9623,10 @@
             </a:outerShdw>
           </a:effectLst>
         </p:spPr>
+        <p:txBody>
+          <a:bodyPr/>
+          <a:p/>
+        </p:txBody>
       </p:sp>
       <p:sp>
         <p:nvSpPr>
@@ -9695,6 +9843,10 @@
           </a:solidFill>
           <a:ln/>
         </p:spPr>
+        <p:txBody>
+          <a:bodyPr/>
+          <a:p/>
+        </p:txBody>
       </p:sp>
       <p:sp>
         <p:nvSpPr>
@@ -9854,7 +10006,7 @@
                 <a:ea typeface="微软雅黑" pitchFamily="34" charset="-122"/>
                 <a:cs typeface="微软雅黑" pitchFamily="34" charset="-120"/>
               </a:rPr>
-              <a:t>帮扶管理信息系统 v1.12.15</a:t>
+              <a:t>帮扶管理信息系统 v1.12.17</a:t>
             </a:r>
             <a:endParaRPr lang="en-US" sz="1050" dirty="0"/>
           </a:p>
@@ -9888,6 +10040,10 @@
             </a:outerShdw>
           </a:effectLst>
         </p:spPr>
+        <p:txBody>
+          <a:bodyPr/>
+          <a:p/>
+        </p:txBody>
       </p:sp>
       <p:sp>
         <p:nvSpPr>
@@ -10087,6 +10243,10 @@
             </a:outerShdw>
           </a:effectLst>
         </p:spPr>
+        <p:txBody>
+          <a:bodyPr/>
+          <a:p/>
+        </p:txBody>
       </p:sp>
       <p:sp>
         <p:nvSpPr>
@@ -10309,6 +10469,10 @@
           </a:solidFill>
           <a:ln/>
         </p:spPr>
+        <p:txBody>
+          <a:bodyPr/>
+          <a:p/>
+        </p:txBody>
       </p:sp>
       <p:sp>
         <p:nvSpPr>
@@ -10468,7 +10632,7 @@
                 <a:ea typeface="微软雅黑" pitchFamily="34" charset="-122"/>
                 <a:cs typeface="微软雅黑" pitchFamily="34" charset="-120"/>
               </a:rPr>
-              <a:t>帮扶管理信息系统 v1.12.15</a:t>
+              <a:t>帮扶管理信息系统 v1.12.17</a:t>
             </a:r>
             <a:endParaRPr lang="en-US" sz="1050" dirty="0"/>
           </a:p>
@@ -10495,6 +10659,10 @@
           </a:solidFill>
           <a:ln/>
         </p:spPr>
+        <p:txBody>
+          <a:bodyPr/>
+          <a:p/>
+        </p:txBody>
       </p:sp>
       <p:sp>
         <p:nvSpPr>
@@ -10558,6 +10726,10 @@
           </a:solidFill>
           <a:ln/>
         </p:spPr>
+        <p:txBody>
+          <a:bodyPr/>
+          <a:p/>
+        </p:txBody>
       </p:sp>
       <p:sp>
         <p:nvSpPr>
@@ -10621,6 +10793,10 @@
           </a:solidFill>
           <a:ln/>
         </p:spPr>
+        <p:txBody>
+          <a:bodyPr/>
+          <a:p/>
+        </p:txBody>
       </p:sp>
       <p:sp>
         <p:nvSpPr>
@@ -10684,6 +10860,10 @@
           </a:solidFill>
           <a:ln/>
         </p:spPr>
+        <p:txBody>
+          <a:bodyPr/>
+          <a:p/>
+        </p:txBody>
       </p:sp>
       <p:sp>
         <p:nvSpPr>
@@ -10747,6 +10927,10 @@
           </a:solidFill>
           <a:ln/>
         </p:spPr>
+        <p:txBody>
+          <a:bodyPr/>
+          <a:p/>
+        </p:txBody>
       </p:sp>
       <p:sp>
         <p:nvSpPr>
@@ -10810,6 +10994,10 @@
           </a:solidFill>
           <a:ln/>
         </p:spPr>
+        <p:txBody>
+          <a:bodyPr/>
+          <a:p/>
+        </p:txBody>
       </p:sp>
       <p:sp>
         <p:nvSpPr>
@@ -10873,6 +11061,10 @@
           </a:solidFill>
           <a:ln/>
         </p:spPr>
+        <p:txBody>
+          <a:bodyPr/>
+          <a:p/>
+        </p:txBody>
       </p:sp>
       <p:sp>
         <p:nvSpPr>
@@ -10936,6 +11128,10 @@
           </a:solidFill>
           <a:ln/>
         </p:spPr>
+        <p:txBody>
+          <a:bodyPr/>
+          <a:p/>
+        </p:txBody>
       </p:sp>
       <p:sp>
         <p:nvSpPr>
@@ -11137,6 +11333,10 @@
           </a:solidFill>
           <a:ln/>
         </p:spPr>
+        <p:txBody>
+          <a:bodyPr/>
+          <a:p/>
+        </p:txBody>
       </p:sp>
       <p:sp>
         <p:nvSpPr>
@@ -11296,7 +11496,7 @@
                 <a:ea typeface="微软雅黑" pitchFamily="34" charset="-122"/>
                 <a:cs typeface="微软雅黑" pitchFamily="34" charset="-120"/>
               </a:rPr>
-              <a:t>帮扶管理信息系统 v1.12.15</a:t>
+              <a:t>帮扶管理信息系统 v1.12.17</a:t>
             </a:r>
             <a:endParaRPr lang="en-US" sz="1050" dirty="0"/>
           </a:p>
@@ -11321,6 +11521,10 @@
           </a:solidFill>
           <a:ln/>
         </p:spPr>
+        <p:txBody>
+          <a:bodyPr/>
+          <a:p/>
+        </p:txBody>
       </p:sp>
       <p:sp>
         <p:nvSpPr>
@@ -11382,6 +11586,10 @@
           </a:solidFill>
           <a:ln/>
         </p:spPr>
+        <p:txBody>
+          <a:bodyPr/>
+          <a:p/>
+        </p:txBody>
       </p:sp>
       <p:sp>
         <p:nvSpPr>
@@ -11443,6 +11651,10 @@
           </a:solidFill>
           <a:ln/>
         </p:spPr>
+        <p:txBody>
+          <a:bodyPr/>
+          <a:p/>
+        </p:txBody>
       </p:sp>
       <p:sp>
         <p:nvSpPr>
@@ -11504,6 +11716,10 @@
           </a:solidFill>
           <a:ln/>
         </p:spPr>
+        <p:txBody>
+          <a:bodyPr/>
+          <a:p/>
+        </p:txBody>
       </p:sp>
       <p:sp>
         <p:nvSpPr>
@@ -11565,6 +11781,10 @@
           </a:solidFill>
           <a:ln/>
         </p:spPr>
+        <p:txBody>
+          <a:bodyPr/>
+          <a:p/>
+        </p:txBody>
       </p:sp>
       <p:sp>
         <p:nvSpPr>
@@ -11626,6 +11846,10 @@
           </a:solidFill>
           <a:ln/>
         </p:spPr>
+        <p:txBody>
+          <a:bodyPr/>
+          <a:p/>
+        </p:txBody>
       </p:sp>
       <p:sp>
         <p:nvSpPr>
@@ -11848,6 +12072,10 @@
           </a:solidFill>
           <a:ln/>
         </p:spPr>
+        <p:txBody>
+          <a:bodyPr/>
+          <a:p/>
+        </p:txBody>
       </p:sp>
       <p:sp>
         <p:nvSpPr>
@@ -12007,7 +12235,7 @@
                 <a:ea typeface="微软雅黑" pitchFamily="34" charset="-122"/>
                 <a:cs typeface="微软雅黑" pitchFamily="34" charset="-120"/>
               </a:rPr>
-              <a:t>帮扶管理信息系统 v1.12.15</a:t>
+              <a:t>帮扶管理信息系统 v1.12.17</a:t>
             </a:r>
             <a:endParaRPr lang="en-US" sz="1050" dirty="0"/>
           </a:p>
@@ -12032,6 +12260,10 @@
           </a:solidFill>
           <a:ln/>
         </p:spPr>
+        <p:txBody>
+          <a:bodyPr/>
+          <a:p/>
+        </p:txBody>
       </p:sp>
       <p:sp>
         <p:nvSpPr>
@@ -12138,6 +12370,10 @@
             <a:tailEnd type="triangle"/>
           </a:ln>
         </p:spPr>
+        <p:txBody>
+          <a:bodyPr/>
+          <a:p/>
+        </p:txBody>
       </p:sp>
       <p:sp>
         <p:nvSpPr>
@@ -12158,6 +12394,10 @@
           </a:solidFill>
           <a:ln/>
         </p:spPr>
+        <p:txBody>
+          <a:bodyPr/>
+          <a:p/>
+        </p:txBody>
       </p:sp>
       <p:sp>
         <p:nvSpPr>
@@ -12264,6 +12504,10 @@
             <a:tailEnd type="triangle"/>
           </a:ln>
         </p:spPr>
+        <p:txBody>
+          <a:bodyPr/>
+          <a:p/>
+        </p:txBody>
       </p:sp>
       <p:sp>
         <p:nvSpPr>
@@ -12284,6 +12528,10 @@
           </a:solidFill>
           <a:ln/>
         </p:spPr>
+        <p:txBody>
+          <a:bodyPr/>
+          <a:p/>
+        </p:txBody>
       </p:sp>
       <p:sp>
         <p:nvSpPr>
@@ -12390,6 +12638,10 @@
             <a:tailEnd type="triangle"/>
           </a:ln>
         </p:spPr>
+        <p:txBody>
+          <a:bodyPr/>
+          <a:p/>
+        </p:txBody>
       </p:sp>
       <p:sp>
         <p:nvSpPr>
@@ -12410,6 +12662,10 @@
           </a:solidFill>
           <a:ln/>
         </p:spPr>
+        <p:txBody>
+          <a:bodyPr/>
+          <a:p/>
+        </p:txBody>
       </p:sp>
       <p:sp>
         <p:nvSpPr>
@@ -12516,6 +12772,10 @@
             <a:tailEnd type="triangle"/>
           </a:ln>
         </p:spPr>
+        <p:txBody>
+          <a:bodyPr/>
+          <a:p/>
+        </p:txBody>
       </p:sp>
       <p:sp>
         <p:nvSpPr>
@@ -12536,6 +12796,10 @@
           </a:solidFill>
           <a:ln/>
         </p:spPr>
+        <p:txBody>
+          <a:bodyPr/>
+          <a:p/>
+        </p:txBody>
       </p:sp>
       <p:sp>
         <p:nvSpPr>
@@ -12642,6 +12906,10 @@
             <a:tailEnd type="triangle"/>
           </a:ln>
         </p:spPr>
+        <p:txBody>
+          <a:bodyPr/>
+          <a:p/>
+        </p:txBody>
       </p:sp>
       <p:sp>
         <p:nvSpPr>
@@ -12662,6 +12930,10 @@
           </a:solidFill>
           <a:ln/>
         </p:spPr>
+        <p:txBody>
+          <a:bodyPr/>
+          <a:p/>
+        </p:txBody>
       </p:sp>
       <p:sp>
         <p:nvSpPr>
@@ -12768,6 +13040,10 @@
             <a:tailEnd type="triangle"/>
           </a:ln>
         </p:spPr>
+        <p:txBody>
+          <a:bodyPr/>
+          <a:p/>
+        </p:txBody>
       </p:sp>
       <p:sp>
         <p:nvSpPr>
@@ -12788,6 +13064,10 @@
           </a:solidFill>
           <a:ln/>
         </p:spPr>
+        <p:txBody>
+          <a:bodyPr/>
+          <a:p/>
+        </p:txBody>
       </p:sp>
       <p:sp>
         <p:nvSpPr>
@@ -12894,6 +13174,10 @@
             <a:tailEnd type="triangle"/>
           </a:ln>
         </p:spPr>
+        <p:txBody>
+          <a:bodyPr/>
+          <a:p/>
+        </p:txBody>
       </p:sp>
       <p:sp>
         <p:nvSpPr>
@@ -12914,6 +13198,10 @@
           </a:solidFill>
           <a:ln/>
         </p:spPr>
+        <p:txBody>
+          <a:bodyPr/>
+          <a:p/>
+        </p:txBody>
       </p:sp>
       <p:sp>
         <p:nvSpPr>
@@ -13025,6 +13313,10 @@
             </a:outerShdw>
           </a:effectLst>
         </p:spPr>
+        <p:txBody>
+          <a:bodyPr/>
+          <a:p/>
+        </p:txBody>
       </p:sp>
       <p:sp>
         <p:nvSpPr>
@@ -13182,6 +13474,10 @@
             </a:outerShdw>
           </a:effectLst>
         </p:spPr>
+        <p:txBody>
+          <a:bodyPr/>
+          <a:p/>
+        </p:txBody>
       </p:sp>
       <p:sp>
         <p:nvSpPr>
@@ -13446,6 +13742,10 @@
           </a:solidFill>
           <a:ln/>
         </p:spPr>
+        <p:txBody>
+          <a:bodyPr/>
+          <a:p/>
+        </p:txBody>
       </p:sp>
       <p:sp>
         <p:nvSpPr>
@@ -13591,6 +13891,10 @@
           </a:solidFill>
           <a:ln/>
         </p:spPr>
+        <p:txBody>
+          <a:bodyPr/>
+          <a:p/>
+        </p:txBody>
       </p:sp>
       <p:sp>
         <p:nvSpPr>
@@ -13736,6 +14040,10 @@
           </a:solidFill>
           <a:ln/>
         </p:spPr>
+        <p:txBody>
+          <a:bodyPr/>
+          <a:p/>
+        </p:txBody>
       </p:sp>
       <p:sp>
         <p:nvSpPr>
@@ -13881,6 +14189,10 @@
           </a:solidFill>
           <a:ln/>
         </p:spPr>
+        <p:txBody>
+          <a:bodyPr/>
+          <a:p/>
+        </p:txBody>
       </p:sp>
       <p:sp>
         <p:nvSpPr>
@@ -14026,6 +14338,10 @@
           </a:solidFill>
           <a:ln/>
         </p:spPr>
+        <p:txBody>
+          <a:bodyPr/>
+          <a:p/>
+        </p:txBody>
       </p:sp>
       <p:sp>
         <p:nvSpPr>
@@ -14171,6 +14487,10 @@
           </a:solidFill>
           <a:ln/>
         </p:spPr>
+        <p:txBody>
+          <a:bodyPr/>
+          <a:p/>
+        </p:txBody>
       </p:sp>
       <p:sp>
         <p:nvSpPr>
@@ -14346,6 +14666,10 @@
           </a:solidFill>
           <a:ln/>
         </p:spPr>
+        <p:txBody>
+          <a:bodyPr/>
+          <a:p/>
+        </p:txBody>
       </p:sp>
       <p:sp>
         <p:nvSpPr>
@@ -14505,7 +14829,7 @@
                 <a:ea typeface="微软雅黑" pitchFamily="34" charset="-122"/>
                 <a:cs typeface="微软雅黑" pitchFamily="34" charset="-120"/>
               </a:rPr>
-              <a:t>帮扶管理信息系统 v1.12.15</a:t>
+              <a:t>帮扶管理信息系统 v1.12.17</a:t>
             </a:r>
             <a:endParaRPr lang="en-US" sz="1050" dirty="0"/>
           </a:p>
@@ -14539,6 +14863,10 @@
             </a:outerShdw>
           </a:effectLst>
         </p:spPr>
+        <p:txBody>
+          <a:bodyPr/>
+          <a:p/>
+        </p:txBody>
       </p:sp>
       <p:sp>
         <p:nvSpPr>
@@ -14738,6 +15066,10 @@
             </a:outerShdw>
           </a:effectLst>
         </p:spPr>
+        <p:txBody>
+          <a:bodyPr/>
+          <a:p/>
+        </p:txBody>
       </p:sp>
       <p:sp>
         <p:nvSpPr>
@@ -14960,6 +15292,10 @@
           </a:solidFill>
           <a:ln/>
         </p:spPr>
+        <p:txBody>
+          <a:bodyPr/>
+          <a:p/>
+        </p:txBody>
       </p:sp>
       <p:sp>
         <p:nvSpPr>
@@ -15119,7 +15455,7 @@
                 <a:ea typeface="微软雅黑" pitchFamily="34" charset="-122"/>
                 <a:cs typeface="微软雅黑" pitchFamily="34" charset="-120"/>
               </a:rPr>
-              <a:t>帮扶管理信息系统 v1.12.15</a:t>
+              <a:t>帮扶管理信息系统 v1.12.17</a:t>
             </a:r>
             <a:endParaRPr lang="en-US" sz="1050" dirty="0"/>
           </a:p>
@@ -15144,6 +15480,10 @@
           </a:solidFill>
           <a:ln/>
         </p:spPr>
+        <p:txBody>
+          <a:bodyPr/>
+          <a:p/>
+        </p:txBody>
       </p:sp>
       <p:sp>
         <p:nvSpPr>
@@ -15205,6 +15545,10 @@
           </a:solidFill>
           <a:ln/>
         </p:spPr>
+        <p:txBody>
+          <a:bodyPr/>
+          <a:p/>
+        </p:txBody>
       </p:sp>
       <p:sp>
         <p:nvSpPr>
@@ -15266,6 +15610,10 @@
           </a:solidFill>
           <a:ln/>
         </p:spPr>
+        <p:txBody>
+          <a:bodyPr/>
+          <a:p/>
+        </p:txBody>
       </p:sp>
       <p:sp>
         <p:nvSpPr>
@@ -15327,6 +15675,10 @@
           </a:solidFill>
           <a:ln/>
         </p:spPr>
+        <p:txBody>
+          <a:bodyPr/>
+          <a:p/>
+        </p:txBody>
       </p:sp>
       <p:sp>
         <p:nvSpPr>
@@ -15388,6 +15740,10 @@
           </a:solidFill>
           <a:ln/>
         </p:spPr>
+        <p:txBody>
+          <a:bodyPr/>
+          <a:p/>
+        </p:txBody>
       </p:sp>
       <p:sp>
         <p:nvSpPr>
@@ -15631,6 +15987,10 @@
           </a:solidFill>
           <a:ln/>
         </p:spPr>
+        <p:txBody>
+          <a:bodyPr/>
+          <a:p/>
+        </p:txBody>
       </p:sp>
       <p:sp>
         <p:nvSpPr>
@@ -15790,7 +16150,7 @@
                 <a:ea typeface="微软雅黑" pitchFamily="34" charset="-122"/>
                 <a:cs typeface="微软雅黑" pitchFamily="34" charset="-120"/>
               </a:rPr>
-              <a:t>帮扶管理信息系统 v1.12.15</a:t>
+              <a:t>帮扶管理信息系统 v1.12.17</a:t>
             </a:r>
             <a:endParaRPr lang="en-US" sz="1050" dirty="0"/>
           </a:p>
@@ -15824,6 +16184,10 @@
             </a:outerShdw>
           </a:effectLst>
         </p:spPr>
+        <p:txBody>
+          <a:bodyPr/>
+          <a:p/>
+        </p:txBody>
       </p:sp>
       <p:sp>
         <p:nvSpPr>
@@ -16002,6 +16366,10 @@
             </a:outerShdw>
           </a:effectLst>
         </p:spPr>
+        <p:txBody>
+          <a:bodyPr/>
+          <a:p/>
+        </p:txBody>
       </p:sp>
       <p:sp>
         <p:nvSpPr>
@@ -16180,6 +16548,10 @@
             </a:outerShdw>
           </a:effectLst>
         </p:spPr>
+        <p:txBody>
+          <a:bodyPr/>
+          <a:p/>
+        </p:txBody>
       </p:sp>
       <p:sp>
         <p:nvSpPr>
@@ -16314,6 +16686,10 @@
           </a:solidFill>
           <a:ln/>
         </p:spPr>
+        <p:txBody>
+          <a:bodyPr/>
+          <a:p/>
+        </p:txBody>
       </p:sp>
       <p:sp>
         <p:nvSpPr>
@@ -16473,7 +16849,7 @@
                 <a:ea typeface="微软雅黑" pitchFamily="34" charset="-122"/>
                 <a:cs typeface="微软雅黑" pitchFamily="34" charset="-120"/>
               </a:rPr>
-              <a:t>帮扶管理信息系统 v1.12.15</a:t>
+              <a:t>帮扶管理信息系统 v1.12.17</a:t>
             </a:r>
             <a:endParaRPr lang="en-US" sz="1050" dirty="0"/>
           </a:p>
@@ -16507,6 +16883,10 @@
             </a:outerShdw>
           </a:effectLst>
         </p:spPr>
+        <p:txBody>
+          <a:bodyPr/>
+          <a:p/>
+        </p:txBody>
       </p:sp>
       <p:sp>
         <p:nvSpPr>
@@ -16618,6 +16998,10 @@
             </a:outerShdw>
           </a:effectLst>
         </p:spPr>
+        <p:txBody>
+          <a:bodyPr/>
+          <a:p/>
+        </p:txBody>
       </p:sp>
       <p:sp>
         <p:nvSpPr>
@@ -16729,6 +17113,10 @@
             </a:outerShdw>
           </a:effectLst>
         </p:spPr>
+        <p:txBody>
+          <a:bodyPr/>
+          <a:p/>
+        </p:txBody>
       </p:sp>
       <p:sp>
         <p:nvSpPr>
@@ -16840,6 +17228,10 @@
             </a:outerShdw>
           </a:effectLst>
         </p:spPr>
+        <p:txBody>
+          <a:bodyPr/>
+          <a:p/>
+        </p:txBody>
       </p:sp>
       <p:sp>
         <p:nvSpPr>
@@ -16951,6 +17343,10 @@
             </a:outerShdw>
           </a:effectLst>
         </p:spPr>
+        <p:txBody>
+          <a:bodyPr/>
+          <a:p/>
+        </p:txBody>
       </p:sp>
       <p:sp>
         <p:nvSpPr>
@@ -17062,6 +17458,10 @@
             </a:outerShdw>
           </a:effectLst>
         </p:spPr>
+        <p:txBody>
+          <a:bodyPr/>
+          <a:p/>
+        </p:txBody>
       </p:sp>
       <p:sp>
         <p:nvSpPr>
@@ -17196,6 +17596,10 @@
           </a:solidFill>
           <a:ln/>
         </p:spPr>
+        <p:txBody>
+          <a:bodyPr/>
+          <a:p/>
+        </p:txBody>
       </p:sp>
       <p:sp>
         <p:nvSpPr>
@@ -17355,7 +17759,7 @@
                 <a:ea typeface="微软雅黑" pitchFamily="34" charset="-122"/>
                 <a:cs typeface="微软雅黑" pitchFamily="34" charset="-120"/>
               </a:rPr>
-              <a:t>帮扶管理信息系统 v1.12.15</a:t>
+              <a:t>帮扶管理信息系统 v1.12.17</a:t>
             </a:r>
             <a:endParaRPr lang="en-US" sz="1050" dirty="0"/>
           </a:p>
@@ -17389,6 +17793,10 @@
             </a:outerShdw>
           </a:effectLst>
         </p:spPr>
+        <p:txBody>
+          <a:bodyPr/>
+          <a:p/>
+        </p:txBody>
       </p:sp>
       <p:sp>
         <p:nvSpPr>
@@ -17500,6 +17908,10 @@
             </a:outerShdw>
           </a:effectLst>
         </p:spPr>
+        <p:txBody>
+          <a:bodyPr/>
+          <a:p/>
+        </p:txBody>
       </p:sp>
       <p:sp>
         <p:nvSpPr>
@@ -17611,6 +18023,10 @@
             </a:outerShdw>
           </a:effectLst>
         </p:spPr>
+        <p:txBody>
+          <a:bodyPr/>
+          <a:p/>
+        </p:txBody>
       </p:sp>
       <p:sp>
         <p:nvSpPr>
@@ -17722,6 +18138,10 @@
             </a:outerShdw>
           </a:effectLst>
         </p:spPr>
+        <p:txBody>
+          <a:bodyPr/>
+          <a:p/>
+        </p:txBody>
       </p:sp>
       <p:sp>
         <p:nvSpPr>
@@ -17833,6 +18253,10 @@
             </a:outerShdw>
           </a:effectLst>
         </p:spPr>
+        <p:txBody>
+          <a:bodyPr/>
+          <a:p/>
+        </p:txBody>
       </p:sp>
       <p:sp>
         <p:nvSpPr>
@@ -17944,6 +18368,10 @@
             </a:outerShdw>
           </a:effectLst>
         </p:spPr>
+        <p:txBody>
+          <a:bodyPr/>
+          <a:p/>
+        </p:txBody>
       </p:sp>
       <p:sp>
         <p:nvSpPr>
@@ -18382,6 +18810,10 @@
           </a:solidFill>
           <a:ln/>
         </p:spPr>
+        <p:txBody>
+          <a:bodyPr/>
+          <a:p/>
+        </p:txBody>
       </p:sp>
       <p:sp>
         <p:nvSpPr>
@@ -18541,7 +18973,7 @@
                 <a:ea typeface="微软雅黑" pitchFamily="34" charset="-122"/>
                 <a:cs typeface="微软雅黑" pitchFamily="34" charset="-120"/>
               </a:rPr>
-              <a:t>帮扶管理信息系统 v1.12.15</a:t>
+              <a:t>帮扶管理信息系统 v1.12.17</a:t>
             </a:r>
             <a:endParaRPr lang="en-US" sz="1050" dirty="0"/>
           </a:p>
@@ -18575,6 +19007,10 @@
             </a:outerShdw>
           </a:effectLst>
         </p:spPr>
+        <p:txBody>
+          <a:bodyPr/>
+          <a:p/>
+        </p:txBody>
       </p:sp>
       <p:sp>
         <p:nvSpPr>
@@ -18597,6 +19033,10 @@
           </a:solidFill>
           <a:ln/>
         </p:spPr>
+        <p:txBody>
+          <a:bodyPr/>
+          <a:p/>
+        </p:txBody>
       </p:sp>
       <p:sp>
         <p:nvSpPr>
@@ -18749,6 +19189,10 @@
             </a:outerShdw>
           </a:effectLst>
         </p:spPr>
+        <p:txBody>
+          <a:bodyPr/>
+          <a:p/>
+        </p:txBody>
       </p:sp>
       <p:sp>
         <p:nvSpPr>
@@ -18771,6 +19215,10 @@
           </a:solidFill>
           <a:ln/>
         </p:spPr>
+        <p:txBody>
+          <a:bodyPr/>
+          <a:p/>
+        </p:txBody>
       </p:sp>
       <p:sp>
         <p:nvSpPr>
@@ -18923,6 +19371,10 @@
             </a:outerShdw>
           </a:effectLst>
         </p:spPr>
+        <p:txBody>
+          <a:bodyPr/>
+          <a:p/>
+        </p:txBody>
       </p:sp>
       <p:sp>
         <p:nvSpPr>
@@ -18945,6 +19397,10 @@
           </a:solidFill>
           <a:ln/>
         </p:spPr>
+        <p:txBody>
+          <a:bodyPr/>
+          <a:p/>
+        </p:txBody>
       </p:sp>
       <p:sp>
         <p:nvSpPr>
@@ -19097,6 +19553,10 @@
             </a:outerShdw>
           </a:effectLst>
         </p:spPr>
+        <p:txBody>
+          <a:bodyPr/>
+          <a:p/>
+        </p:txBody>
       </p:sp>
       <p:sp>
         <p:nvSpPr>
@@ -19119,6 +19579,10 @@
           </a:solidFill>
           <a:ln/>
         </p:spPr>
+        <p:txBody>
+          <a:bodyPr/>
+          <a:p/>
+        </p:txBody>
       </p:sp>
       <p:sp>
         <p:nvSpPr>
@@ -19381,6 +19845,10 @@
           </a:solidFill>
           <a:ln/>
         </p:spPr>
+        <p:txBody>
+          <a:bodyPr/>
+          <a:p/>
+        </p:txBody>
       </p:sp>
       <p:sp>
         <p:nvSpPr>
@@ -19540,7 +20008,7 @@
                 <a:ea typeface="微软雅黑" pitchFamily="34" charset="-122"/>
                 <a:cs typeface="微软雅黑" pitchFamily="34" charset="-120"/>
               </a:rPr>
-              <a:t>帮扶管理信息系统 v1.12.15</a:t>
+              <a:t>帮扶管理信息系统 v1.12.17</a:t>
             </a:r>
             <a:endParaRPr lang="en-US" sz="1050" dirty="0"/>
           </a:p>
@@ -19574,6 +20042,10 @@
             </a:outerShdw>
           </a:effectLst>
         </p:spPr>
+        <p:txBody>
+          <a:bodyPr/>
+          <a:p/>
+        </p:txBody>
       </p:sp>
       <p:sp>
         <p:nvSpPr>
@@ -19726,6 +20198,10 @@
             </a:outerShdw>
           </a:effectLst>
         </p:spPr>
+        <p:txBody>
+          <a:bodyPr/>
+          <a:p/>
+        </p:txBody>
       </p:sp>
       <p:sp>
         <p:nvSpPr>
@@ -19878,6 +20354,10 @@
             </a:outerShdw>
           </a:effectLst>
         </p:spPr>
+        <p:txBody>
+          <a:bodyPr/>
+          <a:p/>
+        </p:txBody>
       </p:sp>
       <p:sp>
         <p:nvSpPr>
@@ -20030,6 +20510,10 @@
             </a:outerShdw>
           </a:effectLst>
         </p:spPr>
+        <p:txBody>
+          <a:bodyPr/>
+          <a:p/>
+        </p:txBody>
       </p:sp>
       <p:sp>
         <p:nvSpPr>
@@ -20210,6 +20694,10 @@
           </a:solidFill>
           <a:ln/>
         </p:spPr>
+        <p:txBody>
+          <a:bodyPr/>
+          <a:p/>
+        </p:txBody>
       </p:sp>
       <p:sp>
         <p:nvSpPr>
@@ -20369,7 +20857,7 @@
                 <a:ea typeface="微软雅黑" pitchFamily="34" charset="-122"/>
                 <a:cs typeface="微软雅黑" pitchFamily="34" charset="-120"/>
               </a:rPr>
-              <a:t>帮扶管理信息系统 v1.12.15</a:t>
+              <a:t>帮扶管理信息系统 v1.12.17</a:t>
             </a:r>
             <a:endParaRPr lang="en-US" sz="1050" dirty="0"/>
           </a:p>
@@ -20403,6 +20891,10 @@
             </a:outerShdw>
           </a:effectLst>
         </p:spPr>
+        <p:txBody>
+          <a:bodyPr/>
+          <a:p/>
+        </p:txBody>
       </p:sp>
       <p:sp>
         <p:nvSpPr>
@@ -20466,6 +20958,10 @@
           </a:solidFill>
           <a:ln/>
         </p:spPr>
+        <p:txBody>
+          <a:bodyPr/>
+          <a:p/>
+        </p:txBody>
       </p:sp>
       <p:sp>
         <p:nvSpPr>
@@ -20531,6 +21027,10 @@
             <a:tailEnd type="triangle"/>
           </a:ln>
         </p:spPr>
+        <p:txBody>
+          <a:bodyPr/>
+          <a:p/>
+        </p:txBody>
       </p:sp>
       <p:sp>
         <p:nvSpPr>
@@ -20553,6 +21053,10 @@
           </a:solidFill>
           <a:ln/>
         </p:spPr>
+        <p:txBody>
+          <a:bodyPr/>
+          <a:p/>
+        </p:txBody>
       </p:sp>
       <p:sp>
         <p:nvSpPr>
@@ -20618,6 +21122,10 @@
             <a:tailEnd type="triangle"/>
           </a:ln>
         </p:spPr>
+        <p:txBody>
+          <a:bodyPr/>
+          <a:p/>
+        </p:txBody>
       </p:sp>
       <p:sp>
         <p:nvSpPr>
@@ -20640,6 +21148,10 @@
           </a:solidFill>
           <a:ln/>
         </p:spPr>
+        <p:txBody>
+          <a:bodyPr/>
+          <a:p/>
+        </p:txBody>
       </p:sp>
       <p:sp>
         <p:nvSpPr>
@@ -20776,6 +21288,10 @@
             </a:outerShdw>
           </a:effectLst>
         </p:spPr>
+        <p:txBody>
+          <a:bodyPr/>
+          <a:p/>
+        </p:txBody>
       </p:sp>
       <p:sp>
         <p:nvSpPr>
@@ -20954,6 +21470,10 @@
             </a:outerShdw>
           </a:effectLst>
         </p:spPr>
+        <p:txBody>
+          <a:bodyPr/>
+          <a:p/>
+        </p:txBody>
       </p:sp>
       <p:sp>
         <p:nvSpPr>
@@ -21088,6 +21608,10 @@
           </a:solidFill>
           <a:ln/>
         </p:spPr>
+        <p:txBody>
+          <a:bodyPr/>
+          <a:p/>
+        </p:txBody>
       </p:sp>
       <p:sp>
         <p:nvSpPr>
@@ -21247,7 +21771,7 @@
                 <a:ea typeface="微软雅黑" pitchFamily="34" charset="-122"/>
                 <a:cs typeface="微软雅黑" pitchFamily="34" charset="-120"/>
               </a:rPr>
-              <a:t>帮扶管理信息系统 v1.12.15</a:t>
+              <a:t>帮扶管理信息系统 v1.12.17</a:t>
             </a:r>
             <a:endParaRPr lang="en-US" sz="1050" dirty="0"/>
           </a:p>
@@ -21272,6 +21796,10 @@
           </a:solidFill>
           <a:ln/>
         </p:spPr>
+        <p:txBody>
+          <a:bodyPr/>
+          <a:p/>
+        </p:txBody>
       </p:sp>
       <p:sp>
         <p:nvSpPr>
@@ -21374,6 +21902,10 @@
           </a:solidFill>
           <a:ln/>
         </p:spPr>
+        <p:txBody>
+          <a:bodyPr/>
+          <a:p/>
+        </p:txBody>
       </p:sp>
       <p:sp>
         <p:nvSpPr>
@@ -21476,6 +22008,10 @@
           </a:solidFill>
           <a:ln/>
         </p:spPr>
+        <p:txBody>
+          <a:bodyPr/>
+          <a:p/>
+        </p:txBody>
       </p:sp>
       <p:sp>
         <p:nvSpPr>
@@ -21578,6 +22114,10 @@
           </a:solidFill>
           <a:ln/>
         </p:spPr>
+        <p:txBody>
+          <a:bodyPr/>
+          <a:p/>
+        </p:txBody>
       </p:sp>
       <p:sp>
         <p:nvSpPr>
@@ -21680,6 +22220,10 @@
           </a:solidFill>
           <a:ln/>
         </p:spPr>
+        <p:txBody>
+          <a:bodyPr/>
+          <a:p/>
+        </p:txBody>
       </p:sp>
       <p:sp>
         <p:nvSpPr>
@@ -21782,6 +22326,10 @@
           </a:solidFill>
           <a:ln/>
         </p:spPr>
+        <p:txBody>
+          <a:bodyPr/>
+          <a:p/>
+        </p:txBody>
       </p:sp>
       <p:sp>
         <p:nvSpPr>
@@ -22220,6 +22768,10 @@
           </a:solidFill>
           <a:ln/>
         </p:spPr>
+        <p:txBody>
+          <a:bodyPr/>
+          <a:p/>
+        </p:txBody>
       </p:sp>
       <p:sp>
         <p:nvSpPr>
@@ -22379,7 +22931,7 @@
                 <a:ea typeface="微软雅黑" pitchFamily="34" charset="-122"/>
                 <a:cs typeface="微软雅黑" pitchFamily="34" charset="-120"/>
               </a:rPr>
-              <a:t>帮扶管理信息系统 v1.12.15</a:t>
+              <a:t>帮扶管理信息系统 v1.12.17</a:t>
             </a:r>
             <a:endParaRPr lang="en-US" sz="1050" dirty="0"/>
           </a:p>
@@ -22404,6 +22956,10 @@
           </a:solidFill>
           <a:ln/>
         </p:spPr>
+        <p:txBody>
+          <a:bodyPr/>
+          <a:p/>
+        </p:txBody>
       </p:sp>
       <p:sp>
         <p:nvSpPr>
@@ -22465,6 +23021,10 @@
           </a:solidFill>
           <a:ln/>
         </p:spPr>
+        <p:txBody>
+          <a:bodyPr/>
+          <a:p/>
+        </p:txBody>
       </p:sp>
       <p:sp>
         <p:nvSpPr>
@@ -22526,6 +23086,10 @@
           </a:solidFill>
           <a:ln/>
         </p:spPr>
+        <p:txBody>
+          <a:bodyPr/>
+          <a:p/>
+        </p:txBody>
       </p:sp>
       <p:sp>
         <p:nvSpPr>
@@ -22587,6 +23151,10 @@
           </a:solidFill>
           <a:ln/>
         </p:spPr>
+        <p:txBody>
+          <a:bodyPr/>
+          <a:p/>
+        </p:txBody>
       </p:sp>
       <p:sp>
         <p:nvSpPr>
@@ -22648,6 +23216,10 @@
           </a:solidFill>
           <a:ln/>
         </p:spPr>
+        <p:txBody>
+          <a:bodyPr/>
+          <a:p/>
+        </p:txBody>
       </p:sp>
       <p:sp>
         <p:nvSpPr>
@@ -23013,7 +23585,7 @@
                 <a:ea typeface="微软雅黑" pitchFamily="34" charset="-122"/>
                 <a:cs typeface="微软雅黑" pitchFamily="34" charset="-120"/>
               </a:rPr>
-              <a:t>18,745 项自动化测试（后端 12,422 + 前端 6,323）</a:t>
+              <a:t>18,745 项自动化测试（后端 12716 + 前端 6363）</a:t>
             </a:r>
             <a:endParaRPr lang="en-US" sz="1400" dirty="0"/>
           </a:p>
@@ -23216,6 +23788,10 @@
           </a:solidFill>
           <a:ln/>
         </p:spPr>
+        <p:txBody>
+          <a:bodyPr/>
+          <a:p/>
+        </p:txBody>
       </p:sp>
       <p:sp>
         <p:nvSpPr>
@@ -23375,7 +23951,7 @@
                 <a:ea typeface="微软雅黑" pitchFamily="34" charset="-122"/>
                 <a:cs typeface="微软雅黑" pitchFamily="34" charset="-120"/>
               </a:rPr>
-              <a:t>帮扶管理信息系统 v1.12.15</a:t>
+              <a:t>帮扶管理信息系统 v1.12.17</a:t>
             </a:r>
             <a:endParaRPr lang="en-US" sz="1050" dirty="0"/>
           </a:p>
@@ -23432,7 +24008,7 @@
                 <a:ea typeface="微软雅黑" pitchFamily="34" charset="-122"/>
                 <a:cs typeface="微软雅黑" pitchFamily="34" charset="-120"/>
               </a:rPr>
-              <a:t>数据来源：2026-10-08 实测（v1.12.15）· 后端 12,422 / 前端 6,323 用例 · 覆盖率 100%（行+分支）</a:t>
+              <a:t>数据来源：2026-10-17 实测（v1.12.17）· 后端 12716 / 前端 6363 用例 · 覆盖率 100%（行+分支）</a:t>
             </a:r>
             <a:endParaRPr lang="en-US" sz="1050" dirty="0"/>
           </a:p>
@@ -23466,6 +24042,10 @@
             </a:outerShdw>
           </a:effectLst>
         </p:spPr>
+        <p:txBody>
+          <a:bodyPr/>
+          <a:p/>
+        </p:txBody>
       </p:sp>
       <p:sp>
         <p:nvSpPr>
@@ -23730,6 +24310,10 @@
           </a:solidFill>
           <a:ln/>
         </p:spPr>
+        <p:txBody>
+          <a:bodyPr/>
+          <a:p/>
+        </p:txBody>
       </p:sp>
       <p:sp>
         <p:nvSpPr>
@@ -23889,7 +24473,7 @@
                 <a:ea typeface="微软雅黑" pitchFamily="34" charset="-122"/>
                 <a:cs typeface="微软雅黑" pitchFamily="34" charset="-120"/>
               </a:rPr>
-              <a:t>帮扶管理信息系统 v1.12.15</a:t>
+              <a:t>帮扶管理信息系统 v1.12.17</a:t>
             </a:r>
             <a:endParaRPr lang="en-US" sz="1050" dirty="0"/>
           </a:p>
@@ -23916,6 +24500,10 @@
           </a:solidFill>
           <a:ln/>
         </p:spPr>
+        <p:txBody>
+          <a:bodyPr/>
+          <a:p/>
+        </p:txBody>
       </p:sp>
       <p:sp>
         <p:nvSpPr>
@@ -24020,6 +24608,10 @@
           </a:solidFill>
           <a:ln/>
         </p:spPr>
+        <p:txBody>
+          <a:bodyPr/>
+          <a:p/>
+        </p:txBody>
       </p:sp>
       <p:sp>
         <p:nvSpPr>
@@ -24124,6 +24716,10 @@
           </a:solidFill>
           <a:ln/>
         </p:spPr>
+        <p:txBody>
+          <a:bodyPr/>
+          <a:p/>
+        </p:txBody>
       </p:sp>
       <p:sp>
         <p:nvSpPr>
@@ -24228,6 +24824,10 @@
           </a:solidFill>
           <a:ln/>
         </p:spPr>
+        <p:txBody>
+          <a:bodyPr/>
+          <a:p/>
+        </p:txBody>
       </p:sp>
       <p:sp>
         <p:nvSpPr>
@@ -24403,6 +25003,10 @@
           </a:solidFill>
           <a:ln/>
         </p:spPr>
+        <p:txBody>
+          <a:bodyPr/>
+          <a:p/>
+        </p:txBody>
       </p:sp>
       <p:sp>
         <p:nvSpPr>
@@ -24562,7 +25166,7 @@
                 <a:ea typeface="微软雅黑" pitchFamily="34" charset="-122"/>
                 <a:cs typeface="微软雅黑" pitchFamily="34" charset="-120"/>
               </a:rPr>
-              <a:t>帮扶管理信息系统 v1.12.15</a:t>
+              <a:t>帮扶管理信息系统 v1.12.17</a:t>
             </a:r>
             <a:endParaRPr lang="en-US" sz="1050" dirty="0"/>
           </a:p>
@@ -24596,6 +25200,10 @@
             </a:outerShdw>
           </a:effectLst>
         </p:spPr>
+        <p:txBody>
+          <a:bodyPr/>
+          <a:p/>
+        </p:txBody>
       </p:sp>
       <p:sp>
         <p:nvSpPr>
@@ -24795,6 +25403,10 @@
             </a:outerShdw>
           </a:effectLst>
         </p:spPr>
+        <p:txBody>
+          <a:bodyPr/>
+          <a:p/>
+        </p:txBody>
       </p:sp>
       <p:sp>
         <p:nvSpPr>
@@ -25017,6 +25629,10 @@
           </a:solidFill>
           <a:ln/>
         </p:spPr>
+        <p:txBody>
+          <a:bodyPr/>
+          <a:p/>
+        </p:txBody>
       </p:sp>
       <p:sp>
         <p:nvSpPr>
@@ -25176,7 +25792,7 @@
                 <a:ea typeface="微软雅黑" pitchFamily="34" charset="-122"/>
                 <a:cs typeface="微软雅黑" pitchFamily="34" charset="-120"/>
               </a:rPr>
-              <a:t>帮扶管理信息系统 v1.12.15</a:t>
+              <a:t>帮扶管理信息系统 v1.12.17</a:t>
             </a:r>
             <a:endParaRPr lang="en-US" sz="1050" dirty="0"/>
           </a:p>
@@ -25210,6 +25826,10 @@
             </a:outerShdw>
           </a:effectLst>
         </p:spPr>
+        <p:txBody>
+          <a:bodyPr/>
+          <a:p/>
+        </p:txBody>
       </p:sp>
       <p:sp>
         <p:nvSpPr>
@@ -25409,6 +26029,10 @@
             </a:outerShdw>
           </a:effectLst>
         </p:spPr>
+        <p:txBody>
+          <a:bodyPr/>
+          <a:p/>
+        </p:txBody>
       </p:sp>
       <p:sp>
         <p:nvSpPr>
@@ -25956,6 +26580,10 @@
           </a:solidFill>
           <a:ln/>
         </p:spPr>
+        <p:txBody>
+          <a:bodyPr/>
+          <a:p/>
+        </p:txBody>
       </p:sp>
       <p:sp>
         <p:nvSpPr>
@@ -26115,7 +26743,7 @@
                 <a:ea typeface="微软雅黑" pitchFamily="34" charset="-122"/>
                 <a:cs typeface="微软雅黑" pitchFamily="34" charset="-120"/>
               </a:rPr>
-              <a:t>帮扶管理信息系统 v1.12.15</a:t>
+              <a:t>帮扶管理信息系统 v1.12.17</a:t>
             </a:r>
             <a:endParaRPr lang="en-US" sz="1050" dirty="0"/>
           </a:p>
@@ -26149,6 +26777,10 @@
             </a:outerShdw>
           </a:effectLst>
         </p:spPr>
+        <p:txBody>
+          <a:bodyPr/>
+          <a:p/>
+        </p:txBody>
       </p:sp>
       <p:sp>
         <p:nvSpPr>
@@ -26212,6 +26844,10 @@
           </a:solidFill>
           <a:ln/>
         </p:spPr>
+        <p:txBody>
+          <a:bodyPr/>
+          <a:p/>
+        </p:txBody>
       </p:sp>
       <p:sp>
         <p:nvSpPr>
@@ -26420,6 +27056,10 @@
             </a:outerShdw>
           </a:effectLst>
         </p:spPr>
+        <p:txBody>
+          <a:bodyPr/>
+          <a:p/>
+        </p:txBody>
       </p:sp>
       <p:sp>
         <p:nvSpPr>
@@ -26483,6 +27123,10 @@
           </a:solidFill>
           <a:ln/>
         </p:spPr>
+        <p:txBody>
+          <a:bodyPr/>
+          <a:p/>
+        </p:txBody>
       </p:sp>
       <p:sp>
         <p:nvSpPr>
@@ -26691,6 +27335,10 @@
             </a:outerShdw>
           </a:effectLst>
         </p:spPr>
+        <p:txBody>
+          <a:bodyPr/>
+          <a:p/>
+        </p:txBody>
       </p:sp>
       <p:sp>
         <p:nvSpPr>
@@ -26754,6 +27402,10 @@
           </a:solidFill>
           <a:ln/>
         </p:spPr>
+        <p:txBody>
+          <a:bodyPr/>
+          <a:p/>
+        </p:txBody>
       </p:sp>
       <p:sp>
         <p:nvSpPr>
@@ -27026,6 +27678,10 @@
           </a:solidFill>
           <a:ln/>
         </p:spPr>
+        <p:txBody>
+          <a:bodyPr/>
+          <a:p/>
+        </p:txBody>
       </p:sp>
       <p:sp>
         <p:nvSpPr>
@@ -27185,7 +27841,7 @@
                 <a:ea typeface="微软雅黑" pitchFamily="34" charset="-122"/>
                 <a:cs typeface="微软雅黑" pitchFamily="34" charset="-120"/>
               </a:rPr>
-              <a:t>帮扶管理信息系统 v1.12.15</a:t>
+              <a:t>帮扶管理信息系统 v1.12.17</a:t>
             </a:r>
             <a:endParaRPr lang="en-US" sz="1050" dirty="0"/>
           </a:p>
@@ -27219,6 +27875,10 @@
             </a:outerShdw>
           </a:effectLst>
         </p:spPr>
+        <p:txBody>
+          <a:bodyPr/>
+          <a:p/>
+        </p:txBody>
       </p:sp>
       <p:sp>
         <p:nvSpPr>
@@ -27418,6 +28078,10 @@
             </a:outerShdw>
           </a:effectLst>
         </p:spPr>
+        <p:txBody>
+          <a:bodyPr/>
+          <a:p/>
+        </p:txBody>
       </p:sp>
       <p:sp>
         <p:nvSpPr>
@@ -27661,6 +28325,10 @@
           </a:solidFill>
           <a:ln/>
         </p:spPr>
+        <p:txBody>
+          <a:bodyPr/>
+          <a:p/>
+        </p:txBody>
       </p:sp>
       <p:sp>
         <p:nvSpPr>
@@ -27820,7 +28488,7 @@
                 <a:ea typeface="微软雅黑" pitchFamily="34" charset="-122"/>
                 <a:cs typeface="微软雅黑" pitchFamily="34" charset="-120"/>
               </a:rPr>
-              <a:t>帮扶管理信息系统 v1.12.15</a:t>
+              <a:t>帮扶管理信息系统 v1.12.17</a:t>
             </a:r>
             <a:endParaRPr lang="en-US" sz="1050" dirty="0"/>
           </a:p>
@@ -27848,6 +28516,10 @@
             <a:prstDash val="solid"/>
           </a:ln>
         </p:spPr>
+        <p:txBody>
+          <a:bodyPr/>
+          <a:p/>
+        </p:txBody>
       </p:sp>
       <p:sp>
         <p:nvSpPr>
@@ -27868,6 +28540,10 @@
           </a:solidFill>
           <a:ln/>
         </p:spPr>
+        <p:txBody>
+          <a:bodyPr/>
+          <a:p/>
+        </p:txBody>
       </p:sp>
       <p:sp>
         <p:nvSpPr>
@@ -28011,6 +28687,10 @@
           </a:solidFill>
           <a:ln/>
         </p:spPr>
+        <p:txBody>
+          <a:bodyPr/>
+          <a:p/>
+        </p:txBody>
       </p:sp>
       <p:sp>
         <p:nvSpPr>
@@ -28154,6 +28834,10 @@
           </a:solidFill>
           <a:ln/>
         </p:spPr>
+        <p:txBody>
+          <a:bodyPr/>
+          <a:p/>
+        </p:txBody>
       </p:sp>
       <p:sp>
         <p:nvSpPr>
@@ -28297,6 +28981,10 @@
           </a:solidFill>
           <a:ln/>
         </p:spPr>
+        <p:txBody>
+          <a:bodyPr/>
+          <a:p/>
+        </p:txBody>
       </p:sp>
       <p:sp>
         <p:nvSpPr>
@@ -28440,6 +29128,10 @@
           </a:solidFill>
           <a:ln/>
         </p:spPr>
+        <p:txBody>
+          <a:bodyPr/>
+          <a:p/>
+        </p:txBody>
       </p:sp>
       <p:sp>
         <p:nvSpPr>
@@ -28592,6 +29284,10 @@
             </a:outerShdw>
           </a:effectLst>
         </p:spPr>
+        <p:txBody>
+          <a:bodyPr/>
+          <a:p/>
+        </p:txBody>
       </p:sp>
       <p:sp>
         <p:nvSpPr>
@@ -28628,7 +29324,7 @@
                 <a:ea typeface="微软雅黑" pitchFamily="34" charset="-122"/>
                 <a:cs typeface="微软雅黑" pitchFamily="34" charset="-120"/>
               </a:rPr>
-              <a:t>净效果：12,422 后端用例（行+分支覆盖率 100%）+ 6,323 前端用例全绿；Windows x64 与麒麟 ARM64 两个离线安装包由 GitHub Actions 全自动构建并发布 Release</a:t>
+              <a:t>净效果：12716 后端用例（行+分支覆盖率 100%）+ 6363 前端用例全绿；Windows x64 与麒麟 ARM64 两个离线安装包由 GitHub Actions 全自动构建并发布 Release</a:t>
             </a:r>
             <a:endParaRPr lang="en-US" sz="1350" dirty="0"/>
           </a:p>
@@ -28685,6 +29381,10 @@
           </a:solidFill>
           <a:ln/>
         </p:spPr>
+        <p:txBody>
+          <a:bodyPr/>
+          <a:p/>
+        </p:txBody>
       </p:sp>
       <p:sp>
         <p:nvSpPr>
@@ -28844,7 +29544,7 @@
                 <a:ea typeface="微软雅黑" pitchFamily="34" charset="-122"/>
                 <a:cs typeface="微软雅黑" pitchFamily="34" charset="-120"/>
               </a:rPr>
-              <a:t>帮扶管理信息系统 v1.12.15</a:t>
+              <a:t>帮扶管理信息系统 v1.12.17</a:t>
             </a:r>
             <a:endParaRPr lang="en-US" sz="1050" dirty="0"/>
           </a:p>
@@ -28910,6 +29610,10 @@
           </a:solidFill>
           <a:ln/>
         </p:spPr>
+        <p:txBody>
+          <a:bodyPr/>
+          <a:p/>
+        </p:txBody>
       </p:sp>
       <p:sp>
         <p:nvSpPr>
@@ -29012,6 +29716,10 @@
           </a:solidFill>
           <a:ln/>
         </p:spPr>
+        <p:txBody>
+          <a:bodyPr/>
+          <a:p/>
+        </p:txBody>
       </p:sp>
       <p:sp>
         <p:nvSpPr>
@@ -29114,6 +29822,10 @@
           </a:solidFill>
           <a:ln/>
         </p:spPr>
+        <p:txBody>
+          <a:bodyPr/>
+          <a:p/>
+        </p:txBody>
       </p:sp>
       <p:sp>
         <p:nvSpPr>
@@ -29248,6 +29960,10 @@
           </a:solidFill>
           <a:ln/>
         </p:spPr>
+        <p:txBody>
+          <a:bodyPr/>
+          <a:p/>
+        </p:txBody>
       </p:sp>
       <p:sp>
         <p:nvSpPr>
@@ -29407,7 +30123,7 @@
                 <a:ea typeface="微软雅黑" pitchFamily="34" charset="-122"/>
                 <a:cs typeface="微软雅黑" pitchFamily="34" charset="-120"/>
               </a:rPr>
-              <a:t>帮扶管理信息系统 v1.12.15</a:t>
+              <a:t>帮扶管理信息系统 v1.12.17</a:t>
             </a:r>
             <a:endParaRPr lang="en-US" sz="1050" dirty="0"/>
           </a:p>
@@ -29441,6 +30157,10 @@
             </a:outerShdw>
           </a:effectLst>
         </p:spPr>
+        <p:txBody>
+          <a:bodyPr/>
+          <a:p/>
+        </p:txBody>
       </p:sp>
       <p:sp>
         <p:nvSpPr>
@@ -29552,6 +30272,10 @@
             </a:outerShdw>
           </a:effectLst>
         </p:spPr>
+        <p:txBody>
+          <a:bodyPr/>
+          <a:p/>
+        </p:txBody>
       </p:sp>
       <p:sp>
         <p:nvSpPr>
@@ -29663,6 +30387,10 @@
             </a:outerShdw>
           </a:effectLst>
         </p:spPr>
+        <p:txBody>
+          <a:bodyPr/>
+          <a:p/>
+        </p:txBody>
       </p:sp>
       <p:sp>
         <p:nvSpPr>
@@ -29774,6 +30502,10 @@
             </a:outerShdw>
           </a:effectLst>
         </p:spPr>
+        <p:txBody>
+          <a:bodyPr/>
+          <a:p/>
+        </p:txBody>
       </p:sp>
       <p:sp>
         <p:nvSpPr>
@@ -29885,6 +30617,10 @@
             </a:outerShdw>
           </a:effectLst>
         </p:spPr>
+        <p:txBody>
+          <a:bodyPr/>
+          <a:p/>
+        </p:txBody>
       </p:sp>
       <p:sp>
         <p:nvSpPr>
@@ -29996,6 +30732,10 @@
             </a:outerShdw>
           </a:effectLst>
         </p:spPr>
+        <p:txBody>
+          <a:bodyPr/>
+          <a:p/>
+        </p:txBody>
       </p:sp>
       <p:sp>
         <p:nvSpPr>
@@ -30130,6 +30870,10 @@
           </a:solidFill>
           <a:ln/>
         </p:spPr>
+        <p:txBody>
+          <a:bodyPr/>
+          <a:p/>
+        </p:txBody>
       </p:sp>
       <p:sp>
         <p:nvSpPr>
@@ -30150,6 +30894,10 @@
           </a:solidFill>
           <a:ln/>
         </p:spPr>
+        <p:txBody>
+          <a:bodyPr/>
+          <a:p/>
+        </p:txBody>
       </p:sp>
       <p:sp>
         <p:nvSpPr>
@@ -30268,7 +31016,7 @@
                 <a:ea typeface="微软雅黑" pitchFamily="34" charset="-122"/>
                 <a:cs typeface="微软雅黑" pitchFamily="34" charset="-120"/>
               </a:rPr>
-              <a:t>帮扶管理信息系统 v1.12.15  ·  仓库：github.com/lzh745200/MRRS  ·  完整文档见 docs/ 目录</a:t>
+              <a:t>帮扶管理信息系统 v1.12.17  ·  仓库：github.com/lzh745200/MRRS  ·  完整文档见 docs/ 目录</a:t>
             </a:r>
             <a:endParaRPr lang="en-US" sz="1350" dirty="0"/>
           </a:p>
@@ -30309,7 +31057,7 @@
                 <a:ea typeface="微软雅黑" pitchFamily="34" charset="-122"/>
                 <a:cs typeface="微软雅黑" pitchFamily="34" charset="-120"/>
               </a:rPr>
-              <a:t>12,422 后端用例（行+分支覆盖率 100%）+ 6,323 前端用例 全绿守护 · Windows x64 / 麒麟 ARM64 双平台离线交付</a:t>
+              <a:t>12716 后端用例（行+分支覆盖率 100%）+ 6363 前端用例 全绿守护 · Windows x64 / 麒麟 ARM64 双平台离线交付</a:t>
             </a:r>
             <a:endParaRPr lang="en-US" sz="1350" dirty="0"/>
           </a:p>
@@ -30366,6 +31114,10 @@
           </a:solidFill>
           <a:ln/>
         </p:spPr>
+        <p:txBody>
+          <a:bodyPr/>
+          <a:p/>
+        </p:txBody>
       </p:sp>
       <p:sp>
         <p:nvSpPr>
@@ -30525,7 +31277,7 @@
                 <a:ea typeface="微软雅黑" pitchFamily="34" charset="-122"/>
                 <a:cs typeface="微软雅黑" pitchFamily="34" charset="-120"/>
               </a:rPr>
-              <a:t>帮扶管理信息系统 v1.12.15</a:t>
+              <a:t>帮扶管理信息系统 v1.12.17</a:t>
             </a:r>
             <a:endParaRPr lang="en-US" sz="1050" dirty="0"/>
           </a:p>
@@ -30559,6 +31311,10 @@
             </a:outerShdw>
           </a:effectLst>
         </p:spPr>
+        <p:txBody>
+          <a:bodyPr/>
+          <a:p/>
+        </p:txBody>
       </p:sp>
       <p:sp>
         <p:nvSpPr>
@@ -30579,6 +31335,10 @@
           </a:solidFill>
           <a:ln/>
         </p:spPr>
+        <p:txBody>
+          <a:bodyPr/>
+          <a:p/>
+        </p:txBody>
       </p:sp>
       <p:sp>
         <p:nvSpPr>
@@ -30690,6 +31450,10 @@
             </a:outerShdw>
           </a:effectLst>
         </p:spPr>
+        <p:txBody>
+          <a:bodyPr/>
+          <a:p/>
+        </p:txBody>
       </p:sp>
       <p:sp>
         <p:nvSpPr>
@@ -30710,6 +31474,10 @@
           </a:solidFill>
           <a:ln/>
         </p:spPr>
+        <p:txBody>
+          <a:bodyPr/>
+          <a:p/>
+        </p:txBody>
       </p:sp>
       <p:sp>
         <p:nvSpPr>
@@ -30821,6 +31589,10 @@
             </a:outerShdw>
           </a:effectLst>
         </p:spPr>
+        <p:txBody>
+          <a:bodyPr/>
+          <a:p/>
+        </p:txBody>
       </p:sp>
       <p:sp>
         <p:nvSpPr>
@@ -30841,6 +31613,10 @@
           </a:solidFill>
           <a:ln/>
         </p:spPr>
+        <p:txBody>
+          <a:bodyPr/>
+          <a:p/>
+        </p:txBody>
       </p:sp>
       <p:sp>
         <p:nvSpPr>
@@ -30952,6 +31728,10 @@
             </a:outerShdw>
           </a:effectLst>
         </p:spPr>
+        <p:txBody>
+          <a:bodyPr/>
+          <a:p/>
+        </p:txBody>
       </p:sp>
       <p:sp>
         <p:nvSpPr>
@@ -30972,6 +31752,10 @@
           </a:solidFill>
           <a:ln/>
         </p:spPr>
+        <p:txBody>
+          <a:bodyPr/>
+          <a:p/>
+        </p:txBody>
       </p:sp>
       <p:sp>
         <p:nvSpPr>
@@ -31106,6 +31890,10 @@
           </a:solidFill>
           <a:ln/>
         </p:spPr>
+        <p:txBody>
+          <a:bodyPr/>
+          <a:p/>
+        </p:txBody>
       </p:sp>
       <p:sp>
         <p:nvSpPr>
@@ -31265,7 +32053,7 @@
                 <a:ea typeface="微软雅黑" pitchFamily="34" charset="-122"/>
                 <a:cs typeface="微软雅黑" pitchFamily="34" charset="-120"/>
               </a:rPr>
-              <a:t>帮扶管理信息系统 v1.12.15</a:t>
+              <a:t>帮扶管理信息系统 v1.12.17</a:t>
             </a:r>
             <a:endParaRPr lang="en-US" sz="1050" dirty="0"/>
           </a:p>
@@ -31306,7 +32094,7 @@
                 <a:ea typeface="微软雅黑" pitchFamily="34" charset="-122"/>
                 <a:cs typeface="微软雅黑" pitchFamily="34" charset="-120"/>
               </a:rPr>
-              <a:t>12,422</a:t>
+              <a:t>12716</a:t>
             </a:r>
             <a:endParaRPr lang="en-US" sz="4000" dirty="0"/>
           </a:p>
@@ -31388,7 +32176,7 @@
                 <a:ea typeface="微软雅黑" pitchFamily="34" charset="-122"/>
                 <a:cs typeface="微软雅黑" pitchFamily="34" charset="-120"/>
               </a:rPr>
-              <a:t>6,323</a:t>
+              <a:t>6363</a:t>
             </a:r>
             <a:endParaRPr lang="en-US" sz="4000" dirty="0"/>
           </a:p>
@@ -31621,6 +32409,10 @@
             <a:prstDash val="solid"/>
           </a:ln>
         </p:spPr>
+        <p:txBody>
+          <a:bodyPr/>
+          <a:p/>
+        </p:txBody>
       </p:sp>
       <p:sp>
         <p:nvSpPr>
@@ -31985,7 +32777,7 @@
                 <a:ea typeface="微软雅黑" pitchFamily="34" charset="-122"/>
                 <a:cs typeface="微软雅黑" pitchFamily="34" charset="-120"/>
               </a:rPr>
-              <a:t>数据来源：2026-10-08 仓库实测（v1.12.15）—— 后端 12,422 用例全绿 / 行+分支覆盖率 100%（branch=True 严格门禁）· 前端 6,323 用例全绿 · flake8 0 · bandit 0 中高危 · vue-tsc 0 · eslint 0 警告</a:t>
+              <a:t>数据来源：2026-10-17 仓库实测（v1.12.17）—— 后端 12716 用例全绿 / 行+分支覆盖率 100%（branch=True 严格门禁）· 前端 6363 用例全绿 · flake8 0 · bandit 0 中高危 · vue-tsc 0 · eslint 0 警告</a:t>
             </a:r>
             <a:endParaRPr lang="en-US" sz="1000" dirty="0"/>
           </a:p>
@@ -32346,6 +33138,10 @@
           </a:solidFill>
           <a:ln/>
         </p:spPr>
+        <p:txBody>
+          <a:bodyPr/>
+          <a:p/>
+        </p:txBody>
       </p:sp>
       <p:sp>
         <p:nvSpPr>
@@ -32505,7 +33301,7 @@
                 <a:ea typeface="微软雅黑" pitchFamily="34" charset="-122"/>
                 <a:cs typeface="微软雅黑" pitchFamily="34" charset="-120"/>
               </a:rPr>
-              <a:t>帮扶管理信息系统 v1.12.15</a:t>
+              <a:t>帮扶管理信息系统 v1.12.17</a:t>
             </a:r>
             <a:endParaRPr lang="en-US" sz="1050" dirty="0"/>
           </a:p>
@@ -32539,6 +33335,10 @@
             </a:outerShdw>
           </a:effectLst>
         </p:spPr>
+        <p:txBody>
+          <a:bodyPr/>
+          <a:p/>
+        </p:txBody>
       </p:sp>
       <p:sp>
         <p:nvSpPr>
@@ -32758,6 +33558,10 @@
             </a:outerShdw>
           </a:effectLst>
         </p:spPr>
+        <p:txBody>
+          <a:bodyPr/>
+          <a:p/>
+        </p:txBody>
       </p:sp>
       <p:sp>
         <p:nvSpPr>
@@ -32977,6 +33781,10 @@
             </a:outerShdw>
           </a:effectLst>
         </p:spPr>
+        <p:txBody>
+          <a:bodyPr/>
+          <a:p/>
+        </p:txBody>
       </p:sp>
       <p:sp>
         <p:nvSpPr>
@@ -33196,6 +34004,10 @@
             </a:outerShdw>
           </a:effectLst>
         </p:spPr>
+        <p:txBody>
+          <a:bodyPr/>
+          <a:p/>
+        </p:txBody>
       </p:sp>
       <p:sp>
         <p:nvSpPr>
@@ -33438,6 +34250,10 @@
           </a:solidFill>
           <a:ln/>
         </p:spPr>
+        <p:txBody>
+          <a:bodyPr/>
+          <a:p/>
+        </p:txBody>
       </p:sp>
       <p:sp>
         <p:nvSpPr>
@@ -33597,7 +34413,7 @@
                 <a:ea typeface="微软雅黑" pitchFamily="34" charset="-122"/>
                 <a:cs typeface="微软雅黑" pitchFamily="34" charset="-120"/>
               </a:rPr>
-              <a:t>帮扶管理信息系统 v1.12.15</a:t>
+              <a:t>帮扶管理信息系统 v1.12.17</a:t>
             </a:r>
             <a:endParaRPr lang="en-US" sz="1050" dirty="0"/>
           </a:p>
@@ -33624,6 +34440,10 @@
           </a:solidFill>
           <a:ln/>
         </p:spPr>
+        <p:txBody>
+          <a:bodyPr/>
+          <a:p/>
+        </p:txBody>
       </p:sp>
       <p:sp>
         <p:nvSpPr>
@@ -33730,6 +34550,10 @@
             <a:tailEnd type="triangle"/>
           </a:ln>
         </p:spPr>
+        <p:txBody>
+          <a:bodyPr/>
+          <a:p/>
+        </p:txBody>
       </p:sp>
       <p:sp>
         <p:nvSpPr>
@@ -33752,6 +34576,10 @@
           </a:solidFill>
           <a:ln/>
         </p:spPr>
+        <p:txBody>
+          <a:bodyPr/>
+          <a:p/>
+        </p:txBody>
       </p:sp>
       <p:sp>
         <p:nvSpPr>
@@ -33858,6 +34686,10 @@
             <a:tailEnd type="triangle"/>
           </a:ln>
         </p:spPr>
+        <p:txBody>
+          <a:bodyPr/>
+          <a:p/>
+        </p:txBody>
       </p:sp>
       <p:sp>
         <p:nvSpPr>
@@ -33880,6 +34712,10 @@
           </a:solidFill>
           <a:ln/>
         </p:spPr>
+        <p:txBody>
+          <a:bodyPr/>
+          <a:p/>
+        </p:txBody>
       </p:sp>
       <p:sp>
         <p:nvSpPr>
@@ -33986,6 +34822,10 @@
             <a:tailEnd type="triangle"/>
           </a:ln>
         </p:spPr>
+        <p:txBody>
+          <a:bodyPr/>
+          <a:p/>
+        </p:txBody>
       </p:sp>
       <p:sp>
         <p:nvSpPr>
@@ -34008,6 +34848,10 @@
           </a:solidFill>
           <a:ln/>
         </p:spPr>
+        <p:txBody>
+          <a:bodyPr/>
+          <a:p/>
+        </p:txBody>
       </p:sp>
       <p:sp>
         <p:nvSpPr>

--- a/帮扶管理信息系统介绍.pptx
+++ b/帮扶管理信息系统介绍.pptx
@@ -4976,7 +4976,7 @@
                 <a:ea typeface="微软雅黑" pitchFamily="34" charset="-122"/>
                 <a:cs typeface="微软雅黑" pitchFamily="34" charset="-120"/>
               </a:rPr>
-              <a:t>V1.12.17  |  2026-10-17  |  FastAPI + Vue 3 + Electron + SQLite</a:t>
+              <a:t>V1.12.18  |  2026-10-17  |  FastAPI + Vue 3 + Electron + SQLite</a:t>
             </a:r>
             <a:endParaRPr lang="en-US" sz="1250" dirty="0"/>
           </a:p>
@@ -5196,7 +5196,7 @@
                 <a:ea typeface="微软雅黑" pitchFamily="34" charset="-122"/>
                 <a:cs typeface="微软雅黑" pitchFamily="34" charset="-120"/>
               </a:rPr>
-              <a:t>帮扶管理信息系统 v1.12.17</a:t>
+              <a:t>帮扶管理信息系统 v1.12.18</a:t>
             </a:r>
             <a:endParaRPr lang="en-US" sz="1050" dirty="0"/>
           </a:p>
@@ -5378,7 +5378,7 @@
                 <a:ea typeface="微软雅黑" pitchFamily="34" charset="-122"/>
                 <a:cs typeface="微软雅黑" pitchFamily="34" charset="-120"/>
               </a:rPr>
-              <a:t>299 个测试文件 · 6363 个用例</a:t>
+              <a:t>301 个测试文件 · 6363 个用例</a:t>
             </a:r>
             <a:endParaRPr lang="en-US" sz="1350" dirty="0"/>
           </a:p>
@@ -5822,7 +5822,7 @@
                 <a:ea typeface="微软雅黑" pitchFamily="34" charset="-122"/>
                 <a:cs typeface="微软雅黑" pitchFamily="34" charset="-120"/>
               </a:rPr>
-              <a:t>帮扶管理信息系统 v1.12.17</a:t>
+              <a:t>帮扶管理信息系统 v1.12.18</a:t>
             </a:r>
             <a:endParaRPr lang="en-US" sz="1050" dirty="0"/>
           </a:p>
@@ -6754,7 +6754,7 @@
                 <a:ea typeface="微软雅黑" pitchFamily="34" charset="-122"/>
                 <a:cs typeface="微软雅黑" pitchFamily="34" charset="-120"/>
               </a:rPr>
-              <a:t>帮扶管理信息系统 v1.12.17</a:t>
+              <a:t>帮扶管理信息系统 v1.12.18</a:t>
             </a:r>
             <a:endParaRPr lang="en-US" sz="1050" dirty="0"/>
           </a:p>
@@ -7380,7 +7380,7 @@
                 <a:ea typeface="微软雅黑" pitchFamily="34" charset="-122"/>
                 <a:cs typeface="微软雅黑" pitchFamily="34" charset="-120"/>
               </a:rPr>
-              <a:t>帮扶管理信息系统 v1.12.17</a:t>
+              <a:t>帮扶管理信息系统 v1.12.18</a:t>
             </a:r>
             <a:endParaRPr lang="en-US" sz="1050" dirty="0"/>
           </a:p>
@@ -8809,7 +8809,7 @@
                 <a:ea typeface="微软雅黑" pitchFamily="34" charset="-122"/>
                 <a:cs typeface="微软雅黑" pitchFamily="34" charset="-120"/>
               </a:rPr>
-              <a:t>帮扶管理信息系统 v1.12.17</a:t>
+              <a:t>帮扶管理信息系统 v1.12.18</a:t>
             </a:r>
             <a:endParaRPr lang="en-US" sz="1050" dirty="0"/>
           </a:p>
@@ -10006,7 +10006,7 @@
                 <a:ea typeface="微软雅黑" pitchFamily="34" charset="-122"/>
                 <a:cs typeface="微软雅黑" pitchFamily="34" charset="-120"/>
               </a:rPr>
-              <a:t>帮扶管理信息系统 v1.12.17</a:t>
+              <a:t>帮扶管理信息系统 v1.12.18</a:t>
             </a:r>
             <a:endParaRPr lang="en-US" sz="1050" dirty="0"/>
           </a:p>
@@ -10632,7 +10632,7 @@
                 <a:ea typeface="微软雅黑" pitchFamily="34" charset="-122"/>
                 <a:cs typeface="微软雅黑" pitchFamily="34" charset="-120"/>
               </a:rPr>
-              <a:t>帮扶管理信息系统 v1.12.17</a:t>
+              <a:t>帮扶管理信息系统 v1.12.18</a:t>
             </a:r>
             <a:endParaRPr lang="en-US" sz="1050" dirty="0"/>
           </a:p>
@@ -11496,7 +11496,7 @@
                 <a:ea typeface="微软雅黑" pitchFamily="34" charset="-122"/>
                 <a:cs typeface="微软雅黑" pitchFamily="34" charset="-120"/>
               </a:rPr>
-              <a:t>帮扶管理信息系统 v1.12.17</a:t>
+              <a:t>帮扶管理信息系统 v1.12.18</a:t>
             </a:r>
             <a:endParaRPr lang="en-US" sz="1050" dirty="0"/>
           </a:p>
@@ -12235,7 +12235,7 @@
                 <a:ea typeface="微软雅黑" pitchFamily="34" charset="-122"/>
                 <a:cs typeface="微软雅黑" pitchFamily="34" charset="-120"/>
               </a:rPr>
-              <a:t>帮扶管理信息系统 v1.12.17</a:t>
+              <a:t>帮扶管理信息系统 v1.12.18</a:t>
             </a:r>
             <a:endParaRPr lang="en-US" sz="1050" dirty="0"/>
           </a:p>
@@ -14829,7 +14829,7 @@
                 <a:ea typeface="微软雅黑" pitchFamily="34" charset="-122"/>
                 <a:cs typeface="微软雅黑" pitchFamily="34" charset="-120"/>
               </a:rPr>
-              <a:t>帮扶管理信息系统 v1.12.17</a:t>
+              <a:t>帮扶管理信息系统 v1.12.18</a:t>
             </a:r>
             <a:endParaRPr lang="en-US" sz="1050" dirty="0"/>
           </a:p>
@@ -15455,7 +15455,7 @@
                 <a:ea typeface="微软雅黑" pitchFamily="34" charset="-122"/>
                 <a:cs typeface="微软雅黑" pitchFamily="34" charset="-120"/>
               </a:rPr>
-              <a:t>帮扶管理信息系统 v1.12.17</a:t>
+              <a:t>帮扶管理信息系统 v1.12.18</a:t>
             </a:r>
             <a:endParaRPr lang="en-US" sz="1050" dirty="0"/>
           </a:p>
@@ -16150,7 +16150,7 @@
                 <a:ea typeface="微软雅黑" pitchFamily="34" charset="-122"/>
                 <a:cs typeface="微软雅黑" pitchFamily="34" charset="-120"/>
               </a:rPr>
-              <a:t>帮扶管理信息系统 v1.12.17</a:t>
+              <a:t>帮扶管理信息系统 v1.12.18</a:t>
             </a:r>
             <a:endParaRPr lang="en-US" sz="1050" dirty="0"/>
           </a:p>
@@ -16849,7 +16849,7 @@
                 <a:ea typeface="微软雅黑" pitchFamily="34" charset="-122"/>
                 <a:cs typeface="微软雅黑" pitchFamily="34" charset="-120"/>
               </a:rPr>
-              <a:t>帮扶管理信息系统 v1.12.17</a:t>
+              <a:t>帮扶管理信息系统 v1.12.18</a:t>
             </a:r>
             <a:endParaRPr lang="en-US" sz="1050" dirty="0"/>
           </a:p>
@@ -17759,7 +17759,7 @@
                 <a:ea typeface="微软雅黑" pitchFamily="34" charset="-122"/>
                 <a:cs typeface="微软雅黑" pitchFamily="34" charset="-120"/>
               </a:rPr>
-              <a:t>帮扶管理信息系统 v1.12.17</a:t>
+              <a:t>帮扶管理信息系统 v1.12.18</a:t>
             </a:r>
             <a:endParaRPr lang="en-US" sz="1050" dirty="0"/>
           </a:p>
@@ -18973,7 +18973,7 @@
                 <a:ea typeface="微软雅黑" pitchFamily="34" charset="-122"/>
                 <a:cs typeface="微软雅黑" pitchFamily="34" charset="-120"/>
               </a:rPr>
-              <a:t>帮扶管理信息系统 v1.12.17</a:t>
+              <a:t>帮扶管理信息系统 v1.12.18</a:t>
             </a:r>
             <a:endParaRPr lang="en-US" sz="1050" dirty="0"/>
           </a:p>
@@ -20008,7 +20008,7 @@
                 <a:ea typeface="微软雅黑" pitchFamily="34" charset="-122"/>
                 <a:cs typeface="微软雅黑" pitchFamily="34" charset="-120"/>
               </a:rPr>
-              <a:t>帮扶管理信息系统 v1.12.17</a:t>
+              <a:t>帮扶管理信息系统 v1.12.18</a:t>
             </a:r>
             <a:endParaRPr lang="en-US" sz="1050" dirty="0"/>
           </a:p>
@@ -20857,7 +20857,7 @@
                 <a:ea typeface="微软雅黑" pitchFamily="34" charset="-122"/>
                 <a:cs typeface="微软雅黑" pitchFamily="34" charset="-120"/>
               </a:rPr>
-              <a:t>帮扶管理信息系统 v1.12.17</a:t>
+              <a:t>帮扶管理信息系统 v1.12.18</a:t>
             </a:r>
             <a:endParaRPr lang="en-US" sz="1050" dirty="0"/>
           </a:p>
@@ -21771,7 +21771,7 @@
                 <a:ea typeface="微软雅黑" pitchFamily="34" charset="-122"/>
                 <a:cs typeface="微软雅黑" pitchFamily="34" charset="-120"/>
               </a:rPr>
-              <a:t>帮扶管理信息系统 v1.12.17</a:t>
+              <a:t>帮扶管理信息系统 v1.12.18</a:t>
             </a:r>
             <a:endParaRPr lang="en-US" sz="1050" dirty="0"/>
           </a:p>
@@ -22931,7 +22931,7 @@
                 <a:ea typeface="微软雅黑" pitchFamily="34" charset="-122"/>
                 <a:cs typeface="微软雅黑" pitchFamily="34" charset="-120"/>
               </a:rPr>
-              <a:t>帮扶管理信息系统 v1.12.17</a:t>
+              <a:t>帮扶管理信息系统 v1.12.18</a:t>
             </a:r>
             <a:endParaRPr lang="en-US" sz="1050" dirty="0"/>
           </a:p>
@@ -23585,7 +23585,7 @@
                 <a:ea typeface="微软雅黑" pitchFamily="34" charset="-122"/>
                 <a:cs typeface="微软雅黑" pitchFamily="34" charset="-120"/>
               </a:rPr>
-              <a:t>18,745 项自动化测试（后端 12716 + 前端 6363）</a:t>
+              <a:t>18,745 项自动化测试（后端 12795 + 前端 6363）</a:t>
             </a:r>
             <a:endParaRPr lang="en-US" sz="1400" dirty="0"/>
           </a:p>
@@ -23951,7 +23951,7 @@
                 <a:ea typeface="微软雅黑" pitchFamily="34" charset="-122"/>
                 <a:cs typeface="微软雅黑" pitchFamily="34" charset="-120"/>
               </a:rPr>
-              <a:t>帮扶管理信息系统 v1.12.17</a:t>
+              <a:t>帮扶管理信息系统 v1.12.18</a:t>
             </a:r>
             <a:endParaRPr lang="en-US" sz="1050" dirty="0"/>
           </a:p>
@@ -24008,7 +24008,7 @@
                 <a:ea typeface="微软雅黑" pitchFamily="34" charset="-122"/>
                 <a:cs typeface="微软雅黑" pitchFamily="34" charset="-120"/>
               </a:rPr>
-              <a:t>数据来源：2026-10-17 实测（v1.12.17）· 后端 12716 / 前端 6363 用例 · 覆盖率 100%（行+分支）</a:t>
+              <a:t>数据来源：2026-10-17 实测（v1.12.18）· 后端 12795 / 前端 6363 用例 · 覆盖率 100%（行+分支）</a:t>
             </a:r>
             <a:endParaRPr lang="en-US" sz="1050" dirty="0"/>
           </a:p>
@@ -24473,7 +24473,7 @@
                 <a:ea typeface="微软雅黑" pitchFamily="34" charset="-122"/>
                 <a:cs typeface="微软雅黑" pitchFamily="34" charset="-120"/>
               </a:rPr>
-              <a:t>帮扶管理信息系统 v1.12.17</a:t>
+              <a:t>帮扶管理信息系统 v1.12.18</a:t>
             </a:r>
             <a:endParaRPr lang="en-US" sz="1050" dirty="0"/>
           </a:p>
@@ -25166,7 +25166,7 @@
                 <a:ea typeface="微软雅黑" pitchFamily="34" charset="-122"/>
                 <a:cs typeface="微软雅黑" pitchFamily="34" charset="-120"/>
               </a:rPr>
-              <a:t>帮扶管理信息系统 v1.12.17</a:t>
+              <a:t>帮扶管理信息系统 v1.12.18</a:t>
             </a:r>
             <a:endParaRPr lang="en-US" sz="1050" dirty="0"/>
           </a:p>
@@ -25792,7 +25792,7 @@
                 <a:ea typeface="微软雅黑" pitchFamily="34" charset="-122"/>
                 <a:cs typeface="微软雅黑" pitchFamily="34" charset="-120"/>
               </a:rPr>
-              <a:t>帮扶管理信息系统 v1.12.17</a:t>
+              <a:t>帮扶管理信息系统 v1.12.18</a:t>
             </a:r>
             <a:endParaRPr lang="en-US" sz="1050" dirty="0"/>
           </a:p>
@@ -26743,7 +26743,7 @@
                 <a:ea typeface="微软雅黑" pitchFamily="34" charset="-122"/>
                 <a:cs typeface="微软雅黑" pitchFamily="34" charset="-120"/>
               </a:rPr>
-              <a:t>帮扶管理信息系统 v1.12.17</a:t>
+              <a:t>帮扶管理信息系统 v1.12.18</a:t>
             </a:r>
             <a:endParaRPr lang="en-US" sz="1050" dirty="0"/>
           </a:p>
@@ -27841,7 +27841,7 @@
                 <a:ea typeface="微软雅黑" pitchFamily="34" charset="-122"/>
                 <a:cs typeface="微软雅黑" pitchFamily="34" charset="-120"/>
               </a:rPr>
-              <a:t>帮扶管理信息系统 v1.12.17</a:t>
+              <a:t>帮扶管理信息系统 v1.12.18</a:t>
             </a:r>
             <a:endParaRPr lang="en-US" sz="1050" dirty="0"/>
           </a:p>
@@ -28488,7 +28488,7 @@
                 <a:ea typeface="微软雅黑" pitchFamily="34" charset="-122"/>
                 <a:cs typeface="微软雅黑" pitchFamily="34" charset="-120"/>
               </a:rPr>
-              <a:t>帮扶管理信息系统 v1.12.17</a:t>
+              <a:t>帮扶管理信息系统 v1.12.18</a:t>
             </a:r>
             <a:endParaRPr lang="en-US" sz="1050" dirty="0"/>
           </a:p>
@@ -29324,7 +29324,7 @@
                 <a:ea typeface="微软雅黑" pitchFamily="34" charset="-122"/>
                 <a:cs typeface="微软雅黑" pitchFamily="34" charset="-120"/>
               </a:rPr>
-              <a:t>净效果：12716 后端用例（行+分支覆盖率 100%）+ 6363 前端用例全绿；Windows x64 与麒麟 ARM64 两个离线安装包由 GitHub Actions 全自动构建并发布 Release</a:t>
+              <a:t>净效果：12795 后端用例（行+分支覆盖率 100%）+ 6363 前端用例全绿；Windows x64 与麒麟 ARM64 两个离线安装包由 GitHub Actions 全自动构建并发布 Release</a:t>
             </a:r>
             <a:endParaRPr lang="en-US" sz="1350" dirty="0"/>
           </a:p>
@@ -29544,7 +29544,7 @@
                 <a:ea typeface="微软雅黑" pitchFamily="34" charset="-122"/>
                 <a:cs typeface="微软雅黑" pitchFamily="34" charset="-120"/>
               </a:rPr>
-              <a:t>帮扶管理信息系统 v1.12.17</a:t>
+              <a:t>帮扶管理信息系统 v1.12.18</a:t>
             </a:r>
             <a:endParaRPr lang="en-US" sz="1050" dirty="0"/>
           </a:p>
@@ -30123,7 +30123,7 @@
                 <a:ea typeface="微软雅黑" pitchFamily="34" charset="-122"/>
                 <a:cs typeface="微软雅黑" pitchFamily="34" charset="-120"/>
               </a:rPr>
-              <a:t>帮扶管理信息系统 v1.12.17</a:t>
+              <a:t>帮扶管理信息系统 v1.12.18</a:t>
             </a:r>
             <a:endParaRPr lang="en-US" sz="1050" dirty="0"/>
           </a:p>
@@ -31016,7 +31016,7 @@
                 <a:ea typeface="微软雅黑" pitchFamily="34" charset="-122"/>
                 <a:cs typeface="微软雅黑" pitchFamily="34" charset="-120"/>
               </a:rPr>
-              <a:t>帮扶管理信息系统 v1.12.17  ·  仓库：github.com/lzh745200/MRRS  ·  完整文档见 docs/ 目录</a:t>
+              <a:t>帮扶管理信息系统 v1.12.18  ·  仓库：github.com/lzh745200/MRRS  ·  完整文档见 docs/ 目录</a:t>
             </a:r>
             <a:endParaRPr lang="en-US" sz="1350" dirty="0"/>
           </a:p>
@@ -31057,7 +31057,7 @@
                 <a:ea typeface="微软雅黑" pitchFamily="34" charset="-122"/>
                 <a:cs typeface="微软雅黑" pitchFamily="34" charset="-120"/>
               </a:rPr>
-              <a:t>12716 后端用例（行+分支覆盖率 100%）+ 6363 前端用例 全绿守护 · Windows x64 / 麒麟 ARM64 双平台离线交付</a:t>
+              <a:t>12795 后端用例（行+分支覆盖率 100%）+ 6363 前端用例 全绿守护 · Windows x64 / 麒麟 ARM64 双平台离线交付</a:t>
             </a:r>
             <a:endParaRPr lang="en-US" sz="1350" dirty="0"/>
           </a:p>
@@ -31277,7 +31277,7 @@
                 <a:ea typeface="微软雅黑" pitchFamily="34" charset="-122"/>
                 <a:cs typeface="微软雅黑" pitchFamily="34" charset="-120"/>
               </a:rPr>
-              <a:t>帮扶管理信息系统 v1.12.17</a:t>
+              <a:t>帮扶管理信息系统 v1.12.18</a:t>
             </a:r>
             <a:endParaRPr lang="en-US" sz="1050" dirty="0"/>
           </a:p>
@@ -32053,7 +32053,7 @@
                 <a:ea typeface="微软雅黑" pitchFamily="34" charset="-122"/>
                 <a:cs typeface="微软雅黑" pitchFamily="34" charset="-120"/>
               </a:rPr>
-              <a:t>帮扶管理信息系统 v1.12.17</a:t>
+              <a:t>帮扶管理信息系统 v1.12.18</a:t>
             </a:r>
             <a:endParaRPr lang="en-US" sz="1050" dirty="0"/>
           </a:p>
@@ -32094,7 +32094,7 @@
                 <a:ea typeface="微软雅黑" pitchFamily="34" charset="-122"/>
                 <a:cs typeface="微软雅黑" pitchFamily="34" charset="-120"/>
               </a:rPr>
-              <a:t>12716</a:t>
+              <a:t>12795</a:t>
             </a:r>
             <a:endParaRPr lang="en-US" sz="4000" dirty="0"/>
           </a:p>
@@ -32777,7 +32777,7 @@
                 <a:ea typeface="微软雅黑" pitchFamily="34" charset="-122"/>
                 <a:cs typeface="微软雅黑" pitchFamily="34" charset="-120"/>
               </a:rPr>
-              <a:t>数据来源：2026-10-17 仓库实测（v1.12.17）—— 后端 12716 用例全绿 / 行+分支覆盖率 100%（branch=True 严格门禁）· 前端 6363 用例全绿 · flake8 0 · bandit 0 中高危 · vue-tsc 0 · eslint 0 警告</a:t>
+              <a:t>数据来源：2026-10-17 仓库实测（v1.12.18）—— 后端 12795 用例全绿 / 行+分支覆盖率 100%（branch=True 严格门禁）· 前端 6363 用例全绿 · flake8 0 · bandit 0 中高危 · vue-tsc 0 · eslint 0 警告</a:t>
             </a:r>
             <a:endParaRPr lang="en-US" sz="1000" dirty="0"/>
           </a:p>
@@ -33301,7 +33301,7 @@
                 <a:ea typeface="微软雅黑" pitchFamily="34" charset="-122"/>
                 <a:cs typeface="微软雅黑" pitchFamily="34" charset="-120"/>
               </a:rPr>
-              <a:t>帮扶管理信息系统 v1.12.17</a:t>
+              <a:t>帮扶管理信息系统 v1.12.18</a:t>
             </a:r>
             <a:endParaRPr lang="en-US" sz="1050" dirty="0"/>
           </a:p>
@@ -34413,7 +34413,7 @@
                 <a:ea typeface="微软雅黑" pitchFamily="34" charset="-122"/>
                 <a:cs typeface="微软雅黑" pitchFamily="34" charset="-120"/>
               </a:rPr>
-              <a:t>帮扶管理信息系统 v1.12.17</a:t>
+              <a:t>帮扶管理信息系统 v1.12.18</a:t>
             </a:r>
             <a:endParaRPr lang="en-US" sz="1050" dirty="0"/>
           </a:p>
